--- a/output/network-card-csi-v5.1.pptx
+++ b/output/network-card-csi-v5.1.pptx
@@ -5017,14 +5017,6 @@
 <file path=ppt/slides/slide1.xml><?xml version="1.0" encoding="utf-8"?>
 <p:sld xmlns:a="http://schemas.openxmlformats.org/drawingml/2006/main" xmlns:p="http://schemas.openxmlformats.org/presentationml/2006/main" xmlns:r="http://schemas.openxmlformats.org/officeDocument/2006/relationships">
   <p:cSld>
-    <p:bg>
-      <p:bgPr>
-        <a:solidFill>
-          <a:srgbClr val="2C3038"/>
-        </a:solidFill>
-        <a:effectLst/>
-      </p:bgPr>
-    </p:bg>
     <p:spTree>
       <p:nvGrpSpPr>
         <p:cNvPr id="1" name=""/>
@@ -5040,15 +5032,23 @@
         </p:nvSpPr>
         <p:spPr>
           <a:xfrm>
-            <a:off x="6400800" y="2857500"/>
-            <a:ext cx="2743200" cy="2286000"/>
-          </a:xfrm>
-          <a:prstGeom prst="rect">
-            <a:avLst/>
-          </a:prstGeom>
-          <a:solidFill>
-            <a:srgbClr val="0D223D"/>
-          </a:solidFill>
+            <a:off x="0" y="0"/>
+            <a:ext cx="9144000" cy="5143500"/>
+          </a:xfrm>
+          <a:prstGeom prst="rect">
+            <a:avLst/>
+          </a:prstGeom>
+          <a:gradFill rotWithShape="1">
+            <a:gsLst>
+              <a:gs pos="0">
+                <a:srgbClr val="1E1E1E"/>
+              </a:gs>
+              <a:gs pos="100000">
+                <a:srgbClr val="2A2A2A"/>
+              </a:gs>
+            </a:gsLst>
+            <a:lin scaled="0" ang="8100000"/>
+          </a:gradFill>
           <a:ln>
             <a:noFill/>
           </a:ln>
@@ -5083,14 +5083,14 @@
         </p:nvSpPr>
         <p:spPr>
           <a:xfrm>
-            <a:off x="7498080" y="3771900"/>
-            <a:ext cx="1645920" cy="1371600"/>
+            <a:off x="6400800" y="2857500"/>
+            <a:ext cx="2743200" cy="2286000"/>
           </a:xfrm>
           <a:prstGeom prst="rect">
             <a:avLst/>
           </a:prstGeom>
           <a:solidFill>
-            <a:srgbClr val="071528"/>
+            <a:srgbClr val="1A1A1A"/>
           </a:solidFill>
           <a:ln>
             <a:noFill/>
@@ -5126,14 +5126,14 @@
         </p:nvSpPr>
         <p:spPr>
           <a:xfrm>
-            <a:off x="0" y="0"/>
-            <a:ext cx="73152" cy="5143500"/>
+            <a:off x="7498080" y="3771900"/>
+            <a:ext cx="1645920" cy="1371600"/>
           </a:xfrm>
           <a:prstGeom prst="rect">
             <a:avLst/>
           </a:prstGeom>
           <a:solidFill>
-            <a:srgbClr val="4A90D9"/>
+            <a:srgbClr val="0F0F0F"/>
           </a:solidFill>
           <a:ln>
             <a:noFill/>
@@ -5163,7 +5163,50 @@
       </p:sp>
       <p:sp>
         <p:nvSpPr>
-          <p:cNvPr id="5" name="TextBox 4"/>
+          <p:cNvPr id="5" name="Rectangle 4"/>
+          <p:cNvSpPr/>
+          <p:nvPr/>
+        </p:nvSpPr>
+        <p:spPr>
+          <a:xfrm>
+            <a:off x="0" y="0"/>
+            <a:ext cx="73152" cy="5143500"/>
+          </a:xfrm>
+          <a:prstGeom prst="rect">
+            <a:avLst/>
+          </a:prstGeom>
+          <a:solidFill>
+            <a:srgbClr val="505050"/>
+          </a:solidFill>
+          <a:ln>
+            <a:noFill/>
+          </a:ln>
+        </p:spPr>
+        <p:style>
+          <a:lnRef idx="1">
+            <a:schemeClr val="accent1"/>
+          </a:lnRef>
+          <a:fillRef idx="3">
+            <a:schemeClr val="accent1"/>
+          </a:fillRef>
+          <a:effectRef idx="2">
+            <a:schemeClr val="accent1"/>
+          </a:effectRef>
+          <a:fontRef idx="minor">
+            <a:schemeClr val="lt1"/>
+          </a:fontRef>
+        </p:style>
+        <p:txBody>
+          <a:bodyPr rtlCol="0" anchor="ctr"/>
+          <a:lstStyle/>
+          <a:p>
+            <a:pPr algn="ctr"/>
+          </a:p>
+        </p:txBody>
+      </p:sp>
+      <p:sp>
+        <p:nvSpPr>
+          <p:cNvPr id="6" name="TextBox 5"/>
           <p:cNvSpPr txBox="1"/>
           <p:nvPr/>
         </p:nvSpPr>
@@ -5198,7 +5241,7 @@
       </p:sp>
       <p:cxnSp>
         <p:nvCxnSpPr>
-          <p:cNvPr id="6" name="Connector 5"/>
+          <p:cNvPr id="7" name="Connector 6"/>
           <p:cNvCxnSpPr/>
           <p:nvPr/>
         </p:nvCxnSpPr>
@@ -5212,7 +5255,7 @@
           </a:prstGeom>
           <a:ln w="25400">
             <a:solidFill>
-              <a:srgbClr val="4A90D9"/>
+              <a:srgbClr val="505050"/>
             </a:solidFill>
           </a:ln>
         </p:spPr>
@@ -5233,7 +5276,7 @@
       </p:cxnSp>
       <p:sp>
         <p:nvSpPr>
-          <p:cNvPr id="7" name="TextBox 6"/>
+          <p:cNvPr id="8" name="TextBox 7"/>
           <p:cNvSpPr txBox="1"/>
           <p:nvPr/>
         </p:nvSpPr>
@@ -5257,7 +5300,7 @@
             <a:r>
               <a:rPr sz="2200" b="0">
                 <a:solidFill>
-                  <a:srgbClr val="C8D4E8"/>
+                  <a:srgbClr val="C0C0C0"/>
                 </a:solidFill>
                 <a:latin typeface="Calibri"/>
               </a:rPr>
@@ -5269,7 +5312,7 @@
       </p:sp>
       <p:sp>
         <p:nvSpPr>
-          <p:cNvPr id="8" name="TextBox 7"/>
+          <p:cNvPr id="9" name="TextBox 8"/>
           <p:cNvSpPr txBox="1"/>
           <p:nvPr/>
         </p:nvSpPr>
@@ -5293,7 +5336,7 @@
             <a:r>
               <a:rPr sz="1400" b="0">
                 <a:solidFill>
-                  <a:srgbClr val="7A9AC0"/>
+                  <a:srgbClr val="909090"/>
                 </a:solidFill>
                 <a:latin typeface="Calibri"/>
               </a:rPr>
@@ -5304,7 +5347,7 @@
       </p:sp>
       <p:sp>
         <p:nvSpPr>
-          <p:cNvPr id="9" name="Rectangle 8"/>
+          <p:cNvPr id="10" name="Rectangle 9"/>
           <p:cNvSpPr/>
           <p:nvPr/>
         </p:nvSpPr>
@@ -5316,9 +5359,17 @@
           <a:prstGeom prst="rect">
             <a:avLst/>
           </a:prstGeom>
-          <a:solidFill>
-            <a:srgbClr val="2C3038"/>
-          </a:solidFill>
+          <a:gradFill rotWithShape="1">
+            <a:gsLst>
+              <a:gs pos="0">
+                <a:srgbClr val="2A2A2A"/>
+              </a:gs>
+              <a:gs pos="100000">
+                <a:srgbClr val="343434"/>
+              </a:gs>
+            </a:gsLst>
+            <a:lin scaled="0" ang="0"/>
+          </a:gradFill>
           <a:ln>
             <a:noFill/>
           </a:ln>
@@ -5347,7 +5398,7 @@
       </p:sp>
       <p:sp>
         <p:nvSpPr>
-          <p:cNvPr id="10" name="TextBox 9"/>
+          <p:cNvPr id="11" name="TextBox 10"/>
           <p:cNvSpPr txBox="1"/>
           <p:nvPr/>
         </p:nvSpPr>
@@ -5371,7 +5422,7 @@
             <a:r>
               <a:rPr sz="1300" b="0">
                 <a:solidFill>
-                  <a:srgbClr val="B0C4DE"/>
+                  <a:srgbClr val="B0B0B0"/>
                 </a:solidFill>
                 <a:latin typeface="Calibri"/>
               </a:rPr>
@@ -5420,9 +5471,17 @@
           <a:prstGeom prst="rect">
             <a:avLst/>
           </a:prstGeom>
-          <a:solidFill>
-            <a:srgbClr val="2C3038"/>
-          </a:solidFill>
+          <a:gradFill rotWithShape="1">
+            <a:gsLst>
+              <a:gs pos="0">
+                <a:srgbClr val="2A2A2A"/>
+              </a:gs>
+              <a:gs pos="100000">
+                <a:srgbClr val="363636"/>
+              </a:gs>
+            </a:gsLst>
+            <a:lin scaled="0" ang="0"/>
+          </a:gradFill>
           <a:ln>
             <a:noFill/>
           </a:ln>
@@ -5464,7 +5523,7 @@
             <a:avLst/>
           </a:prstGeom>
           <a:solidFill>
-            <a:srgbClr val="4A90D9"/>
+            <a:srgbClr val="505050"/>
           </a:solidFill>
           <a:ln>
             <a:noFill/>
@@ -5553,7 +5612,7 @@
             <a:r>
               <a:rPr sz="1300" b="0">
                 <a:solidFill>
-                  <a:srgbClr val="B0C4DE"/>
+                  <a:srgbClr val="B0B0B0"/>
                 </a:solidFill>
                 <a:latin typeface="Calibri"/>
               </a:rPr>
@@ -5583,7 +5642,7 @@
           </a:solidFill>
           <a:ln w="19050">
             <a:solidFill>
-              <a:srgbClr val="4A90D9"/>
+              <a:srgbClr val="505050"/>
             </a:solidFill>
           </a:ln>
         </p:spPr>
@@ -5609,7 +5668,7 @@
             <a:r>
               <a:rPr sz="1300" b="1">
                 <a:solidFill>
-                  <a:srgbClr val="1A1A2E"/>
+                  <a:srgbClr val="1C1C1C"/>
                 </a:solidFill>
                 <a:latin typeface="Calibri"/>
               </a:rPr>
@@ -5622,7 +5681,7 @@
             <a:r>
               <a:rPr sz="1100">
                 <a:solidFill>
-                  <a:srgbClr val="4A90D9"/>
+                  <a:srgbClr val="505050"/>
                 </a:solidFill>
                 <a:latin typeface="Calibri"/>
               </a:rPr>
@@ -5647,7 +5706,7 @@
           </a:prstGeom>
           <a:ln w="25400">
             <a:solidFill>
-              <a:srgbClr val="4A90D9"/>
+              <a:srgbClr val="505050"/>
             </a:solidFill>
             <a:tailEnd type="arrow" w="med" len="med"/>
           </a:ln>
@@ -5688,7 +5747,7 @@
           </a:solidFill>
           <a:ln w="19050">
             <a:solidFill>
-              <a:srgbClr val="4A90D9"/>
+              <a:srgbClr val="505050"/>
             </a:solidFill>
           </a:ln>
         </p:spPr>
@@ -5714,7 +5773,7 @@
             <a:r>
               <a:rPr sz="1300" b="1">
                 <a:solidFill>
-                  <a:srgbClr val="1A1A2E"/>
+                  <a:srgbClr val="1C1C1C"/>
                 </a:solidFill>
                 <a:latin typeface="Calibri"/>
               </a:rPr>
@@ -5727,7 +5786,7 @@
             <a:r>
               <a:rPr sz="1100">
                 <a:solidFill>
-                  <a:srgbClr val="4A90D9"/>
+                  <a:srgbClr val="505050"/>
                 </a:solidFill>
                 <a:latin typeface="Calibri"/>
               </a:rPr>
@@ -5752,7 +5811,7 @@
           </a:prstGeom>
           <a:ln w="25400">
             <a:solidFill>
-              <a:srgbClr val="4A90D9"/>
+              <a:srgbClr val="505050"/>
             </a:solidFill>
             <a:tailEnd type="arrow" w="med" len="med"/>
           </a:ln>
@@ -5793,7 +5852,7 @@
           </a:solidFill>
           <a:ln w="19050">
             <a:solidFill>
-              <a:srgbClr val="4A90D9"/>
+              <a:srgbClr val="505050"/>
             </a:solidFill>
           </a:ln>
         </p:spPr>
@@ -5819,7 +5878,7 @@
             <a:r>
               <a:rPr sz="1300" b="1">
                 <a:solidFill>
-                  <a:srgbClr val="1A1A2E"/>
+                  <a:srgbClr val="1C1C1C"/>
                 </a:solidFill>
                 <a:latin typeface="Calibri"/>
               </a:rPr>
@@ -5832,7 +5891,7 @@
             <a:r>
               <a:rPr sz="1100">
                 <a:solidFill>
-                  <a:srgbClr val="4A90D9"/>
+                  <a:srgbClr val="505050"/>
                 </a:solidFill>
                 <a:latin typeface="Calibri"/>
               </a:rPr>
@@ -5857,7 +5916,7 @@
           </a:prstGeom>
           <a:ln w="25400">
             <a:solidFill>
-              <a:srgbClr val="4A90D9"/>
+              <a:srgbClr val="505050"/>
             </a:solidFill>
             <a:tailEnd type="arrow" w="med" len="med"/>
           </a:ln>
@@ -5898,7 +5957,7 @@
           </a:solidFill>
           <a:ln w="19050">
             <a:solidFill>
-              <a:srgbClr val="4A90D9"/>
+              <a:srgbClr val="505050"/>
             </a:solidFill>
           </a:ln>
         </p:spPr>
@@ -5924,7 +5983,7 @@
             <a:r>
               <a:rPr sz="1300" b="1">
                 <a:solidFill>
-                  <a:srgbClr val="1A1A2E"/>
+                  <a:srgbClr val="1C1C1C"/>
                 </a:solidFill>
                 <a:latin typeface="Calibri"/>
               </a:rPr>
@@ -5937,7 +5996,7 @@
             <a:r>
               <a:rPr sz="1100">
                 <a:solidFill>
-                  <a:srgbClr val="4A90D9"/>
+                  <a:srgbClr val="505050"/>
                 </a:solidFill>
                 <a:latin typeface="Calibri"/>
               </a:rPr>
@@ -5962,7 +6021,7 @@
           </a:prstGeom>
           <a:ln w="25400">
             <a:solidFill>
-              <a:srgbClr val="4A90D9"/>
+              <a:srgbClr val="505050"/>
             </a:solidFill>
             <a:tailEnd type="arrow" w="med" len="med"/>
           </a:ln>
@@ -6003,7 +6062,7 @@
           </a:solidFill>
           <a:ln w="19050">
             <a:solidFill>
-              <a:srgbClr val="4A90D9"/>
+              <a:srgbClr val="505050"/>
             </a:solidFill>
           </a:ln>
         </p:spPr>
@@ -6029,7 +6088,7 @@
             <a:r>
               <a:rPr sz="1300" b="1">
                 <a:solidFill>
-                  <a:srgbClr val="1A1A2E"/>
+                  <a:srgbClr val="1C1C1C"/>
                 </a:solidFill>
                 <a:latin typeface="Calibri"/>
               </a:rPr>
@@ -6042,7 +6101,7 @@
             <a:r>
               <a:rPr sz="1100">
                 <a:solidFill>
-                  <a:srgbClr val="4A90D9"/>
+                  <a:srgbClr val="505050"/>
                 </a:solidFill>
                 <a:latin typeface="Calibri"/>
               </a:rPr>
@@ -6067,7 +6126,7 @@
           </a:prstGeom>
           <a:ln w="6350">
             <a:solidFill>
-              <a:srgbClr val="E0E5ED"/>
+              <a:srgbClr val="DCDCDC"/>
             </a:solidFill>
           </a:ln>
         </p:spPr>
@@ -6112,7 +6171,7 @@
             <a:r>
               <a:rPr sz="1300" b="0">
                 <a:solidFill>
-                  <a:srgbClr val="5A6A7A"/>
+                  <a:srgbClr val="6B6B6B"/>
                 </a:solidFill>
                 <a:latin typeface="Calibri"/>
               </a:rPr>
@@ -6135,9 +6194,17 @@
           <a:prstGeom prst="rect">
             <a:avLst/>
           </a:prstGeom>
-          <a:solidFill>
-            <a:srgbClr val="2C3038"/>
-          </a:solidFill>
+          <a:gradFill rotWithShape="1">
+            <a:gsLst>
+              <a:gs pos="0">
+                <a:srgbClr val="2A2A2A"/>
+              </a:gs>
+              <a:gs pos="100000">
+                <a:srgbClr val="343434"/>
+              </a:gs>
+            </a:gsLst>
+            <a:lin scaled="0" ang="0"/>
+          </a:gradFill>
           <a:ln>
             <a:noFill/>
           </a:ln>
@@ -6190,7 +6257,7 @@
             <a:r>
               <a:rPr sz="1300" b="0">
                 <a:solidFill>
-                  <a:srgbClr val="B0C4DE"/>
+                  <a:srgbClr val="B0B0B0"/>
                 </a:solidFill>
                 <a:latin typeface="Calibri"/>
               </a:rPr>
@@ -6225,7 +6292,7 @@
             <a:r>
               <a:rPr sz="1300" b="0">
                 <a:solidFill>
-                  <a:srgbClr val="B0C4DE"/>
+                  <a:srgbClr val="B0B0B0"/>
                 </a:solidFill>
                 <a:latin typeface="Calibri"/>
               </a:rPr>
@@ -6274,9 +6341,17 @@
           <a:prstGeom prst="rect">
             <a:avLst/>
           </a:prstGeom>
-          <a:solidFill>
-            <a:srgbClr val="2C3038"/>
-          </a:solidFill>
+          <a:gradFill rotWithShape="1">
+            <a:gsLst>
+              <a:gs pos="0">
+                <a:srgbClr val="2A2A2A"/>
+              </a:gs>
+              <a:gs pos="100000">
+                <a:srgbClr val="363636"/>
+              </a:gs>
+            </a:gsLst>
+            <a:lin scaled="0" ang="0"/>
+          </a:gradFill>
           <a:ln>
             <a:noFill/>
           </a:ln>
@@ -6318,7 +6393,7 @@
             <a:avLst/>
           </a:prstGeom>
           <a:solidFill>
-            <a:srgbClr val="4A90D9"/>
+            <a:srgbClr val="505050"/>
           </a:solidFill>
           <a:ln>
             <a:noFill/>
@@ -6407,7 +6482,7 @@
             <a:r>
               <a:rPr sz="1300" b="0">
                 <a:solidFill>
-                  <a:srgbClr val="B0C4DE"/>
+                  <a:srgbClr val="B0B0B0"/>
                 </a:solidFill>
                 <a:latin typeface="Calibri"/>
               </a:rPr>
@@ -6431,7 +6506,7 @@
             <a:avLst/>
           </a:prstGeom>
           <a:solidFill>
-            <a:srgbClr val="4A90D9"/>
+            <a:srgbClr val="505050"/>
           </a:solidFill>
           <a:ln>
             <a:noFill/>
@@ -6489,7 +6564,7 @@
             <a:r>
               <a:rPr b="1" sz="2000">
                 <a:solidFill>
-                  <a:srgbClr val="4A90D9"/>
+                  <a:srgbClr val="505050"/>
                 </a:solidFill>
               </a:rPr>
               <a:t>▶ 職責：802.11 連線管理（Native 802.11 架構，Windows 10 起由 WDI 取代但概念相同）</a:t>
@@ -6504,7 +6579,7 @@
             <a:r>
               <a:rPr sz="1700">
                 <a:solidFill>
-                  <a:srgbClr val="5A6A7A"/>
+                  <a:srgbClr val="6B6B6B"/>
                 </a:solidFill>
               </a:rPr>
               <a:t>  · · 認證（WPA2/WPA3）、漫遊、省電、掃描</a:t>
@@ -6525,7 +6600,7 @@
             <a:r>
               <a:rPr b="1" sz="2000">
                 <a:solidFill>
-                  <a:srgbClr val="4A90D9"/>
+                  <a:srgbClr val="505050"/>
                 </a:solidFill>
               </a:rPr>
               <a:t>▶ 向上暴露的介面：</a:t>
@@ -6540,7 +6615,7 @@
             <a:r>
               <a:rPr sz="1700">
                 <a:solidFill>
-                  <a:srgbClr val="5A6A7A"/>
+                  <a:srgbClr val="6B6B6B"/>
                 </a:solidFill>
               </a:rPr>
               <a:t>  · · SSID / RSSI / 連線狀態 / 頻道 / 連線速率</a:t>
@@ -6555,7 +6630,7 @@
             <a:r>
               <a:rPr sz="1700">
                 <a:solidFill>
-                  <a:srgbClr val="5A6A7A"/>
+                  <a:srgbClr val="6B6B6B"/>
                 </a:solidFill>
               </a:rPr>
               <a:t>  · · Native WiFi API（wlanapi.dll）→ 應用程式</a:t>
@@ -6576,7 +6651,7 @@
             <a:r>
               <a:rPr b="1" sz="2000">
                 <a:solidFill>
-                  <a:srgbClr val="4A90D9"/>
+                  <a:srgbClr val="505050"/>
                 </a:solidFill>
               </a:rPr>
               <a:t>⚠ 不暴露任何 PHY 層原始資料</a:t>
@@ -6591,7 +6666,7 @@
             <a:r>
               <a:rPr sz="1700">
                 <a:solidFill>
-                  <a:srgbClr val="5A6A7A"/>
+                  <a:srgbClr val="6B6B6B"/>
                 </a:solidFill>
               </a:rPr>
               <a:t>  · · ❌ CSI、❌ IQ 樣本、❌ 每天線獨立 RSSI</a:t>
@@ -6612,7 +6687,7 @@
             <a:r>
               <a:rPr sz="2000">
                 <a:solidFill>
-                  <a:srgbClr val="1A1A2E"/>
+                  <a:srgbClr val="1C1C1C"/>
                 </a:solidFill>
               </a:rPr>
               <a:t>● 設計目標是連線管理，不是 RF 量測</a:t>
@@ -6636,7 +6711,7 @@
           </a:prstGeom>
           <a:ln w="6350">
             <a:solidFill>
-              <a:srgbClr val="E0E5ED"/>
+              <a:srgbClr val="DCDCDC"/>
             </a:solidFill>
           </a:ln>
         </p:spPr>
@@ -6681,7 +6756,7 @@
             <a:r>
               <a:rPr sz="1300" b="0">
                 <a:solidFill>
-                  <a:srgbClr val="5A6A7A"/>
+                  <a:srgbClr val="6B6B6B"/>
                 </a:solidFill>
                 <a:latin typeface="Calibri"/>
               </a:rPr>
@@ -6704,9 +6779,17 @@
           <a:prstGeom prst="rect">
             <a:avLst/>
           </a:prstGeom>
-          <a:solidFill>
-            <a:srgbClr val="2C3038"/>
-          </a:solidFill>
+          <a:gradFill rotWithShape="1">
+            <a:gsLst>
+              <a:gs pos="0">
+                <a:srgbClr val="2A2A2A"/>
+              </a:gs>
+              <a:gs pos="100000">
+                <a:srgbClr val="343434"/>
+              </a:gs>
+            </a:gsLst>
+            <a:lin scaled="0" ang="0"/>
+          </a:gradFill>
           <a:ln>
             <a:noFill/>
           </a:ln>
@@ -6759,7 +6842,7 @@
             <a:r>
               <a:rPr sz="1300" b="0">
                 <a:solidFill>
-                  <a:srgbClr val="B0C4DE"/>
+                  <a:srgbClr val="B0B0B0"/>
                 </a:solidFill>
                 <a:latin typeface="Calibri"/>
               </a:rPr>
@@ -6794,7 +6877,7 @@
             <a:r>
               <a:rPr sz="1300" b="0">
                 <a:solidFill>
-                  <a:srgbClr val="B0C4DE"/>
+                  <a:srgbClr val="B0B0B0"/>
                 </a:solidFill>
                 <a:latin typeface="Calibri"/>
               </a:rPr>
@@ -6843,9 +6926,17 @@
           <a:prstGeom prst="rect">
             <a:avLst/>
           </a:prstGeom>
-          <a:solidFill>
-            <a:srgbClr val="2C3038"/>
-          </a:solidFill>
+          <a:gradFill rotWithShape="1">
+            <a:gsLst>
+              <a:gs pos="0">
+                <a:srgbClr val="2A2A2A"/>
+              </a:gs>
+              <a:gs pos="100000">
+                <a:srgbClr val="363636"/>
+              </a:gs>
+            </a:gsLst>
+            <a:lin scaled="0" ang="0"/>
+          </a:gradFill>
           <a:ln>
             <a:noFill/>
           </a:ln>
@@ -6887,7 +6978,7 @@
             <a:avLst/>
           </a:prstGeom>
           <a:solidFill>
-            <a:srgbClr val="4A90D9"/>
+            <a:srgbClr val="505050"/>
           </a:solidFill>
           <a:ln>
             <a:noFill/>
@@ -6976,7 +7067,7 @@
             <a:r>
               <a:rPr sz="1300" b="0">
                 <a:solidFill>
-                  <a:srgbClr val="B0C4DE"/>
+                  <a:srgbClr val="B0B0B0"/>
                 </a:solidFill>
                 <a:latin typeface="Calibri"/>
               </a:rPr>
@@ -7000,7 +7091,7 @@
             <a:avLst/>
           </a:prstGeom>
           <a:solidFill>
-            <a:srgbClr val="4A90D9"/>
+            <a:srgbClr val="505050"/>
           </a:solidFill>
           <a:ln>
             <a:noFill/>
@@ -7058,7 +7149,7 @@
             <a:r>
               <a:rPr sz="2000">
                 <a:solidFill>
-                  <a:srgbClr val="1A1A2E"/>
+                  <a:srgbClr val="1C1C1C"/>
                 </a:solidFill>
               </a:rPr>
               <a:t>● NDIS 設計目標：跨廠商通用介面</a:t>
@@ -7073,7 +7164,7 @@
             <a:r>
               <a:rPr sz="1700">
                 <a:solidFill>
-                  <a:srgbClr val="5A6A7A"/>
+                  <a:srgbClr val="6B6B6B"/>
                 </a:solidFill>
               </a:rPr>
               <a:t>  · · 任何協定 × 任何網卡 = 最大公約數</a:t>
@@ -7094,7 +7185,7 @@
             <a:r>
               <a:rPr sz="2000">
                 <a:solidFill>
-                  <a:srgbClr val="1A1A2E"/>
+                  <a:srgbClr val="1C1C1C"/>
                 </a:solidFill>
               </a:rPr>
               <a:t>● OID 機制提供：SSID / RSSI / 掃描 / 統計</a:t>
@@ -7109,7 +7200,7 @@
             <a:r>
               <a:rPr b="1" sz="2000">
                 <a:solidFill>
-                  <a:srgbClr val="1A1A2E"/>
+                  <a:srgbClr val="1C1C1C"/>
                 </a:solidFill>
               </a:rPr>
               <a:t>❌ 無任何 OID 定義 CSI 查詢</a:t>
@@ -7130,7 +7221,7 @@
             <a:r>
               <a:rPr b="1" sz="2000">
                 <a:solidFill>
-                  <a:srgbClr val="4A90D9"/>
+                  <a:srgbClr val="505050"/>
                 </a:solidFill>
               </a:rPr>
               <a:t>▶ 為什麼無法標準化 CSI？</a:t>
@@ -7145,7 +7236,7 @@
             <a:r>
               <a:rPr sz="1700">
                 <a:solidFill>
-                  <a:srgbClr val="5A6A7A"/>
+                  <a:srgbClr val="6B6B6B"/>
                 </a:solidFill>
               </a:rPr>
               <a:t>  · · Intel 5300：30 個子載波群組</a:t>
@@ -7160,7 +7251,7 @@
             <a:r>
               <a:rPr sz="1700">
                 <a:solidFill>
-                  <a:srgbClr val="5A6A7A"/>
+                  <a:srgbClr val="6B6B6B"/>
                 </a:solidFill>
               </a:rPr>
               <a:t>  · · Atheros AR9380：56 個子載波</a:t>
@@ -7175,7 +7266,7 @@
             <a:r>
               <a:rPr sz="1700">
                 <a:solidFill>
-                  <a:srgbClr val="5A6A7A"/>
+                  <a:srgbClr val="6B6B6B"/>
                 </a:solidFill>
               </a:rPr>
               <a:t>  · · 格式完全不同，無法取最大公約數</a:t>
@@ -7196,7 +7287,7 @@
             <a:r>
               <a:rPr sz="2000">
                 <a:solidFill>
-                  <a:srgbClr val="1A1A2E"/>
+                  <a:srgbClr val="1C1C1C"/>
                 </a:solidFill>
               </a:rPr>
               <a:t>● 結論：通用性的代價 = 丟棄廠商私有 PHY 細節</a:t>
@@ -7220,7 +7311,7 @@
           </a:prstGeom>
           <a:ln w="6350">
             <a:solidFill>
-              <a:srgbClr val="E0E5ED"/>
+              <a:srgbClr val="DCDCDC"/>
             </a:solidFill>
           </a:ln>
         </p:spPr>
@@ -7265,7 +7356,7 @@
             <a:r>
               <a:rPr sz="1300" b="0">
                 <a:solidFill>
-                  <a:srgbClr val="5A6A7A"/>
+                  <a:srgbClr val="6B6B6B"/>
                 </a:solidFill>
                 <a:latin typeface="Calibri"/>
               </a:rPr>
@@ -7288,9 +7379,17 @@
           <a:prstGeom prst="rect">
             <a:avLst/>
           </a:prstGeom>
-          <a:solidFill>
-            <a:srgbClr val="2C3038"/>
-          </a:solidFill>
+          <a:gradFill rotWithShape="1">
+            <a:gsLst>
+              <a:gs pos="0">
+                <a:srgbClr val="2A2A2A"/>
+              </a:gs>
+              <a:gs pos="100000">
+                <a:srgbClr val="343434"/>
+              </a:gs>
+            </a:gsLst>
+            <a:lin scaled="0" ang="0"/>
+          </a:gradFill>
           <a:ln>
             <a:noFill/>
           </a:ln>
@@ -7343,7 +7442,7 @@
             <a:r>
               <a:rPr sz="1300" b="0">
                 <a:solidFill>
-                  <a:srgbClr val="B0C4DE"/>
+                  <a:srgbClr val="B0B0B0"/>
                 </a:solidFill>
                 <a:latin typeface="Calibri"/>
               </a:rPr>
@@ -7378,7 +7477,7 @@
             <a:r>
               <a:rPr sz="1300" b="0">
                 <a:solidFill>
-                  <a:srgbClr val="B0C4DE"/>
+                  <a:srgbClr val="B0B0B0"/>
                 </a:solidFill>
                 <a:latin typeface="Calibri"/>
               </a:rPr>
@@ -7427,9 +7526,17 @@
           <a:prstGeom prst="rect">
             <a:avLst/>
           </a:prstGeom>
-          <a:solidFill>
-            <a:srgbClr val="2C3038"/>
-          </a:solidFill>
+          <a:gradFill rotWithShape="1">
+            <a:gsLst>
+              <a:gs pos="0">
+                <a:srgbClr val="2A2A2A"/>
+              </a:gs>
+              <a:gs pos="100000">
+                <a:srgbClr val="363636"/>
+              </a:gs>
+            </a:gsLst>
+            <a:lin scaled="0" ang="0"/>
+          </a:gradFill>
           <a:ln>
             <a:noFill/>
           </a:ln>
@@ -7471,7 +7578,7 @@
             <a:avLst/>
           </a:prstGeom>
           <a:solidFill>
-            <a:srgbClr val="4A90D9"/>
+            <a:srgbClr val="505050"/>
           </a:solidFill>
           <a:ln>
             <a:noFill/>
@@ -7560,7 +7667,7 @@
             <a:r>
               <a:rPr sz="1300" b="0">
                 <a:solidFill>
-                  <a:srgbClr val="B0C4DE"/>
+                  <a:srgbClr val="B0B0B0"/>
                 </a:solidFill>
                 <a:latin typeface="Calibri"/>
               </a:rPr>
@@ -7585,7 +7692,7 @@
           </a:prstGeom>
           <a:ln w="6350">
             <a:solidFill>
-              <a:srgbClr val="E0E5ED"/>
+              <a:srgbClr val="DCDCDC"/>
             </a:solidFill>
           </a:ln>
         </p:spPr>
@@ -7630,7 +7737,7 @@
             <a:r>
               <a:rPr sz="1800" b="1">
                 <a:solidFill>
-                  <a:srgbClr val="4A90D9"/>
+                  <a:srgbClr val="505050"/>
                 </a:solidFill>
                 <a:latin typeface="Calibri"/>
               </a:rPr>
@@ -7669,7 +7776,7 @@
             <a:r>
               <a:rPr sz="1700">
                 <a:solidFill>
-                  <a:srgbClr val="1A1A2E"/>
+                  <a:srgbClr val="1C1C1C"/>
                 </a:solidFill>
               </a:rPr>
               <a:t>WLAN Device Driver Interface（WDI）</a:t>
@@ -7684,7 +7791,7 @@
             <a:r>
               <a:rPr sz="1700">
                 <a:solidFill>
-                  <a:srgbClr val="1A1A2E"/>
+                  <a:srgbClr val="1C1C1C"/>
                 </a:solidFill>
               </a:rPr>
               <a:t>Win10 引入，取代部分 NDIS WiFi 介面</a:t>
@@ -7699,7 +7806,7 @@
             <a:r>
               <a:rPr sz="1700">
                 <a:solidFill>
-                  <a:srgbClr val="1A1A2E"/>
+                  <a:srgbClr val="1C1C1C"/>
                 </a:solidFill>
               </a:rPr>
               <a:t>將驅動分為：</a:t>
@@ -7714,7 +7821,7 @@
             <a:r>
               <a:rPr sz="1500">
                 <a:solidFill>
-                  <a:srgbClr val="5A6A7A"/>
+                  <a:srgbClr val="6B6B6B"/>
                 </a:solidFill>
               </a:rPr>
               <a:t>  · IHV 元件（UMDF，User Mode）</a:t>
@@ -7729,7 +7836,7 @@
             <a:r>
               <a:rPr sz="1500">
                 <a:solidFill>
-                  <a:srgbClr val="5A6A7A"/>
+                  <a:srgbClr val="6B6B6B"/>
                 </a:solidFill>
               </a:rPr>
               <a:t>  · WDI 框架（KMDF，Kernel Mode）</a:t>
@@ -7744,7 +7851,7 @@
             <a:r>
               <a:rPr sz="1700">
                 <a:solidFill>
-                  <a:srgbClr val="1A1A2E"/>
+                  <a:srgbClr val="1C1C1C"/>
                 </a:solidFill>
               </a:rPr>
               <a:t>降低藍屏風險（User Mode crash 不致命）</a:t>
@@ -7759,7 +7866,7 @@
             <a:r>
               <a:rPr sz="1700">
                 <a:solidFill>
-                  <a:srgbClr val="1A1A2E"/>
+                  <a:srgbClr val="1C1C1C"/>
                 </a:solidFill>
               </a:rPr>
               <a:t>簡化 IHV 驅動開發</a:t>
@@ -7793,7 +7900,7 @@
             <a:r>
               <a:rPr sz="1800" b="1">
                 <a:solidFill>
-                  <a:srgbClr val="4A90D9"/>
+                  <a:srgbClr val="505050"/>
                 </a:solidFill>
                 <a:latin typeface="Calibri"/>
               </a:rPr>
@@ -7832,7 +7939,7 @@
             <a:r>
               <a:rPr sz="1700" b="1">
                 <a:solidFill>
-                  <a:srgbClr val="1A1A2E"/>
+                  <a:srgbClr val="1C1C1C"/>
                 </a:solidFill>
               </a:rPr>
               <a:t>❌ WDI Task/Property 定義中</a:t>
@@ -7847,7 +7954,7 @@
             <a:r>
               <a:rPr sz="1500">
                 <a:solidFill>
-                  <a:srgbClr val="5A6A7A"/>
+                  <a:srgbClr val="6B6B6B"/>
                 </a:solidFill>
               </a:rPr>
               <a:t>   同樣沒有 CSI 相關介面</a:t>
@@ -7868,7 +7975,7 @@
             <a:r>
               <a:rPr sz="1700">
                 <a:solidFill>
-                  <a:srgbClr val="1A1A2E"/>
+                  <a:srgbClr val="1C1C1C"/>
                 </a:solidFill>
               </a:rPr>
               <a:t>WDITASK 清單（部分）：</a:t>
@@ -7883,7 +7990,7 @@
             <a:r>
               <a:rPr sz="1500">
                 <a:solidFill>
-                  <a:srgbClr val="5A6A7A"/>
+                  <a:srgbClr val="6B6B6B"/>
                 </a:solidFill>
               </a:rPr>
               <a:t>  · TaskScan</a:t>
@@ -7898,7 +8005,7 @@
             <a:r>
               <a:rPr sz="1500">
                 <a:solidFill>
-                  <a:srgbClr val="5A6A7A"/>
+                  <a:srgbClr val="6B6B6B"/>
                 </a:solidFill>
               </a:rPr>
               <a:t>  · TaskConnect</a:t>
@@ -7913,7 +8020,7 @@
             <a:r>
               <a:rPr sz="1500">
                 <a:solidFill>
-                  <a:srgbClr val="5A6A7A"/>
+                  <a:srgbClr val="6B6B6B"/>
                 </a:solidFill>
               </a:rPr>
               <a:t>  · TaskDisconnect</a:t>
@@ -7928,7 +8035,7 @@
             <a:r>
               <a:rPr sz="1500">
                 <a:solidFill>
-                  <a:srgbClr val="5A6A7A"/>
+                  <a:srgbClr val="6B6B6B"/>
                 </a:solidFill>
               </a:rPr>
               <a:t>  · TaskSendRequest</a:t>
@@ -7949,7 +8056,7 @@
             <a:r>
               <a:rPr sz="1700">
                 <a:solidFill>
-                  <a:srgbClr val="1A1A2E"/>
+                  <a:srgbClr val="1C1C1C"/>
                 </a:solidFill>
               </a:rPr>
               <a:t>→ 架構更新，但 CSI 缺席問題未解決</a:t>
@@ -7973,7 +8080,7 @@
           </a:prstGeom>
           <a:ln w="6350">
             <a:solidFill>
-              <a:srgbClr val="E0E5ED"/>
+              <a:srgbClr val="DCDCDC"/>
             </a:solidFill>
           </a:ln>
         </p:spPr>
@@ -8018,7 +8125,7 @@
             <a:r>
               <a:rPr sz="1300" b="0">
                 <a:solidFill>
-                  <a:srgbClr val="5A6A7A"/>
+                  <a:srgbClr val="6B6B6B"/>
                 </a:solidFill>
                 <a:latin typeface="Calibri"/>
               </a:rPr>
@@ -8041,9 +8148,17 @@
           <a:prstGeom prst="rect">
             <a:avLst/>
           </a:prstGeom>
-          <a:solidFill>
-            <a:srgbClr val="2C3038"/>
-          </a:solidFill>
+          <a:gradFill rotWithShape="1">
+            <a:gsLst>
+              <a:gs pos="0">
+                <a:srgbClr val="2A2A2A"/>
+              </a:gs>
+              <a:gs pos="100000">
+                <a:srgbClr val="343434"/>
+              </a:gs>
+            </a:gsLst>
+            <a:lin scaled="0" ang="0"/>
+          </a:gradFill>
           <a:ln>
             <a:noFill/>
           </a:ln>
@@ -8096,7 +8211,7 @@
             <a:r>
               <a:rPr sz="1300" b="0">
                 <a:solidFill>
-                  <a:srgbClr val="B0C4DE"/>
+                  <a:srgbClr val="B0B0B0"/>
                 </a:solidFill>
                 <a:latin typeface="Calibri"/>
               </a:rPr>
@@ -8131,7 +8246,7 @@
             <a:r>
               <a:rPr sz="1300" b="0">
                 <a:solidFill>
-                  <a:srgbClr val="B0C4DE"/>
+                  <a:srgbClr val="B0B0B0"/>
                 </a:solidFill>
                 <a:latin typeface="Calibri"/>
               </a:rPr>
@@ -8180,9 +8295,17 @@
           <a:prstGeom prst="rect">
             <a:avLst/>
           </a:prstGeom>
-          <a:solidFill>
-            <a:srgbClr val="2C3038"/>
-          </a:solidFill>
+          <a:gradFill rotWithShape="1">
+            <a:gsLst>
+              <a:gs pos="0">
+                <a:srgbClr val="2A2A2A"/>
+              </a:gs>
+              <a:gs pos="100000">
+                <a:srgbClr val="363636"/>
+              </a:gs>
+            </a:gsLst>
+            <a:lin scaled="0" ang="0"/>
+          </a:gradFill>
           <a:ln>
             <a:noFill/>
           </a:ln>
@@ -8224,7 +8347,7 @@
             <a:avLst/>
           </a:prstGeom>
           <a:solidFill>
-            <a:srgbClr val="4A90D9"/>
+            <a:srgbClr val="505050"/>
           </a:solidFill>
           <a:ln>
             <a:noFill/>
@@ -8313,7 +8436,7 @@
             <a:r>
               <a:rPr sz="1300" b="0">
                 <a:solidFill>
-                  <a:srgbClr val="B0C4DE"/>
+                  <a:srgbClr val="B0B0B0"/>
                 </a:solidFill>
                 <a:latin typeface="Calibri"/>
               </a:rPr>
@@ -8337,11 +8460,11 @@
             <a:avLst/>
           </a:prstGeom>
           <a:solidFill>
-            <a:srgbClr val="284F77"/>
+            <a:srgbClr val="2C2C2C"/>
           </a:solidFill>
           <a:ln w="12700">
             <a:solidFill>
-              <a:srgbClr val="4A90D9"/>
+              <a:srgbClr val="505050"/>
             </a:solidFill>
           </a:ln>
         </p:spPr>
@@ -8402,7 +8525,7 @@
             <a:r>
               <a:rPr sz="1300" b="0">
                 <a:solidFill>
-                  <a:srgbClr val="5A6A7A"/>
+                  <a:srgbClr val="6B6B6B"/>
                 </a:solidFill>
                 <a:latin typeface="Calibri"/>
               </a:rPr>
@@ -8426,11 +8549,11 @@
             <a:avLst/>
           </a:prstGeom>
           <a:solidFill>
-            <a:srgbClr val="284F77"/>
+            <a:srgbClr val="2C2C2C"/>
           </a:solidFill>
           <a:ln w="12700">
             <a:solidFill>
-              <a:srgbClr val="4A90D9"/>
+              <a:srgbClr val="505050"/>
             </a:solidFill>
           </a:ln>
         </p:spPr>
@@ -8491,7 +8614,7 @@
             <a:r>
               <a:rPr sz="1300" b="0">
                 <a:solidFill>
-                  <a:srgbClr val="5A6A7A"/>
+                  <a:srgbClr val="6B6B6B"/>
                 </a:solidFill>
                 <a:latin typeface="Calibri"/>
               </a:rPr>
@@ -8515,11 +8638,11 @@
             <a:avLst/>
           </a:prstGeom>
           <a:solidFill>
-            <a:srgbClr val="924000"/>
+            <a:srgbClr val="5A5A5A"/>
           </a:solidFill>
           <a:ln w="31750">
             <a:solidFill>
-              <a:srgbClr val="FFA000"/>
+              <a:srgbClr val="888888"/>
             </a:solidFill>
           </a:ln>
         </p:spPr>
@@ -8580,7 +8703,7 @@
             <a:r>
               <a:rPr sz="1300" b="0">
                 <a:solidFill>
-                  <a:srgbClr val="B86000"/>
+                  <a:srgbClr val="7A7A7A"/>
                 </a:solidFill>
                 <a:latin typeface="Calibri"/>
               </a:rPr>
@@ -8604,11 +8727,11 @@
             <a:avLst/>
           </a:prstGeom>
           <a:solidFill>
-            <a:srgbClr val="8B0000"/>
+            <a:srgbClr val="3A3A3A"/>
           </a:solidFill>
           <a:ln w="31750">
             <a:solidFill>
-              <a:srgbClr val="CC0000"/>
+              <a:srgbClr val="AAAAAA"/>
             </a:solidFill>
           </a:ln>
         </p:spPr>
@@ -8669,7 +8792,7 @@
             <a:r>
               <a:rPr sz="1300" b="0">
                 <a:solidFill>
-                  <a:srgbClr val="CC3333"/>
+                  <a:srgbClr val="4A4A4A"/>
                 </a:solidFill>
                 <a:latin typeface="Calibri"/>
               </a:rPr>
@@ -8693,11 +8816,11 @@
             <a:avLst/>
           </a:prstGeom>
           <a:solidFill>
-            <a:srgbClr val="8B0000"/>
+            <a:srgbClr val="3A3A3A"/>
           </a:solidFill>
           <a:ln w="31750">
             <a:solidFill>
-              <a:srgbClr val="CC0000"/>
+              <a:srgbClr val="AAAAAA"/>
             </a:solidFill>
           </a:ln>
         </p:spPr>
@@ -8758,7 +8881,7 @@
             <a:r>
               <a:rPr sz="1300" b="0">
                 <a:solidFill>
-                  <a:srgbClr val="CC3333"/>
+                  <a:srgbClr val="4A4A4A"/>
                 </a:solidFill>
                 <a:latin typeface="Calibri"/>
               </a:rPr>
@@ -8782,11 +8905,11 @@
             <a:avLst/>
           </a:prstGeom>
           <a:solidFill>
-            <a:srgbClr val="006644"/>
+            <a:srgbClr val="707070"/>
           </a:solidFill>
           <a:ln w="12700">
             <a:solidFill>
-              <a:srgbClr val="0E8F8F"/>
+              <a:srgbClr val="808080"/>
             </a:solidFill>
           </a:ln>
         </p:spPr>
@@ -8847,7 +8970,7 @@
             <a:r>
               <a:rPr sz="1300" b="0">
                 <a:solidFill>
-                  <a:srgbClr val="0E8F8F"/>
+                  <a:srgbClr val="808080"/>
                 </a:solidFill>
                 <a:latin typeface="Calibri"/>
               </a:rPr>
@@ -8872,7 +8995,7 @@
           </a:prstGeom>
           <a:ln w="6350">
             <a:solidFill>
-              <a:srgbClr val="E0E5ED"/>
+              <a:srgbClr val="DCDCDC"/>
             </a:solidFill>
           </a:ln>
         </p:spPr>
@@ -8917,7 +9040,7 @@
             <a:r>
               <a:rPr sz="1300" b="0">
                 <a:solidFill>
-                  <a:srgbClr val="5A6A7A"/>
+                  <a:srgbClr val="6B6B6B"/>
                 </a:solidFill>
                 <a:latin typeface="Calibri"/>
               </a:rPr>
@@ -8940,9 +9063,17 @@
           <a:prstGeom prst="rect">
             <a:avLst/>
           </a:prstGeom>
-          <a:solidFill>
-            <a:srgbClr val="2C3038"/>
-          </a:solidFill>
+          <a:gradFill rotWithShape="1">
+            <a:gsLst>
+              <a:gs pos="0">
+                <a:srgbClr val="2A2A2A"/>
+              </a:gs>
+              <a:gs pos="100000">
+                <a:srgbClr val="343434"/>
+              </a:gs>
+            </a:gsLst>
+            <a:lin scaled="0" ang="0"/>
+          </a:gradFill>
           <a:ln>
             <a:noFill/>
           </a:ln>
@@ -8995,7 +9126,7 @@
             <a:r>
               <a:rPr sz="1300" b="0">
                 <a:solidFill>
-                  <a:srgbClr val="B0C4DE"/>
+                  <a:srgbClr val="B0B0B0"/>
                 </a:solidFill>
                 <a:latin typeface="Calibri"/>
               </a:rPr>
@@ -9030,7 +9161,7 @@
             <a:r>
               <a:rPr sz="1300" b="0">
                 <a:solidFill>
-                  <a:srgbClr val="B0C4DE"/>
+                  <a:srgbClr val="B0B0B0"/>
                 </a:solidFill>
                 <a:latin typeface="Calibri"/>
               </a:rPr>
@@ -9050,14 +9181,6 @@
 <file path=ppt/slides/slide15.xml><?xml version="1.0" encoding="utf-8"?>
 <p:sld xmlns:a="http://schemas.openxmlformats.org/drawingml/2006/main" xmlns:p="http://schemas.openxmlformats.org/presentationml/2006/main" xmlns:r="http://schemas.openxmlformats.org/officeDocument/2006/relationships">
   <p:cSld>
-    <p:bg>
-      <p:bgPr>
-        <a:solidFill>
-          <a:srgbClr val="2C3038"/>
-        </a:solidFill>
-        <a:effectLst/>
-      </p:bgPr>
-    </p:bg>
     <p:spTree>
       <p:nvGrpSpPr>
         <p:cNvPr id="1" name=""/>
@@ -9074,14 +9197,22 @@
         <p:spPr>
           <a:xfrm>
             <a:off x="0" y="0"/>
-            <a:ext cx="9144000" cy="109728"/>
-          </a:xfrm>
-          <a:prstGeom prst="rect">
-            <a:avLst/>
-          </a:prstGeom>
-          <a:solidFill>
-            <a:srgbClr val="4A90D9"/>
-          </a:solidFill>
+            <a:ext cx="9144000" cy="5143500"/>
+          </a:xfrm>
+          <a:prstGeom prst="rect">
+            <a:avLst/>
+          </a:prstGeom>
+          <a:gradFill rotWithShape="1">
+            <a:gsLst>
+              <a:gs pos="0">
+                <a:srgbClr val="222222"/>
+              </a:gs>
+              <a:gs pos="100000">
+                <a:srgbClr val="2E2E2E"/>
+              </a:gs>
+            </a:gsLst>
+            <a:lin scaled="0" ang="5400000"/>
+          </a:gradFill>
           <a:ln>
             <a:noFill/>
           </a:ln>
@@ -9110,7 +9241,50 @@
       </p:sp>
       <p:sp>
         <p:nvSpPr>
-          <p:cNvPr id="3" name="TextBox 2"/>
+          <p:cNvPr id="3" name="Rectangle 2"/>
+          <p:cNvSpPr/>
+          <p:nvPr/>
+        </p:nvSpPr>
+        <p:spPr>
+          <a:xfrm>
+            <a:off x="0" y="0"/>
+            <a:ext cx="9144000" cy="109728"/>
+          </a:xfrm>
+          <a:prstGeom prst="rect">
+            <a:avLst/>
+          </a:prstGeom>
+          <a:solidFill>
+            <a:srgbClr val="505050"/>
+          </a:solidFill>
+          <a:ln>
+            <a:noFill/>
+          </a:ln>
+        </p:spPr>
+        <p:style>
+          <a:lnRef idx="1">
+            <a:schemeClr val="accent1"/>
+          </a:lnRef>
+          <a:fillRef idx="3">
+            <a:schemeClr val="accent1"/>
+          </a:fillRef>
+          <a:effectRef idx="2">
+            <a:schemeClr val="accent1"/>
+          </a:effectRef>
+          <a:fontRef idx="minor">
+            <a:schemeClr val="lt1"/>
+          </a:fontRef>
+        </p:style>
+        <p:txBody>
+          <a:bodyPr rtlCol="0" anchor="ctr"/>
+          <a:lstStyle/>
+          <a:p>
+            <a:pPr algn="ctr"/>
+          </a:p>
+        </p:txBody>
+      </p:sp>
+      <p:sp>
+        <p:nvSpPr>
+          <p:cNvPr id="4" name="TextBox 3"/>
           <p:cNvSpPr txBox="1"/>
           <p:nvPr/>
         </p:nvSpPr>
@@ -9134,7 +9308,7 @@
             <a:r>
               <a:rPr sz="16000" b="1">
                 <a:solidFill>
-                  <a:srgbClr val="334860"/>
+                  <a:srgbClr val="333333"/>
                 </a:solidFill>
                 <a:latin typeface="Calibri"/>
               </a:rPr>
@@ -9145,7 +9319,7 @@
       </p:sp>
       <p:sp>
         <p:nvSpPr>
-          <p:cNvPr id="4" name="TextBox 3"/>
+          <p:cNvPr id="5" name="TextBox 4"/>
           <p:cNvSpPr txBox="1"/>
           <p:nvPr/>
         </p:nvSpPr>
@@ -9180,7 +9354,7 @@
       </p:sp>
       <p:sp>
         <p:nvSpPr>
-          <p:cNvPr id="5" name="TextBox 4"/>
+          <p:cNvPr id="6" name="TextBox 5"/>
           <p:cNvSpPr txBox="1"/>
           <p:nvPr/>
         </p:nvSpPr>
@@ -9204,7 +9378,7 @@
             <a:r>
               <a:rPr sz="2200" b="0">
                 <a:solidFill>
-                  <a:srgbClr val="4A90D9"/>
+                  <a:srgbClr val="505050"/>
                 </a:solidFill>
                 <a:latin typeface="Calibri"/>
               </a:rPr>
@@ -9215,7 +9389,7 @@
       </p:sp>
       <p:cxnSp>
         <p:nvCxnSpPr>
-          <p:cNvPr id="6" name="Connector 5"/>
+          <p:cNvPr id="7" name="Connector 6"/>
           <p:cNvCxnSpPr/>
           <p:nvPr/>
         </p:nvCxnSpPr>
@@ -9229,7 +9403,7 @@
           </a:prstGeom>
           <a:ln w="19050">
             <a:solidFill>
-              <a:srgbClr val="4A90D9"/>
+              <a:srgbClr val="505050"/>
             </a:solidFill>
           </a:ln>
         </p:spPr>
@@ -9250,7 +9424,7 @@
       </p:cxnSp>
       <p:sp>
         <p:nvSpPr>
-          <p:cNvPr id="7" name="Rectangle 6"/>
+          <p:cNvPr id="8" name="Rectangle 7"/>
           <p:cNvSpPr/>
           <p:nvPr/>
         </p:nvSpPr>
@@ -9262,9 +9436,17 @@
           <a:prstGeom prst="rect">
             <a:avLst/>
           </a:prstGeom>
-          <a:solidFill>
-            <a:srgbClr val="2C3038"/>
-          </a:solidFill>
+          <a:gradFill rotWithShape="1">
+            <a:gsLst>
+              <a:gs pos="0">
+                <a:srgbClr val="2A2A2A"/>
+              </a:gs>
+              <a:gs pos="100000">
+                <a:srgbClr val="343434"/>
+              </a:gs>
+            </a:gsLst>
+            <a:lin scaled="0" ang="0"/>
+          </a:gradFill>
           <a:ln>
             <a:noFill/>
           </a:ln>
@@ -9293,7 +9475,7 @@
       </p:sp>
       <p:sp>
         <p:nvSpPr>
-          <p:cNvPr id="8" name="TextBox 7"/>
+          <p:cNvPr id="9" name="TextBox 8"/>
           <p:cNvSpPr txBox="1"/>
           <p:nvPr/>
         </p:nvSpPr>
@@ -9317,7 +9499,7 @@
             <a:r>
               <a:rPr sz="1300" b="0">
                 <a:solidFill>
-                  <a:srgbClr val="B0C4DE"/>
+                  <a:srgbClr val="B0B0B0"/>
                 </a:solidFill>
                 <a:latin typeface="Calibri"/>
               </a:rPr>
@@ -9328,7 +9510,7 @@
       </p:sp>
       <p:sp>
         <p:nvSpPr>
-          <p:cNvPr id="9" name="TextBox 8"/>
+          <p:cNvPr id="10" name="TextBox 9"/>
           <p:cNvSpPr txBox="1"/>
           <p:nvPr/>
         </p:nvSpPr>
@@ -9352,7 +9534,7 @@
             <a:r>
               <a:rPr sz="1300" b="0">
                 <a:solidFill>
-                  <a:srgbClr val="B0C4DE"/>
+                  <a:srgbClr val="B0B0B0"/>
                 </a:solidFill>
                 <a:latin typeface="Calibri"/>
               </a:rPr>
@@ -9401,9 +9583,17 @@
           <a:prstGeom prst="rect">
             <a:avLst/>
           </a:prstGeom>
-          <a:solidFill>
-            <a:srgbClr val="2C3038"/>
-          </a:solidFill>
+          <a:gradFill rotWithShape="1">
+            <a:gsLst>
+              <a:gs pos="0">
+                <a:srgbClr val="2A2A2A"/>
+              </a:gs>
+              <a:gs pos="100000">
+                <a:srgbClr val="363636"/>
+              </a:gs>
+            </a:gsLst>
+            <a:lin scaled="0" ang="0"/>
+          </a:gradFill>
           <a:ln>
             <a:noFill/>
           </a:ln>
@@ -9445,7 +9635,7 @@
             <a:avLst/>
           </a:prstGeom>
           <a:solidFill>
-            <a:srgbClr val="4A90D9"/>
+            <a:srgbClr val="505050"/>
           </a:solidFill>
           <a:ln>
             <a:noFill/>
@@ -9534,7 +9724,7 @@
             <a:r>
               <a:rPr sz="1300" b="0">
                 <a:solidFill>
-                  <a:srgbClr val="B0C4DE"/>
+                  <a:srgbClr val="B0B0B0"/>
                 </a:solidFill>
                 <a:latin typeface="Calibri"/>
               </a:rPr>
@@ -9559,7 +9749,7 @@
           </a:prstGeom>
           <a:ln w="6350">
             <a:solidFill>
-              <a:srgbClr val="E0E5ED"/>
+              <a:srgbClr val="DCDCDC"/>
             </a:solidFill>
           </a:ln>
         </p:spPr>
@@ -9604,7 +9794,7 @@
             <a:r>
               <a:rPr sz="1800" b="1">
                 <a:solidFill>
-                  <a:srgbClr val="4A90D9"/>
+                  <a:srgbClr val="505050"/>
                 </a:solidFill>
                 <a:latin typeface="Calibri"/>
               </a:rPr>
@@ -9643,7 +9833,7 @@
             <a:r>
               <a:rPr sz="1700">
                 <a:solidFill>
-                  <a:srgbClr val="1A1A2E"/>
+                  <a:srgbClr val="1C1C1C"/>
                 </a:solidFill>
               </a:rPr>
               <a:t>cfg80211：802.11 設定框架</a:t>
@@ -9658,7 +9848,7 @@
             <a:r>
               <a:rPr sz="1700">
                 <a:solidFill>
-                  <a:srgbClr val="1A1A2E"/>
+                  <a:srgbClr val="1C1C1C"/>
                 </a:solidFill>
               </a:rPr>
               <a:t>mac80211：軟體 MAC 實作</a:t>
@@ -9673,7 +9863,7 @@
             <a:r>
               <a:rPr sz="1700">
                 <a:solidFill>
-                  <a:srgbClr val="1A1A2E"/>
+                  <a:srgbClr val="1C1C1C"/>
                 </a:solidFill>
               </a:rPr>
               <a:t>nl80211：Netlink 介面（用戶空間↔核心）</a:t>
@@ -9694,7 +9884,7 @@
             <a:r>
               <a:rPr sz="1700">
                 <a:solidFill>
-                  <a:srgbClr val="1A1A2E"/>
+                  <a:srgbClr val="1C1C1C"/>
                 </a:solidFill>
               </a:rPr>
               <a:t>關鍵差異：開源驅動</a:t>
@@ -9709,7 +9899,7 @@
             <a:r>
               <a:rPr sz="1500">
                 <a:solidFill>
-                  <a:srgbClr val="5A6A7A"/>
+                  <a:srgbClr val="6B6B6B"/>
                 </a:solidFill>
               </a:rPr>
               <a:t>  · iwlwifi（Intel）可修改</a:t>
@@ -9724,7 +9914,7 @@
             <a:r>
               <a:rPr sz="1500">
                 <a:solidFill>
-                  <a:srgbClr val="5A6A7A"/>
+                  <a:srgbClr val="6B6B6B"/>
                 </a:solidFill>
               </a:rPr>
               <a:t>  · ath9k（Atheros）可修改</a:t>
@@ -9739,7 +9929,7 @@
             <a:r>
               <a:rPr sz="1500">
                 <a:solidFill>
-                  <a:srgbClr val="5A6A7A"/>
+                  <a:srgbClr val="6B6B6B"/>
                 </a:solidFill>
               </a:rPr>
               <a:t>  · brcmfmac（Broadcom）可 patch 韌體</a:t>
@@ -9760,7 +9950,7 @@
             <a:r>
               <a:rPr sz="1700">
                 <a:solidFill>
-                  <a:srgbClr val="1A1A2E"/>
+                  <a:srgbClr val="1C1C1C"/>
                 </a:solidFill>
               </a:rPr>
               <a:t>debugfs 介面：</a:t>
@@ -9775,7 +9965,7 @@
             <a:r>
               <a:rPr sz="1500">
                 <a:solidFill>
-                  <a:srgbClr val="5A6A7A"/>
+                  <a:srgbClr val="6B6B6B"/>
                 </a:solidFill>
               </a:rPr>
               <a:t>  /sys/kernel/debug/ieee80211/</a:t>
@@ -9790,7 +9980,7 @@
             <a:r>
               <a:rPr sz="1500">
                 <a:solidFill>
-                  <a:srgbClr val="5A6A7A"/>
+                  <a:srgbClr val="6B6B6B"/>
                 </a:solidFill>
               </a:rPr>
               <a:t>  部分驅動在此暴露 CSI 原始資料</a:t>
@@ -9824,7 +10014,7 @@
             <a:r>
               <a:rPr sz="1800" b="1">
                 <a:solidFill>
-                  <a:srgbClr val="4A90D9"/>
+                  <a:srgbClr val="505050"/>
                 </a:solidFill>
                 <a:latin typeface="Calibri"/>
               </a:rPr>
@@ -9863,7 +10053,7 @@
             <a:r>
               <a:rPr sz="1700" b="1">
                 <a:solidFill>
-                  <a:srgbClr val="1A1A2E"/>
+                  <a:srgbClr val="1C1C1C"/>
                 </a:solidFill>
               </a:rPr>
               <a:t>✗ OEM.sys 為閉源二進位</a:t>
@@ -9878,7 +10068,7 @@
             <a:r>
               <a:rPr sz="1700" b="1">
                 <a:solidFill>
-                  <a:srgbClr val="1A1A2E"/>
+                  <a:srgbClr val="1C1C1C"/>
                 </a:solidFill>
               </a:rPr>
               <a:t>✗ NDIS 介面固定，無擴充 CSI 的機制</a:t>
@@ -9893,7 +10083,7 @@
             <a:r>
               <a:rPr sz="1700" b="1">
                 <a:solidFill>
-                  <a:srgbClr val="1A1A2E"/>
+                  <a:srgbClr val="1C1C1C"/>
                 </a:solidFill>
               </a:rPr>
               <a:t>✗ 無等同 debugfs 的 PHY 資料介面</a:t>
@@ -9908,7 +10098,7 @@
             <a:r>
               <a:rPr sz="1700" b="1">
                 <a:solidFill>
-                  <a:srgbClr val="1A1A2E"/>
+                  <a:srgbClr val="1C1C1C"/>
                 </a:solidFill>
               </a:rPr>
               <a:t>✗ 韌體修改需要 WHQL 簽章</a:t>
@@ -9929,7 +10119,7 @@
             <a:r>
               <a:rPr sz="1700">
                 <a:solidFill>
-                  <a:srgbClr val="1A1A2E"/>
+                  <a:srgbClr val="1C1C1C"/>
                 </a:solidFill>
               </a:rPr>
               <a:t>→ Linux 的可行性來自</a:t>
@@ -9944,7 +10134,7 @@
             <a:r>
               <a:rPr sz="1500">
                 <a:solidFill>
-                  <a:srgbClr val="5A6A7A"/>
+                  <a:srgbClr val="6B6B6B"/>
                 </a:solidFill>
               </a:rPr>
               <a:t>  開源 + 可修改驅動 + 彈性的核心介面</a:t>
@@ -9959,7 +10149,7 @@
             <a:r>
               <a:rPr sz="1500">
                 <a:solidFill>
-                  <a:srgbClr val="5A6A7A"/>
+                  <a:srgbClr val="6B6B6B"/>
                 </a:solidFill>
               </a:rPr>
               <a:t>  不是 Windows 的「bug」，是設計哲學差異</a:t>
@@ -9983,7 +10173,7 @@
           </a:prstGeom>
           <a:ln w="6350">
             <a:solidFill>
-              <a:srgbClr val="E0E5ED"/>
+              <a:srgbClr val="DCDCDC"/>
             </a:solidFill>
           </a:ln>
         </p:spPr>
@@ -10028,7 +10218,7 @@
             <a:r>
               <a:rPr sz="1300" b="0">
                 <a:solidFill>
-                  <a:srgbClr val="5A6A7A"/>
+                  <a:srgbClr val="6B6B6B"/>
                 </a:solidFill>
                 <a:latin typeface="Calibri"/>
               </a:rPr>
@@ -10051,9 +10241,17 @@
           <a:prstGeom prst="rect">
             <a:avLst/>
           </a:prstGeom>
-          <a:solidFill>
-            <a:srgbClr val="2C3038"/>
-          </a:solidFill>
+          <a:gradFill rotWithShape="1">
+            <a:gsLst>
+              <a:gs pos="0">
+                <a:srgbClr val="2A2A2A"/>
+              </a:gs>
+              <a:gs pos="100000">
+                <a:srgbClr val="343434"/>
+              </a:gs>
+            </a:gsLst>
+            <a:lin scaled="0" ang="0"/>
+          </a:gradFill>
           <a:ln>
             <a:noFill/>
           </a:ln>
@@ -10106,7 +10304,7 @@
             <a:r>
               <a:rPr sz="1300" b="0">
                 <a:solidFill>
-                  <a:srgbClr val="B0C4DE"/>
+                  <a:srgbClr val="B0B0B0"/>
                 </a:solidFill>
                 <a:latin typeface="Calibri"/>
               </a:rPr>
@@ -10141,7 +10339,7 @@
             <a:r>
               <a:rPr sz="1300" b="0">
                 <a:solidFill>
-                  <a:srgbClr val="B0C4DE"/>
+                  <a:srgbClr val="B0B0B0"/>
                 </a:solidFill>
                 <a:latin typeface="Calibri"/>
               </a:rPr>
@@ -10190,9 +10388,17 @@
           <a:prstGeom prst="rect">
             <a:avLst/>
           </a:prstGeom>
-          <a:solidFill>
-            <a:srgbClr val="2C3038"/>
-          </a:solidFill>
+          <a:gradFill rotWithShape="1">
+            <a:gsLst>
+              <a:gs pos="0">
+                <a:srgbClr val="2A2A2A"/>
+              </a:gs>
+              <a:gs pos="100000">
+                <a:srgbClr val="363636"/>
+              </a:gs>
+            </a:gsLst>
+            <a:lin scaled="0" ang="0"/>
+          </a:gradFill>
           <a:ln>
             <a:noFill/>
           </a:ln>
@@ -10234,7 +10440,7 @@
             <a:avLst/>
           </a:prstGeom>
           <a:solidFill>
-            <a:srgbClr val="4A90D9"/>
+            <a:srgbClr val="505050"/>
           </a:solidFill>
           <a:ln>
             <a:noFill/>
@@ -10323,7 +10529,7 @@
             <a:r>
               <a:rPr sz="1300" b="0">
                 <a:solidFill>
-                  <a:srgbClr val="B0C4DE"/>
+                  <a:srgbClr val="B0B0B0"/>
                 </a:solidFill>
                 <a:latin typeface="Calibri"/>
               </a:rPr>
@@ -10377,7 +10583,7 @@
                   </a:txBody>
                   <a:tcPr marL="73152" marR="73152" marT="45720" marB="45720">
                     <a:solidFill>
-                      <a:srgbClr val="2C3038"/>
+                      <a:srgbClr val="2A2A2A"/>
                     </a:solidFill>
                   </a:tcPr>
                 </a:tc>
@@ -10400,7 +10606,7 @@
                   </a:txBody>
                   <a:tcPr marL="73152" marR="73152" marT="45720" marB="45720">
                     <a:solidFill>
-                      <a:srgbClr val="2C3038"/>
+                      <a:srgbClr val="2A2A2A"/>
                     </a:solidFill>
                   </a:tcPr>
                 </a:tc>
@@ -10423,7 +10629,7 @@
                   </a:txBody>
                   <a:tcPr marL="73152" marR="73152" marT="45720" marB="45720">
                     <a:solidFill>
-                      <a:srgbClr val="2C3038"/>
+                      <a:srgbClr val="2A2A2A"/>
                     </a:solidFill>
                   </a:tcPr>
                 </a:tc>
@@ -10446,7 +10652,7 @@
                   </a:txBody>
                   <a:tcPr marL="73152" marR="73152" marT="45720" marB="45720">
                     <a:solidFill>
-                      <a:srgbClr val="2C3038"/>
+                      <a:srgbClr val="2A2A2A"/>
                     </a:solidFill>
                   </a:tcPr>
                 </a:tc>
@@ -10469,7 +10675,7 @@
                   </a:txBody>
                   <a:tcPr marL="73152" marR="73152" marT="45720" marB="45720">
                     <a:solidFill>
-                      <a:srgbClr val="2C3038"/>
+                      <a:srgbClr val="2A2A2A"/>
                     </a:solidFill>
                   </a:tcPr>
                 </a:tc>
@@ -10483,7 +10689,7 @@
                       <a:r>
                         <a:rPr sz="1400" b="1">
                           <a:solidFill>
-                            <a:srgbClr val="4A90D9"/>
+                            <a:srgbClr val="505050"/>
                           </a:solidFill>
                           <a:latin typeface="Calibri"/>
                         </a:rPr>
@@ -10505,7 +10711,7 @@
                       <a:r>
                         <a:rPr sz="1400">
                           <a:solidFill>
-                            <a:srgbClr val="1A1A2E"/>
+                            <a:srgbClr val="1C1C1C"/>
                           </a:solidFill>
                           <a:latin typeface="Calibri"/>
                         </a:rPr>
@@ -10527,7 +10733,7 @@
                       <a:r>
                         <a:rPr sz="1400">
                           <a:solidFill>
-                            <a:srgbClr val="1A1A2E"/>
+                            <a:srgbClr val="1C1C1C"/>
                           </a:solidFill>
                           <a:latin typeface="Calibri"/>
                         </a:rPr>
@@ -10549,7 +10755,7 @@
                       <a:r>
                         <a:rPr sz="1400">
                           <a:solidFill>
-                            <a:srgbClr val="1A1A2E"/>
+                            <a:srgbClr val="1C1C1C"/>
                           </a:solidFill>
                           <a:latin typeface="Calibri"/>
                         </a:rPr>
@@ -10571,7 +10777,7 @@
                       <a:r>
                         <a:rPr sz="1400">
                           <a:solidFill>
-                            <a:srgbClr val="1A1A2E"/>
+                            <a:srgbClr val="1C1C1C"/>
                           </a:solidFill>
                           <a:latin typeface="Calibri"/>
                         </a:rPr>
@@ -10595,7 +10801,7 @@
                       <a:r>
                         <a:rPr sz="1400" b="1">
                           <a:solidFill>
-                            <a:srgbClr val="4A90D9"/>
+                            <a:srgbClr val="505050"/>
                           </a:solidFill>
                           <a:latin typeface="Calibri"/>
                         </a:rPr>
@@ -10605,7 +10811,7 @@
                   </a:txBody>
                   <a:tcPr marL="73152" marR="73152" marT="36576" marB="36576">
                     <a:solidFill>
-                      <a:srgbClr val="F4F7FB"/>
+                      <a:srgbClr val="F0F0F0"/>
                     </a:solidFill>
                   </a:tcPr>
                 </a:tc>
@@ -10617,7 +10823,7 @@
                       <a:r>
                         <a:rPr sz="1400">
                           <a:solidFill>
-                            <a:srgbClr val="1A1A2E"/>
+                            <a:srgbClr val="1C1C1C"/>
                           </a:solidFill>
                           <a:latin typeface="Calibri"/>
                         </a:rPr>
@@ -10627,7 +10833,7 @@
                   </a:txBody>
                   <a:tcPr marL="73152" marR="73152" marT="36576" marB="36576">
                     <a:solidFill>
-                      <a:srgbClr val="F4F7FB"/>
+                      <a:srgbClr val="F0F0F0"/>
                     </a:solidFill>
                   </a:tcPr>
                 </a:tc>
@@ -10639,7 +10845,7 @@
                       <a:r>
                         <a:rPr sz="1400">
                           <a:solidFill>
-                            <a:srgbClr val="1A1A2E"/>
+                            <a:srgbClr val="1C1C1C"/>
                           </a:solidFill>
                           <a:latin typeface="Calibri"/>
                         </a:rPr>
@@ -10649,7 +10855,7 @@
                   </a:txBody>
                   <a:tcPr marL="73152" marR="73152" marT="36576" marB="36576">
                     <a:solidFill>
-                      <a:srgbClr val="F4F7FB"/>
+                      <a:srgbClr val="F0F0F0"/>
                     </a:solidFill>
                   </a:tcPr>
                 </a:tc>
@@ -10661,7 +10867,7 @@
                       <a:r>
                         <a:rPr sz="1400">
                           <a:solidFill>
-                            <a:srgbClr val="1A1A2E"/>
+                            <a:srgbClr val="1C1C1C"/>
                           </a:solidFill>
                           <a:latin typeface="Calibri"/>
                         </a:rPr>
@@ -10671,7 +10877,7 @@
                   </a:txBody>
                   <a:tcPr marL="73152" marR="73152" marT="36576" marB="36576">
                     <a:solidFill>
-                      <a:srgbClr val="F4F7FB"/>
+                      <a:srgbClr val="F0F0F0"/>
                     </a:solidFill>
                   </a:tcPr>
                 </a:tc>
@@ -10683,7 +10889,7 @@
                       <a:r>
                         <a:rPr sz="1400">
                           <a:solidFill>
-                            <a:srgbClr val="1A1A2E"/>
+                            <a:srgbClr val="1C1C1C"/>
                           </a:solidFill>
                           <a:latin typeface="Calibri"/>
                         </a:rPr>
@@ -10693,7 +10899,7 @@
                   </a:txBody>
                   <a:tcPr marL="73152" marR="73152" marT="36576" marB="36576">
                     <a:solidFill>
-                      <a:srgbClr val="F4F7FB"/>
+                      <a:srgbClr val="F0F0F0"/>
                     </a:solidFill>
                   </a:tcPr>
                 </a:tc>
@@ -10707,7 +10913,7 @@
                       <a:r>
                         <a:rPr sz="1400" b="1">
                           <a:solidFill>
-                            <a:srgbClr val="4A90D9"/>
+                            <a:srgbClr val="505050"/>
                           </a:solidFill>
                           <a:latin typeface="Calibri"/>
                         </a:rPr>
@@ -10729,7 +10935,7 @@
                       <a:r>
                         <a:rPr sz="1400">
                           <a:solidFill>
-                            <a:srgbClr val="1A1A2E"/>
+                            <a:srgbClr val="1C1C1C"/>
                           </a:solidFill>
                           <a:latin typeface="Calibri"/>
                         </a:rPr>
@@ -10751,7 +10957,7 @@
                       <a:r>
                         <a:rPr sz="1400">
                           <a:solidFill>
-                            <a:srgbClr val="1A1A2E"/>
+                            <a:srgbClr val="1C1C1C"/>
                           </a:solidFill>
                           <a:latin typeface="Calibri"/>
                         </a:rPr>
@@ -10773,7 +10979,7 @@
                       <a:r>
                         <a:rPr sz="1400">
                           <a:solidFill>
-                            <a:srgbClr val="1A1A2E"/>
+                            <a:srgbClr val="1C1C1C"/>
                           </a:solidFill>
                           <a:latin typeface="Calibri"/>
                         </a:rPr>
@@ -10795,7 +11001,7 @@
                       <a:r>
                         <a:rPr sz="1400">
                           <a:solidFill>
-                            <a:srgbClr val="1A1A2E"/>
+                            <a:srgbClr val="1C1C1C"/>
                           </a:solidFill>
                           <a:latin typeface="Calibri"/>
                         </a:rPr>
@@ -10819,7 +11025,7 @@
                       <a:r>
                         <a:rPr sz="1400" b="1">
                           <a:solidFill>
-                            <a:srgbClr val="4A90D9"/>
+                            <a:srgbClr val="505050"/>
                           </a:solidFill>
                           <a:latin typeface="Calibri"/>
                         </a:rPr>
@@ -10829,7 +11035,7 @@
                   </a:txBody>
                   <a:tcPr marL="73152" marR="73152" marT="36576" marB="36576">
                     <a:solidFill>
-                      <a:srgbClr val="F4F7FB"/>
+                      <a:srgbClr val="F0F0F0"/>
                     </a:solidFill>
                   </a:tcPr>
                 </a:tc>
@@ -10841,7 +11047,7 @@
                       <a:r>
                         <a:rPr sz="1400">
                           <a:solidFill>
-                            <a:srgbClr val="1A1A2E"/>
+                            <a:srgbClr val="1C1C1C"/>
                           </a:solidFill>
                           <a:latin typeface="Calibri"/>
                         </a:rPr>
@@ -10851,7 +11057,7 @@
                   </a:txBody>
                   <a:tcPr marL="73152" marR="73152" marT="36576" marB="36576">
                     <a:solidFill>
-                      <a:srgbClr val="F4F7FB"/>
+                      <a:srgbClr val="F0F0F0"/>
                     </a:solidFill>
                   </a:tcPr>
                 </a:tc>
@@ -10863,7 +11069,7 @@
                       <a:r>
                         <a:rPr sz="1400">
                           <a:solidFill>
-                            <a:srgbClr val="1A1A2E"/>
+                            <a:srgbClr val="1C1C1C"/>
                           </a:solidFill>
                           <a:latin typeface="Calibri"/>
                         </a:rPr>
@@ -10873,7 +11079,7 @@
                   </a:txBody>
                   <a:tcPr marL="73152" marR="73152" marT="36576" marB="36576">
                     <a:solidFill>
-                      <a:srgbClr val="F4F7FB"/>
+                      <a:srgbClr val="F0F0F0"/>
                     </a:solidFill>
                   </a:tcPr>
                 </a:tc>
@@ -10885,7 +11091,7 @@
                       <a:r>
                         <a:rPr sz="1400">
                           <a:solidFill>
-                            <a:srgbClr val="1A1A2E"/>
+                            <a:srgbClr val="1C1C1C"/>
                           </a:solidFill>
                           <a:latin typeface="Calibri"/>
                         </a:rPr>
@@ -10895,7 +11101,7 @@
                   </a:txBody>
                   <a:tcPr marL="73152" marR="73152" marT="36576" marB="36576">
                     <a:solidFill>
-                      <a:srgbClr val="F4F7FB"/>
+                      <a:srgbClr val="F0F0F0"/>
                     </a:solidFill>
                   </a:tcPr>
                 </a:tc>
@@ -10907,7 +11113,7 @@
                       <a:r>
                         <a:rPr sz="1400">
                           <a:solidFill>
-                            <a:srgbClr val="1A1A2E"/>
+                            <a:srgbClr val="1C1C1C"/>
                           </a:solidFill>
                           <a:latin typeface="Calibri"/>
                         </a:rPr>
@@ -10917,7 +11123,7 @@
                   </a:txBody>
                   <a:tcPr marL="73152" marR="73152" marT="36576" marB="36576">
                     <a:solidFill>
-                      <a:srgbClr val="F4F7FB"/>
+                      <a:srgbClr val="F0F0F0"/>
                     </a:solidFill>
                   </a:tcPr>
                 </a:tc>
@@ -10931,7 +11137,7 @@
                       <a:r>
                         <a:rPr sz="1400" b="1">
                           <a:solidFill>
-                            <a:srgbClr val="4A90D9"/>
+                            <a:srgbClr val="505050"/>
                           </a:solidFill>
                           <a:latin typeface="Calibri"/>
                         </a:rPr>
@@ -10953,7 +11159,7 @@
                       <a:r>
                         <a:rPr sz="1400">
                           <a:solidFill>
-                            <a:srgbClr val="1A1A2E"/>
+                            <a:srgbClr val="1C1C1C"/>
                           </a:solidFill>
                           <a:latin typeface="Calibri"/>
                         </a:rPr>
@@ -10975,7 +11181,7 @@
                       <a:r>
                         <a:rPr sz="1400">
                           <a:solidFill>
-                            <a:srgbClr val="1A1A2E"/>
+                            <a:srgbClr val="1C1C1C"/>
                           </a:solidFill>
                           <a:latin typeface="Calibri"/>
                         </a:rPr>
@@ -10997,7 +11203,7 @@
                       <a:r>
                         <a:rPr sz="1400">
                           <a:solidFill>
-                            <a:srgbClr val="1A1A2E"/>
+                            <a:srgbClr val="1C1C1C"/>
                           </a:solidFill>
                           <a:latin typeface="Calibri"/>
                         </a:rPr>
@@ -11019,7 +11225,7 @@
                       <a:r>
                         <a:rPr sz="1400">
                           <a:solidFill>
-                            <a:srgbClr val="1A1A2E"/>
+                            <a:srgbClr val="1C1C1C"/>
                           </a:solidFill>
                           <a:latin typeface="Calibri"/>
                         </a:rPr>
@@ -11043,7 +11249,7 @@
                       <a:r>
                         <a:rPr sz="1400" b="1">
                           <a:solidFill>
-                            <a:srgbClr val="4A90D9"/>
+                            <a:srgbClr val="505050"/>
                           </a:solidFill>
                           <a:latin typeface="Calibri"/>
                         </a:rPr>
@@ -11053,7 +11259,7 @@
                   </a:txBody>
                   <a:tcPr marL="73152" marR="73152" marT="36576" marB="36576">
                     <a:solidFill>
-                      <a:srgbClr val="F4F7FB"/>
+                      <a:srgbClr val="F0F0F0"/>
                     </a:solidFill>
                   </a:tcPr>
                 </a:tc>
@@ -11065,7 +11271,7 @@
                       <a:r>
                         <a:rPr sz="1400">
                           <a:solidFill>
-                            <a:srgbClr val="1A1A2E"/>
+                            <a:srgbClr val="1C1C1C"/>
                           </a:solidFill>
                           <a:latin typeface="Calibri"/>
                         </a:rPr>
@@ -11075,7 +11281,7 @@
                   </a:txBody>
                   <a:tcPr marL="73152" marR="73152" marT="36576" marB="36576">
                     <a:solidFill>
-                      <a:srgbClr val="F4F7FB"/>
+                      <a:srgbClr val="F0F0F0"/>
                     </a:solidFill>
                   </a:tcPr>
                 </a:tc>
@@ -11087,7 +11293,7 @@
                       <a:r>
                         <a:rPr sz="1400">
                           <a:solidFill>
-                            <a:srgbClr val="1A1A2E"/>
+                            <a:srgbClr val="1C1C1C"/>
                           </a:solidFill>
                           <a:latin typeface="Calibri"/>
                         </a:rPr>
@@ -11097,7 +11303,7 @@
                   </a:txBody>
                   <a:tcPr marL="73152" marR="73152" marT="36576" marB="36576">
                     <a:solidFill>
-                      <a:srgbClr val="F4F7FB"/>
+                      <a:srgbClr val="F0F0F0"/>
                     </a:solidFill>
                   </a:tcPr>
                 </a:tc>
@@ -11109,7 +11315,7 @@
                       <a:r>
                         <a:rPr sz="1400">
                           <a:solidFill>
-                            <a:srgbClr val="1A1A2E"/>
+                            <a:srgbClr val="1C1C1C"/>
                           </a:solidFill>
                           <a:latin typeface="Calibri"/>
                         </a:rPr>
@@ -11119,7 +11325,7 @@
                   </a:txBody>
                   <a:tcPr marL="73152" marR="73152" marT="36576" marB="36576">
                     <a:solidFill>
-                      <a:srgbClr val="F4F7FB"/>
+                      <a:srgbClr val="F0F0F0"/>
                     </a:solidFill>
                   </a:tcPr>
                 </a:tc>
@@ -11131,7 +11337,7 @@
                       <a:r>
                         <a:rPr sz="1400">
                           <a:solidFill>
-                            <a:srgbClr val="1A1A2E"/>
+                            <a:srgbClr val="1C1C1C"/>
                           </a:solidFill>
                           <a:latin typeface="Calibri"/>
                         </a:rPr>
@@ -11141,7 +11347,7 @@
                   </a:txBody>
                   <a:tcPr marL="73152" marR="73152" marT="36576" marB="36576">
                     <a:solidFill>
-                      <a:srgbClr val="F4F7FB"/>
+                      <a:srgbClr val="F0F0F0"/>
                     </a:solidFill>
                   </a:tcPr>
                 </a:tc>
@@ -11166,7 +11372,7 @@
           </a:prstGeom>
           <a:ln w="6350">
             <a:solidFill>
-              <a:srgbClr val="E0E5ED"/>
+              <a:srgbClr val="DCDCDC"/>
             </a:solidFill>
           </a:ln>
         </p:spPr>
@@ -11211,7 +11417,7 @@
             <a:r>
               <a:rPr sz="1300" b="0">
                 <a:solidFill>
-                  <a:srgbClr val="5A6A7A"/>
+                  <a:srgbClr val="6B6B6B"/>
                 </a:solidFill>
                 <a:latin typeface="Calibri"/>
               </a:rPr>
@@ -11234,9 +11440,17 @@
           <a:prstGeom prst="rect">
             <a:avLst/>
           </a:prstGeom>
-          <a:solidFill>
-            <a:srgbClr val="2C3038"/>
-          </a:solidFill>
+          <a:gradFill rotWithShape="1">
+            <a:gsLst>
+              <a:gs pos="0">
+                <a:srgbClr val="2A2A2A"/>
+              </a:gs>
+              <a:gs pos="100000">
+                <a:srgbClr val="343434"/>
+              </a:gs>
+            </a:gsLst>
+            <a:lin scaled="0" ang="0"/>
+          </a:gradFill>
           <a:ln>
             <a:noFill/>
           </a:ln>
@@ -11289,7 +11503,7 @@
             <a:r>
               <a:rPr sz="1300" b="0">
                 <a:solidFill>
-                  <a:srgbClr val="B0C4DE"/>
+                  <a:srgbClr val="B0B0B0"/>
                 </a:solidFill>
                 <a:latin typeface="Calibri"/>
               </a:rPr>
@@ -11324,7 +11538,7 @@
             <a:r>
               <a:rPr sz="1300" b="0">
                 <a:solidFill>
-                  <a:srgbClr val="B0C4DE"/>
+                  <a:srgbClr val="B0B0B0"/>
                 </a:solidFill>
                 <a:latin typeface="Calibri"/>
               </a:rPr>
@@ -11373,9 +11587,17 @@
           <a:prstGeom prst="rect">
             <a:avLst/>
           </a:prstGeom>
-          <a:solidFill>
-            <a:srgbClr val="2C3038"/>
-          </a:solidFill>
+          <a:gradFill rotWithShape="1">
+            <a:gsLst>
+              <a:gs pos="0">
+                <a:srgbClr val="2A2A2A"/>
+              </a:gs>
+              <a:gs pos="100000">
+                <a:srgbClr val="363636"/>
+              </a:gs>
+            </a:gsLst>
+            <a:lin scaled="0" ang="0"/>
+          </a:gradFill>
           <a:ln>
             <a:noFill/>
           </a:ln>
@@ -11417,7 +11639,7 @@
             <a:avLst/>
           </a:prstGeom>
           <a:solidFill>
-            <a:srgbClr val="4A90D9"/>
+            <a:srgbClr val="505050"/>
           </a:solidFill>
           <a:ln>
             <a:noFill/>
@@ -11506,7 +11728,7 @@
             <a:r>
               <a:rPr sz="1300" b="0">
                 <a:solidFill>
-                  <a:srgbClr val="B0C4DE"/>
+                  <a:srgbClr val="B0B0B0"/>
                 </a:solidFill>
                 <a:latin typeface="Calibri"/>
               </a:rPr>
@@ -11560,7 +11782,7 @@
                   </a:txBody>
                   <a:tcPr marL="73152" marR="73152" marT="45720" marB="45720">
                     <a:solidFill>
-                      <a:srgbClr val="2C3038"/>
+                      <a:srgbClr val="2A2A2A"/>
                     </a:solidFill>
                   </a:tcPr>
                 </a:tc>
@@ -11583,7 +11805,7 @@
                   </a:txBody>
                   <a:tcPr marL="73152" marR="73152" marT="45720" marB="45720">
                     <a:solidFill>
-                      <a:srgbClr val="2C3038"/>
+                      <a:srgbClr val="2A2A2A"/>
                     </a:solidFill>
                   </a:tcPr>
                 </a:tc>
@@ -11606,7 +11828,7 @@
                   </a:txBody>
                   <a:tcPr marL="73152" marR="73152" marT="45720" marB="45720">
                     <a:solidFill>
-                      <a:srgbClr val="2C3038"/>
+                      <a:srgbClr val="2A2A2A"/>
                     </a:solidFill>
                   </a:tcPr>
                 </a:tc>
@@ -11629,7 +11851,7 @@
                   </a:txBody>
                   <a:tcPr marL="73152" marR="73152" marT="45720" marB="45720">
                     <a:solidFill>
-                      <a:srgbClr val="2C3038"/>
+                      <a:srgbClr val="2A2A2A"/>
                     </a:solidFill>
                   </a:tcPr>
                 </a:tc>
@@ -11652,7 +11874,7 @@
                   </a:txBody>
                   <a:tcPr marL="73152" marR="73152" marT="45720" marB="45720">
                     <a:solidFill>
-                      <a:srgbClr val="2C3038"/>
+                      <a:srgbClr val="2A2A2A"/>
                     </a:solidFill>
                   </a:tcPr>
                 </a:tc>
@@ -11666,7 +11888,7 @@
                       <a:r>
                         <a:rPr sz="1400" b="1">
                           <a:solidFill>
-                            <a:srgbClr val="4A90D9"/>
+                            <a:srgbClr val="505050"/>
                           </a:solidFill>
                           <a:latin typeface="Calibri"/>
                         </a:rPr>
@@ -11693,7 +11915,7 @@
                       <a:r>
                         <a:rPr sz="1400">
                           <a:solidFill>
-                            <a:srgbClr val="1A1A2E"/>
+                            <a:srgbClr val="1C1C1C"/>
                           </a:solidFill>
                           <a:latin typeface="Calibri"/>
                         </a:rPr>
@@ -11715,7 +11937,7 @@
                       <a:r>
                         <a:rPr sz="1400">
                           <a:solidFill>
-                            <a:srgbClr val="1A1A2E"/>
+                            <a:srgbClr val="1C1C1C"/>
                           </a:solidFill>
                           <a:latin typeface="Calibri"/>
                         </a:rPr>
@@ -11737,7 +11959,7 @@
                       <a:r>
                         <a:rPr sz="1400">
                           <a:solidFill>
-                            <a:srgbClr val="1A1A2E"/>
+                            <a:srgbClr val="1C1C1C"/>
                           </a:solidFill>
                           <a:latin typeface="Calibri"/>
                         </a:rPr>
@@ -11759,7 +11981,7 @@
                       <a:r>
                         <a:rPr sz="1400">
                           <a:solidFill>
-                            <a:srgbClr val="1A1A2E"/>
+                            <a:srgbClr val="1C1C1C"/>
                           </a:solidFill>
                           <a:latin typeface="Calibri"/>
                         </a:rPr>
@@ -11783,7 +12005,7 @@
                       <a:r>
                         <a:rPr sz="1400" b="1">
                           <a:solidFill>
-                            <a:srgbClr val="4A90D9"/>
+                            <a:srgbClr val="505050"/>
                           </a:solidFill>
                           <a:latin typeface="Calibri"/>
                         </a:rPr>
@@ -11798,7 +12020,7 @@
                   </a:txBody>
                   <a:tcPr marL="73152" marR="73152" marT="36576" marB="36576">
                     <a:solidFill>
-                      <a:srgbClr val="F4F7FB"/>
+                      <a:srgbClr val="F0F0F0"/>
                     </a:solidFill>
                   </a:tcPr>
                 </a:tc>
@@ -11810,7 +12032,7 @@
                       <a:r>
                         <a:rPr sz="1400">
                           <a:solidFill>
-                            <a:srgbClr val="1A1A2E"/>
+                            <a:srgbClr val="1C1C1C"/>
                           </a:solidFill>
                           <a:latin typeface="Calibri"/>
                         </a:rPr>
@@ -11820,7 +12042,7 @@
                   </a:txBody>
                   <a:tcPr marL="73152" marR="73152" marT="36576" marB="36576">
                     <a:solidFill>
-                      <a:srgbClr val="F4F7FB"/>
+                      <a:srgbClr val="F0F0F0"/>
                     </a:solidFill>
                   </a:tcPr>
                 </a:tc>
@@ -11832,7 +12054,7 @@
                       <a:r>
                         <a:rPr sz="1400">
                           <a:solidFill>
-                            <a:srgbClr val="1A1A2E"/>
+                            <a:srgbClr val="1C1C1C"/>
                           </a:solidFill>
                           <a:latin typeface="Calibri"/>
                         </a:rPr>
@@ -11842,7 +12064,7 @@
                   </a:txBody>
                   <a:tcPr marL="73152" marR="73152" marT="36576" marB="36576">
                     <a:solidFill>
-                      <a:srgbClr val="F4F7FB"/>
+                      <a:srgbClr val="F0F0F0"/>
                     </a:solidFill>
                   </a:tcPr>
                 </a:tc>
@@ -11854,7 +12076,7 @@
                       <a:r>
                         <a:rPr sz="1400">
                           <a:solidFill>
-                            <a:srgbClr val="1A1A2E"/>
+                            <a:srgbClr val="1C1C1C"/>
                           </a:solidFill>
                           <a:latin typeface="Calibri"/>
                         </a:rPr>
@@ -11864,7 +12086,7 @@
                   </a:txBody>
                   <a:tcPr marL="73152" marR="73152" marT="36576" marB="36576">
                     <a:solidFill>
-                      <a:srgbClr val="F4F7FB"/>
+                      <a:srgbClr val="F0F0F0"/>
                     </a:solidFill>
                   </a:tcPr>
                 </a:tc>
@@ -11876,7 +12098,7 @@
                       <a:r>
                         <a:rPr sz="1400">
                           <a:solidFill>
-                            <a:srgbClr val="1A1A2E"/>
+                            <a:srgbClr val="1C1C1C"/>
                           </a:solidFill>
                           <a:latin typeface="Calibri"/>
                         </a:rPr>
@@ -11886,7 +12108,7 @@
                   </a:txBody>
                   <a:tcPr marL="73152" marR="73152" marT="36576" marB="36576">
                     <a:solidFill>
-                      <a:srgbClr val="F4F7FB"/>
+                      <a:srgbClr val="F0F0F0"/>
                     </a:solidFill>
                   </a:tcPr>
                 </a:tc>
@@ -11900,7 +12122,7 @@
                       <a:r>
                         <a:rPr sz="1400" b="1">
                           <a:solidFill>
-                            <a:srgbClr val="4A90D9"/>
+                            <a:srgbClr val="505050"/>
                           </a:solidFill>
                           <a:latin typeface="Calibri"/>
                         </a:rPr>
@@ -11922,7 +12144,7 @@
                       <a:r>
                         <a:rPr sz="1400">
                           <a:solidFill>
-                            <a:srgbClr val="1A1A2E"/>
+                            <a:srgbClr val="1C1C1C"/>
                           </a:solidFill>
                           <a:latin typeface="Calibri"/>
                         </a:rPr>
@@ -11944,7 +12166,7 @@
                       <a:r>
                         <a:rPr sz="1400">
                           <a:solidFill>
-                            <a:srgbClr val="1A1A2E"/>
+                            <a:srgbClr val="1C1C1C"/>
                           </a:solidFill>
                           <a:latin typeface="Calibri"/>
                         </a:rPr>
@@ -11966,7 +12188,7 @@
                       <a:r>
                         <a:rPr sz="1400">
                           <a:solidFill>
-                            <a:srgbClr val="1A1A2E"/>
+                            <a:srgbClr val="1C1C1C"/>
                           </a:solidFill>
                           <a:latin typeface="Calibri"/>
                         </a:rPr>
@@ -11988,7 +12210,7 @@
                       <a:r>
                         <a:rPr sz="1400">
                           <a:solidFill>
-                            <a:srgbClr val="1A1A2E"/>
+                            <a:srgbClr val="1C1C1C"/>
                           </a:solidFill>
                           <a:latin typeface="Calibri"/>
                         </a:rPr>
@@ -12012,7 +12234,7 @@
                       <a:r>
                         <a:rPr sz="1400" b="1">
                           <a:solidFill>
-                            <a:srgbClr val="4A90D9"/>
+                            <a:srgbClr val="505050"/>
                           </a:solidFill>
                           <a:latin typeface="Calibri"/>
                         </a:rPr>
@@ -12027,7 +12249,7 @@
                   </a:txBody>
                   <a:tcPr marL="73152" marR="73152" marT="36576" marB="36576">
                     <a:solidFill>
-                      <a:srgbClr val="F4F7FB"/>
+                      <a:srgbClr val="F0F0F0"/>
                     </a:solidFill>
                   </a:tcPr>
                 </a:tc>
@@ -12039,7 +12261,7 @@
                       <a:r>
                         <a:rPr sz="1400">
                           <a:solidFill>
-                            <a:srgbClr val="1A1A2E"/>
+                            <a:srgbClr val="1C1C1C"/>
                           </a:solidFill>
                           <a:latin typeface="Calibri"/>
                         </a:rPr>
@@ -12049,7 +12271,7 @@
                   </a:txBody>
                   <a:tcPr marL="73152" marR="73152" marT="36576" marB="36576">
                     <a:solidFill>
-                      <a:srgbClr val="F4F7FB"/>
+                      <a:srgbClr val="F0F0F0"/>
                     </a:solidFill>
                   </a:tcPr>
                 </a:tc>
@@ -12061,7 +12283,7 @@
                       <a:r>
                         <a:rPr sz="1400">
                           <a:solidFill>
-                            <a:srgbClr val="1A1A2E"/>
+                            <a:srgbClr val="1C1C1C"/>
                           </a:solidFill>
                           <a:latin typeface="Calibri"/>
                         </a:rPr>
@@ -12071,7 +12293,7 @@
                   </a:txBody>
                   <a:tcPr marL="73152" marR="73152" marT="36576" marB="36576">
                     <a:solidFill>
-                      <a:srgbClr val="F4F7FB"/>
+                      <a:srgbClr val="F0F0F0"/>
                     </a:solidFill>
                   </a:tcPr>
                 </a:tc>
@@ -12083,7 +12305,7 @@
                       <a:r>
                         <a:rPr sz="1400">
                           <a:solidFill>
-                            <a:srgbClr val="1A1A2E"/>
+                            <a:srgbClr val="1C1C1C"/>
                           </a:solidFill>
                           <a:latin typeface="Calibri"/>
                         </a:rPr>
@@ -12093,7 +12315,7 @@
                   </a:txBody>
                   <a:tcPr marL="73152" marR="73152" marT="36576" marB="36576">
                     <a:solidFill>
-                      <a:srgbClr val="F4F7FB"/>
+                      <a:srgbClr val="F0F0F0"/>
                     </a:solidFill>
                   </a:tcPr>
                 </a:tc>
@@ -12105,7 +12327,7 @@
                       <a:r>
                         <a:rPr sz="1400">
                           <a:solidFill>
-                            <a:srgbClr val="1A1A2E"/>
+                            <a:srgbClr val="1C1C1C"/>
                           </a:solidFill>
                           <a:latin typeface="Calibri"/>
                         </a:rPr>
@@ -12115,7 +12337,7 @@
                   </a:txBody>
                   <a:tcPr marL="73152" marR="73152" marT="36576" marB="36576">
                     <a:solidFill>
-                      <a:srgbClr val="F4F7FB"/>
+                      <a:srgbClr val="F0F0F0"/>
                     </a:solidFill>
                   </a:tcPr>
                 </a:tc>
@@ -12140,7 +12362,7 @@
           </a:prstGeom>
           <a:ln w="6350">
             <a:solidFill>
-              <a:srgbClr val="E0E5ED"/>
+              <a:srgbClr val="DCDCDC"/>
             </a:solidFill>
           </a:ln>
         </p:spPr>
@@ -12185,7 +12407,7 @@
             <a:r>
               <a:rPr sz="1300" b="0">
                 <a:solidFill>
-                  <a:srgbClr val="5A6A7A"/>
+                  <a:srgbClr val="6B6B6B"/>
                 </a:solidFill>
                 <a:latin typeface="Calibri"/>
               </a:rPr>
@@ -12208,9 +12430,17 @@
           <a:prstGeom prst="rect">
             <a:avLst/>
           </a:prstGeom>
-          <a:solidFill>
-            <a:srgbClr val="2C3038"/>
-          </a:solidFill>
+          <a:gradFill rotWithShape="1">
+            <a:gsLst>
+              <a:gs pos="0">
+                <a:srgbClr val="2A2A2A"/>
+              </a:gs>
+              <a:gs pos="100000">
+                <a:srgbClr val="343434"/>
+              </a:gs>
+            </a:gsLst>
+            <a:lin scaled="0" ang="0"/>
+          </a:gradFill>
           <a:ln>
             <a:noFill/>
           </a:ln>
@@ -12263,7 +12493,7 @@
             <a:r>
               <a:rPr sz="1300" b="0">
                 <a:solidFill>
-                  <a:srgbClr val="B0C4DE"/>
+                  <a:srgbClr val="B0B0B0"/>
                 </a:solidFill>
                 <a:latin typeface="Calibri"/>
               </a:rPr>
@@ -12298,7 +12528,7 @@
             <a:r>
               <a:rPr sz="1300" b="0">
                 <a:solidFill>
-                  <a:srgbClr val="B0C4DE"/>
+                  <a:srgbClr val="B0B0B0"/>
                 </a:solidFill>
                 <a:latin typeface="Calibri"/>
               </a:rPr>
@@ -12347,9 +12577,17 @@
           <a:prstGeom prst="rect">
             <a:avLst/>
           </a:prstGeom>
-          <a:solidFill>
-            <a:srgbClr val="2C3038"/>
-          </a:solidFill>
+          <a:gradFill rotWithShape="1">
+            <a:gsLst>
+              <a:gs pos="0">
+                <a:srgbClr val="2A2A2A"/>
+              </a:gs>
+              <a:gs pos="100000">
+                <a:srgbClr val="363636"/>
+              </a:gs>
+            </a:gsLst>
+            <a:lin scaled="0" ang="0"/>
+          </a:gradFill>
           <a:ln>
             <a:noFill/>
           </a:ln>
@@ -12391,7 +12629,7 @@
             <a:avLst/>
           </a:prstGeom>
           <a:solidFill>
-            <a:srgbClr val="4A90D9"/>
+            <a:srgbClr val="505050"/>
           </a:solidFill>
           <a:ln>
             <a:noFill/>
@@ -12480,7 +12718,7 @@
             <a:r>
               <a:rPr sz="1300" b="0">
                 <a:solidFill>
-                  <a:srgbClr val="B0C4DE"/>
+                  <a:srgbClr val="B0B0B0"/>
                 </a:solidFill>
                 <a:latin typeface="Calibri"/>
               </a:rPr>
@@ -12534,7 +12772,7 @@
                   </a:txBody>
                   <a:tcPr marL="73152" marR="73152" marT="45720" marB="45720">
                     <a:solidFill>
-                      <a:srgbClr val="2C3038"/>
+                      <a:srgbClr val="2A2A2A"/>
                     </a:solidFill>
                   </a:tcPr>
                 </a:tc>
@@ -12557,7 +12795,7 @@
                   </a:txBody>
                   <a:tcPr marL="73152" marR="73152" marT="45720" marB="45720">
                     <a:solidFill>
-                      <a:srgbClr val="2C3038"/>
+                      <a:srgbClr val="2A2A2A"/>
                     </a:solidFill>
                   </a:tcPr>
                 </a:tc>
@@ -12580,7 +12818,7 @@
                   </a:txBody>
                   <a:tcPr marL="73152" marR="73152" marT="45720" marB="45720">
                     <a:solidFill>
-                      <a:srgbClr val="2C3038"/>
+                      <a:srgbClr val="2A2A2A"/>
                     </a:solidFill>
                   </a:tcPr>
                 </a:tc>
@@ -12603,7 +12841,7 @@
                   </a:txBody>
                   <a:tcPr marL="73152" marR="73152" marT="45720" marB="45720">
                     <a:solidFill>
-                      <a:srgbClr val="2C3038"/>
+                      <a:srgbClr val="2A2A2A"/>
                     </a:solidFill>
                   </a:tcPr>
                 </a:tc>
@@ -12626,7 +12864,7 @@
                   </a:txBody>
                   <a:tcPr marL="73152" marR="73152" marT="45720" marB="45720">
                     <a:solidFill>
-                      <a:srgbClr val="2C3038"/>
+                      <a:srgbClr val="2A2A2A"/>
                     </a:solidFill>
                   </a:tcPr>
                 </a:tc>
@@ -12640,7 +12878,7 @@
                       <a:r>
                         <a:rPr sz="1400" b="1">
                           <a:solidFill>
-                            <a:srgbClr val="4A90D9"/>
+                            <a:srgbClr val="505050"/>
                           </a:solidFill>
                           <a:latin typeface="Calibri"/>
                         </a:rPr>
@@ -12662,7 +12900,7 @@
                       <a:r>
                         <a:rPr sz="1400">
                           <a:solidFill>
-                            <a:srgbClr val="1A1A2E"/>
+                            <a:srgbClr val="1C1C1C"/>
                           </a:solidFill>
                           <a:latin typeface="Calibri"/>
                         </a:rPr>
@@ -12684,7 +12922,7 @@
                       <a:r>
                         <a:rPr sz="1400">
                           <a:solidFill>
-                            <a:srgbClr val="1A1A2E"/>
+                            <a:srgbClr val="1C1C1C"/>
                           </a:solidFill>
                           <a:latin typeface="Calibri"/>
                         </a:rPr>
@@ -12706,7 +12944,7 @@
                       <a:r>
                         <a:rPr sz="1400">
                           <a:solidFill>
-                            <a:srgbClr val="1A1A2E"/>
+                            <a:srgbClr val="1C1C1C"/>
                           </a:solidFill>
                           <a:latin typeface="Calibri"/>
                         </a:rPr>
@@ -12728,7 +12966,7 @@
                       <a:r>
                         <a:rPr sz="1400">
                           <a:solidFill>
-                            <a:srgbClr val="1A1A2E"/>
+                            <a:srgbClr val="1C1C1C"/>
                           </a:solidFill>
                           <a:latin typeface="Calibri"/>
                         </a:rPr>
@@ -12752,7 +12990,7 @@
                       <a:r>
                         <a:rPr sz="1400" b="1">
                           <a:solidFill>
-                            <a:srgbClr val="4A90D9"/>
+                            <a:srgbClr val="505050"/>
                           </a:solidFill>
                           <a:latin typeface="Calibri"/>
                         </a:rPr>
@@ -12762,7 +13000,7 @@
                   </a:txBody>
                   <a:tcPr marL="73152" marR="73152" marT="36576" marB="36576">
                     <a:solidFill>
-                      <a:srgbClr val="F4F7FB"/>
+                      <a:srgbClr val="F0F0F0"/>
                     </a:solidFill>
                   </a:tcPr>
                 </a:tc>
@@ -12774,7 +13012,7 @@
                       <a:r>
                         <a:rPr sz="1400">
                           <a:solidFill>
-                            <a:srgbClr val="1A1A2E"/>
+                            <a:srgbClr val="1C1C1C"/>
                           </a:solidFill>
                           <a:latin typeface="Calibri"/>
                         </a:rPr>
@@ -12784,7 +13022,7 @@
                   </a:txBody>
                   <a:tcPr marL="73152" marR="73152" marT="36576" marB="36576">
                     <a:solidFill>
-                      <a:srgbClr val="F4F7FB"/>
+                      <a:srgbClr val="F0F0F0"/>
                     </a:solidFill>
                   </a:tcPr>
                 </a:tc>
@@ -12796,7 +13034,7 @@
                       <a:r>
                         <a:rPr sz="1400">
                           <a:solidFill>
-                            <a:srgbClr val="1A1A2E"/>
+                            <a:srgbClr val="1C1C1C"/>
                           </a:solidFill>
                           <a:latin typeface="Calibri"/>
                         </a:rPr>
@@ -12806,7 +13044,7 @@
                   </a:txBody>
                   <a:tcPr marL="73152" marR="73152" marT="36576" marB="36576">
                     <a:solidFill>
-                      <a:srgbClr val="F4F7FB"/>
+                      <a:srgbClr val="F0F0F0"/>
                     </a:solidFill>
                   </a:tcPr>
                 </a:tc>
@@ -12818,7 +13056,7 @@
                       <a:r>
                         <a:rPr sz="1400">
                           <a:solidFill>
-                            <a:srgbClr val="1A1A2E"/>
+                            <a:srgbClr val="1C1C1C"/>
                           </a:solidFill>
                           <a:latin typeface="Calibri"/>
                         </a:rPr>
@@ -12828,7 +13066,7 @@
                   </a:txBody>
                   <a:tcPr marL="73152" marR="73152" marT="36576" marB="36576">
                     <a:solidFill>
-                      <a:srgbClr val="F4F7FB"/>
+                      <a:srgbClr val="F0F0F0"/>
                     </a:solidFill>
                   </a:tcPr>
                 </a:tc>
@@ -12840,7 +13078,7 @@
                       <a:r>
                         <a:rPr sz="1400">
                           <a:solidFill>
-                            <a:srgbClr val="1A1A2E"/>
+                            <a:srgbClr val="1C1C1C"/>
                           </a:solidFill>
                           <a:latin typeface="Calibri"/>
                         </a:rPr>
@@ -12850,7 +13088,7 @@
                   </a:txBody>
                   <a:tcPr marL="73152" marR="73152" marT="36576" marB="36576">
                     <a:solidFill>
-                      <a:srgbClr val="F4F7FB"/>
+                      <a:srgbClr val="F0F0F0"/>
                     </a:solidFill>
                   </a:tcPr>
                 </a:tc>
@@ -12864,7 +13102,7 @@
                       <a:r>
                         <a:rPr sz="1400" b="1">
                           <a:solidFill>
-                            <a:srgbClr val="4A90D9"/>
+                            <a:srgbClr val="505050"/>
                           </a:solidFill>
                           <a:latin typeface="Calibri"/>
                         </a:rPr>
@@ -12886,7 +13124,7 @@
                       <a:r>
                         <a:rPr sz="1400">
                           <a:solidFill>
-                            <a:srgbClr val="1A1A2E"/>
+                            <a:srgbClr val="1C1C1C"/>
                           </a:solidFill>
                           <a:latin typeface="Calibri"/>
                         </a:rPr>
@@ -12908,7 +13146,7 @@
                       <a:r>
                         <a:rPr sz="1400">
                           <a:solidFill>
-                            <a:srgbClr val="1A1A2E"/>
+                            <a:srgbClr val="1C1C1C"/>
                           </a:solidFill>
                           <a:latin typeface="Calibri"/>
                         </a:rPr>
@@ -12930,7 +13168,7 @@
                       <a:r>
                         <a:rPr sz="1400">
                           <a:solidFill>
-                            <a:srgbClr val="1A1A2E"/>
+                            <a:srgbClr val="1C1C1C"/>
                           </a:solidFill>
                           <a:latin typeface="Calibri"/>
                         </a:rPr>
@@ -12952,7 +13190,7 @@
                       <a:r>
                         <a:rPr sz="1400">
                           <a:solidFill>
-                            <a:srgbClr val="1A1A2E"/>
+                            <a:srgbClr val="1C1C1C"/>
                           </a:solidFill>
                           <a:latin typeface="Calibri"/>
                         </a:rPr>
@@ -12976,7 +13214,7 @@
                       <a:r>
                         <a:rPr sz="1400" b="1">
                           <a:solidFill>
-                            <a:srgbClr val="4A90D9"/>
+                            <a:srgbClr val="505050"/>
                           </a:solidFill>
                           <a:latin typeface="Calibri"/>
                         </a:rPr>
@@ -12986,7 +13224,7 @@
                   </a:txBody>
                   <a:tcPr marL="73152" marR="73152" marT="36576" marB="36576">
                     <a:solidFill>
-                      <a:srgbClr val="F4F7FB"/>
+                      <a:srgbClr val="F0F0F0"/>
                     </a:solidFill>
                   </a:tcPr>
                 </a:tc>
@@ -12998,7 +13236,7 @@
                       <a:r>
                         <a:rPr sz="1400">
                           <a:solidFill>
-                            <a:srgbClr val="1A1A2E"/>
+                            <a:srgbClr val="1C1C1C"/>
                           </a:solidFill>
                           <a:latin typeface="Calibri"/>
                         </a:rPr>
@@ -13008,7 +13246,7 @@
                   </a:txBody>
                   <a:tcPr marL="73152" marR="73152" marT="36576" marB="36576">
                     <a:solidFill>
-                      <a:srgbClr val="F4F7FB"/>
+                      <a:srgbClr val="F0F0F0"/>
                     </a:solidFill>
                   </a:tcPr>
                 </a:tc>
@@ -13020,7 +13258,7 @@
                       <a:r>
                         <a:rPr sz="1400">
                           <a:solidFill>
-                            <a:srgbClr val="1A1A2E"/>
+                            <a:srgbClr val="1C1C1C"/>
                           </a:solidFill>
                           <a:latin typeface="Calibri"/>
                         </a:rPr>
@@ -13030,7 +13268,7 @@
                   </a:txBody>
                   <a:tcPr marL="73152" marR="73152" marT="36576" marB="36576">
                     <a:solidFill>
-                      <a:srgbClr val="F4F7FB"/>
+                      <a:srgbClr val="F0F0F0"/>
                     </a:solidFill>
                   </a:tcPr>
                 </a:tc>
@@ -13042,7 +13280,7 @@
                       <a:r>
                         <a:rPr sz="1400">
                           <a:solidFill>
-                            <a:srgbClr val="1A1A2E"/>
+                            <a:srgbClr val="1C1C1C"/>
                           </a:solidFill>
                           <a:latin typeface="Calibri"/>
                         </a:rPr>
@@ -13052,7 +13290,7 @@
                   </a:txBody>
                   <a:tcPr marL="73152" marR="73152" marT="36576" marB="36576">
                     <a:solidFill>
-                      <a:srgbClr val="F4F7FB"/>
+                      <a:srgbClr val="F0F0F0"/>
                     </a:solidFill>
                   </a:tcPr>
                 </a:tc>
@@ -13064,7 +13302,7 @@
                       <a:r>
                         <a:rPr sz="1400">
                           <a:solidFill>
-                            <a:srgbClr val="1A1A2E"/>
+                            <a:srgbClr val="1C1C1C"/>
                           </a:solidFill>
                           <a:latin typeface="Calibri"/>
                         </a:rPr>
@@ -13074,7 +13312,7 @@
                   </a:txBody>
                   <a:tcPr marL="73152" marR="73152" marT="36576" marB="36576">
                     <a:solidFill>
-                      <a:srgbClr val="F4F7FB"/>
+                      <a:srgbClr val="F0F0F0"/>
                     </a:solidFill>
                   </a:tcPr>
                 </a:tc>
@@ -13088,7 +13326,7 @@
                       <a:r>
                         <a:rPr sz="1400" b="1">
                           <a:solidFill>
-                            <a:srgbClr val="4A90D9"/>
+                            <a:srgbClr val="505050"/>
                           </a:solidFill>
                           <a:latin typeface="Calibri"/>
                         </a:rPr>
@@ -13110,7 +13348,7 @@
                       <a:r>
                         <a:rPr sz="1400">
                           <a:solidFill>
-                            <a:srgbClr val="1A1A2E"/>
+                            <a:srgbClr val="1C1C1C"/>
                           </a:solidFill>
                           <a:latin typeface="Calibri"/>
                         </a:rPr>
@@ -13132,7 +13370,7 @@
                       <a:r>
                         <a:rPr sz="1400">
                           <a:solidFill>
-                            <a:srgbClr val="1A1A2E"/>
+                            <a:srgbClr val="1C1C1C"/>
                           </a:solidFill>
                           <a:latin typeface="Calibri"/>
                         </a:rPr>
@@ -13154,7 +13392,7 @@
                       <a:r>
                         <a:rPr sz="1400">
                           <a:solidFill>
-                            <a:srgbClr val="1A1A2E"/>
+                            <a:srgbClr val="1C1C1C"/>
                           </a:solidFill>
                           <a:latin typeface="Calibri"/>
                         </a:rPr>
@@ -13176,7 +13414,7 @@
                       <a:r>
                         <a:rPr sz="1400">
                           <a:solidFill>
-                            <a:srgbClr val="1A1A2E"/>
+                            <a:srgbClr val="1C1C1C"/>
                           </a:solidFill>
                           <a:latin typeface="Calibri"/>
                         </a:rPr>
@@ -13200,7 +13438,7 @@
                       <a:r>
                         <a:rPr sz="1400" b="1">
                           <a:solidFill>
-                            <a:srgbClr val="4A90D9"/>
+                            <a:srgbClr val="505050"/>
                           </a:solidFill>
                           <a:latin typeface="Calibri"/>
                         </a:rPr>
@@ -13210,7 +13448,7 @@
                   </a:txBody>
                   <a:tcPr marL="73152" marR="73152" marT="36576" marB="36576">
                     <a:solidFill>
-                      <a:srgbClr val="F4F7FB"/>
+                      <a:srgbClr val="F0F0F0"/>
                     </a:solidFill>
                   </a:tcPr>
                 </a:tc>
@@ -13222,7 +13460,7 @@
                       <a:r>
                         <a:rPr sz="1400">
                           <a:solidFill>
-                            <a:srgbClr val="1A1A2E"/>
+                            <a:srgbClr val="1C1C1C"/>
                           </a:solidFill>
                           <a:latin typeface="Calibri"/>
                         </a:rPr>
@@ -13232,7 +13470,7 @@
                   </a:txBody>
                   <a:tcPr marL="73152" marR="73152" marT="36576" marB="36576">
                     <a:solidFill>
-                      <a:srgbClr val="F4F7FB"/>
+                      <a:srgbClr val="F0F0F0"/>
                     </a:solidFill>
                   </a:tcPr>
                 </a:tc>
@@ -13244,7 +13482,7 @@
                       <a:r>
                         <a:rPr sz="1400">
                           <a:solidFill>
-                            <a:srgbClr val="1A1A2E"/>
+                            <a:srgbClr val="1C1C1C"/>
                           </a:solidFill>
                           <a:latin typeface="Calibri"/>
                         </a:rPr>
@@ -13254,7 +13492,7 @@
                   </a:txBody>
                   <a:tcPr marL="73152" marR="73152" marT="36576" marB="36576">
                     <a:solidFill>
-                      <a:srgbClr val="F4F7FB"/>
+                      <a:srgbClr val="F0F0F0"/>
                     </a:solidFill>
                   </a:tcPr>
                 </a:tc>
@@ -13266,7 +13504,7 @@
                       <a:r>
                         <a:rPr sz="1400">
                           <a:solidFill>
-                            <a:srgbClr val="1A1A2E"/>
+                            <a:srgbClr val="1C1C1C"/>
                           </a:solidFill>
                           <a:latin typeface="Calibri"/>
                         </a:rPr>
@@ -13276,7 +13514,7 @@
                   </a:txBody>
                   <a:tcPr marL="73152" marR="73152" marT="36576" marB="36576">
                     <a:solidFill>
-                      <a:srgbClr val="F4F7FB"/>
+                      <a:srgbClr val="F0F0F0"/>
                     </a:solidFill>
                   </a:tcPr>
                 </a:tc>
@@ -13288,7 +13526,7 @@
                       <a:r>
                         <a:rPr sz="1400">
                           <a:solidFill>
-                            <a:srgbClr val="1A1A2E"/>
+                            <a:srgbClr val="1C1C1C"/>
                           </a:solidFill>
                           <a:latin typeface="Calibri"/>
                         </a:rPr>
@@ -13298,7 +13536,7 @@
                   </a:txBody>
                   <a:tcPr marL="73152" marR="73152" marT="36576" marB="36576">
                     <a:solidFill>
-                      <a:srgbClr val="F4F7FB"/>
+                      <a:srgbClr val="F0F0F0"/>
                     </a:solidFill>
                   </a:tcPr>
                 </a:tc>
@@ -13323,7 +13561,7 @@
           </a:prstGeom>
           <a:ln w="6350">
             <a:solidFill>
-              <a:srgbClr val="E0E5ED"/>
+              <a:srgbClr val="DCDCDC"/>
             </a:solidFill>
           </a:ln>
         </p:spPr>
@@ -13368,7 +13606,7 @@
             <a:r>
               <a:rPr sz="1300" b="0">
                 <a:solidFill>
-                  <a:srgbClr val="5A6A7A"/>
+                  <a:srgbClr val="6B6B6B"/>
                 </a:solidFill>
                 <a:latin typeface="Calibri"/>
               </a:rPr>
@@ -13391,9 +13629,17 @@
           <a:prstGeom prst="rect">
             <a:avLst/>
           </a:prstGeom>
-          <a:solidFill>
-            <a:srgbClr val="2C3038"/>
-          </a:solidFill>
+          <a:gradFill rotWithShape="1">
+            <a:gsLst>
+              <a:gs pos="0">
+                <a:srgbClr val="2A2A2A"/>
+              </a:gs>
+              <a:gs pos="100000">
+                <a:srgbClr val="343434"/>
+              </a:gs>
+            </a:gsLst>
+            <a:lin scaled="0" ang="0"/>
+          </a:gradFill>
           <a:ln>
             <a:noFill/>
           </a:ln>
@@ -13446,7 +13692,7 @@
             <a:r>
               <a:rPr sz="1300" b="0">
                 <a:solidFill>
-                  <a:srgbClr val="B0C4DE"/>
+                  <a:srgbClr val="B0B0B0"/>
                 </a:solidFill>
                 <a:latin typeface="Calibri"/>
               </a:rPr>
@@ -13481,7 +13727,7 @@
             <a:r>
               <a:rPr sz="1300" b="0">
                 <a:solidFill>
-                  <a:srgbClr val="B0C4DE"/>
+                  <a:srgbClr val="B0B0B0"/>
                 </a:solidFill>
                 <a:latin typeface="Calibri"/>
               </a:rPr>
@@ -13530,9 +13776,17 @@
           <a:prstGeom prst="rect">
             <a:avLst/>
           </a:prstGeom>
-          <a:solidFill>
-            <a:srgbClr val="2C3038"/>
-          </a:solidFill>
+          <a:gradFill rotWithShape="1">
+            <a:gsLst>
+              <a:gs pos="0">
+                <a:srgbClr val="2A2A2A"/>
+              </a:gs>
+              <a:gs pos="100000">
+                <a:srgbClr val="363636"/>
+              </a:gs>
+            </a:gsLst>
+            <a:lin scaled="0" ang="0"/>
+          </a:gradFill>
           <a:ln>
             <a:noFill/>
           </a:ln>
@@ -13574,7 +13828,7 @@
             <a:avLst/>
           </a:prstGeom>
           <a:solidFill>
-            <a:srgbClr val="4A90D9"/>
+            <a:srgbClr val="505050"/>
           </a:solidFill>
           <a:ln>
             <a:noFill/>
@@ -13652,7 +13906,7 @@
             <a:avLst/>
           </a:prstGeom>
           <a:solidFill>
-            <a:srgbClr val="4A90D9"/>
+            <a:srgbClr val="505050"/>
           </a:solidFill>
           <a:ln>
             <a:noFill/>
@@ -13710,7 +13964,7 @@
             <a:r>
               <a:rPr sz="2000">
                 <a:solidFill>
-                  <a:srgbClr val="1A1A2E"/>
+                  <a:srgbClr val="1C1C1C"/>
                 </a:solidFill>
               </a:rPr>
               <a:t>● 第一段：基礎架構（Slides 3–5）</a:t>
@@ -13725,7 +13979,7 @@
             <a:r>
               <a:rPr sz="1700">
                 <a:solidFill>
-                  <a:srgbClr val="5A6A7A"/>
+                  <a:srgbClr val="6B6B6B"/>
                 </a:solidFill>
               </a:rPr>
               <a:t>  · · 802.11 RF 信號路徑</a:t>
@@ -13740,7 +13994,7 @@
             <a:r>
               <a:rPr sz="1700">
                 <a:solidFill>
-                  <a:srgbClr val="5A6A7A"/>
+                  <a:srgbClr val="6B6B6B"/>
                 </a:solidFill>
               </a:rPr>
               <a:t>  · · PHY / MAC 與 CSI</a:t>
@@ -13755,7 +14009,7 @@
             <a:r>
               <a:rPr sz="1700">
                 <a:solidFill>
-                  <a:srgbClr val="5A6A7A"/>
+                  <a:srgbClr val="6B6B6B"/>
                 </a:solidFill>
               </a:rPr>
               <a:t>  · · OSI 7 層 vs Windows 元件對應</a:t>
@@ -13770,7 +14024,7 @@
             <a:r>
               <a:rPr sz="2000">
                 <a:solidFill>
-                  <a:srgbClr val="1A1A2E"/>
+                  <a:srgbClr val="1C1C1C"/>
                 </a:solidFill>
               </a:rPr>
               <a:t>● 第二段：Windows 驅動堆疊（Slides 6–13）</a:t>
@@ -13785,7 +14039,7 @@
             <a:r>
               <a:rPr sz="1700">
                 <a:solidFill>
-                  <a:srgbClr val="5A6A7A"/>
+                  <a:srgbClr val="6B6B6B"/>
                 </a:solidFill>
               </a:rPr>
               <a:t>  · · OEM.sys / nwifi.sys / NDIS / WDI</a:t>
@@ -13800,7 +14054,7 @@
             <a:r>
               <a:rPr sz="1700">
                 <a:solidFill>
-                  <a:srgbClr val="5A6A7A"/>
+                  <a:srgbClr val="6B6B6B"/>
                 </a:solidFill>
               </a:rPr>
               <a:t>  · · CSI 消失點分析</a:t>
@@ -13815,7 +14069,7 @@
             <a:r>
               <a:rPr sz="2000">
                 <a:solidFill>
-                  <a:srgbClr val="1A1A2E"/>
+                  <a:srgbClr val="1C1C1C"/>
                 </a:solidFill>
               </a:rPr>
               <a:t>● 第三段：替代方案（Slides 14–17）</a:t>
@@ -13830,7 +14084,7 @@
             <a:r>
               <a:rPr sz="1700">
                 <a:solidFill>
-                  <a:srgbClr val="5A6A7A"/>
+                  <a:srgbClr val="6B6B6B"/>
                 </a:solidFill>
               </a:rPr>
               <a:t>  · · Linux 生態 vs Windows 限制</a:t>
@@ -13845,7 +14099,7 @@
             <a:r>
               <a:rPr sz="1700">
                 <a:solidFill>
-                  <a:srgbClr val="5A6A7A"/>
+                  <a:srgbClr val="6B6B6B"/>
                 </a:solidFill>
               </a:rPr>
               <a:t>  · · 硬體選型建議</a:t>
@@ -13860,7 +14114,7 @@
             <a:r>
               <a:rPr sz="2000">
                 <a:solidFill>
-                  <a:srgbClr val="1A1A2E"/>
+                  <a:srgbClr val="1C1C1C"/>
                 </a:solidFill>
               </a:rPr>
               <a:t>● 第四段：結語與建議（Slides 18–20）</a:t>
@@ -13882,9 +14136,17 @@
           <a:prstGeom prst="rect">
             <a:avLst/>
           </a:prstGeom>
-          <a:solidFill>
-            <a:srgbClr val="2C3038"/>
-          </a:solidFill>
+          <a:gradFill rotWithShape="1">
+            <a:gsLst>
+              <a:gs pos="0">
+                <a:srgbClr val="2A2A2A"/>
+              </a:gs>
+              <a:gs pos="100000">
+                <a:srgbClr val="343434"/>
+              </a:gs>
+            </a:gsLst>
+            <a:lin scaled="0" ang="0"/>
+          </a:gradFill>
           <a:ln>
             <a:noFill/>
           </a:ln>
@@ -13937,7 +14199,7 @@
             <a:r>
               <a:rPr sz="1300" b="0">
                 <a:solidFill>
-                  <a:srgbClr val="B0C4DE"/>
+                  <a:srgbClr val="B0B0B0"/>
                 </a:solidFill>
                 <a:latin typeface="Calibri"/>
               </a:rPr>
@@ -13957,14 +14219,6 @@
 <file path=ppt/slides/slide20.xml><?xml version="1.0" encoding="utf-8"?>
 <p:sld xmlns:a="http://schemas.openxmlformats.org/drawingml/2006/main" xmlns:p="http://schemas.openxmlformats.org/presentationml/2006/main" xmlns:r="http://schemas.openxmlformats.org/officeDocument/2006/relationships">
   <p:cSld>
-    <p:bg>
-      <p:bgPr>
-        <a:solidFill>
-          <a:srgbClr val="2C3038"/>
-        </a:solidFill>
-        <a:effectLst/>
-      </p:bgPr>
-    </p:bg>
     <p:spTree>
       <p:nvGrpSpPr>
         <p:cNvPr id="1" name=""/>
@@ -13981,14 +14235,22 @@
         <p:spPr>
           <a:xfrm>
             <a:off x="0" y="0"/>
-            <a:ext cx="9144000" cy="109728"/>
-          </a:xfrm>
-          <a:prstGeom prst="rect">
-            <a:avLst/>
-          </a:prstGeom>
-          <a:solidFill>
-            <a:srgbClr val="4A90D9"/>
-          </a:solidFill>
+            <a:ext cx="9144000" cy="5143500"/>
+          </a:xfrm>
+          <a:prstGeom prst="rect">
+            <a:avLst/>
+          </a:prstGeom>
+          <a:gradFill rotWithShape="1">
+            <a:gsLst>
+              <a:gs pos="0">
+                <a:srgbClr val="222222"/>
+              </a:gs>
+              <a:gs pos="100000">
+                <a:srgbClr val="2E2E2E"/>
+              </a:gs>
+            </a:gsLst>
+            <a:lin scaled="0" ang="5400000"/>
+          </a:gradFill>
           <a:ln>
             <a:noFill/>
           </a:ln>
@@ -14017,7 +14279,50 @@
       </p:sp>
       <p:sp>
         <p:nvSpPr>
-          <p:cNvPr id="3" name="TextBox 2"/>
+          <p:cNvPr id="3" name="Rectangle 2"/>
+          <p:cNvSpPr/>
+          <p:nvPr/>
+        </p:nvSpPr>
+        <p:spPr>
+          <a:xfrm>
+            <a:off x="0" y="0"/>
+            <a:ext cx="9144000" cy="109728"/>
+          </a:xfrm>
+          <a:prstGeom prst="rect">
+            <a:avLst/>
+          </a:prstGeom>
+          <a:solidFill>
+            <a:srgbClr val="505050"/>
+          </a:solidFill>
+          <a:ln>
+            <a:noFill/>
+          </a:ln>
+        </p:spPr>
+        <p:style>
+          <a:lnRef idx="1">
+            <a:schemeClr val="accent1"/>
+          </a:lnRef>
+          <a:fillRef idx="3">
+            <a:schemeClr val="accent1"/>
+          </a:fillRef>
+          <a:effectRef idx="2">
+            <a:schemeClr val="accent1"/>
+          </a:effectRef>
+          <a:fontRef idx="minor">
+            <a:schemeClr val="lt1"/>
+          </a:fontRef>
+        </p:style>
+        <p:txBody>
+          <a:bodyPr rtlCol="0" anchor="ctr"/>
+          <a:lstStyle/>
+          <a:p>
+            <a:pPr algn="ctr"/>
+          </a:p>
+        </p:txBody>
+      </p:sp>
+      <p:sp>
+        <p:nvSpPr>
+          <p:cNvPr id="4" name="TextBox 3"/>
           <p:cNvSpPr txBox="1"/>
           <p:nvPr/>
         </p:nvSpPr>
@@ -14041,7 +14346,7 @@
             <a:r>
               <a:rPr sz="16000" b="1">
                 <a:solidFill>
-                  <a:srgbClr val="334860"/>
+                  <a:srgbClr val="333333"/>
                 </a:solidFill>
                 <a:latin typeface="Calibri"/>
               </a:rPr>
@@ -14052,7 +14357,7 @@
       </p:sp>
       <p:sp>
         <p:nvSpPr>
-          <p:cNvPr id="4" name="TextBox 3"/>
+          <p:cNvPr id="5" name="TextBox 4"/>
           <p:cNvSpPr txBox="1"/>
           <p:nvPr/>
         </p:nvSpPr>
@@ -14087,7 +14392,7 @@
       </p:sp>
       <p:sp>
         <p:nvSpPr>
-          <p:cNvPr id="5" name="TextBox 4"/>
+          <p:cNvPr id="6" name="TextBox 5"/>
           <p:cNvSpPr txBox="1"/>
           <p:nvPr/>
         </p:nvSpPr>
@@ -14111,7 +14416,7 @@
             <a:r>
               <a:rPr sz="2200" b="0">
                 <a:solidFill>
-                  <a:srgbClr val="4A90D9"/>
+                  <a:srgbClr val="505050"/>
                 </a:solidFill>
                 <a:latin typeface="Calibri"/>
               </a:rPr>
@@ -14122,7 +14427,7 @@
       </p:sp>
       <p:cxnSp>
         <p:nvCxnSpPr>
-          <p:cNvPr id="6" name="Connector 5"/>
+          <p:cNvPr id="7" name="Connector 6"/>
           <p:cNvCxnSpPr/>
           <p:nvPr/>
         </p:nvCxnSpPr>
@@ -14136,7 +14441,7 @@
           </a:prstGeom>
           <a:ln w="19050">
             <a:solidFill>
-              <a:srgbClr val="4A90D9"/>
+              <a:srgbClr val="505050"/>
             </a:solidFill>
           </a:ln>
         </p:spPr>
@@ -14157,7 +14462,7 @@
       </p:cxnSp>
       <p:sp>
         <p:nvSpPr>
-          <p:cNvPr id="7" name="Rectangle 6"/>
+          <p:cNvPr id="8" name="Rectangle 7"/>
           <p:cNvSpPr/>
           <p:nvPr/>
         </p:nvSpPr>
@@ -14169,9 +14474,17 @@
           <a:prstGeom prst="rect">
             <a:avLst/>
           </a:prstGeom>
-          <a:solidFill>
-            <a:srgbClr val="2C3038"/>
-          </a:solidFill>
+          <a:gradFill rotWithShape="1">
+            <a:gsLst>
+              <a:gs pos="0">
+                <a:srgbClr val="2A2A2A"/>
+              </a:gs>
+              <a:gs pos="100000">
+                <a:srgbClr val="343434"/>
+              </a:gs>
+            </a:gsLst>
+            <a:lin scaled="0" ang="0"/>
+          </a:gradFill>
           <a:ln>
             <a:noFill/>
           </a:ln>
@@ -14200,7 +14513,7 @@
       </p:sp>
       <p:sp>
         <p:nvSpPr>
-          <p:cNvPr id="8" name="TextBox 7"/>
+          <p:cNvPr id="9" name="TextBox 8"/>
           <p:cNvSpPr txBox="1"/>
           <p:nvPr/>
         </p:nvSpPr>
@@ -14224,7 +14537,7 @@
             <a:r>
               <a:rPr sz="1300" b="0">
                 <a:solidFill>
-                  <a:srgbClr val="B0C4DE"/>
+                  <a:srgbClr val="B0B0B0"/>
                 </a:solidFill>
                 <a:latin typeface="Calibri"/>
               </a:rPr>
@@ -14235,7 +14548,7 @@
       </p:sp>
       <p:sp>
         <p:nvSpPr>
-          <p:cNvPr id="9" name="TextBox 8"/>
+          <p:cNvPr id="10" name="TextBox 9"/>
           <p:cNvSpPr txBox="1"/>
           <p:nvPr/>
         </p:nvSpPr>
@@ -14259,7 +14572,7 @@
             <a:r>
               <a:rPr sz="1300" b="0">
                 <a:solidFill>
-                  <a:srgbClr val="B0C4DE"/>
+                  <a:srgbClr val="B0B0B0"/>
                 </a:solidFill>
                 <a:latin typeface="Calibri"/>
               </a:rPr>
@@ -14308,9 +14621,17 @@
           <a:prstGeom prst="rect">
             <a:avLst/>
           </a:prstGeom>
-          <a:solidFill>
-            <a:srgbClr val="2C3038"/>
-          </a:solidFill>
+          <a:gradFill rotWithShape="1">
+            <a:gsLst>
+              <a:gs pos="0">
+                <a:srgbClr val="2A2A2A"/>
+              </a:gs>
+              <a:gs pos="100000">
+                <a:srgbClr val="363636"/>
+              </a:gs>
+            </a:gsLst>
+            <a:lin scaled="0" ang="0"/>
+          </a:gradFill>
           <a:ln>
             <a:noFill/>
           </a:ln>
@@ -14352,7 +14673,7 @@
             <a:avLst/>
           </a:prstGeom>
           <a:solidFill>
-            <a:srgbClr val="4A90D9"/>
+            <a:srgbClr val="505050"/>
           </a:solidFill>
           <a:ln>
             <a:noFill/>
@@ -14441,7 +14762,7 @@
             <a:r>
               <a:rPr sz="1300" b="0">
                 <a:solidFill>
-                  <a:srgbClr val="B0C4DE"/>
+                  <a:srgbClr val="B0B0B0"/>
                 </a:solidFill>
                 <a:latin typeface="Calibri"/>
               </a:rPr>
@@ -14465,11 +14786,11 @@
             <a:avLst/>
           </a:prstGeom>
           <a:solidFill>
-            <a:srgbClr val="284F77"/>
+            <a:srgbClr val="2C2C2C"/>
           </a:solidFill>
           <a:ln w="12700">
             <a:solidFill>
-              <a:srgbClr val="4A90D9"/>
+              <a:srgbClr val="505050"/>
             </a:solidFill>
           </a:ln>
         </p:spPr>
@@ -14530,7 +14851,7 @@
             <a:r>
               <a:rPr sz="1300" b="0">
                 <a:solidFill>
-                  <a:srgbClr val="5A6A7A"/>
+                  <a:srgbClr val="6B6B6B"/>
                 </a:solidFill>
                 <a:latin typeface="Calibri"/>
               </a:rPr>
@@ -14554,11 +14875,11 @@
             <a:avLst/>
           </a:prstGeom>
           <a:solidFill>
-            <a:srgbClr val="924000"/>
+            <a:srgbClr val="5A5A5A"/>
           </a:solidFill>
           <a:ln w="31750">
             <a:solidFill>
-              <a:srgbClr val="FFA000"/>
+              <a:srgbClr val="888888"/>
             </a:solidFill>
           </a:ln>
         </p:spPr>
@@ -14619,7 +14940,7 @@
             <a:r>
               <a:rPr sz="1300" b="0">
                 <a:solidFill>
-                  <a:srgbClr val="B86000"/>
+                  <a:srgbClr val="7A7A7A"/>
                 </a:solidFill>
                 <a:latin typeface="Calibri"/>
               </a:rPr>
@@ -14643,11 +14964,11 @@
             <a:avLst/>
           </a:prstGeom>
           <a:solidFill>
-            <a:srgbClr val="8B0000"/>
+            <a:srgbClr val="3A3A3A"/>
           </a:solidFill>
           <a:ln w="31750">
             <a:solidFill>
-              <a:srgbClr val="CC0000"/>
+              <a:srgbClr val="AAAAAA"/>
             </a:solidFill>
           </a:ln>
         </p:spPr>
@@ -14708,7 +15029,7 @@
             <a:r>
               <a:rPr sz="1300" b="0">
                 <a:solidFill>
-                  <a:srgbClr val="CC3333"/>
+                  <a:srgbClr val="4A4A4A"/>
                 </a:solidFill>
                 <a:latin typeface="Calibri"/>
               </a:rPr>
@@ -14732,11 +15053,11 @@
             <a:avLst/>
           </a:prstGeom>
           <a:solidFill>
-            <a:srgbClr val="8B0000"/>
+            <a:srgbClr val="3A3A3A"/>
           </a:solidFill>
           <a:ln w="31750">
             <a:solidFill>
-              <a:srgbClr val="CC0000"/>
+              <a:srgbClr val="AAAAAA"/>
             </a:solidFill>
           </a:ln>
         </p:spPr>
@@ -14797,7 +15118,7 @@
             <a:r>
               <a:rPr sz="1300" b="0">
                 <a:solidFill>
-                  <a:srgbClr val="CC3333"/>
+                  <a:srgbClr val="4A4A4A"/>
                 </a:solidFill>
                 <a:latin typeface="Calibri"/>
               </a:rPr>
@@ -14821,11 +15142,11 @@
             <a:avLst/>
           </a:prstGeom>
           <a:solidFill>
-            <a:srgbClr val="006644"/>
+            <a:srgbClr val="707070"/>
           </a:solidFill>
           <a:ln w="12700">
             <a:solidFill>
-              <a:srgbClr val="0E8F8F"/>
+              <a:srgbClr val="808080"/>
             </a:solidFill>
           </a:ln>
         </p:spPr>
@@ -14886,7 +15207,7 @@
             <a:r>
               <a:rPr sz="1300" b="0">
                 <a:solidFill>
-                  <a:srgbClr val="0E8F8F"/>
+                  <a:srgbClr val="808080"/>
                 </a:solidFill>
                 <a:latin typeface="Calibri"/>
               </a:rPr>
@@ -14910,11 +15231,11 @@
             <a:avLst/>
           </a:prstGeom>
           <a:solidFill>
-            <a:srgbClr val="006644"/>
+            <a:srgbClr val="707070"/>
           </a:solidFill>
           <a:ln w="12700">
             <a:solidFill>
-              <a:srgbClr val="0E8F8F"/>
+              <a:srgbClr val="808080"/>
             </a:solidFill>
           </a:ln>
         </p:spPr>
@@ -14975,7 +15296,7 @@
             <a:r>
               <a:rPr sz="1300" b="0">
                 <a:solidFill>
-                  <a:srgbClr val="0E8F8F"/>
+                  <a:srgbClr val="808080"/>
                 </a:solidFill>
                 <a:latin typeface="Calibri"/>
               </a:rPr>
@@ -15000,7 +15321,7 @@
           </a:prstGeom>
           <a:ln w="6350">
             <a:solidFill>
-              <a:srgbClr val="E0E5ED"/>
+              <a:srgbClr val="DCDCDC"/>
             </a:solidFill>
           </a:ln>
         </p:spPr>
@@ -15045,7 +15366,7 @@
             <a:r>
               <a:rPr sz="1300" b="0">
                 <a:solidFill>
-                  <a:srgbClr val="5A6A7A"/>
+                  <a:srgbClr val="6B6B6B"/>
                 </a:solidFill>
                 <a:latin typeface="Calibri"/>
               </a:rPr>
@@ -15068,9 +15389,17 @@
           <a:prstGeom prst="rect">
             <a:avLst/>
           </a:prstGeom>
-          <a:solidFill>
-            <a:srgbClr val="2C3038"/>
-          </a:solidFill>
+          <a:gradFill rotWithShape="1">
+            <a:gsLst>
+              <a:gs pos="0">
+                <a:srgbClr val="2A2A2A"/>
+              </a:gs>
+              <a:gs pos="100000">
+                <a:srgbClr val="343434"/>
+              </a:gs>
+            </a:gsLst>
+            <a:lin scaled="0" ang="0"/>
+          </a:gradFill>
           <a:ln>
             <a:noFill/>
           </a:ln>
@@ -15123,7 +15452,7 @@
             <a:r>
               <a:rPr sz="1300" b="0">
                 <a:solidFill>
-                  <a:srgbClr val="B0C4DE"/>
+                  <a:srgbClr val="B0B0B0"/>
                 </a:solidFill>
                 <a:latin typeface="Calibri"/>
               </a:rPr>
@@ -15158,7 +15487,7 @@
             <a:r>
               <a:rPr sz="1300" b="0">
                 <a:solidFill>
-                  <a:srgbClr val="B0C4DE"/>
+                  <a:srgbClr val="B0B0B0"/>
                 </a:solidFill>
                 <a:latin typeface="Calibri"/>
               </a:rPr>
@@ -15207,9 +15536,17 @@
           <a:prstGeom prst="rect">
             <a:avLst/>
           </a:prstGeom>
-          <a:solidFill>
-            <a:srgbClr val="2C3038"/>
-          </a:solidFill>
+          <a:gradFill rotWithShape="1">
+            <a:gsLst>
+              <a:gs pos="0">
+                <a:srgbClr val="2A2A2A"/>
+              </a:gs>
+              <a:gs pos="100000">
+                <a:srgbClr val="363636"/>
+              </a:gs>
+            </a:gsLst>
+            <a:lin scaled="0" ang="0"/>
+          </a:gradFill>
           <a:ln>
             <a:noFill/>
           </a:ln>
@@ -15251,7 +15588,7 @@
             <a:avLst/>
           </a:prstGeom>
           <a:solidFill>
-            <a:srgbClr val="4A90D9"/>
+            <a:srgbClr val="505050"/>
           </a:solidFill>
           <a:ln>
             <a:noFill/>
@@ -15340,7 +15677,7 @@
             <a:r>
               <a:rPr sz="1300" b="0">
                 <a:solidFill>
-                  <a:srgbClr val="B0C4DE"/>
+                  <a:srgbClr val="B0B0B0"/>
                 </a:solidFill>
                 <a:latin typeface="Calibri"/>
               </a:rPr>
@@ -15364,7 +15701,7 @@
             <a:avLst/>
           </a:prstGeom>
           <a:solidFill>
-            <a:srgbClr val="4A90D9"/>
+            <a:srgbClr val="505050"/>
           </a:solidFill>
           <a:ln>
             <a:noFill/>
@@ -15422,7 +15759,7 @@
             <a:r>
               <a:rPr b="1" sz="2000">
                 <a:solidFill>
-                  <a:srgbClr val="4A90D9"/>
+                  <a:srgbClr val="505050"/>
                 </a:solidFill>
               </a:rPr>
               <a:t>1. 選硬體先確認 CSI 工具支援</a:t>
@@ -15437,7 +15774,7 @@
             <a:r>
               <a:rPr sz="1700">
                 <a:solidFill>
-                  <a:srgbClr val="5A6A7A"/>
+                  <a:srgbClr val="6B6B6B"/>
                 </a:solidFill>
               </a:rPr>
               <a:t>  · → Intel AX200/AX210 = 目前最佳選擇</a:t>
@@ -15458,7 +15795,7 @@
             <a:r>
               <a:rPr b="1" sz="2000">
                 <a:solidFill>
-                  <a:srgbClr val="4A90D9"/>
+                  <a:srgbClr val="505050"/>
                 </a:solidFill>
               </a:rPr>
               <a:t>2. 優先 Linux 環境採集 CSI</a:t>
@@ -15473,7 +15810,7 @@
             <a:r>
               <a:rPr sz="1700">
                 <a:solidFill>
-                  <a:srgbClr val="5A6A7A"/>
+                  <a:srgbClr val="6B6B6B"/>
                 </a:solidFill>
               </a:rPr>
               <a:t>  · → PicoScenes（商業支援）或 FeitCSI（開源）</a:t>
@@ -15488,7 +15825,7 @@
             <a:r>
               <a:rPr sz="1700">
                 <a:solidFill>
-                  <a:srgbClr val="5A6A7A"/>
+                  <a:srgbClr val="6B6B6B"/>
                 </a:solidFill>
               </a:rPr>
               <a:t>  · → 雙系統：Linux 採集，Windows 後處理</a:t>
@@ -15509,7 +15846,7 @@
             <a:r>
               <a:rPr b="1" sz="2000">
                 <a:solidFill>
-                  <a:srgbClr val="4A90D9"/>
+                  <a:srgbClr val="505050"/>
                 </a:solidFill>
               </a:rPr>
               <a:t>3. 避免的坑</a:t>
@@ -15524,7 +15861,7 @@
             <a:r>
               <a:rPr sz="1700">
                 <a:solidFill>
-                  <a:srgbClr val="5A6A7A"/>
+                  <a:srgbClr val="6B6B6B"/>
                 </a:solidFill>
               </a:rPr>
               <a:t>  · ❌ OEM 私有 IOCTL（每次驅動更新後失效）</a:t>
@@ -15539,7 +15876,7 @@
             <a:r>
               <a:rPr sz="1700">
                 <a:solidFill>
-                  <a:srgbClr val="5A6A7A"/>
+                  <a:srgbClr val="6B6B6B"/>
                 </a:solidFill>
               </a:rPr>
               <a:t>  · ❌ VM 取 CSI（時序精度受 Hypervisor 影響）</a:t>
@@ -15554,7 +15891,7 @@
             <a:r>
               <a:rPr sz="1700">
                 <a:solidFill>
-                  <a:srgbClr val="5A6A7A"/>
+                  <a:srgbClr val="6B6B6B"/>
                 </a:solidFill>
               </a:rPr>
               <a:t>  · ❌ 未在支援清單上的網卡</a:t>
@@ -15576,9 +15913,17 @@
           <a:prstGeom prst="rect">
             <a:avLst/>
           </a:prstGeom>
-          <a:solidFill>
-            <a:srgbClr val="2C3038"/>
-          </a:solidFill>
+          <a:gradFill rotWithShape="1">
+            <a:gsLst>
+              <a:gs pos="0">
+                <a:srgbClr val="2A2A2A"/>
+              </a:gs>
+              <a:gs pos="100000">
+                <a:srgbClr val="343434"/>
+              </a:gs>
+            </a:gsLst>
+            <a:lin scaled="0" ang="0"/>
+          </a:gradFill>
           <a:ln>
             <a:noFill/>
           </a:ln>
@@ -15631,7 +15976,7 @@
             <a:r>
               <a:rPr sz="1300" b="0">
                 <a:solidFill>
-                  <a:srgbClr val="B0C4DE"/>
+                  <a:srgbClr val="B0B0B0"/>
                 </a:solidFill>
                 <a:latin typeface="Calibri"/>
               </a:rPr>
@@ -15666,7 +16011,7 @@
             <a:r>
               <a:rPr sz="1300" b="0">
                 <a:solidFill>
-                  <a:srgbClr val="B0C4DE"/>
+                  <a:srgbClr val="B0B0B0"/>
                 </a:solidFill>
                 <a:latin typeface="Calibri"/>
               </a:rPr>
@@ -15715,9 +16060,17 @@
           <a:prstGeom prst="rect">
             <a:avLst/>
           </a:prstGeom>
-          <a:solidFill>
-            <a:srgbClr val="2C3038"/>
-          </a:solidFill>
+          <a:gradFill rotWithShape="1">
+            <a:gsLst>
+              <a:gs pos="0">
+                <a:srgbClr val="2A2A2A"/>
+              </a:gs>
+              <a:gs pos="100000">
+                <a:srgbClr val="363636"/>
+              </a:gs>
+            </a:gsLst>
+            <a:lin scaled="0" ang="0"/>
+          </a:gradFill>
           <a:ln>
             <a:noFill/>
           </a:ln>
@@ -15759,7 +16112,7 @@
             <a:avLst/>
           </a:prstGeom>
           <a:solidFill>
-            <a:srgbClr val="4A90D9"/>
+            <a:srgbClr val="505050"/>
           </a:solidFill>
           <a:ln>
             <a:noFill/>
@@ -15848,7 +16201,7 @@
             <a:r>
               <a:rPr sz="1300" b="0">
                 <a:solidFill>
-                  <a:srgbClr val="B0C4DE"/>
+                  <a:srgbClr val="B0B0B0"/>
                 </a:solidFill>
                 <a:latin typeface="Calibri"/>
               </a:rPr>
@@ -15887,7 +16240,7 @@
             <a:r>
               <a:rPr sz="1400">
                 <a:solidFill>
-                  <a:srgbClr val="4A90D9"/>
+                  <a:srgbClr val="505050"/>
                 </a:solidFill>
                 <a:latin typeface="Calibri"/>
               </a:rPr>
@@ -15903,7 +16256,7 @@
             <a:r>
               <a:rPr sz="1400">
                 <a:solidFill>
-                  <a:srgbClr val="4A90D9"/>
+                  <a:srgbClr val="505050"/>
                 </a:solidFill>
                 <a:latin typeface="Calibri"/>
               </a:rPr>
@@ -15919,7 +16272,7 @@
             <a:r>
               <a:rPr sz="1400">
                 <a:solidFill>
-                  <a:srgbClr val="4A90D9"/>
+                  <a:srgbClr val="505050"/>
                 </a:solidFill>
                 <a:latin typeface="Calibri"/>
               </a:rPr>
@@ -15935,7 +16288,7 @@
             <a:r>
               <a:rPr sz="1400">
                 <a:solidFill>
-                  <a:srgbClr val="4A90D9"/>
+                  <a:srgbClr val="505050"/>
                 </a:solidFill>
                 <a:latin typeface="Calibri"/>
               </a:rPr>
@@ -15951,7 +16304,7 @@
             <a:r>
               <a:rPr sz="1400">
                 <a:solidFill>
-                  <a:srgbClr val="4A90D9"/>
+                  <a:srgbClr val="505050"/>
                 </a:solidFill>
                 <a:latin typeface="Calibri"/>
               </a:rPr>
@@ -15967,7 +16320,7 @@
             <a:r>
               <a:rPr sz="1400">
                 <a:solidFill>
-                  <a:srgbClr val="4A90D9"/>
+                  <a:srgbClr val="505050"/>
                 </a:solidFill>
                 <a:latin typeface="Calibri"/>
               </a:rPr>
@@ -15983,7 +16336,7 @@
             <a:r>
               <a:rPr sz="1400">
                 <a:solidFill>
-                  <a:srgbClr val="4A90D9"/>
+                  <a:srgbClr val="505050"/>
                 </a:solidFill>
                 <a:latin typeface="Calibri"/>
               </a:rPr>
@@ -15999,7 +16352,7 @@
             <a:r>
               <a:rPr sz="1400">
                 <a:solidFill>
-                  <a:srgbClr val="4A90D9"/>
+                  <a:srgbClr val="505050"/>
                 </a:solidFill>
                 <a:latin typeface="Calibri"/>
               </a:rPr>
@@ -16022,9 +16375,17 @@
           <a:prstGeom prst="rect">
             <a:avLst/>
           </a:prstGeom>
-          <a:solidFill>
-            <a:srgbClr val="2C3038"/>
-          </a:solidFill>
+          <a:gradFill rotWithShape="1">
+            <a:gsLst>
+              <a:gs pos="0">
+                <a:srgbClr val="2A2A2A"/>
+              </a:gs>
+              <a:gs pos="100000">
+                <a:srgbClr val="343434"/>
+              </a:gs>
+            </a:gsLst>
+            <a:lin scaled="0" ang="0"/>
+          </a:gradFill>
           <a:ln>
             <a:noFill/>
           </a:ln>
@@ -16077,7 +16438,7 @@
             <a:r>
               <a:rPr sz="1300" b="0">
                 <a:solidFill>
-                  <a:srgbClr val="B0C4DE"/>
+                  <a:srgbClr val="B0B0B0"/>
                 </a:solidFill>
                 <a:latin typeface="Calibri"/>
               </a:rPr>
@@ -16112,7 +16473,7 @@
             <a:r>
               <a:rPr sz="1300" b="0">
                 <a:solidFill>
-                  <a:srgbClr val="B0C4DE"/>
+                  <a:srgbClr val="B0B0B0"/>
                 </a:solidFill>
                 <a:latin typeface="Calibri"/>
               </a:rPr>
@@ -16132,14 +16493,6 @@
 <file path=ppt/slides/slide3.xml><?xml version="1.0" encoding="utf-8"?>
 <p:sld xmlns:a="http://schemas.openxmlformats.org/drawingml/2006/main" xmlns:p="http://schemas.openxmlformats.org/presentationml/2006/main" xmlns:r="http://schemas.openxmlformats.org/officeDocument/2006/relationships">
   <p:cSld>
-    <p:bg>
-      <p:bgPr>
-        <a:solidFill>
-          <a:srgbClr val="2C3038"/>
-        </a:solidFill>
-        <a:effectLst/>
-      </p:bgPr>
-    </p:bg>
     <p:spTree>
       <p:nvGrpSpPr>
         <p:cNvPr id="1" name=""/>
@@ -16156,14 +16509,22 @@
         <p:spPr>
           <a:xfrm>
             <a:off x="0" y="0"/>
-            <a:ext cx="9144000" cy="109728"/>
-          </a:xfrm>
-          <a:prstGeom prst="rect">
-            <a:avLst/>
-          </a:prstGeom>
-          <a:solidFill>
-            <a:srgbClr val="4A90D9"/>
-          </a:solidFill>
+            <a:ext cx="9144000" cy="5143500"/>
+          </a:xfrm>
+          <a:prstGeom prst="rect">
+            <a:avLst/>
+          </a:prstGeom>
+          <a:gradFill rotWithShape="1">
+            <a:gsLst>
+              <a:gs pos="0">
+                <a:srgbClr val="222222"/>
+              </a:gs>
+              <a:gs pos="100000">
+                <a:srgbClr val="2E2E2E"/>
+              </a:gs>
+            </a:gsLst>
+            <a:lin scaled="0" ang="5400000"/>
+          </a:gradFill>
           <a:ln>
             <a:noFill/>
           </a:ln>
@@ -16192,7 +16553,50 @@
       </p:sp>
       <p:sp>
         <p:nvSpPr>
-          <p:cNvPr id="3" name="TextBox 2"/>
+          <p:cNvPr id="3" name="Rectangle 2"/>
+          <p:cNvSpPr/>
+          <p:nvPr/>
+        </p:nvSpPr>
+        <p:spPr>
+          <a:xfrm>
+            <a:off x="0" y="0"/>
+            <a:ext cx="9144000" cy="109728"/>
+          </a:xfrm>
+          <a:prstGeom prst="rect">
+            <a:avLst/>
+          </a:prstGeom>
+          <a:solidFill>
+            <a:srgbClr val="505050"/>
+          </a:solidFill>
+          <a:ln>
+            <a:noFill/>
+          </a:ln>
+        </p:spPr>
+        <p:style>
+          <a:lnRef idx="1">
+            <a:schemeClr val="accent1"/>
+          </a:lnRef>
+          <a:fillRef idx="3">
+            <a:schemeClr val="accent1"/>
+          </a:fillRef>
+          <a:effectRef idx="2">
+            <a:schemeClr val="accent1"/>
+          </a:effectRef>
+          <a:fontRef idx="minor">
+            <a:schemeClr val="lt1"/>
+          </a:fontRef>
+        </p:style>
+        <p:txBody>
+          <a:bodyPr rtlCol="0" anchor="ctr"/>
+          <a:lstStyle/>
+          <a:p>
+            <a:pPr algn="ctr"/>
+          </a:p>
+        </p:txBody>
+      </p:sp>
+      <p:sp>
+        <p:nvSpPr>
+          <p:cNvPr id="4" name="TextBox 3"/>
           <p:cNvSpPr txBox="1"/>
           <p:nvPr/>
         </p:nvSpPr>
@@ -16216,7 +16620,7 @@
             <a:r>
               <a:rPr sz="16000" b="1">
                 <a:solidFill>
-                  <a:srgbClr val="334860"/>
+                  <a:srgbClr val="333333"/>
                 </a:solidFill>
                 <a:latin typeface="Calibri"/>
               </a:rPr>
@@ -16227,7 +16631,7 @@
       </p:sp>
       <p:sp>
         <p:nvSpPr>
-          <p:cNvPr id="4" name="TextBox 3"/>
+          <p:cNvPr id="5" name="TextBox 4"/>
           <p:cNvSpPr txBox="1"/>
           <p:nvPr/>
         </p:nvSpPr>
@@ -16262,7 +16666,7 @@
       </p:sp>
       <p:sp>
         <p:nvSpPr>
-          <p:cNvPr id="5" name="TextBox 4"/>
+          <p:cNvPr id="6" name="TextBox 5"/>
           <p:cNvSpPr txBox="1"/>
           <p:nvPr/>
         </p:nvSpPr>
@@ -16286,7 +16690,7 @@
             <a:r>
               <a:rPr sz="2200" b="0">
                 <a:solidFill>
-                  <a:srgbClr val="4A90D9"/>
+                  <a:srgbClr val="505050"/>
                 </a:solidFill>
                 <a:latin typeface="Calibri"/>
               </a:rPr>
@@ -16297,7 +16701,7 @@
       </p:sp>
       <p:cxnSp>
         <p:nvCxnSpPr>
-          <p:cNvPr id="6" name="Connector 5"/>
+          <p:cNvPr id="7" name="Connector 6"/>
           <p:cNvCxnSpPr/>
           <p:nvPr/>
         </p:nvCxnSpPr>
@@ -16311,7 +16715,7 @@
           </a:prstGeom>
           <a:ln w="19050">
             <a:solidFill>
-              <a:srgbClr val="4A90D9"/>
+              <a:srgbClr val="505050"/>
             </a:solidFill>
           </a:ln>
         </p:spPr>
@@ -16332,7 +16736,7 @@
       </p:cxnSp>
       <p:sp>
         <p:nvSpPr>
-          <p:cNvPr id="7" name="Rectangle 6"/>
+          <p:cNvPr id="8" name="Rectangle 7"/>
           <p:cNvSpPr/>
           <p:nvPr/>
         </p:nvSpPr>
@@ -16344,9 +16748,17 @@
           <a:prstGeom prst="rect">
             <a:avLst/>
           </a:prstGeom>
-          <a:solidFill>
-            <a:srgbClr val="2C3038"/>
-          </a:solidFill>
+          <a:gradFill rotWithShape="1">
+            <a:gsLst>
+              <a:gs pos="0">
+                <a:srgbClr val="2A2A2A"/>
+              </a:gs>
+              <a:gs pos="100000">
+                <a:srgbClr val="343434"/>
+              </a:gs>
+            </a:gsLst>
+            <a:lin scaled="0" ang="0"/>
+          </a:gradFill>
           <a:ln>
             <a:noFill/>
           </a:ln>
@@ -16375,7 +16787,7 @@
       </p:sp>
       <p:sp>
         <p:nvSpPr>
-          <p:cNvPr id="8" name="TextBox 7"/>
+          <p:cNvPr id="9" name="TextBox 8"/>
           <p:cNvSpPr txBox="1"/>
           <p:nvPr/>
         </p:nvSpPr>
@@ -16399,7 +16811,7 @@
             <a:r>
               <a:rPr sz="1300" b="0">
                 <a:solidFill>
-                  <a:srgbClr val="B0C4DE"/>
+                  <a:srgbClr val="B0B0B0"/>
                 </a:solidFill>
                 <a:latin typeface="Calibri"/>
               </a:rPr>
@@ -16410,7 +16822,7 @@
       </p:sp>
       <p:sp>
         <p:nvSpPr>
-          <p:cNvPr id="9" name="TextBox 8"/>
+          <p:cNvPr id="10" name="TextBox 9"/>
           <p:cNvSpPr txBox="1"/>
           <p:nvPr/>
         </p:nvSpPr>
@@ -16434,7 +16846,7 @@
             <a:r>
               <a:rPr sz="1300" b="0">
                 <a:solidFill>
-                  <a:srgbClr val="B0C4DE"/>
+                  <a:srgbClr val="B0B0B0"/>
                 </a:solidFill>
                 <a:latin typeface="Calibri"/>
               </a:rPr>
@@ -16483,9 +16895,17 @@
           <a:prstGeom prst="rect">
             <a:avLst/>
           </a:prstGeom>
-          <a:solidFill>
-            <a:srgbClr val="2C3038"/>
-          </a:solidFill>
+          <a:gradFill rotWithShape="1">
+            <a:gsLst>
+              <a:gs pos="0">
+                <a:srgbClr val="2A2A2A"/>
+              </a:gs>
+              <a:gs pos="100000">
+                <a:srgbClr val="363636"/>
+              </a:gs>
+            </a:gsLst>
+            <a:lin scaled="0" ang="0"/>
+          </a:gradFill>
           <a:ln>
             <a:noFill/>
           </a:ln>
@@ -16527,7 +16947,7 @@
             <a:avLst/>
           </a:prstGeom>
           <a:solidFill>
-            <a:srgbClr val="4A90D9"/>
+            <a:srgbClr val="505050"/>
           </a:solidFill>
           <a:ln>
             <a:noFill/>
@@ -16616,7 +17036,7 @@
             <a:r>
               <a:rPr sz="1300" b="0">
                 <a:solidFill>
-                  <a:srgbClr val="B0C4DE"/>
+                  <a:srgbClr val="B0B0B0"/>
                 </a:solidFill>
                 <a:latin typeface="Calibri"/>
               </a:rPr>
@@ -16646,7 +17066,7 @@
           </a:solidFill>
           <a:ln w="19050">
             <a:solidFill>
-              <a:srgbClr val="4A90D9"/>
+              <a:srgbClr val="505050"/>
             </a:solidFill>
           </a:ln>
         </p:spPr>
@@ -16672,7 +17092,7 @@
             <a:r>
               <a:rPr sz="1300" b="1">
                 <a:solidFill>
-                  <a:srgbClr val="1A1A2E"/>
+                  <a:srgbClr val="1C1C1C"/>
                 </a:solidFill>
                 <a:latin typeface="Calibri"/>
               </a:rPr>
@@ -16685,7 +17105,7 @@
             <a:r>
               <a:rPr sz="1100">
                 <a:solidFill>
-                  <a:srgbClr val="4A90D9"/>
+                  <a:srgbClr val="505050"/>
                 </a:solidFill>
                 <a:latin typeface="Calibri"/>
               </a:rPr>
@@ -16710,7 +17130,7 @@
           </a:prstGeom>
           <a:ln w="25400">
             <a:solidFill>
-              <a:srgbClr val="4A90D9"/>
+              <a:srgbClr val="505050"/>
             </a:solidFill>
             <a:tailEnd type="arrow" w="med" len="med"/>
           </a:ln>
@@ -16751,7 +17171,7 @@
           </a:solidFill>
           <a:ln w="19050">
             <a:solidFill>
-              <a:srgbClr val="4A90D9"/>
+              <a:srgbClr val="505050"/>
             </a:solidFill>
           </a:ln>
         </p:spPr>
@@ -16777,7 +17197,7 @@
             <a:r>
               <a:rPr sz="1300" b="1">
                 <a:solidFill>
-                  <a:srgbClr val="1A1A2E"/>
+                  <a:srgbClr val="1C1C1C"/>
                 </a:solidFill>
                 <a:latin typeface="Calibri"/>
               </a:rPr>
@@ -16790,7 +17210,7 @@
             <a:r>
               <a:rPr sz="1100">
                 <a:solidFill>
-                  <a:srgbClr val="4A90D9"/>
+                  <a:srgbClr val="505050"/>
                 </a:solidFill>
                 <a:latin typeface="Calibri"/>
               </a:rPr>
@@ -16815,7 +17235,7 @@
           </a:prstGeom>
           <a:ln w="25400">
             <a:solidFill>
-              <a:srgbClr val="4A90D9"/>
+              <a:srgbClr val="505050"/>
             </a:solidFill>
             <a:tailEnd type="arrow" w="med" len="med"/>
           </a:ln>
@@ -16856,7 +17276,7 @@
           </a:solidFill>
           <a:ln w="19050">
             <a:solidFill>
-              <a:srgbClr val="4A90D9"/>
+              <a:srgbClr val="505050"/>
             </a:solidFill>
           </a:ln>
         </p:spPr>
@@ -16882,7 +17302,7 @@
             <a:r>
               <a:rPr sz="1300" b="1">
                 <a:solidFill>
-                  <a:srgbClr val="1A1A2E"/>
+                  <a:srgbClr val="1C1C1C"/>
                 </a:solidFill>
                 <a:latin typeface="Calibri"/>
               </a:rPr>
@@ -16895,7 +17315,7 @@
             <a:r>
               <a:rPr sz="1100">
                 <a:solidFill>
-                  <a:srgbClr val="4A90D9"/>
+                  <a:srgbClr val="505050"/>
                 </a:solidFill>
                 <a:latin typeface="Calibri"/>
               </a:rPr>
@@ -16920,7 +17340,7 @@
           </a:prstGeom>
           <a:ln w="25400">
             <a:solidFill>
-              <a:srgbClr val="4A90D9"/>
+              <a:srgbClr val="505050"/>
             </a:solidFill>
             <a:tailEnd type="arrow" w="med" len="med"/>
           </a:ln>
@@ -16961,7 +17381,7 @@
           </a:solidFill>
           <a:ln w="19050">
             <a:solidFill>
-              <a:srgbClr val="4A90D9"/>
+              <a:srgbClr val="505050"/>
             </a:solidFill>
           </a:ln>
         </p:spPr>
@@ -16987,7 +17407,7 @@
             <a:r>
               <a:rPr sz="1300" b="1">
                 <a:solidFill>
-                  <a:srgbClr val="1A1A2E"/>
+                  <a:srgbClr val="1C1C1C"/>
                 </a:solidFill>
                 <a:latin typeface="Calibri"/>
               </a:rPr>
@@ -17000,7 +17420,7 @@
             <a:r>
               <a:rPr sz="1100">
                 <a:solidFill>
-                  <a:srgbClr val="4A90D9"/>
+                  <a:srgbClr val="505050"/>
                 </a:solidFill>
                 <a:latin typeface="Calibri"/>
               </a:rPr>
@@ -17025,7 +17445,7 @@
           </a:prstGeom>
           <a:ln w="25400">
             <a:solidFill>
-              <a:srgbClr val="4A90D9"/>
+              <a:srgbClr val="505050"/>
             </a:solidFill>
             <a:tailEnd type="arrow" w="med" len="med"/>
           </a:ln>
@@ -17066,7 +17486,7 @@
           </a:solidFill>
           <a:ln w="19050">
             <a:solidFill>
-              <a:srgbClr val="4A90D9"/>
+              <a:srgbClr val="505050"/>
             </a:solidFill>
           </a:ln>
         </p:spPr>
@@ -17092,7 +17512,7 @@
             <a:r>
               <a:rPr sz="1300" b="1">
                 <a:solidFill>
-                  <a:srgbClr val="1A1A2E"/>
+                  <a:srgbClr val="1C1C1C"/>
                 </a:solidFill>
                 <a:latin typeface="Calibri"/>
               </a:rPr>
@@ -17105,7 +17525,7 @@
             <a:r>
               <a:rPr sz="1100">
                 <a:solidFill>
-                  <a:srgbClr val="4A90D9"/>
+                  <a:srgbClr val="505050"/>
                 </a:solidFill>
                 <a:latin typeface="Calibri"/>
               </a:rPr>
@@ -17130,7 +17550,7 @@
           </a:prstGeom>
           <a:ln w="6350">
             <a:solidFill>
-              <a:srgbClr val="E0E5ED"/>
+              <a:srgbClr val="DCDCDC"/>
             </a:solidFill>
           </a:ln>
         </p:spPr>
@@ -17175,7 +17595,7 @@
             <a:r>
               <a:rPr sz="1300" b="0">
                 <a:solidFill>
-                  <a:srgbClr val="5A6A7A"/>
+                  <a:srgbClr val="6B6B6B"/>
                 </a:solidFill>
                 <a:latin typeface="Calibri"/>
               </a:rPr>
@@ -17198,9 +17618,17 @@
           <a:prstGeom prst="rect">
             <a:avLst/>
           </a:prstGeom>
-          <a:solidFill>
-            <a:srgbClr val="2C3038"/>
-          </a:solidFill>
+          <a:gradFill rotWithShape="1">
+            <a:gsLst>
+              <a:gs pos="0">
+                <a:srgbClr val="2A2A2A"/>
+              </a:gs>
+              <a:gs pos="100000">
+                <a:srgbClr val="343434"/>
+              </a:gs>
+            </a:gsLst>
+            <a:lin scaled="0" ang="0"/>
+          </a:gradFill>
           <a:ln>
             <a:noFill/>
           </a:ln>
@@ -17253,7 +17681,7 @@
             <a:r>
               <a:rPr sz="1300" b="0">
                 <a:solidFill>
-                  <a:srgbClr val="B0C4DE"/>
+                  <a:srgbClr val="B0B0B0"/>
                 </a:solidFill>
                 <a:latin typeface="Calibri"/>
               </a:rPr>
@@ -17288,7 +17716,7 @@
             <a:r>
               <a:rPr sz="1300" b="0">
                 <a:solidFill>
-                  <a:srgbClr val="B0C4DE"/>
+                  <a:srgbClr val="B0B0B0"/>
                 </a:solidFill>
                 <a:latin typeface="Calibri"/>
               </a:rPr>
@@ -17337,9 +17765,17 @@
           <a:prstGeom prst="rect">
             <a:avLst/>
           </a:prstGeom>
-          <a:solidFill>
-            <a:srgbClr val="2C3038"/>
-          </a:solidFill>
+          <a:gradFill rotWithShape="1">
+            <a:gsLst>
+              <a:gs pos="0">
+                <a:srgbClr val="2A2A2A"/>
+              </a:gs>
+              <a:gs pos="100000">
+                <a:srgbClr val="363636"/>
+              </a:gs>
+            </a:gsLst>
+            <a:lin scaled="0" ang="0"/>
+          </a:gradFill>
           <a:ln>
             <a:noFill/>
           </a:ln>
@@ -17381,7 +17817,7 @@
             <a:avLst/>
           </a:prstGeom>
           <a:solidFill>
-            <a:srgbClr val="4A90D9"/>
+            <a:srgbClr val="505050"/>
           </a:solidFill>
           <a:ln>
             <a:noFill/>
@@ -17470,7 +17906,7 @@
             <a:r>
               <a:rPr sz="1300" b="0">
                 <a:solidFill>
-                  <a:srgbClr val="B0C4DE"/>
+                  <a:srgbClr val="B0B0B0"/>
                 </a:solidFill>
                 <a:latin typeface="Calibri"/>
               </a:rPr>
@@ -17495,7 +17931,7 @@
           </a:prstGeom>
           <a:ln w="6350">
             <a:solidFill>
-              <a:srgbClr val="E0E5ED"/>
+              <a:srgbClr val="DCDCDC"/>
             </a:solidFill>
           </a:ln>
         </p:spPr>
@@ -17540,7 +17976,7 @@
             <a:r>
               <a:rPr sz="1800" b="1">
                 <a:solidFill>
-                  <a:srgbClr val="4A90D9"/>
+                  <a:srgbClr val="505050"/>
                 </a:solidFill>
                 <a:latin typeface="Calibri"/>
               </a:rPr>
@@ -17579,7 +18015,7 @@
             <a:r>
               <a:rPr sz="1700">
                 <a:solidFill>
-                  <a:srgbClr val="1A1A2E"/>
+                  <a:srgbClr val="1C1C1C"/>
                 </a:solidFill>
               </a:rPr>
               <a:t>整體接收功率（單一數值）</a:t>
@@ -17594,7 +18030,7 @@
             <a:r>
               <a:rPr sz="1700">
                 <a:solidFill>
-                  <a:srgbClr val="1A1A2E"/>
+                  <a:srgbClr val="1C1C1C"/>
                 </a:solidFill>
               </a:rPr>
               <a:t>單位：dBm</a:t>
@@ -17609,7 +18045,7 @@
             <a:r>
               <a:rPr sz="1700">
                 <a:solidFill>
-                  <a:srgbClr val="1A1A2E"/>
+                  <a:srgbClr val="1C1C1C"/>
                 </a:solidFill>
               </a:rPr>
               <a:t>無法區分多路徑效應</a:t>
@@ -17624,7 +18060,7 @@
             <a:r>
               <a:rPr sz="1700">
                 <a:solidFill>
-                  <a:srgbClr val="1A1A2E"/>
+                  <a:srgbClr val="1C1C1C"/>
                 </a:solidFill>
               </a:rPr>
               <a:t>精度低，只反映總體信號強度</a:t>
@@ -17658,7 +18094,7 @@
             <a:r>
               <a:rPr sz="1800" b="1">
                 <a:solidFill>
-                  <a:srgbClr val="4A90D9"/>
+                  <a:srgbClr val="505050"/>
                 </a:solidFill>
                 <a:latin typeface="Calibri"/>
               </a:rPr>
@@ -17697,7 +18133,7 @@
             <a:r>
               <a:rPr sz="1700">
                 <a:solidFill>
-                  <a:srgbClr val="1A1A2E"/>
+                  <a:srgbClr val="1C1C1C"/>
                 </a:solidFill>
               </a:rPr>
               <a:t>MAC 職責：CSMA/CA、ACK、Frame 組裝</a:t>
@@ -17718,7 +18154,7 @@
             <a:r>
               <a:rPr sz="1700" b="1">
                 <a:solidFill>
-                  <a:srgbClr val="1A1A2E"/>
+                  <a:srgbClr val="1C1C1C"/>
                 </a:solidFill>
               </a:rPr>
               <a:t>⚠ CSI 不在 MAC 協定範圍</a:t>
@@ -17733,7 +18169,7 @@
             <a:r>
               <a:rPr sz="1500">
                 <a:solidFill>
-                  <a:srgbClr val="5A6A7A"/>
+                  <a:srgbClr val="6B6B6B"/>
                 </a:solidFill>
               </a:rPr>
               <a:t>  · PHY 解調後存於 NIC 韌體暫存器</a:t>
@@ -17748,7 +18184,7 @@
             <a:r>
               <a:rPr sz="1500">
                 <a:solidFill>
-                  <a:srgbClr val="5A6A7A"/>
+                  <a:srgbClr val="6B6B6B"/>
                 </a:solidFill>
               </a:rPr>
               <a:t>  · MAC 只收到已解調的 802.11 frame</a:t>
@@ -17763,7 +18199,7 @@
             <a:r>
               <a:rPr sz="1500">
                 <a:solidFill>
-                  <a:srgbClr val="5A6A7A"/>
+                  <a:srgbClr val="6B6B6B"/>
                 </a:solidFill>
               </a:rPr>
               <a:t>  · CSI 從未進入 NDIS 封包結構</a:t>
@@ -17784,7 +18220,7 @@
             <a:r>
               <a:rPr sz="1700">
                 <a:solidFill>
-                  <a:srgbClr val="1A1A2E"/>
+                  <a:srgbClr val="1C1C1C"/>
                 </a:solidFill>
               </a:rPr>
               <a:t>結論：CSI 旅程的第一個截斷點</a:t>
@@ -17808,7 +18244,7 @@
           </a:prstGeom>
           <a:ln w="6350">
             <a:solidFill>
-              <a:srgbClr val="E0E5ED"/>
+              <a:srgbClr val="DCDCDC"/>
             </a:solidFill>
           </a:ln>
         </p:spPr>
@@ -17853,7 +18289,7 @@
             <a:r>
               <a:rPr sz="1300" b="0">
                 <a:solidFill>
-                  <a:srgbClr val="5A6A7A"/>
+                  <a:srgbClr val="6B6B6B"/>
                 </a:solidFill>
                 <a:latin typeface="Calibri"/>
               </a:rPr>
@@ -17876,9 +18312,17 @@
           <a:prstGeom prst="rect">
             <a:avLst/>
           </a:prstGeom>
-          <a:solidFill>
-            <a:srgbClr val="2C3038"/>
-          </a:solidFill>
+          <a:gradFill rotWithShape="1">
+            <a:gsLst>
+              <a:gs pos="0">
+                <a:srgbClr val="2A2A2A"/>
+              </a:gs>
+              <a:gs pos="100000">
+                <a:srgbClr val="343434"/>
+              </a:gs>
+            </a:gsLst>
+            <a:lin scaled="0" ang="0"/>
+          </a:gradFill>
           <a:ln>
             <a:noFill/>
           </a:ln>
@@ -17931,7 +18375,7 @@
             <a:r>
               <a:rPr sz="1300" b="0">
                 <a:solidFill>
-                  <a:srgbClr val="B0C4DE"/>
+                  <a:srgbClr val="B0B0B0"/>
                 </a:solidFill>
                 <a:latin typeface="Calibri"/>
               </a:rPr>
@@ -17966,7 +18410,7 @@
             <a:r>
               <a:rPr sz="1300" b="0">
                 <a:solidFill>
-                  <a:srgbClr val="B0C4DE"/>
+                  <a:srgbClr val="B0B0B0"/>
                 </a:solidFill>
                 <a:latin typeface="Calibri"/>
               </a:rPr>
@@ -18015,9 +18459,17 @@
           <a:prstGeom prst="rect">
             <a:avLst/>
           </a:prstGeom>
-          <a:solidFill>
-            <a:srgbClr val="2C3038"/>
-          </a:solidFill>
+          <a:gradFill rotWithShape="1">
+            <a:gsLst>
+              <a:gs pos="0">
+                <a:srgbClr val="2A2A2A"/>
+              </a:gs>
+              <a:gs pos="100000">
+                <a:srgbClr val="363636"/>
+              </a:gs>
+            </a:gsLst>
+            <a:lin scaled="0" ang="0"/>
+          </a:gradFill>
           <a:ln>
             <a:noFill/>
           </a:ln>
@@ -18059,7 +18511,7 @@
             <a:avLst/>
           </a:prstGeom>
           <a:solidFill>
-            <a:srgbClr val="4A90D9"/>
+            <a:srgbClr val="505050"/>
           </a:solidFill>
           <a:ln>
             <a:noFill/>
@@ -18148,7 +18600,7 @@
             <a:r>
               <a:rPr sz="1300" b="0">
                 <a:solidFill>
-                  <a:srgbClr val="B0C4DE"/>
+                  <a:srgbClr val="B0B0B0"/>
                 </a:solidFill>
                 <a:latin typeface="Calibri"/>
               </a:rPr>
@@ -18201,7 +18653,7 @@
                   </a:txBody>
                   <a:tcPr marL="73152" marR="73152" marT="45720" marB="45720">
                     <a:solidFill>
-                      <a:srgbClr val="2C3038"/>
+                      <a:srgbClr val="2A2A2A"/>
                     </a:solidFill>
                   </a:tcPr>
                 </a:tc>
@@ -18224,7 +18676,7 @@
                   </a:txBody>
                   <a:tcPr marL="73152" marR="73152" marT="45720" marB="45720">
                     <a:solidFill>
-                      <a:srgbClr val="2C3038"/>
+                      <a:srgbClr val="2A2A2A"/>
                     </a:solidFill>
                   </a:tcPr>
                 </a:tc>
@@ -18247,7 +18699,7 @@
                   </a:txBody>
                   <a:tcPr marL="73152" marR="73152" marT="45720" marB="45720">
                     <a:solidFill>
-                      <a:srgbClr val="2C3038"/>
+                      <a:srgbClr val="2A2A2A"/>
                     </a:solidFill>
                   </a:tcPr>
                 </a:tc>
@@ -18270,7 +18722,7 @@
                   </a:txBody>
                   <a:tcPr marL="73152" marR="73152" marT="45720" marB="45720">
                     <a:solidFill>
-                      <a:srgbClr val="2C3038"/>
+                      <a:srgbClr val="2A2A2A"/>
                     </a:solidFill>
                   </a:tcPr>
                 </a:tc>
@@ -18284,7 +18736,7 @@
                       <a:r>
                         <a:rPr sz="1400" b="1">
                           <a:solidFill>
-                            <a:srgbClr val="4A90D9"/>
+                            <a:srgbClr val="505050"/>
                           </a:solidFill>
                           <a:latin typeface="Calibri"/>
                         </a:rPr>
@@ -18306,7 +18758,7 @@
                       <a:r>
                         <a:rPr sz="1400">
                           <a:solidFill>
-                            <a:srgbClr val="1A1A2E"/>
+                            <a:srgbClr val="1C1C1C"/>
                           </a:solidFill>
                           <a:latin typeface="Calibri"/>
                         </a:rPr>
@@ -18328,7 +18780,7 @@
                       <a:r>
                         <a:rPr sz="1400">
                           <a:solidFill>
-                            <a:srgbClr val="1A1A2E"/>
+                            <a:srgbClr val="1C1C1C"/>
                           </a:solidFill>
                           <a:latin typeface="Calibri"/>
                         </a:rPr>
@@ -18350,7 +18802,7 @@
                       <a:r>
                         <a:rPr sz="1400">
                           <a:solidFill>
-                            <a:srgbClr val="1A1A2E"/>
+                            <a:srgbClr val="1C1C1C"/>
                           </a:solidFill>
                           <a:latin typeface="Calibri"/>
                         </a:rPr>
@@ -18374,7 +18826,7 @@
                       <a:r>
                         <a:rPr sz="1400" b="1">
                           <a:solidFill>
-                            <a:srgbClr val="4A90D9"/>
+                            <a:srgbClr val="505050"/>
                           </a:solidFill>
                           <a:latin typeface="Calibri"/>
                         </a:rPr>
@@ -18384,7 +18836,7 @@
                   </a:txBody>
                   <a:tcPr marL="73152" marR="73152" marT="36576" marB="36576">
                     <a:solidFill>
-                      <a:srgbClr val="F4F7FB"/>
+                      <a:srgbClr val="F0F0F0"/>
                     </a:solidFill>
                   </a:tcPr>
                 </a:tc>
@@ -18396,7 +18848,7 @@
                       <a:r>
                         <a:rPr sz="1400">
                           <a:solidFill>
-                            <a:srgbClr val="1A1A2E"/>
+                            <a:srgbClr val="1C1C1C"/>
                           </a:solidFill>
                           <a:latin typeface="Calibri"/>
                         </a:rPr>
@@ -18406,7 +18858,7 @@
                   </a:txBody>
                   <a:tcPr marL="73152" marR="73152" marT="36576" marB="36576">
                     <a:solidFill>
-                      <a:srgbClr val="F4F7FB"/>
+                      <a:srgbClr val="F0F0F0"/>
                     </a:solidFill>
                   </a:tcPr>
                 </a:tc>
@@ -18418,7 +18870,7 @@
                       <a:r>
                         <a:rPr sz="1400">
                           <a:solidFill>
-                            <a:srgbClr val="1A1A2E"/>
+                            <a:srgbClr val="1C1C1C"/>
                           </a:solidFill>
                           <a:latin typeface="Calibri"/>
                         </a:rPr>
@@ -18428,7 +18880,7 @@
                   </a:txBody>
                   <a:tcPr marL="73152" marR="73152" marT="36576" marB="36576">
                     <a:solidFill>
-                      <a:srgbClr val="F4F7FB"/>
+                      <a:srgbClr val="F0F0F0"/>
                     </a:solidFill>
                   </a:tcPr>
                 </a:tc>
@@ -18440,7 +18892,7 @@
                       <a:r>
                         <a:rPr sz="1400">
                           <a:solidFill>
-                            <a:srgbClr val="1A1A2E"/>
+                            <a:srgbClr val="1C1C1C"/>
                           </a:solidFill>
                           <a:latin typeface="Calibri"/>
                         </a:rPr>
@@ -18450,7 +18902,7 @@
                   </a:txBody>
                   <a:tcPr marL="73152" marR="73152" marT="36576" marB="36576">
                     <a:solidFill>
-                      <a:srgbClr val="F4F7FB"/>
+                      <a:srgbClr val="F0F0F0"/>
                     </a:solidFill>
                   </a:tcPr>
                 </a:tc>
@@ -18464,7 +18916,7 @@
                       <a:r>
                         <a:rPr sz="1400" b="1">
                           <a:solidFill>
-                            <a:srgbClr val="4A90D9"/>
+                            <a:srgbClr val="505050"/>
                           </a:solidFill>
                           <a:latin typeface="Calibri"/>
                         </a:rPr>
@@ -18486,7 +18938,7 @@
                       <a:r>
                         <a:rPr sz="1400">
                           <a:solidFill>
-                            <a:srgbClr val="1A1A2E"/>
+                            <a:srgbClr val="1C1C1C"/>
                           </a:solidFill>
                           <a:latin typeface="Calibri"/>
                         </a:rPr>
@@ -18508,7 +18960,7 @@
                       <a:r>
                         <a:rPr sz="1400">
                           <a:solidFill>
-                            <a:srgbClr val="1A1A2E"/>
+                            <a:srgbClr val="1C1C1C"/>
                           </a:solidFill>
                           <a:latin typeface="Calibri"/>
                         </a:rPr>
@@ -18530,7 +18982,7 @@
                       <a:r>
                         <a:rPr sz="1400">
                           <a:solidFill>
-                            <a:srgbClr val="1A1A2E"/>
+                            <a:srgbClr val="1C1C1C"/>
                           </a:solidFill>
                           <a:latin typeface="Calibri"/>
                         </a:rPr>
@@ -18554,7 +19006,7 @@
                       <a:r>
                         <a:rPr sz="1400" b="1">
                           <a:solidFill>
-                            <a:srgbClr val="4A90D9"/>
+                            <a:srgbClr val="505050"/>
                           </a:solidFill>
                           <a:latin typeface="Calibri"/>
                         </a:rPr>
@@ -18564,7 +19016,7 @@
                   </a:txBody>
                   <a:tcPr marL="73152" marR="73152" marT="36576" marB="36576">
                     <a:solidFill>
-                      <a:srgbClr val="F4F7FB"/>
+                      <a:srgbClr val="F0F0F0"/>
                     </a:solidFill>
                   </a:tcPr>
                 </a:tc>
@@ -18576,7 +19028,7 @@
                       <a:r>
                         <a:rPr sz="1400">
                           <a:solidFill>
-                            <a:srgbClr val="1A1A2E"/>
+                            <a:srgbClr val="1C1C1C"/>
                           </a:solidFill>
                           <a:latin typeface="Calibri"/>
                         </a:rPr>
@@ -18586,7 +19038,7 @@
                   </a:txBody>
                   <a:tcPr marL="73152" marR="73152" marT="36576" marB="36576">
                     <a:solidFill>
-                      <a:srgbClr val="F4F7FB"/>
+                      <a:srgbClr val="F0F0F0"/>
                     </a:solidFill>
                   </a:tcPr>
                 </a:tc>
@@ -18598,7 +19050,7 @@
                       <a:r>
                         <a:rPr sz="1400">
                           <a:solidFill>
-                            <a:srgbClr val="1A1A2E"/>
+                            <a:srgbClr val="1C1C1C"/>
                           </a:solidFill>
                           <a:latin typeface="Calibri"/>
                         </a:rPr>
@@ -18608,7 +19060,7 @@
                   </a:txBody>
                   <a:tcPr marL="73152" marR="73152" marT="36576" marB="36576">
                     <a:solidFill>
-                      <a:srgbClr val="F4F7FB"/>
+                      <a:srgbClr val="F0F0F0"/>
                     </a:solidFill>
                   </a:tcPr>
                 </a:tc>
@@ -18620,7 +19072,7 @@
                       <a:r>
                         <a:rPr sz="1400">
                           <a:solidFill>
-                            <a:srgbClr val="1A1A2E"/>
+                            <a:srgbClr val="1C1C1C"/>
                           </a:solidFill>
                           <a:latin typeface="Calibri"/>
                         </a:rPr>
@@ -18630,7 +19082,7 @@
                   </a:txBody>
                   <a:tcPr marL="73152" marR="73152" marT="36576" marB="36576">
                     <a:solidFill>
-                      <a:srgbClr val="F4F7FB"/>
+                      <a:srgbClr val="F0F0F0"/>
                     </a:solidFill>
                   </a:tcPr>
                 </a:tc>
@@ -18644,7 +19096,7 @@
                       <a:r>
                         <a:rPr sz="1400" b="1">
                           <a:solidFill>
-                            <a:srgbClr val="4A90D9"/>
+                            <a:srgbClr val="505050"/>
                           </a:solidFill>
                           <a:latin typeface="Calibri"/>
                         </a:rPr>
@@ -18666,7 +19118,7 @@
                       <a:r>
                         <a:rPr sz="1400">
                           <a:solidFill>
-                            <a:srgbClr val="1A1A2E"/>
+                            <a:srgbClr val="1C1C1C"/>
                           </a:solidFill>
                           <a:latin typeface="Calibri"/>
                         </a:rPr>
@@ -18688,7 +19140,7 @@
                       <a:r>
                         <a:rPr sz="1400">
                           <a:solidFill>
-                            <a:srgbClr val="1A1A2E"/>
+                            <a:srgbClr val="1C1C1C"/>
                           </a:solidFill>
                           <a:latin typeface="Calibri"/>
                         </a:rPr>
@@ -18710,7 +19162,7 @@
                       <a:r>
                         <a:rPr sz="1400">
                           <a:solidFill>
-                            <a:srgbClr val="1A1A2E"/>
+                            <a:srgbClr val="1C1C1C"/>
                           </a:solidFill>
                           <a:latin typeface="Calibri"/>
                         </a:rPr>
@@ -18734,7 +19186,7 @@
                       <a:r>
                         <a:rPr sz="1400" b="1">
                           <a:solidFill>
-                            <a:srgbClr val="4A90D9"/>
+                            <a:srgbClr val="505050"/>
                           </a:solidFill>
                           <a:latin typeface="Calibri"/>
                         </a:rPr>
@@ -18744,7 +19196,7 @@
                   </a:txBody>
                   <a:tcPr marL="73152" marR="73152" marT="36576" marB="36576">
                     <a:solidFill>
-                      <a:srgbClr val="F4F7FB"/>
+                      <a:srgbClr val="F0F0F0"/>
                     </a:solidFill>
                   </a:tcPr>
                 </a:tc>
@@ -18756,7 +19208,7 @@
                       <a:r>
                         <a:rPr sz="1400">
                           <a:solidFill>
-                            <a:srgbClr val="1A1A2E"/>
+                            <a:srgbClr val="1C1C1C"/>
                           </a:solidFill>
                           <a:latin typeface="Calibri"/>
                         </a:rPr>
@@ -18766,7 +19218,7 @@
                   </a:txBody>
                   <a:tcPr marL="73152" marR="73152" marT="36576" marB="36576">
                     <a:solidFill>
-                      <a:srgbClr val="F4F7FB"/>
+                      <a:srgbClr val="F0F0F0"/>
                     </a:solidFill>
                   </a:tcPr>
                 </a:tc>
@@ -18778,7 +19230,7 @@
                       <a:r>
                         <a:rPr sz="1400">
                           <a:solidFill>
-                            <a:srgbClr val="1A1A2E"/>
+                            <a:srgbClr val="1C1C1C"/>
                           </a:solidFill>
                           <a:latin typeface="Calibri"/>
                         </a:rPr>
@@ -18788,7 +19240,7 @@
                   </a:txBody>
                   <a:tcPr marL="73152" marR="73152" marT="36576" marB="36576">
                     <a:solidFill>
-                      <a:srgbClr val="F4F7FB"/>
+                      <a:srgbClr val="F0F0F0"/>
                     </a:solidFill>
                   </a:tcPr>
                 </a:tc>
@@ -18800,7 +19252,7 @@
                       <a:r>
                         <a:rPr sz="1400">
                           <a:solidFill>
-                            <a:srgbClr val="1A1A2E"/>
+                            <a:srgbClr val="1C1C1C"/>
                           </a:solidFill>
                           <a:latin typeface="Calibri"/>
                         </a:rPr>
@@ -18810,7 +19262,7 @@
                   </a:txBody>
                   <a:tcPr marL="73152" marR="73152" marT="36576" marB="36576">
                     <a:solidFill>
-                      <a:srgbClr val="F4F7FB"/>
+                      <a:srgbClr val="F0F0F0"/>
                     </a:solidFill>
                   </a:tcPr>
                 </a:tc>
@@ -18835,7 +19287,7 @@
           </a:prstGeom>
           <a:ln w="6350">
             <a:solidFill>
-              <a:srgbClr val="E0E5ED"/>
+              <a:srgbClr val="DCDCDC"/>
             </a:solidFill>
           </a:ln>
         </p:spPr>
@@ -18880,7 +19332,7 @@
             <a:r>
               <a:rPr sz="1300" b="0">
                 <a:solidFill>
-                  <a:srgbClr val="5A6A7A"/>
+                  <a:srgbClr val="6B6B6B"/>
                 </a:solidFill>
                 <a:latin typeface="Calibri"/>
               </a:rPr>
@@ -18903,9 +19355,17 @@
           <a:prstGeom prst="rect">
             <a:avLst/>
           </a:prstGeom>
-          <a:solidFill>
-            <a:srgbClr val="2C3038"/>
-          </a:solidFill>
+          <a:gradFill rotWithShape="1">
+            <a:gsLst>
+              <a:gs pos="0">
+                <a:srgbClr val="2A2A2A"/>
+              </a:gs>
+              <a:gs pos="100000">
+                <a:srgbClr val="343434"/>
+              </a:gs>
+            </a:gsLst>
+            <a:lin scaled="0" ang="0"/>
+          </a:gradFill>
           <a:ln>
             <a:noFill/>
           </a:ln>
@@ -18958,7 +19418,7 @@
             <a:r>
               <a:rPr sz="1300" b="0">
                 <a:solidFill>
-                  <a:srgbClr val="B0C4DE"/>
+                  <a:srgbClr val="B0B0B0"/>
                 </a:solidFill>
                 <a:latin typeface="Calibri"/>
               </a:rPr>
@@ -18993,7 +19453,7 @@
             <a:r>
               <a:rPr sz="1300" b="0">
                 <a:solidFill>
-                  <a:srgbClr val="B0C4DE"/>
+                  <a:srgbClr val="B0B0B0"/>
                 </a:solidFill>
                 <a:latin typeface="Calibri"/>
               </a:rPr>
@@ -19013,14 +19473,6 @@
 <file path=ppt/slides/slide7.xml><?xml version="1.0" encoding="utf-8"?>
 <p:sld xmlns:a="http://schemas.openxmlformats.org/drawingml/2006/main" xmlns:p="http://schemas.openxmlformats.org/presentationml/2006/main" xmlns:r="http://schemas.openxmlformats.org/officeDocument/2006/relationships">
   <p:cSld>
-    <p:bg>
-      <p:bgPr>
-        <a:solidFill>
-          <a:srgbClr val="2C3038"/>
-        </a:solidFill>
-        <a:effectLst/>
-      </p:bgPr>
-    </p:bg>
     <p:spTree>
       <p:nvGrpSpPr>
         <p:cNvPr id="1" name=""/>
@@ -19037,14 +19489,22 @@
         <p:spPr>
           <a:xfrm>
             <a:off x="0" y="0"/>
-            <a:ext cx="9144000" cy="109728"/>
-          </a:xfrm>
-          <a:prstGeom prst="rect">
-            <a:avLst/>
-          </a:prstGeom>
-          <a:solidFill>
-            <a:srgbClr val="4A90D9"/>
-          </a:solidFill>
+            <a:ext cx="9144000" cy="5143500"/>
+          </a:xfrm>
+          <a:prstGeom prst="rect">
+            <a:avLst/>
+          </a:prstGeom>
+          <a:gradFill rotWithShape="1">
+            <a:gsLst>
+              <a:gs pos="0">
+                <a:srgbClr val="222222"/>
+              </a:gs>
+              <a:gs pos="100000">
+                <a:srgbClr val="2E2E2E"/>
+              </a:gs>
+            </a:gsLst>
+            <a:lin scaled="0" ang="5400000"/>
+          </a:gradFill>
           <a:ln>
             <a:noFill/>
           </a:ln>
@@ -19073,7 +19533,50 @@
       </p:sp>
       <p:sp>
         <p:nvSpPr>
-          <p:cNvPr id="3" name="TextBox 2"/>
+          <p:cNvPr id="3" name="Rectangle 2"/>
+          <p:cNvSpPr/>
+          <p:nvPr/>
+        </p:nvSpPr>
+        <p:spPr>
+          <a:xfrm>
+            <a:off x="0" y="0"/>
+            <a:ext cx="9144000" cy="109728"/>
+          </a:xfrm>
+          <a:prstGeom prst="rect">
+            <a:avLst/>
+          </a:prstGeom>
+          <a:solidFill>
+            <a:srgbClr val="505050"/>
+          </a:solidFill>
+          <a:ln>
+            <a:noFill/>
+          </a:ln>
+        </p:spPr>
+        <p:style>
+          <a:lnRef idx="1">
+            <a:schemeClr val="accent1"/>
+          </a:lnRef>
+          <a:fillRef idx="3">
+            <a:schemeClr val="accent1"/>
+          </a:fillRef>
+          <a:effectRef idx="2">
+            <a:schemeClr val="accent1"/>
+          </a:effectRef>
+          <a:fontRef idx="minor">
+            <a:schemeClr val="lt1"/>
+          </a:fontRef>
+        </p:style>
+        <p:txBody>
+          <a:bodyPr rtlCol="0" anchor="ctr"/>
+          <a:lstStyle/>
+          <a:p>
+            <a:pPr algn="ctr"/>
+          </a:p>
+        </p:txBody>
+      </p:sp>
+      <p:sp>
+        <p:nvSpPr>
+          <p:cNvPr id="4" name="TextBox 3"/>
           <p:cNvSpPr txBox="1"/>
           <p:nvPr/>
         </p:nvSpPr>
@@ -19097,7 +19600,7 @@
             <a:r>
               <a:rPr sz="16000" b="1">
                 <a:solidFill>
-                  <a:srgbClr val="334860"/>
+                  <a:srgbClr val="333333"/>
                 </a:solidFill>
                 <a:latin typeface="Calibri"/>
               </a:rPr>
@@ -19108,7 +19611,7 @@
       </p:sp>
       <p:sp>
         <p:nvSpPr>
-          <p:cNvPr id="4" name="TextBox 3"/>
+          <p:cNvPr id="5" name="TextBox 4"/>
           <p:cNvSpPr txBox="1"/>
           <p:nvPr/>
         </p:nvSpPr>
@@ -19143,7 +19646,7 @@
       </p:sp>
       <p:sp>
         <p:nvSpPr>
-          <p:cNvPr id="5" name="TextBox 4"/>
+          <p:cNvPr id="6" name="TextBox 5"/>
           <p:cNvSpPr txBox="1"/>
           <p:nvPr/>
         </p:nvSpPr>
@@ -19167,7 +19670,7 @@
             <a:r>
               <a:rPr sz="2200" b="0">
                 <a:solidFill>
-                  <a:srgbClr val="4A90D9"/>
+                  <a:srgbClr val="505050"/>
                 </a:solidFill>
                 <a:latin typeface="Calibri"/>
               </a:rPr>
@@ -19178,7 +19681,7 @@
       </p:sp>
       <p:cxnSp>
         <p:nvCxnSpPr>
-          <p:cNvPr id="6" name="Connector 5"/>
+          <p:cNvPr id="7" name="Connector 6"/>
           <p:cNvCxnSpPr/>
           <p:nvPr/>
         </p:nvCxnSpPr>
@@ -19192,7 +19695,7 @@
           </a:prstGeom>
           <a:ln w="19050">
             <a:solidFill>
-              <a:srgbClr val="4A90D9"/>
+              <a:srgbClr val="505050"/>
             </a:solidFill>
           </a:ln>
         </p:spPr>
@@ -19213,7 +19716,7 @@
       </p:cxnSp>
       <p:sp>
         <p:nvSpPr>
-          <p:cNvPr id="7" name="Rectangle 6"/>
+          <p:cNvPr id="8" name="Rectangle 7"/>
           <p:cNvSpPr/>
           <p:nvPr/>
         </p:nvSpPr>
@@ -19225,9 +19728,17 @@
           <a:prstGeom prst="rect">
             <a:avLst/>
           </a:prstGeom>
-          <a:solidFill>
-            <a:srgbClr val="2C3038"/>
-          </a:solidFill>
+          <a:gradFill rotWithShape="1">
+            <a:gsLst>
+              <a:gs pos="0">
+                <a:srgbClr val="2A2A2A"/>
+              </a:gs>
+              <a:gs pos="100000">
+                <a:srgbClr val="343434"/>
+              </a:gs>
+            </a:gsLst>
+            <a:lin scaled="0" ang="0"/>
+          </a:gradFill>
           <a:ln>
             <a:noFill/>
           </a:ln>
@@ -19256,7 +19767,7 @@
       </p:sp>
       <p:sp>
         <p:nvSpPr>
-          <p:cNvPr id="8" name="TextBox 7"/>
+          <p:cNvPr id="9" name="TextBox 8"/>
           <p:cNvSpPr txBox="1"/>
           <p:nvPr/>
         </p:nvSpPr>
@@ -19280,7 +19791,7 @@
             <a:r>
               <a:rPr sz="1300" b="0">
                 <a:solidFill>
-                  <a:srgbClr val="B0C4DE"/>
+                  <a:srgbClr val="B0B0B0"/>
                 </a:solidFill>
                 <a:latin typeface="Calibri"/>
               </a:rPr>
@@ -19291,7 +19802,7 @@
       </p:sp>
       <p:sp>
         <p:nvSpPr>
-          <p:cNvPr id="9" name="TextBox 8"/>
+          <p:cNvPr id="10" name="TextBox 9"/>
           <p:cNvSpPr txBox="1"/>
           <p:nvPr/>
         </p:nvSpPr>
@@ -19315,7 +19826,7 @@
             <a:r>
               <a:rPr sz="1300" b="0">
                 <a:solidFill>
-                  <a:srgbClr val="B0C4DE"/>
+                  <a:srgbClr val="B0B0B0"/>
                 </a:solidFill>
                 <a:latin typeface="Calibri"/>
               </a:rPr>
@@ -19364,9 +19875,17 @@
           <a:prstGeom prst="rect">
             <a:avLst/>
           </a:prstGeom>
-          <a:solidFill>
-            <a:srgbClr val="2C3038"/>
-          </a:solidFill>
+          <a:gradFill rotWithShape="1">
+            <a:gsLst>
+              <a:gs pos="0">
+                <a:srgbClr val="2A2A2A"/>
+              </a:gs>
+              <a:gs pos="100000">
+                <a:srgbClr val="363636"/>
+              </a:gs>
+            </a:gsLst>
+            <a:lin scaled="0" ang="0"/>
+          </a:gradFill>
           <a:ln>
             <a:noFill/>
           </a:ln>
@@ -19408,7 +19927,7 @@
             <a:avLst/>
           </a:prstGeom>
           <a:solidFill>
-            <a:srgbClr val="4A90D9"/>
+            <a:srgbClr val="505050"/>
           </a:solidFill>
           <a:ln>
             <a:noFill/>
@@ -19497,7 +20016,7 @@
             <a:r>
               <a:rPr sz="1300" b="0">
                 <a:solidFill>
-                  <a:srgbClr val="B0C4DE"/>
+                  <a:srgbClr val="B0B0B0"/>
                 </a:solidFill>
                 <a:latin typeface="Calibri"/>
               </a:rPr>
@@ -19520,12 +20039,20 @@
           <a:prstGeom prst="rect">
             <a:avLst/>
           </a:prstGeom>
-          <a:solidFill>
-            <a:srgbClr val="19324B"/>
-          </a:solidFill>
+          <a:gradFill rotWithShape="1">
+            <a:gsLst>
+              <a:gs pos="0">
+                <a:srgbClr val="1C1C1C"/>
+              </a:gs>
+              <a:gs pos="100000">
+                <a:srgbClr val="202020"/>
+              </a:gs>
+            </a:gsLst>
+            <a:lin scaled="0" ang="0"/>
+          </a:gradFill>
           <a:ln w="12700">
             <a:solidFill>
-              <a:srgbClr val="4A90D9"/>
+              <a:srgbClr val="505050"/>
             </a:solidFill>
           </a:ln>
         </p:spPr>
@@ -19586,7 +20113,7 @@
             <a:r>
               <a:rPr sz="1000" b="0">
                 <a:solidFill>
-                  <a:srgbClr val="5A6A7A"/>
+                  <a:srgbClr val="6B6B6B"/>
                 </a:solidFill>
                 <a:latin typeface="Calibri"/>
               </a:rPr>
@@ -19611,7 +20138,7 @@
           </a:prstGeom>
           <a:ln w="12700">
             <a:solidFill>
-              <a:srgbClr val="4A90D9"/>
+              <a:srgbClr val="505050"/>
             </a:solidFill>
           </a:ln>
         </p:spPr>
@@ -19644,12 +20171,20 @@
           <a:prstGeom prst="rect">
             <a:avLst/>
           </a:prstGeom>
-          <a:solidFill>
-            <a:srgbClr val="1F3D5D"/>
-          </a:solidFill>
+          <a:gradFill rotWithShape="1">
+            <a:gsLst>
+              <a:gs pos="0">
+                <a:srgbClr val="222222"/>
+              </a:gs>
+              <a:gs pos="100000">
+                <a:srgbClr val="272727"/>
+              </a:gs>
+            </a:gsLst>
+            <a:lin scaled="0" ang="0"/>
+          </a:gradFill>
           <a:ln w="12700">
             <a:solidFill>
-              <a:srgbClr val="4A90D9"/>
+              <a:srgbClr val="505050"/>
             </a:solidFill>
           </a:ln>
         </p:spPr>
@@ -19710,7 +20245,7 @@
             <a:r>
               <a:rPr sz="1000" b="0">
                 <a:solidFill>
-                  <a:srgbClr val="5A6A7A"/>
+                  <a:srgbClr val="6B6B6B"/>
                 </a:solidFill>
                 <a:latin typeface="Calibri"/>
               </a:rPr>
@@ -19735,7 +20270,7 @@
           </a:prstGeom>
           <a:ln w="12700">
             <a:solidFill>
-              <a:srgbClr val="4A90D9"/>
+              <a:srgbClr val="505050"/>
             </a:solidFill>
           </a:ln>
         </p:spPr>
@@ -19768,12 +20303,20 @@
           <a:prstGeom prst="rect">
             <a:avLst/>
           </a:prstGeom>
-          <a:solidFill>
-            <a:srgbClr val="25496E"/>
-          </a:solidFill>
+          <a:gradFill rotWithShape="1">
+            <a:gsLst>
+              <a:gs pos="0">
+                <a:srgbClr val="282828"/>
+              </a:gs>
+              <a:gs pos="100000">
+                <a:srgbClr val="2E2E2E"/>
+              </a:gs>
+            </a:gsLst>
+            <a:lin scaled="0" ang="0"/>
+          </a:gradFill>
           <a:ln w="12700">
             <a:solidFill>
-              <a:srgbClr val="4A90D9"/>
+              <a:srgbClr val="505050"/>
             </a:solidFill>
           </a:ln>
         </p:spPr>
@@ -19834,7 +20377,7 @@
             <a:r>
               <a:rPr sz="1000" b="0">
                 <a:solidFill>
-                  <a:srgbClr val="5A6A7A"/>
+                  <a:srgbClr val="6B6B6B"/>
                 </a:solidFill>
                 <a:latin typeface="Calibri"/>
               </a:rPr>
@@ -19859,7 +20402,7 @@
           </a:prstGeom>
           <a:ln w="12700">
             <a:solidFill>
-              <a:srgbClr val="4A90D9"/>
+              <a:srgbClr val="505050"/>
             </a:solidFill>
           </a:ln>
         </p:spPr>
@@ -19892,12 +20435,20 @@
           <a:prstGeom prst="rect">
             <a:avLst/>
           </a:prstGeom>
-          <a:solidFill>
-            <a:srgbClr val="2B547F"/>
-          </a:solidFill>
+          <a:gradFill rotWithShape="1">
+            <a:gsLst>
+              <a:gs pos="0">
+                <a:srgbClr val="2E2E2E"/>
+              </a:gs>
+              <a:gs pos="100000">
+                <a:srgbClr val="343434"/>
+              </a:gs>
+            </a:gsLst>
+            <a:lin scaled="0" ang="0"/>
+          </a:gradFill>
           <a:ln w="12700">
             <a:solidFill>
-              <a:srgbClr val="4A90D9"/>
+              <a:srgbClr val="505050"/>
             </a:solidFill>
           </a:ln>
         </p:spPr>
@@ -19958,7 +20509,7 @@
             <a:r>
               <a:rPr sz="1000" b="0">
                 <a:solidFill>
-                  <a:srgbClr val="5A6A7A"/>
+                  <a:srgbClr val="6B6B6B"/>
                 </a:solidFill>
                 <a:latin typeface="Calibri"/>
               </a:rPr>
@@ -19983,7 +20534,7 @@
           </a:prstGeom>
           <a:ln w="12700">
             <a:solidFill>
-              <a:srgbClr val="4A90D9"/>
+              <a:srgbClr val="505050"/>
             </a:solidFill>
           </a:ln>
         </p:spPr>
@@ -20016,12 +20567,20 @@
           <a:prstGeom prst="rect">
             <a:avLst/>
           </a:prstGeom>
-          <a:solidFill>
-            <a:srgbClr val="315F90"/>
-          </a:solidFill>
+          <a:gradFill rotWithShape="1">
+            <a:gsLst>
+              <a:gs pos="0">
+                <a:srgbClr val="353535"/>
+              </a:gs>
+              <a:gs pos="100000">
+                <a:srgbClr val="3C3C3C"/>
+              </a:gs>
+            </a:gsLst>
+            <a:lin scaled="0" ang="0"/>
+          </a:gradFill>
           <a:ln w="12700">
             <a:solidFill>
-              <a:srgbClr val="4A90D9"/>
+              <a:srgbClr val="505050"/>
             </a:solidFill>
           </a:ln>
         </p:spPr>
@@ -20082,7 +20641,7 @@
             <a:r>
               <a:rPr sz="1000" b="0">
                 <a:solidFill>
-                  <a:srgbClr val="5A6A7A"/>
+                  <a:srgbClr val="6B6B6B"/>
                 </a:solidFill>
                 <a:latin typeface="Calibri"/>
               </a:rPr>
@@ -20107,7 +20666,7 @@
           </a:prstGeom>
           <a:ln w="12700">
             <a:solidFill>
-              <a:srgbClr val="4A90D9"/>
+              <a:srgbClr val="505050"/>
             </a:solidFill>
           </a:ln>
         </p:spPr>
@@ -20140,12 +20699,20 @@
           <a:prstGeom prst="rect">
             <a:avLst/>
           </a:prstGeom>
-          <a:solidFill>
-            <a:srgbClr val="366AA1"/>
-          </a:solidFill>
+          <a:gradFill rotWithShape="1">
+            <a:gsLst>
+              <a:gs pos="0">
+                <a:srgbClr val="3B3B3B"/>
+              </a:gs>
+              <a:gs pos="100000">
+                <a:srgbClr val="434343"/>
+              </a:gs>
+            </a:gsLst>
+            <a:lin scaled="0" ang="0"/>
+          </a:gradFill>
           <a:ln w="12700">
             <a:solidFill>
-              <a:srgbClr val="4A90D9"/>
+              <a:srgbClr val="505050"/>
             </a:solidFill>
           </a:ln>
         </p:spPr>
@@ -20206,7 +20773,7 @@
             <a:r>
               <a:rPr sz="1000" b="0">
                 <a:solidFill>
-                  <a:srgbClr val="5A6A7A"/>
+                  <a:srgbClr val="6B6B6B"/>
                 </a:solidFill>
                 <a:latin typeface="Calibri"/>
               </a:rPr>
@@ -20231,7 +20798,7 @@
           </a:prstGeom>
           <a:ln w="12700">
             <a:solidFill>
-              <a:srgbClr val="4A90D9"/>
+              <a:srgbClr val="505050"/>
             </a:solidFill>
           </a:ln>
         </p:spPr>
@@ -20264,12 +20831,20 @@
           <a:prstGeom prst="rect">
             <a:avLst/>
           </a:prstGeom>
-          <a:solidFill>
-            <a:srgbClr val="3C76B2"/>
-          </a:solidFill>
+          <a:gradFill rotWithShape="1">
+            <a:gsLst>
+              <a:gs pos="0">
+                <a:srgbClr val="414141"/>
+              </a:gs>
+              <a:gs pos="100000">
+                <a:srgbClr val="4A4A4A"/>
+              </a:gs>
+            </a:gsLst>
+            <a:lin scaled="0" ang="0"/>
+          </a:gradFill>
           <a:ln w="12700">
             <a:solidFill>
-              <a:srgbClr val="4A90D9"/>
+              <a:srgbClr val="505050"/>
             </a:solidFill>
           </a:ln>
         </p:spPr>
@@ -20330,7 +20905,7 @@
             <a:r>
               <a:rPr sz="1000" b="0">
                 <a:solidFill>
-                  <a:srgbClr val="5A6A7A"/>
+                  <a:srgbClr val="6B6B6B"/>
                 </a:solidFill>
                 <a:latin typeface="Calibri"/>
               </a:rPr>
@@ -20355,7 +20930,7 @@
           </a:prstGeom>
           <a:ln w="12700">
             <a:solidFill>
-              <a:srgbClr val="4A90D9"/>
+              <a:srgbClr val="505050"/>
             </a:solidFill>
           </a:ln>
         </p:spPr>
@@ -20388,12 +20963,20 @@
           <a:prstGeom prst="rect">
             <a:avLst/>
           </a:prstGeom>
-          <a:solidFill>
-            <a:srgbClr val="4281C3"/>
-          </a:solidFill>
+          <a:gradFill rotWithShape="1">
+            <a:gsLst>
+              <a:gs pos="0">
+                <a:srgbClr val="484848"/>
+              </a:gs>
+              <a:gs pos="100000">
+                <a:srgbClr val="525252"/>
+              </a:gs>
+            </a:gsLst>
+            <a:lin scaled="0" ang="0"/>
+          </a:gradFill>
           <a:ln w="12700">
             <a:solidFill>
-              <a:srgbClr val="4A90D9"/>
+              <a:srgbClr val="505050"/>
             </a:solidFill>
           </a:ln>
         </p:spPr>
@@ -20454,7 +21037,7 @@
             <a:r>
               <a:rPr sz="1000" b="0">
                 <a:solidFill>
-                  <a:srgbClr val="5A6A7A"/>
+                  <a:srgbClr val="6B6B6B"/>
                 </a:solidFill>
                 <a:latin typeface="Calibri"/>
               </a:rPr>
@@ -20479,7 +21062,7 @@
           </a:prstGeom>
           <a:ln w="6350">
             <a:solidFill>
-              <a:srgbClr val="E0E5ED"/>
+              <a:srgbClr val="DCDCDC"/>
             </a:solidFill>
           </a:ln>
         </p:spPr>
@@ -20524,7 +21107,7 @@
             <a:r>
               <a:rPr sz="1300" b="0">
                 <a:solidFill>
-                  <a:srgbClr val="5A6A7A"/>
+                  <a:srgbClr val="6B6B6B"/>
                 </a:solidFill>
                 <a:latin typeface="Calibri"/>
               </a:rPr>
@@ -20547,9 +21130,17 @@
           <a:prstGeom prst="rect">
             <a:avLst/>
           </a:prstGeom>
-          <a:solidFill>
-            <a:srgbClr val="2C3038"/>
-          </a:solidFill>
+          <a:gradFill rotWithShape="1">
+            <a:gsLst>
+              <a:gs pos="0">
+                <a:srgbClr val="2A2A2A"/>
+              </a:gs>
+              <a:gs pos="100000">
+                <a:srgbClr val="343434"/>
+              </a:gs>
+            </a:gsLst>
+            <a:lin scaled="0" ang="0"/>
+          </a:gradFill>
           <a:ln>
             <a:noFill/>
           </a:ln>
@@ -20602,7 +21193,7 @@
             <a:r>
               <a:rPr sz="1300" b="0">
                 <a:solidFill>
-                  <a:srgbClr val="B0C4DE"/>
+                  <a:srgbClr val="B0B0B0"/>
                 </a:solidFill>
                 <a:latin typeface="Calibri"/>
               </a:rPr>
@@ -20637,7 +21228,7 @@
             <a:r>
               <a:rPr sz="1300" b="0">
                 <a:solidFill>
-                  <a:srgbClr val="B0C4DE"/>
+                  <a:srgbClr val="B0B0B0"/>
                 </a:solidFill>
                 <a:latin typeface="Calibri"/>
               </a:rPr>
@@ -20686,9 +21277,17 @@
           <a:prstGeom prst="rect">
             <a:avLst/>
           </a:prstGeom>
-          <a:solidFill>
-            <a:srgbClr val="2C3038"/>
-          </a:solidFill>
+          <a:gradFill rotWithShape="1">
+            <a:gsLst>
+              <a:gs pos="0">
+                <a:srgbClr val="2A2A2A"/>
+              </a:gs>
+              <a:gs pos="100000">
+                <a:srgbClr val="363636"/>
+              </a:gs>
+            </a:gsLst>
+            <a:lin scaled="0" ang="0"/>
+          </a:gradFill>
           <a:ln>
             <a:noFill/>
           </a:ln>
@@ -20730,7 +21329,7 @@
             <a:avLst/>
           </a:prstGeom>
           <a:solidFill>
-            <a:srgbClr val="4A90D9"/>
+            <a:srgbClr val="505050"/>
           </a:solidFill>
           <a:ln>
             <a:noFill/>
@@ -20819,7 +21418,7 @@
             <a:r>
               <a:rPr sz="1300" b="0">
                 <a:solidFill>
-                  <a:srgbClr val="B0C4DE"/>
+                  <a:srgbClr val="B0B0B0"/>
                 </a:solidFill>
                 <a:latin typeface="Calibri"/>
               </a:rPr>
@@ -20844,7 +21443,7 @@
           </a:prstGeom>
           <a:ln w="6350">
             <a:solidFill>
-              <a:srgbClr val="E0E5ED"/>
+              <a:srgbClr val="DCDCDC"/>
             </a:solidFill>
           </a:ln>
         </p:spPr>
@@ -20889,7 +21488,7 @@
             <a:r>
               <a:rPr sz="1800" b="1">
                 <a:solidFill>
-                  <a:srgbClr val="4A90D9"/>
+                  <a:srgbClr val="505050"/>
                 </a:solidFill>
                 <a:latin typeface="Calibri"/>
               </a:rPr>
@@ -20928,7 +21527,7 @@
             <a:r>
               <a:rPr sz="1700">
                 <a:solidFill>
-                  <a:srgbClr val="1A1A2E"/>
+                  <a:srgbClr val="1C1C1C"/>
                 </a:solidFill>
               </a:rPr>
               <a:t>直接與 NIC 硬體暫存器溝通（MMIO/PCI）</a:t>
@@ -20943,7 +21542,7 @@
             <a:r>
               <a:rPr sz="1700">
                 <a:solidFill>
-                  <a:srgbClr val="1A1A2E"/>
+                  <a:srgbClr val="1C1C1C"/>
                 </a:solidFill>
               </a:rPr>
               <a:t>控制 RF 參數（頻道、頻寬、TX 功率）</a:t>
@@ -20958,7 +21557,7 @@
             <a:r>
               <a:rPr sz="1700">
                 <a:solidFill>
-                  <a:srgbClr val="1A1A2E"/>
+                  <a:srgbClr val="1C1C1C"/>
                 </a:solidFill>
               </a:rPr>
               <a:t>管理 DMA 傳輸（TX/RX 封包緩衝）</a:t>
@@ -20973,7 +21572,7 @@
             <a:r>
               <a:rPr sz="1700">
                 <a:solidFill>
-                  <a:srgbClr val="1A1A2E"/>
+                  <a:srgbClr val="1C1C1C"/>
                 </a:solidFill>
               </a:rPr>
               <a:t>實作 NDIS Miniport 介面</a:t>
@@ -20988,7 +21587,7 @@
             <a:r>
               <a:rPr sz="1700">
                 <a:solidFill>
-                  <a:srgbClr val="1A1A2E"/>
+                  <a:srgbClr val="1C1C1C"/>
                 </a:solidFill>
               </a:rPr>
               <a:t>上報硬體事件給 nwifi.sys</a:t>
@@ -21022,7 +21621,7 @@
             <a:r>
               <a:rPr sz="1800" b="1">
                 <a:solidFill>
-                  <a:srgbClr val="4A90D9"/>
+                  <a:srgbClr val="505050"/>
                 </a:solidFill>
                 <a:latin typeface="Calibri"/>
               </a:rPr>
@@ -21061,7 +21660,7 @@
             <a:r>
               <a:rPr sz="1700">
                 <a:solidFill>
-                  <a:srgbClr val="1A1A2E"/>
+                  <a:srgbClr val="1C1C1C"/>
                 </a:solidFill>
               </a:rPr>
               <a:t>Intel：iwlwifi（Linux）/ netwtw*.sys（Windows）</a:t>
@@ -21076,7 +21675,7 @@
             <a:r>
               <a:rPr sz="1700">
                 <a:solidFill>
-                  <a:srgbClr val="1A1A2E"/>
+                  <a:srgbClr val="1C1C1C"/>
                 </a:solidFill>
               </a:rPr>
               <a:t>Qualcomm/Atheros：ath*.sys</a:t>
@@ -21091,7 +21690,7 @@
             <a:r>
               <a:rPr sz="1700">
                 <a:solidFill>
-                  <a:srgbClr val="1A1A2E"/>
+                  <a:srgbClr val="1C1C1C"/>
                 </a:solidFill>
               </a:rPr>
               <a:t>Broadcom：bcmwl*.sys</a:t>
@@ -21106,7 +21705,7 @@
             <a:r>
               <a:rPr sz="1700">
                 <a:solidFill>
-                  <a:srgbClr val="1A1A2E"/>
+                  <a:srgbClr val="1C1C1C"/>
                 </a:solidFill>
               </a:rPr>
               <a:t>MediaTek：mt*.sys</a:t>
@@ -21127,7 +21726,7 @@
             <a:r>
               <a:rPr sz="1700" b="1">
                 <a:solidFill>
-                  <a:srgbClr val="1A1A2E"/>
+                  <a:srgbClr val="1C1C1C"/>
                 </a:solidFill>
               </a:rPr>
               <a:t>⚠ OEM.sys 是唯一能讀取 CSI 的軟體元件</a:t>
@@ -21142,7 +21741,7 @@
             <a:r>
               <a:rPr sz="1500">
                 <a:solidFill>
-                  <a:srgbClr val="5A6A7A"/>
+                  <a:srgbClr val="6B6B6B"/>
                 </a:solidFill>
               </a:rPr>
               <a:t>  但它選擇不向上層暴露此資料</a:t>
@@ -21166,7 +21765,7 @@
           </a:prstGeom>
           <a:ln w="6350">
             <a:solidFill>
-              <a:srgbClr val="E0E5ED"/>
+              <a:srgbClr val="DCDCDC"/>
             </a:solidFill>
           </a:ln>
         </p:spPr>
@@ -21211,7 +21810,7 @@
             <a:r>
               <a:rPr sz="1300" b="0">
                 <a:solidFill>
-                  <a:srgbClr val="5A6A7A"/>
+                  <a:srgbClr val="6B6B6B"/>
                 </a:solidFill>
                 <a:latin typeface="Calibri"/>
               </a:rPr>
@@ -21234,9 +21833,17 @@
           <a:prstGeom prst="rect">
             <a:avLst/>
           </a:prstGeom>
-          <a:solidFill>
-            <a:srgbClr val="2C3038"/>
-          </a:solidFill>
+          <a:gradFill rotWithShape="1">
+            <a:gsLst>
+              <a:gs pos="0">
+                <a:srgbClr val="2A2A2A"/>
+              </a:gs>
+              <a:gs pos="100000">
+                <a:srgbClr val="343434"/>
+              </a:gs>
+            </a:gsLst>
+            <a:lin scaled="0" ang="0"/>
+          </a:gradFill>
           <a:ln>
             <a:noFill/>
           </a:ln>
@@ -21289,7 +21896,7 @@
             <a:r>
               <a:rPr sz="1300" b="0">
                 <a:solidFill>
-                  <a:srgbClr val="B0C4DE"/>
+                  <a:srgbClr val="B0B0B0"/>
                 </a:solidFill>
                 <a:latin typeface="Calibri"/>
               </a:rPr>
@@ -21324,7 +21931,7 @@
             <a:r>
               <a:rPr sz="1300" b="0">
                 <a:solidFill>
-                  <a:srgbClr val="B0C4DE"/>
+                  <a:srgbClr val="B0B0B0"/>
                 </a:solidFill>
                 <a:latin typeface="Calibri"/>
               </a:rPr>

--- a/output/network-card-csi-v5.1.pptx
+++ b/output/network-card-csi-v5.1.pptx
@@ -6558,11 +6558,11 @@
           <a:p>
             <a:pPr>
               <a:spcBef>
-                <a:spcPts val="600"/>
+                <a:spcPts val="400"/>
               </a:spcBef>
             </a:pPr>
             <a:r>
-              <a:rPr b="1" sz="2000">
+              <a:rPr b="1" sz="1700">
                 <a:solidFill>
                   <a:srgbClr val="505050"/>
                 </a:solidFill>
@@ -6573,11 +6573,11 @@
           <a:p>
             <a:pPr lvl="1">
               <a:spcBef>
-                <a:spcPts val="200"/>
+                <a:spcPts val="100"/>
               </a:spcBef>
             </a:pPr>
             <a:r>
-              <a:rPr sz="1700">
+              <a:rPr sz="1500">
                 <a:solidFill>
                   <a:srgbClr val="6B6B6B"/>
                 </a:solidFill>
@@ -6594,11 +6594,11 @@
           <a:p>
             <a:pPr>
               <a:spcBef>
-                <a:spcPts val="600"/>
+                <a:spcPts val="400"/>
               </a:spcBef>
             </a:pPr>
             <a:r>
-              <a:rPr b="1" sz="2000">
+              <a:rPr b="1" sz="1700">
                 <a:solidFill>
                   <a:srgbClr val="505050"/>
                 </a:solidFill>
@@ -6609,11 +6609,11 @@
           <a:p>
             <a:pPr lvl="1">
               <a:spcBef>
-                <a:spcPts val="200"/>
+                <a:spcPts val="100"/>
               </a:spcBef>
             </a:pPr>
             <a:r>
-              <a:rPr sz="1700">
+              <a:rPr sz="1500">
                 <a:solidFill>
                   <a:srgbClr val="6B6B6B"/>
                 </a:solidFill>
@@ -6624,11 +6624,11 @@
           <a:p>
             <a:pPr lvl="1">
               <a:spcBef>
-                <a:spcPts val="200"/>
+                <a:spcPts val="100"/>
               </a:spcBef>
             </a:pPr>
             <a:r>
-              <a:rPr sz="1700">
+              <a:rPr sz="1500">
                 <a:solidFill>
                   <a:srgbClr val="6B6B6B"/>
                 </a:solidFill>
@@ -6645,11 +6645,11 @@
           <a:p>
             <a:pPr>
               <a:spcBef>
-                <a:spcPts val="600"/>
+                <a:spcPts val="400"/>
               </a:spcBef>
             </a:pPr>
             <a:r>
-              <a:rPr b="1" sz="2000">
+              <a:rPr b="1" sz="1700">
                 <a:solidFill>
                   <a:srgbClr val="505050"/>
                 </a:solidFill>
@@ -6660,11 +6660,11 @@
           <a:p>
             <a:pPr lvl="1">
               <a:spcBef>
-                <a:spcPts val="200"/>
+                <a:spcPts val="100"/>
               </a:spcBef>
             </a:pPr>
             <a:r>
-              <a:rPr sz="1700">
+              <a:rPr sz="1500">
                 <a:solidFill>
                   <a:srgbClr val="6B6B6B"/>
                 </a:solidFill>
@@ -6681,11 +6681,11 @@
           <a:p>
             <a:pPr>
               <a:spcBef>
-                <a:spcPts val="600"/>
+                <a:spcPts val="400"/>
               </a:spcBef>
             </a:pPr>
             <a:r>
-              <a:rPr sz="2000">
+              <a:rPr sz="1700">
                 <a:solidFill>
                   <a:srgbClr val="1C1C1C"/>
                 </a:solidFill>
@@ -7143,11 +7143,11 @@
           <a:p>
             <a:pPr>
               <a:spcBef>
-                <a:spcPts val="600"/>
+                <a:spcPts val="400"/>
               </a:spcBef>
             </a:pPr>
             <a:r>
-              <a:rPr sz="2000">
+              <a:rPr sz="1700">
                 <a:solidFill>
                   <a:srgbClr val="1C1C1C"/>
                 </a:solidFill>
@@ -7158,11 +7158,11 @@
           <a:p>
             <a:pPr lvl="1">
               <a:spcBef>
-                <a:spcPts val="200"/>
+                <a:spcPts val="100"/>
               </a:spcBef>
             </a:pPr>
             <a:r>
-              <a:rPr sz="1700">
+              <a:rPr sz="1500">
                 <a:solidFill>
                   <a:srgbClr val="6B6B6B"/>
                 </a:solidFill>
@@ -7179,11 +7179,11 @@
           <a:p>
             <a:pPr>
               <a:spcBef>
-                <a:spcPts val="600"/>
+                <a:spcPts val="400"/>
               </a:spcBef>
             </a:pPr>
             <a:r>
-              <a:rPr sz="2000">
+              <a:rPr sz="1700">
                 <a:solidFill>
                   <a:srgbClr val="1C1C1C"/>
                 </a:solidFill>
@@ -7194,11 +7194,11 @@
           <a:p>
             <a:pPr>
               <a:spcBef>
-                <a:spcPts val="600"/>
+                <a:spcPts val="400"/>
               </a:spcBef>
             </a:pPr>
             <a:r>
-              <a:rPr b="1" sz="2000">
+              <a:rPr b="1" sz="1700">
                 <a:solidFill>
                   <a:srgbClr val="1C1C1C"/>
                 </a:solidFill>
@@ -7215,11 +7215,11 @@
           <a:p>
             <a:pPr>
               <a:spcBef>
-                <a:spcPts val="600"/>
+                <a:spcPts val="400"/>
               </a:spcBef>
             </a:pPr>
             <a:r>
-              <a:rPr b="1" sz="2000">
+              <a:rPr b="1" sz="1700">
                 <a:solidFill>
                   <a:srgbClr val="505050"/>
                 </a:solidFill>
@@ -7230,11 +7230,11 @@
           <a:p>
             <a:pPr lvl="1">
               <a:spcBef>
-                <a:spcPts val="200"/>
+                <a:spcPts val="100"/>
               </a:spcBef>
             </a:pPr>
             <a:r>
-              <a:rPr sz="1700">
+              <a:rPr sz="1500">
                 <a:solidFill>
                   <a:srgbClr val="6B6B6B"/>
                 </a:solidFill>
@@ -7245,11 +7245,11 @@
           <a:p>
             <a:pPr lvl="1">
               <a:spcBef>
-                <a:spcPts val="200"/>
+                <a:spcPts val="100"/>
               </a:spcBef>
             </a:pPr>
             <a:r>
-              <a:rPr sz="1700">
+              <a:rPr sz="1500">
                 <a:solidFill>
                   <a:srgbClr val="6B6B6B"/>
                 </a:solidFill>
@@ -7260,11 +7260,11 @@
           <a:p>
             <a:pPr lvl="1">
               <a:spcBef>
-                <a:spcPts val="200"/>
+                <a:spcPts val="100"/>
               </a:spcBef>
             </a:pPr>
             <a:r>
-              <a:rPr sz="1700">
+              <a:rPr sz="1500">
                 <a:solidFill>
                   <a:srgbClr val="6B6B6B"/>
                 </a:solidFill>
@@ -7281,11 +7281,11 @@
           <a:p>
             <a:pPr>
               <a:spcBef>
-                <a:spcPts val="600"/>
+                <a:spcPts val="400"/>
               </a:spcBef>
             </a:pPr>
             <a:r>
-              <a:rPr sz="2000">
+              <a:rPr sz="1700">
                 <a:solidFill>
                   <a:srgbClr val="1C1C1C"/>
                 </a:solidFill>
@@ -7770,11 +7770,11 @@
           <a:p>
             <a:pPr>
               <a:spcBef>
-                <a:spcPts val="500"/>
+                <a:spcPts val="300"/>
               </a:spcBef>
             </a:pPr>
             <a:r>
-              <a:rPr sz="1700">
+              <a:rPr sz="1500">
                 <a:solidFill>
                   <a:srgbClr val="1C1C1C"/>
                 </a:solidFill>
@@ -7785,11 +7785,11 @@
           <a:p>
             <a:pPr>
               <a:spcBef>
-                <a:spcPts val="500"/>
+                <a:spcPts val="300"/>
               </a:spcBef>
             </a:pPr>
             <a:r>
-              <a:rPr sz="1700">
+              <a:rPr sz="1500">
                 <a:solidFill>
                   <a:srgbClr val="1C1C1C"/>
                 </a:solidFill>
@@ -7800,11 +7800,11 @@
           <a:p>
             <a:pPr>
               <a:spcBef>
-                <a:spcPts val="500"/>
+                <a:spcPts val="300"/>
               </a:spcBef>
             </a:pPr>
             <a:r>
-              <a:rPr sz="1700">
+              <a:rPr sz="1500">
                 <a:solidFill>
                   <a:srgbClr val="1C1C1C"/>
                 </a:solidFill>
@@ -7815,11 +7815,11 @@
           <a:p>
             <a:pPr>
               <a:spcBef>
-                <a:spcPts val="200"/>
+                <a:spcPts val="100"/>
               </a:spcBef>
             </a:pPr>
             <a:r>
-              <a:rPr sz="1500">
+              <a:rPr sz="1300">
                 <a:solidFill>
                   <a:srgbClr val="6B6B6B"/>
                 </a:solidFill>
@@ -7830,11 +7830,11 @@
           <a:p>
             <a:pPr>
               <a:spcBef>
-                <a:spcPts val="200"/>
+                <a:spcPts val="100"/>
               </a:spcBef>
             </a:pPr>
             <a:r>
-              <a:rPr sz="1500">
+              <a:rPr sz="1300">
                 <a:solidFill>
                   <a:srgbClr val="6B6B6B"/>
                 </a:solidFill>
@@ -7845,11 +7845,11 @@
           <a:p>
             <a:pPr>
               <a:spcBef>
-                <a:spcPts val="500"/>
+                <a:spcPts val="300"/>
               </a:spcBef>
             </a:pPr>
             <a:r>
-              <a:rPr sz="1700">
+              <a:rPr sz="1500">
                 <a:solidFill>
                   <a:srgbClr val="1C1C1C"/>
                 </a:solidFill>
@@ -7860,11 +7860,11 @@
           <a:p>
             <a:pPr>
               <a:spcBef>
-                <a:spcPts val="500"/>
+                <a:spcPts val="300"/>
               </a:spcBef>
             </a:pPr>
             <a:r>
-              <a:rPr sz="1700">
+              <a:rPr sz="1500">
                 <a:solidFill>
                   <a:srgbClr val="1C1C1C"/>
                 </a:solidFill>
@@ -7933,11 +7933,11 @@
           <a:p>
             <a:pPr>
               <a:spcBef>
-                <a:spcPts val="500"/>
+                <a:spcPts val="300"/>
               </a:spcBef>
             </a:pPr>
             <a:r>
-              <a:rPr sz="1700" b="1">
+              <a:rPr sz="1500" b="1">
                 <a:solidFill>
                   <a:srgbClr val="1C1C1C"/>
                 </a:solidFill>
@@ -7948,11 +7948,11 @@
           <a:p>
             <a:pPr>
               <a:spcBef>
-                <a:spcPts val="200"/>
+                <a:spcPts val="100"/>
               </a:spcBef>
             </a:pPr>
             <a:r>
-              <a:rPr sz="1500">
+              <a:rPr sz="1300">
                 <a:solidFill>
                   <a:srgbClr val="6B6B6B"/>
                 </a:solidFill>
@@ -7969,11 +7969,11 @@
           <a:p>
             <a:pPr>
               <a:spcBef>
-                <a:spcPts val="500"/>
+                <a:spcPts val="300"/>
               </a:spcBef>
             </a:pPr>
             <a:r>
-              <a:rPr sz="1700">
+              <a:rPr sz="1500">
                 <a:solidFill>
                   <a:srgbClr val="1C1C1C"/>
                 </a:solidFill>
@@ -7984,11 +7984,11 @@
           <a:p>
             <a:pPr>
               <a:spcBef>
-                <a:spcPts val="200"/>
+                <a:spcPts val="100"/>
               </a:spcBef>
             </a:pPr>
             <a:r>
-              <a:rPr sz="1500">
+              <a:rPr sz="1300">
                 <a:solidFill>
                   <a:srgbClr val="6B6B6B"/>
                 </a:solidFill>
@@ -7999,11 +7999,11 @@
           <a:p>
             <a:pPr>
               <a:spcBef>
-                <a:spcPts val="200"/>
+                <a:spcPts val="100"/>
               </a:spcBef>
             </a:pPr>
             <a:r>
-              <a:rPr sz="1500">
+              <a:rPr sz="1300">
                 <a:solidFill>
                   <a:srgbClr val="6B6B6B"/>
                 </a:solidFill>
@@ -8014,11 +8014,11 @@
           <a:p>
             <a:pPr>
               <a:spcBef>
-                <a:spcPts val="200"/>
+                <a:spcPts val="100"/>
               </a:spcBef>
             </a:pPr>
             <a:r>
-              <a:rPr sz="1500">
+              <a:rPr sz="1300">
                 <a:solidFill>
                   <a:srgbClr val="6B6B6B"/>
                 </a:solidFill>
@@ -8029,11 +8029,11 @@
           <a:p>
             <a:pPr>
               <a:spcBef>
-                <a:spcPts val="200"/>
+                <a:spcPts val="100"/>
               </a:spcBef>
             </a:pPr>
             <a:r>
-              <a:rPr sz="1500">
+              <a:rPr sz="1300">
                 <a:solidFill>
                   <a:srgbClr val="6B6B6B"/>
                 </a:solidFill>
@@ -8050,11 +8050,11 @@
           <a:p>
             <a:pPr>
               <a:spcBef>
-                <a:spcPts val="500"/>
+                <a:spcPts val="300"/>
               </a:spcBef>
             </a:pPr>
             <a:r>
-              <a:rPr sz="1700">
+              <a:rPr sz="1500">
                 <a:solidFill>
                   <a:srgbClr val="1C1C1C"/>
                 </a:solidFill>
@@ -9827,11 +9827,11 @@
           <a:p>
             <a:pPr>
               <a:spcBef>
-                <a:spcPts val="500"/>
+                <a:spcPts val="300"/>
               </a:spcBef>
             </a:pPr>
             <a:r>
-              <a:rPr sz="1700">
+              <a:rPr sz="1500">
                 <a:solidFill>
                   <a:srgbClr val="1C1C1C"/>
                 </a:solidFill>
@@ -9842,11 +9842,11 @@
           <a:p>
             <a:pPr>
               <a:spcBef>
-                <a:spcPts val="500"/>
+                <a:spcPts val="300"/>
               </a:spcBef>
             </a:pPr>
             <a:r>
-              <a:rPr sz="1700">
+              <a:rPr sz="1500">
                 <a:solidFill>
                   <a:srgbClr val="1C1C1C"/>
                 </a:solidFill>
@@ -9857,11 +9857,11 @@
           <a:p>
             <a:pPr>
               <a:spcBef>
-                <a:spcPts val="500"/>
+                <a:spcPts val="300"/>
               </a:spcBef>
             </a:pPr>
             <a:r>
-              <a:rPr sz="1700">
+              <a:rPr sz="1500">
                 <a:solidFill>
                   <a:srgbClr val="1C1C1C"/>
                 </a:solidFill>
@@ -9878,11 +9878,11 @@
           <a:p>
             <a:pPr>
               <a:spcBef>
-                <a:spcPts val="500"/>
+                <a:spcPts val="300"/>
               </a:spcBef>
             </a:pPr>
             <a:r>
-              <a:rPr sz="1700">
+              <a:rPr sz="1500">
                 <a:solidFill>
                   <a:srgbClr val="1C1C1C"/>
                 </a:solidFill>
@@ -9893,11 +9893,11 @@
           <a:p>
             <a:pPr>
               <a:spcBef>
-                <a:spcPts val="200"/>
+                <a:spcPts val="100"/>
               </a:spcBef>
             </a:pPr>
             <a:r>
-              <a:rPr sz="1500">
+              <a:rPr sz="1300">
                 <a:solidFill>
                   <a:srgbClr val="6B6B6B"/>
                 </a:solidFill>
@@ -9908,11 +9908,11 @@
           <a:p>
             <a:pPr>
               <a:spcBef>
-                <a:spcPts val="200"/>
+                <a:spcPts val="100"/>
               </a:spcBef>
             </a:pPr>
             <a:r>
-              <a:rPr sz="1500">
+              <a:rPr sz="1300">
                 <a:solidFill>
                   <a:srgbClr val="6B6B6B"/>
                 </a:solidFill>
@@ -9923,11 +9923,11 @@
           <a:p>
             <a:pPr>
               <a:spcBef>
-                <a:spcPts val="200"/>
+                <a:spcPts val="100"/>
               </a:spcBef>
             </a:pPr>
             <a:r>
-              <a:rPr sz="1500">
+              <a:rPr sz="1300">
                 <a:solidFill>
                   <a:srgbClr val="6B6B6B"/>
                 </a:solidFill>
@@ -9944,11 +9944,11 @@
           <a:p>
             <a:pPr>
               <a:spcBef>
-                <a:spcPts val="500"/>
+                <a:spcPts val="300"/>
               </a:spcBef>
             </a:pPr>
             <a:r>
-              <a:rPr sz="1700">
+              <a:rPr sz="1500">
                 <a:solidFill>
                   <a:srgbClr val="1C1C1C"/>
                 </a:solidFill>
@@ -9959,11 +9959,11 @@
           <a:p>
             <a:pPr>
               <a:spcBef>
-                <a:spcPts val="200"/>
+                <a:spcPts val="100"/>
               </a:spcBef>
             </a:pPr>
             <a:r>
-              <a:rPr sz="1500">
+              <a:rPr sz="1300">
                 <a:solidFill>
                   <a:srgbClr val="6B6B6B"/>
                 </a:solidFill>
@@ -9974,11 +9974,11 @@
           <a:p>
             <a:pPr>
               <a:spcBef>
-                <a:spcPts val="200"/>
+                <a:spcPts val="100"/>
               </a:spcBef>
             </a:pPr>
             <a:r>
-              <a:rPr sz="1500">
+              <a:rPr sz="1300">
                 <a:solidFill>
                   <a:srgbClr val="6B6B6B"/>
                 </a:solidFill>
@@ -10047,11 +10047,11 @@
           <a:p>
             <a:pPr>
               <a:spcBef>
-                <a:spcPts val="500"/>
+                <a:spcPts val="300"/>
               </a:spcBef>
             </a:pPr>
             <a:r>
-              <a:rPr sz="1700" b="1">
+              <a:rPr sz="1500" b="1">
                 <a:solidFill>
                   <a:srgbClr val="1C1C1C"/>
                 </a:solidFill>
@@ -10062,11 +10062,11 @@
           <a:p>
             <a:pPr>
               <a:spcBef>
-                <a:spcPts val="500"/>
+                <a:spcPts val="300"/>
               </a:spcBef>
             </a:pPr>
             <a:r>
-              <a:rPr sz="1700" b="1">
+              <a:rPr sz="1500" b="1">
                 <a:solidFill>
                   <a:srgbClr val="1C1C1C"/>
                 </a:solidFill>
@@ -10077,11 +10077,11 @@
           <a:p>
             <a:pPr>
               <a:spcBef>
-                <a:spcPts val="500"/>
+                <a:spcPts val="300"/>
               </a:spcBef>
             </a:pPr>
             <a:r>
-              <a:rPr sz="1700" b="1">
+              <a:rPr sz="1500" b="1">
                 <a:solidFill>
                   <a:srgbClr val="1C1C1C"/>
                 </a:solidFill>
@@ -10092,11 +10092,11 @@
           <a:p>
             <a:pPr>
               <a:spcBef>
-                <a:spcPts val="500"/>
+                <a:spcPts val="300"/>
               </a:spcBef>
             </a:pPr>
             <a:r>
-              <a:rPr sz="1700" b="1">
+              <a:rPr sz="1500" b="1">
                 <a:solidFill>
                   <a:srgbClr val="1C1C1C"/>
                 </a:solidFill>
@@ -10113,11 +10113,11 @@
           <a:p>
             <a:pPr>
               <a:spcBef>
-                <a:spcPts val="500"/>
+                <a:spcPts val="300"/>
               </a:spcBef>
             </a:pPr>
             <a:r>
-              <a:rPr sz="1700">
+              <a:rPr sz="1500">
                 <a:solidFill>
                   <a:srgbClr val="1C1C1C"/>
                 </a:solidFill>
@@ -10128,11 +10128,11 @@
           <a:p>
             <a:pPr>
               <a:spcBef>
-                <a:spcPts val="200"/>
+                <a:spcPts val="100"/>
               </a:spcBef>
             </a:pPr>
             <a:r>
-              <a:rPr sz="1500">
+              <a:rPr sz="1300">
                 <a:solidFill>
                   <a:srgbClr val="6B6B6B"/>
                 </a:solidFill>
@@ -10143,11 +10143,11 @@
           <a:p>
             <a:pPr>
               <a:spcBef>
-                <a:spcPts val="200"/>
+                <a:spcPts val="100"/>
               </a:spcBef>
             </a:pPr>
             <a:r>
-              <a:rPr sz="1500">
+              <a:rPr sz="1300">
                 <a:solidFill>
                   <a:srgbClr val="6B6B6B"/>
                 </a:solidFill>
@@ -13958,11 +13958,11 @@
           <a:p>
             <a:pPr>
               <a:spcBef>
-                <a:spcPts val="600"/>
+                <a:spcPts val="400"/>
               </a:spcBef>
             </a:pPr>
             <a:r>
-              <a:rPr sz="2000">
+              <a:rPr sz="1700">
                 <a:solidFill>
                   <a:srgbClr val="1C1C1C"/>
                 </a:solidFill>
@@ -13973,11 +13973,11 @@
           <a:p>
             <a:pPr lvl="1">
               <a:spcBef>
-                <a:spcPts val="200"/>
+                <a:spcPts val="100"/>
               </a:spcBef>
             </a:pPr>
             <a:r>
-              <a:rPr sz="1700">
+              <a:rPr sz="1500">
                 <a:solidFill>
                   <a:srgbClr val="6B6B6B"/>
                 </a:solidFill>
@@ -13988,11 +13988,11 @@
           <a:p>
             <a:pPr lvl="1">
               <a:spcBef>
-                <a:spcPts val="200"/>
+                <a:spcPts val="100"/>
               </a:spcBef>
             </a:pPr>
             <a:r>
-              <a:rPr sz="1700">
+              <a:rPr sz="1500">
                 <a:solidFill>
                   <a:srgbClr val="6B6B6B"/>
                 </a:solidFill>
@@ -14003,11 +14003,11 @@
           <a:p>
             <a:pPr lvl="1">
               <a:spcBef>
-                <a:spcPts val="200"/>
+                <a:spcPts val="100"/>
               </a:spcBef>
             </a:pPr>
             <a:r>
-              <a:rPr sz="1700">
+              <a:rPr sz="1500">
                 <a:solidFill>
                   <a:srgbClr val="6B6B6B"/>
                 </a:solidFill>
@@ -14018,11 +14018,11 @@
           <a:p>
             <a:pPr>
               <a:spcBef>
-                <a:spcPts val="600"/>
+                <a:spcPts val="400"/>
               </a:spcBef>
             </a:pPr>
             <a:r>
-              <a:rPr sz="2000">
+              <a:rPr sz="1700">
                 <a:solidFill>
                   <a:srgbClr val="1C1C1C"/>
                 </a:solidFill>
@@ -14033,11 +14033,11 @@
           <a:p>
             <a:pPr lvl="1">
               <a:spcBef>
-                <a:spcPts val="200"/>
+                <a:spcPts val="100"/>
               </a:spcBef>
             </a:pPr>
             <a:r>
-              <a:rPr sz="1700">
+              <a:rPr sz="1500">
                 <a:solidFill>
                   <a:srgbClr val="6B6B6B"/>
                 </a:solidFill>
@@ -14048,11 +14048,11 @@
           <a:p>
             <a:pPr lvl="1">
               <a:spcBef>
-                <a:spcPts val="200"/>
+                <a:spcPts val="100"/>
               </a:spcBef>
             </a:pPr>
             <a:r>
-              <a:rPr sz="1700">
+              <a:rPr sz="1500">
                 <a:solidFill>
                   <a:srgbClr val="6B6B6B"/>
                 </a:solidFill>
@@ -14063,11 +14063,11 @@
           <a:p>
             <a:pPr>
               <a:spcBef>
-                <a:spcPts val="600"/>
+                <a:spcPts val="400"/>
               </a:spcBef>
             </a:pPr>
             <a:r>
-              <a:rPr sz="2000">
+              <a:rPr sz="1700">
                 <a:solidFill>
                   <a:srgbClr val="1C1C1C"/>
                 </a:solidFill>
@@ -14078,11 +14078,11 @@
           <a:p>
             <a:pPr lvl="1">
               <a:spcBef>
-                <a:spcPts val="200"/>
+                <a:spcPts val="100"/>
               </a:spcBef>
             </a:pPr>
             <a:r>
-              <a:rPr sz="1700">
+              <a:rPr sz="1500">
                 <a:solidFill>
                   <a:srgbClr val="6B6B6B"/>
                 </a:solidFill>
@@ -14093,11 +14093,11 @@
           <a:p>
             <a:pPr lvl="1">
               <a:spcBef>
-                <a:spcPts val="200"/>
+                <a:spcPts val="100"/>
               </a:spcBef>
             </a:pPr>
             <a:r>
-              <a:rPr sz="1700">
+              <a:rPr sz="1500">
                 <a:solidFill>
                   <a:srgbClr val="6B6B6B"/>
                 </a:solidFill>
@@ -14108,11 +14108,11 @@
           <a:p>
             <a:pPr>
               <a:spcBef>
-                <a:spcPts val="600"/>
+                <a:spcPts val="400"/>
               </a:spcBef>
             </a:pPr>
             <a:r>
-              <a:rPr sz="2000">
+              <a:rPr sz="1700">
                 <a:solidFill>
                   <a:srgbClr val="1C1C1C"/>
                 </a:solidFill>
@@ -15753,11 +15753,11 @@
           <a:p>
             <a:pPr>
               <a:spcBef>
-                <a:spcPts val="600"/>
+                <a:spcPts val="400"/>
               </a:spcBef>
             </a:pPr>
             <a:r>
-              <a:rPr b="1" sz="2000">
+              <a:rPr b="1" sz="1700">
                 <a:solidFill>
                   <a:srgbClr val="505050"/>
                 </a:solidFill>
@@ -15768,11 +15768,11 @@
           <a:p>
             <a:pPr lvl="1">
               <a:spcBef>
-                <a:spcPts val="200"/>
+                <a:spcPts val="100"/>
               </a:spcBef>
             </a:pPr>
             <a:r>
-              <a:rPr sz="1700">
+              <a:rPr sz="1500">
                 <a:solidFill>
                   <a:srgbClr val="6B6B6B"/>
                 </a:solidFill>
@@ -15789,11 +15789,11 @@
           <a:p>
             <a:pPr>
               <a:spcBef>
-                <a:spcPts val="600"/>
+                <a:spcPts val="400"/>
               </a:spcBef>
             </a:pPr>
             <a:r>
-              <a:rPr b="1" sz="2000">
+              <a:rPr b="1" sz="1700">
                 <a:solidFill>
                   <a:srgbClr val="505050"/>
                 </a:solidFill>
@@ -15804,11 +15804,11 @@
           <a:p>
             <a:pPr lvl="1">
               <a:spcBef>
-                <a:spcPts val="200"/>
+                <a:spcPts val="100"/>
               </a:spcBef>
             </a:pPr>
             <a:r>
-              <a:rPr sz="1700">
+              <a:rPr sz="1500">
                 <a:solidFill>
                   <a:srgbClr val="6B6B6B"/>
                 </a:solidFill>
@@ -15819,11 +15819,11 @@
           <a:p>
             <a:pPr lvl="1">
               <a:spcBef>
-                <a:spcPts val="200"/>
+                <a:spcPts val="100"/>
               </a:spcBef>
             </a:pPr>
             <a:r>
-              <a:rPr sz="1700">
+              <a:rPr sz="1500">
                 <a:solidFill>
                   <a:srgbClr val="6B6B6B"/>
                 </a:solidFill>
@@ -15840,11 +15840,11 @@
           <a:p>
             <a:pPr>
               <a:spcBef>
-                <a:spcPts val="600"/>
+                <a:spcPts val="400"/>
               </a:spcBef>
             </a:pPr>
             <a:r>
-              <a:rPr b="1" sz="2000">
+              <a:rPr b="1" sz="1700">
                 <a:solidFill>
                   <a:srgbClr val="505050"/>
                 </a:solidFill>
@@ -15855,11 +15855,11 @@
           <a:p>
             <a:pPr lvl="1">
               <a:spcBef>
-                <a:spcPts val="200"/>
+                <a:spcPts val="100"/>
               </a:spcBef>
             </a:pPr>
             <a:r>
-              <a:rPr sz="1700">
+              <a:rPr sz="1500">
                 <a:solidFill>
                   <a:srgbClr val="6B6B6B"/>
                 </a:solidFill>
@@ -15870,11 +15870,11 @@
           <a:p>
             <a:pPr lvl="1">
               <a:spcBef>
-                <a:spcPts val="200"/>
+                <a:spcPts val="100"/>
               </a:spcBef>
             </a:pPr>
             <a:r>
-              <a:rPr sz="1700">
+              <a:rPr sz="1500">
                 <a:solidFill>
                   <a:srgbClr val="6B6B6B"/>
                 </a:solidFill>
@@ -15885,11 +15885,11 @@
           <a:p>
             <a:pPr lvl="1">
               <a:spcBef>
-                <a:spcPts val="200"/>
+                <a:spcPts val="100"/>
               </a:spcBef>
             </a:pPr>
             <a:r>
-              <a:rPr sz="1700">
+              <a:rPr sz="1500">
                 <a:solidFill>
                   <a:srgbClr val="6B6B6B"/>
                 </a:solidFill>
@@ -18009,11 +18009,11 @@
           <a:p>
             <a:pPr>
               <a:spcBef>
-                <a:spcPts val="500"/>
+                <a:spcPts val="300"/>
               </a:spcBef>
             </a:pPr>
             <a:r>
-              <a:rPr sz="1700">
+              <a:rPr sz="1500">
                 <a:solidFill>
                   <a:srgbClr val="1C1C1C"/>
                 </a:solidFill>
@@ -18024,11 +18024,11 @@
           <a:p>
             <a:pPr>
               <a:spcBef>
-                <a:spcPts val="500"/>
+                <a:spcPts val="300"/>
               </a:spcBef>
             </a:pPr>
             <a:r>
-              <a:rPr sz="1700">
+              <a:rPr sz="1500">
                 <a:solidFill>
                   <a:srgbClr val="1C1C1C"/>
                 </a:solidFill>
@@ -18039,11 +18039,11 @@
           <a:p>
             <a:pPr>
               <a:spcBef>
-                <a:spcPts val="500"/>
+                <a:spcPts val="300"/>
               </a:spcBef>
             </a:pPr>
             <a:r>
-              <a:rPr sz="1700">
+              <a:rPr sz="1500">
                 <a:solidFill>
                   <a:srgbClr val="1C1C1C"/>
                 </a:solidFill>
@@ -18054,11 +18054,11 @@
           <a:p>
             <a:pPr>
               <a:spcBef>
-                <a:spcPts val="500"/>
+                <a:spcPts val="300"/>
               </a:spcBef>
             </a:pPr>
             <a:r>
-              <a:rPr sz="1700">
+              <a:rPr sz="1500">
                 <a:solidFill>
                   <a:srgbClr val="1C1C1C"/>
                 </a:solidFill>
@@ -18127,11 +18127,11 @@
           <a:p>
             <a:pPr>
               <a:spcBef>
-                <a:spcPts val="500"/>
+                <a:spcPts val="300"/>
               </a:spcBef>
             </a:pPr>
             <a:r>
-              <a:rPr sz="1700">
+              <a:rPr sz="1500">
                 <a:solidFill>
                   <a:srgbClr val="1C1C1C"/>
                 </a:solidFill>
@@ -18148,11 +18148,11 @@
           <a:p>
             <a:pPr>
               <a:spcBef>
-                <a:spcPts val="500"/>
+                <a:spcPts val="300"/>
               </a:spcBef>
             </a:pPr>
             <a:r>
-              <a:rPr sz="1700" b="1">
+              <a:rPr sz="1500" b="1">
                 <a:solidFill>
                   <a:srgbClr val="1C1C1C"/>
                 </a:solidFill>
@@ -18163,11 +18163,11 @@
           <a:p>
             <a:pPr>
               <a:spcBef>
-                <a:spcPts val="200"/>
+                <a:spcPts val="100"/>
               </a:spcBef>
             </a:pPr>
             <a:r>
-              <a:rPr sz="1500">
+              <a:rPr sz="1300">
                 <a:solidFill>
                   <a:srgbClr val="6B6B6B"/>
                 </a:solidFill>
@@ -18178,11 +18178,11 @@
           <a:p>
             <a:pPr>
               <a:spcBef>
-                <a:spcPts val="200"/>
+                <a:spcPts val="100"/>
               </a:spcBef>
             </a:pPr>
             <a:r>
-              <a:rPr sz="1500">
+              <a:rPr sz="1300">
                 <a:solidFill>
                   <a:srgbClr val="6B6B6B"/>
                 </a:solidFill>
@@ -18193,11 +18193,11 @@
           <a:p>
             <a:pPr>
               <a:spcBef>
-                <a:spcPts val="200"/>
+                <a:spcPts val="100"/>
               </a:spcBef>
             </a:pPr>
             <a:r>
-              <a:rPr sz="1500">
+              <a:rPr sz="1300">
                 <a:solidFill>
                   <a:srgbClr val="6B6B6B"/>
                 </a:solidFill>
@@ -18214,11 +18214,11 @@
           <a:p>
             <a:pPr>
               <a:spcBef>
-                <a:spcPts val="500"/>
+                <a:spcPts val="300"/>
               </a:spcBef>
             </a:pPr>
             <a:r>
-              <a:rPr sz="1700">
+              <a:rPr sz="1500">
                 <a:solidFill>
                   <a:srgbClr val="1C1C1C"/>
                 </a:solidFill>
@@ -21521,11 +21521,11 @@
           <a:p>
             <a:pPr>
               <a:spcBef>
-                <a:spcPts val="500"/>
+                <a:spcPts val="300"/>
               </a:spcBef>
             </a:pPr>
             <a:r>
-              <a:rPr sz="1700">
+              <a:rPr sz="1500">
                 <a:solidFill>
                   <a:srgbClr val="1C1C1C"/>
                 </a:solidFill>
@@ -21536,11 +21536,11 @@
           <a:p>
             <a:pPr>
               <a:spcBef>
-                <a:spcPts val="500"/>
+                <a:spcPts val="300"/>
               </a:spcBef>
             </a:pPr>
             <a:r>
-              <a:rPr sz="1700">
+              <a:rPr sz="1500">
                 <a:solidFill>
                   <a:srgbClr val="1C1C1C"/>
                 </a:solidFill>
@@ -21551,11 +21551,11 @@
           <a:p>
             <a:pPr>
               <a:spcBef>
-                <a:spcPts val="500"/>
+                <a:spcPts val="300"/>
               </a:spcBef>
             </a:pPr>
             <a:r>
-              <a:rPr sz="1700">
+              <a:rPr sz="1500">
                 <a:solidFill>
                   <a:srgbClr val="1C1C1C"/>
                 </a:solidFill>
@@ -21566,11 +21566,11 @@
           <a:p>
             <a:pPr>
               <a:spcBef>
-                <a:spcPts val="500"/>
+                <a:spcPts val="300"/>
               </a:spcBef>
             </a:pPr>
             <a:r>
-              <a:rPr sz="1700">
+              <a:rPr sz="1500">
                 <a:solidFill>
                   <a:srgbClr val="1C1C1C"/>
                 </a:solidFill>
@@ -21581,11 +21581,11 @@
           <a:p>
             <a:pPr>
               <a:spcBef>
-                <a:spcPts val="500"/>
+                <a:spcPts val="300"/>
               </a:spcBef>
             </a:pPr>
             <a:r>
-              <a:rPr sz="1700">
+              <a:rPr sz="1500">
                 <a:solidFill>
                   <a:srgbClr val="1C1C1C"/>
                 </a:solidFill>
@@ -21654,11 +21654,11 @@
           <a:p>
             <a:pPr>
               <a:spcBef>
-                <a:spcPts val="500"/>
+                <a:spcPts val="300"/>
               </a:spcBef>
             </a:pPr>
             <a:r>
-              <a:rPr sz="1700">
+              <a:rPr sz="1500">
                 <a:solidFill>
                   <a:srgbClr val="1C1C1C"/>
                 </a:solidFill>
@@ -21669,11 +21669,11 @@
           <a:p>
             <a:pPr>
               <a:spcBef>
-                <a:spcPts val="500"/>
+                <a:spcPts val="300"/>
               </a:spcBef>
             </a:pPr>
             <a:r>
-              <a:rPr sz="1700">
+              <a:rPr sz="1500">
                 <a:solidFill>
                   <a:srgbClr val="1C1C1C"/>
                 </a:solidFill>
@@ -21684,11 +21684,11 @@
           <a:p>
             <a:pPr>
               <a:spcBef>
-                <a:spcPts val="500"/>
+                <a:spcPts val="300"/>
               </a:spcBef>
             </a:pPr>
             <a:r>
-              <a:rPr sz="1700">
+              <a:rPr sz="1500">
                 <a:solidFill>
                   <a:srgbClr val="1C1C1C"/>
                 </a:solidFill>
@@ -21699,11 +21699,11 @@
           <a:p>
             <a:pPr>
               <a:spcBef>
-                <a:spcPts val="500"/>
+                <a:spcPts val="300"/>
               </a:spcBef>
             </a:pPr>
             <a:r>
-              <a:rPr sz="1700">
+              <a:rPr sz="1500">
                 <a:solidFill>
                   <a:srgbClr val="1C1C1C"/>
                 </a:solidFill>
@@ -21720,11 +21720,11 @@
           <a:p>
             <a:pPr>
               <a:spcBef>
-                <a:spcPts val="500"/>
+                <a:spcPts val="300"/>
               </a:spcBef>
             </a:pPr>
             <a:r>
-              <a:rPr sz="1700" b="1">
+              <a:rPr sz="1500" b="1">
                 <a:solidFill>
                   <a:srgbClr val="1C1C1C"/>
                 </a:solidFill>
@@ -21735,11 +21735,11 @@
           <a:p>
             <a:pPr>
               <a:spcBef>
-                <a:spcPts val="200"/>
+                <a:spcPts val="100"/>
               </a:spcBef>
             </a:pPr>
             <a:r>
-              <a:rPr sz="1500">
+              <a:rPr sz="1300">
                 <a:solidFill>
                   <a:srgbClr val="6B6B6B"/>
                 </a:solidFill>

--- a/output/network-card-csi-v5.1.pptx
+++ b/output/network-card-csi-v5.1.pptx
@@ -29,6 +29,7 @@
     <p:sldId id="277" r:id="rId29"/>
     <p:sldId id="278" r:id="rId30"/>
     <p:sldId id="279" r:id="rId31"/>
+    <p:sldId id="280" r:id="rId32"/>
   </p:sldIdLst>
   <p:sldSz cx="9144000" cy="5143500" type="screen4x3"/>
   <p:notesSz cx="6858000" cy="9144000"/>
@@ -823,31 +824,25 @@
           <a:lstStyle/>
           <a:p>
             <a:r>
-              <a:t>這是今天的核心投影片。讓我們總結 CSI 在哪裡消失。</a:t>
+              <a:t>在逐一介紹每個元件之後，讓我們用這張全景圖把所有元件放在一起看。</a:t>
             </a:r>
           </a:p>
           <a:p/>
           <a:p>
             <a:r>
-              <a:t>橙色和紅色標注的兩個元件是關鍵：OEM.sys 和 nwifi.sys。</a:t>
+              <a:t>從最底層的 NIC 硬體開始，往上依序是 OEM.sys（韌體廠商驅動）、nwifi.sys（WiFi 連線管理）、NDIS、tcpip.sys、WinSock，最終到應用程式。</a:t>
             </a:r>
           </a:p>
           <a:p/>
           <a:p>
             <a:r>
-              <a:t>OEM.sys 有能力讀取 CSI（因為它可以直接訪問 NIC 硬體暫存器），但它不上報給 nwifi.sys。nwifi.sys 也從未向 OEM.sys 請求 CSI 資料。這個邊界就是 CSI 消失的地方。</a:t>
+              <a:t>每一層只能透過明確定義的介面與相鄰層溝通。這個設計保證了穩定性，但也意味著 L1 的 PHY 資訊無法「跳過」中間層直接到達應用程式。</a:t>
             </a:r>
           </a:p>
           <a:p/>
           <a:p>
             <a:r>
-              <a:t>再往上，ndis.sys 沒有 CSI 的 OID 定義，tcpip.sys 只看到 IP 封包，應用程式完全感知不到 CSI 的存在。</a:t>
-            </a:r>
-          </a:p>
-          <a:p/>
-          <a:p>
-            <a:r>
-              <a:t>結論：CSI 的消失是多層架構決策累積的結果，每一層都有其合理性。</a:t>
+              <a:t>接下來我們用這張圖精確標示 CSI 消失的位置。</a:t>
             </a:r>
           </a:p>
         </p:txBody>
@@ -917,25 +912,31 @@
           <a:lstStyle/>
           <a:p>
             <a:r>
-              <a:t>現在我們來看為什麼 Linux 可以取得 CSI。</a:t>
+              <a:t>這是今天的核心投影片。讓我們總結 CSI 在哪裡消失。</a:t>
             </a:r>
           </a:p>
           <a:p/>
           <a:p>
             <a:r>
-              <a:t>Linux 的關鍵優勢是開源。iwlwifi、ath9k、brcmfmac 這些驅動都是開源的，研究人員可以直接修改驅動程式碼，甚至修改 NIC 韌體。debugfs 提供了一個核心介面，讓驅動可以暴露任意的除錯資料，包括 CSI。</a:t>
+              <a:t>橙色和紅色標注的兩個元件是關鍵：OEM.sys 和 nwifi.sys。</a:t>
             </a:r>
           </a:p>
           <a:p/>
           <a:p>
             <a:r>
-              <a:t>右邊列出了 Windows 的根本差異：OEM.sys 是閉源二進位，不可修改；NDIS 介面固定，沒有擴充機制；韌體修改需要 WHQL 認證簽章。</a:t>
+              <a:t>OEM.sys 有能力讀取 CSI（因為它可以直接訪問 NIC 硬體暫存器），但它不上報給 nwifi.sys。nwifi.sys 也從未向 OEM.sys 請求 CSI 資料。這個邊界就是 CSI 消失的地方。</a:t>
             </a:r>
           </a:p>
           <a:p/>
           <a:p>
             <a:r>
-              <a:t>這不是 Windows 的 bug，而是商業產品（Windows）vs 開源生態（Linux）的架構哲學差異。</a:t>
+              <a:t>再往上，ndis.sys 沒有 CSI 的 OID 定義，tcpip.sys 只看到 IP 封包，應用程式完全感知不到 CSI 的存在。</a:t>
+            </a:r>
+          </a:p>
+          <a:p/>
+          <a:p>
+            <a:r>
+              <a:t>結論：CSI 的消失是多層架構決策累積的結果，每一層都有其合理性。</a:t>
             </a:r>
           </a:p>
         </p:txBody>
@@ -1005,25 +1006,25 @@
           <a:lstStyle/>
           <a:p>
             <a:r>
-              <a:t>這是目前（2026 年）的現代 CSI 工具生態。</a:t>
+              <a:t>現在我們來看為什麼 Linux 可以取得 CSI。</a:t>
             </a:r>
           </a:p>
           <a:p/>
           <a:p>
             <a:r>
-              <a:t>PicoScenes 是目前功能最完整的平台，支援 Intel AX200/AX210，可以取得 802.11ax 格式的 CSI，最寬支援 160 MHz。它有商業支援，適合需要穩定維護的研究團隊。</a:t>
+              <a:t>Linux 的關鍵優勢是開源。iwlwifi、ath9k、brcmfmac 這些驅動都是開源的，研究人員可以直接修改驅動程式碼，甚至修改 NIC 韌體。debugfs 提供了一個核心介面，讓驅動可以暴露任意的除錯資料，包括 CSI。</a:t>
             </a:r>
           </a:p>
           <a:p/>
           <a:p>
             <a:r>
-              <a:t>FeitCSI 是開源替代方案，功能相近，也支援 CSI 注入，可以用於主動量測。</a:t>
+              <a:t>右邊列出了 Windows 的根本差異：OEM.sys 是閉源二進位，不可修改；NDIS 介面固定，沒有擴充機制；韌體修改需要 WHQL 認證簽章。</a:t>
             </a:r>
           </a:p>
           <a:p/>
           <a:p>
             <a:r>
-              <a:t>這張表的最右欄「平台」請注意：全部都是 Linux。這個事實本身就是今天演講的核心論點之一——所有成熟的 CSI 工具都選擇 Linux，因為 Windows 的架構限制讓這件事在 Windows 上無法實現。</a:t>
+              <a:t>這不是 Windows 的 bug，而是商業產品（Windows）vs 開源生態（Linux）的架構哲學差異。</a:t>
             </a:r>
           </a:p>
         </p:txBody>
@@ -1093,7 +1094,25 @@
           <a:lstStyle/>
           <a:p>
             <a:r>
-              <a:t>四種方案快速比較。Raw Packet Capture 最簡單但無 CSI。OEM IOCTL 風險極高。雙系統和 Live USB 都能取到完整 CSI，推薦雙系統。</a:t>
+              <a:t>這是目前（2026 年）的現代 CSI 工具生態。</a:t>
+            </a:r>
+          </a:p>
+          <a:p/>
+          <a:p>
+            <a:r>
+              <a:t>PicoScenes 是目前功能最完整的平台，支援 Intel AX200/AX210，可以取得 802.11ax 格式的 CSI，最寬支援 160 MHz。它有商業支援，適合需要穩定維護的研究團隊。</a:t>
+            </a:r>
+          </a:p>
+          <a:p/>
+          <a:p>
+            <a:r>
+              <a:t>FeitCSI 是開源替代方案，功能相近，也支援 CSI 注入，可以用於主動量測。</a:t>
+            </a:r>
+          </a:p>
+          <a:p/>
+          <a:p>
+            <a:r>
+              <a:t>這張表的最右欄「平台」請注意：全部都是 Linux。這個事實本身就是今天演講的核心論點之一——所有成熟的 CSI 工具都選擇 Linux，因為 Windows 的架構限制讓這件事在 Windows 上無法實現。</a:t>
             </a:r>
           </a:p>
         </p:txBody>
@@ -1163,31 +1182,7 @@
           <a:lstStyle/>
           <a:p>
             <a:r>
-              <a:t>這張表列出目前（2026 年）有明確 CSI 工具支援的網卡。</a:t>
-            </a:r>
-          </a:p>
-          <a:p/>
-          <a:p>
-            <a:r>
-              <a:t>如果你要買新硬體，Intel AX200 M.2 是最容易取得、工具支援最完整的選擇。它便宜（通常 500 到 1000 台幣），支援 802.11ax，PicoScenes 和 FeitCSI 都支援它。買 M.2 版本可以裝在筆電或桌機，或者用 M.2 轉 PCIe 轉接卡。</a:t>
-            </a:r>
-          </a:p>
-          <a:p/>
-          <a:p>
-            <a:r>
-              <a:t>如果你有 Raspberry Pi，BCM43455 晶片已經內建，Nexmon CSI 直接支援，不需要額外購買硬體，非常適合做嵌入式 CSI 採集節點。</a:t>
-            </a:r>
-          </a:p>
-          <a:p/>
-          <a:p>
-            <a:r>
-              <a:t>Atheros AR9380 在 OpenWRT 路由器上很常見，適合布署多點 CSI 量測環境。</a:t>
-            </a:r>
-          </a:p>
-          <a:p/>
-          <a:p>
-            <a:r>
-              <a:t>請避免購買沒有在這份清單上的網卡，除非你願意自己移植驅動。</a:t>
+              <a:t>四種方案快速比較。Raw Packet Capture 最簡單但無 CSI。OEM IOCTL 風險極高。雙系統和 Live USB 都能取到完整 CSI，推薦雙系統。</a:t>
             </a:r>
           </a:p>
         </p:txBody>
@@ -1257,31 +1252,31 @@
           <a:lstStyle/>
           <a:p>
             <a:r>
-              <a:t>讓我們用這張總結圖回顧整個旅程。</a:t>
+              <a:t>這張表列出目前（2026 年）有明確 CSI 工具支援的網卡。</a:t>
             </a:r>
           </a:p>
           <a:p/>
           <a:p>
             <a:r>
-              <a:t>從最下面的 PHY 硬體開始，OFDM 解調計算出 CSI，儲存在 NIC 韌體的暫存器中。NIC 韌體計算完成後，這個資訊就在這裡等待被讀取。</a:t>
+              <a:t>如果你要買新硬體，Intel AX200 M.2 是最容易取得、工具支援最完整的選擇。它便宜（通常 500 到 1000 台幣），支援 802.11ax，PicoScenes 和 FeitCSI 都支援它。買 M.2 版本可以裝在筆電或桌機，或者用 M.2 轉 PCIe 轉接卡。</a:t>
             </a:r>
           </a:p>
           <a:p/>
           <a:p>
             <a:r>
-              <a:t>OEM.sys 是唯一有能力讀取這個資料的軟體元件，但它的設計目標不包含上報 CSI，所以它沒有這樣做。</a:t>
+              <a:t>如果你有 Raspberry Pi，BCM43455 晶片已經內建，Nexmon CSI 直接支援，不需要額外購買硬體，非常適合做嵌入式 CSI 採集節點。</a:t>
             </a:r>
           </a:p>
           <a:p/>
           <a:p>
             <a:r>
-              <a:t>往上的每一層，從 nwifi.sys 到 NDIS 到應用程式，都沒有任何機制可以取得 CSI。每一層都有合理的設計動機，但合在一起的結果就是 CSI 無法從應用層存取。</a:t>
+              <a:t>Atheros AR9380 在 OpenWRT 路由器上很常見，適合布署多點 CSI 量測環境。</a:t>
             </a:r>
           </a:p>
           <a:p/>
           <a:p>
             <a:r>
-              <a:t>這不是一個單一決策造成的問題，而是多層架構設計累積的結果。</a:t>
+              <a:t>請避免購買沒有在這份清單上的網卡，除非你願意自己移植驅動。</a:t>
             </a:r>
           </a:p>
         </p:txBody>
@@ -1351,7 +1346,31 @@
           <a:lstStyle/>
           <a:p>
             <a:r>
-              <a:t>基於今天的內容，給各位三點具體建議。希望能幫助大家避免走彎路，直接使用最有效的工具。</a:t>
+              <a:t>讓我們用這張總結圖回顧整個旅程。</a:t>
+            </a:r>
+          </a:p>
+          <a:p/>
+          <a:p>
+            <a:r>
+              <a:t>從最下面的 PHY 硬體開始，OFDM 解調計算出 CSI，儲存在 NIC 韌體的暫存器中。NIC 韌體計算完成後，這個資訊就在這裡等待被讀取。</a:t>
+            </a:r>
+          </a:p>
+          <a:p/>
+          <a:p>
+            <a:r>
+              <a:t>OEM.sys 是唯一有能力讀取這個資料的軟體元件，但它的設計目標不包含上報 CSI，所以它沒有這樣做。</a:t>
+            </a:r>
+          </a:p>
+          <a:p/>
+          <a:p>
+            <a:r>
+              <a:t>往上的每一層，從 nwifi.sys 到 NDIS 到應用程式，都沒有任何機制可以取得 CSI。每一層都有合理的設計動機，但合在一起的結果就是 CSI 無法從應用層存取。</a:t>
+            </a:r>
+          </a:p>
+          <a:p/>
+          <a:p>
+            <a:r>
+              <a:t>這不是一個單一決策造成的問題，而是多層架構設計累積的結果。</a:t>
             </a:r>
           </a:p>
         </p:txBody>
@@ -1503,6 +1522,76 @@
           <a:lstStyle/>
           <a:p>
             <a:r>
+              <a:t>基於今天的內容，給各位三點具體建議。希望能幫助大家避免走彎路，直接使用最有效的工具。</a:t>
+            </a:r>
+          </a:p>
+        </p:txBody>
+      </p:sp>
+      <p:sp>
+        <p:nvSpPr>
+          <p:cNvPr id="4" name="Slide Number Placeholder 3"/>
+          <p:cNvSpPr>
+            <a:spLocks noGrp="1"/>
+          </p:cNvSpPr>
+          <p:nvPr>
+            <p:ph type="sldNum" idx="5" sz="quarter"/>
+          </p:nvPr>
+        </p:nvSpPr>
+        <p:spPr/>
+      </p:sp>
+    </p:spTree>
+  </p:cSld>
+  <p:clrMapOvr>
+    <a:masterClrMapping/>
+  </p:clrMapOvr>
+</p:notes>
+</file>
+
+<file path=ppt/notesSlides/notesSlide21.xml><?xml version="1.0" encoding="utf-8"?>
+<p:notes xmlns:a="http://schemas.openxmlformats.org/drawingml/2006/main" xmlns:p="http://schemas.openxmlformats.org/presentationml/2006/main" xmlns:r="http://schemas.openxmlformats.org/officeDocument/2006/relationships">
+  <p:cSld>
+    <p:spTree>
+      <p:nvGrpSpPr>
+        <p:cNvPr id="1" name=""/>
+        <p:cNvGrpSpPr/>
+        <p:nvPr/>
+      </p:nvGrpSpPr>
+      <p:grpSpPr>
+        <a:xfrm>
+          <a:off x="0" y="0"/>
+          <a:ext cx="0" cy="0"/>
+          <a:chOff x="0" y="0"/>
+          <a:chExt cx="0" cy="0"/>
+        </a:xfrm>
+      </p:grpSpPr>
+      <p:sp>
+        <p:nvSpPr>
+          <p:cNvPr id="2" name="Slide Image Placeholder 1"/>
+          <p:cNvSpPr>
+            <a:spLocks noGrp="1"/>
+          </p:cNvSpPr>
+          <p:nvPr>
+            <p:ph type="sldImg" idx="2"/>
+          </p:nvPr>
+        </p:nvSpPr>
+        <p:spPr/>
+      </p:sp>
+      <p:sp>
+        <p:nvSpPr>
+          <p:cNvPr id="3" name="Notes Placeholder 2"/>
+          <p:cNvSpPr>
+            <a:spLocks noGrp="1"/>
+          </p:cNvSpPr>
+          <p:nvPr>
+            <p:ph type="body" idx="3" sz="quarter"/>
+          </p:nvPr>
+        </p:nvSpPr>
+        <p:spPr/>
+        <p:txBody>
+          <a:bodyPr/>
+          <a:lstStyle/>
+          <a:p>
+            <a:r>
               <a:t>以上是今天的所有內容。</a:t>
             </a:r>
           </a:p>
@@ -1907,25 +1996,19 @@
           <a:lstStyle/>
           <a:p>
             <a:r>
-              <a:t>現在進入 Windows 驅動架構。這張堆疊圖從上到下代表從應用程式到硬體的路徑。</a:t>
+              <a:t>現在進入 Windows 驅動架構。這是今天的核心問題：CSI 在 NIC 韌體計算完成後，要怎麼到達你的應用程式？</a:t>
             </a:r>
           </a:p>
           <a:p/>
           <a:p>
             <a:r>
-              <a:t>顏色區分了三個層次：綠色是 User Mode（使用者模式），藍色和紫色是 Kernel Mode（核心模式），最底層是硬體。</a:t>
+              <a:t>從 RF 工程師的視角來看，左邊是熟悉的領域：PHY 解調、NIC 韌體計算 CSI、儲存在暫存器。右邊是研究目標：你的程式需要 CSI 來做定位或感測。</a:t>
             </a:r>
           </a:p>
           <a:p/>
           <a:p>
             <a:r>
-              <a:t>每一層只能和相鄰層溝通，而且必須透過明確定義的介面。這個設計保證了穩定性，但也意味著 L1 的 PHY 資訊沒有辦法「跳過」中間層直接到應用程式。</a:t>
-            </a:r>
-          </a:p>
-          <a:p/>
-          <a:p>
-            <a:r>
-              <a:t>接下來我們逐層解釋，重點在紅色的 OEM.sys 和紫色的 nwifi.sys。</a:t>
+              <a:t>中間那個「黑盒子」就是 Windows 的驅動堆疊。接下來我們從最靠近硬體的元件開始，逐層往上解析，找出 CSI 究竟在哪裡消失。</a:t>
             </a:r>
           </a:p>
         </p:txBody>
@@ -5568,7 +5651,7 @@
                 </a:solidFill>
                 <a:latin typeface="Calibri"/>
               </a:rPr>
-              <a:t>01 / 24</a:t>
+              <a:t>01 / 25</a:t>
             </a:r>
           </a:p>
         </p:txBody>
@@ -6330,7 +6413,7 @@
                 </a:solidFill>
                 <a:latin typeface="Calibri"/>
               </a:rPr>
-              <a:t>10 / 24</a:t>
+              <a:t>10 / 25</a:t>
             </a:r>
           </a:p>
         </p:txBody>
@@ -7283,7 +7366,7 @@
                 </a:solidFill>
                 <a:latin typeface="Calibri"/>
               </a:rPr>
-              <a:t>11 / 24</a:t>
+              <a:t>11 / 25</a:t>
             </a:r>
           </a:p>
         </p:txBody>
@@ -7927,7 +8010,7 @@
                 </a:solidFill>
                 <a:latin typeface="Calibri"/>
               </a:rPr>
-              <a:t>12 / 24</a:t>
+              <a:t>12 / 25</a:t>
             </a:r>
           </a:p>
         </p:txBody>
@@ -8586,7 +8669,7 @@
                 </a:solidFill>
                 <a:latin typeface="Calibri"/>
               </a:rPr>
-              <a:t>13 / 24</a:t>
+              <a:t>13 / 25</a:t>
             </a:r>
           </a:p>
         </p:txBody>
@@ -9414,7 +9497,7 @@
                 </a:solidFill>
                 <a:latin typeface="Calibri"/>
               </a:rPr>
-              <a:t>14 / 24</a:t>
+              <a:t>14 / 25</a:t>
             </a:r>
           </a:p>
         </p:txBody>
@@ -9628,7 +9711,7 @@
                 </a:solidFill>
                 <a:latin typeface="Calibri"/>
               </a:rPr>
-              <a:t>CSI 消失點分析</a:t>
+              <a:t>Windows 網路驅動架構總覽</a:t>
             </a:r>
           </a:p>
         </p:txBody>
@@ -9676,15 +9759,23 @@
         </p:nvSpPr>
         <p:spPr>
           <a:xfrm>
-            <a:off x="365760" y="1005840"/>
-            <a:ext cx="4754880" cy="402336"/>
-          </a:xfrm>
-          <a:prstGeom prst="rect">
-            <a:avLst/>
-          </a:prstGeom>
-          <a:solidFill>
-            <a:srgbClr val="545454"/>
-          </a:solidFill>
+            <a:off x="640080" y="966978"/>
+            <a:ext cx="6583680" cy="384048"/>
+          </a:xfrm>
+          <a:prstGeom prst="rect">
+            <a:avLst/>
+          </a:prstGeom>
+          <a:gradFill rotWithShape="1">
+            <a:gsLst>
+              <a:gs pos="0">
+                <a:srgbClr val="353535"/>
+              </a:gs>
+              <a:gs pos="100000">
+                <a:srgbClr val="3C3C3C"/>
+              </a:gs>
+            </a:gsLst>
+            <a:lin scaled="0" ang="0"/>
+          </a:gradFill>
           <a:ln w="12700">
             <a:solidFill>
               <a:srgbClr val="9A9A9A"/>
@@ -9717,7 +9808,7 @@
                 </a:solidFill>
                 <a:latin typeface="Calibri"/>
               </a:rPr>
-              <a:t>應用程式 / WinSock</a:t>
+              <a:t>應用程式</a:t>
             </a:r>
           </a:p>
         </p:txBody>
@@ -9730,8 +9821,8 @@
         </p:nvSpPr>
         <p:spPr>
           <a:xfrm>
-            <a:off x="5303520" y="1051560"/>
-            <a:ext cx="3474720" cy="402336"/>
+            <a:off x="7315200" y="966978"/>
+            <a:ext cx="1463040" cy="384048"/>
           </a:xfrm>
           <a:prstGeom prst="rect">
             <a:avLst/>
@@ -9746,479 +9837,34 @@
           <a:p>
             <a:pPr algn="l"/>
             <a:r>
-              <a:rPr sz="1300" b="0">
+              <a:rPr sz="1000" b="0">
                 <a:solidFill>
                   <a:srgbClr val="646464"/>
                 </a:solidFill>
                 <a:latin typeface="Calibri"/>
               </a:rPr>
-              <a:t>無法感知 CSI 存在</a:t>
-            </a:r>
-          </a:p>
-        </p:txBody>
-      </p:sp>
-      <p:sp>
-        <p:nvSpPr>
-          <p:cNvPr id="9" name="Rectangle 8"/>
-          <p:cNvSpPr/>
-          <p:nvPr/>
-        </p:nvSpPr>
-        <p:spPr>
-          <a:xfrm>
-            <a:off x="365760" y="1444752"/>
-            <a:ext cx="4754880" cy="402336"/>
-          </a:xfrm>
-          <a:prstGeom prst="rect">
-            <a:avLst/>
-          </a:prstGeom>
-          <a:solidFill>
-            <a:srgbClr val="545454"/>
-          </a:solidFill>
+              <a:t>User Mode</a:t>
+            </a:r>
+          </a:p>
+        </p:txBody>
+      </p:sp>
+      <p:cxnSp>
+        <p:nvCxnSpPr>
+          <p:cNvPr id="9" name="Connector 8"/>
+          <p:cNvCxnSpPr/>
+          <p:nvPr/>
+        </p:nvCxnSpPr>
+        <p:spPr>
+          <a:xfrm>
+            <a:off x="3931920" y="1351026"/>
+            <a:ext cx="0" cy="36576"/>
+          </a:xfrm>
+          <a:prstGeom prst="line">
+            <a:avLst/>
+          </a:prstGeom>
           <a:ln w="12700">
             <a:solidFill>
               <a:srgbClr val="9A9A9A"/>
-            </a:solidFill>
-          </a:ln>
-        </p:spPr>
-        <p:style>
-          <a:lnRef idx="1">
-            <a:schemeClr val="accent1"/>
-          </a:lnRef>
-          <a:fillRef idx="3">
-            <a:schemeClr val="accent1"/>
-          </a:fillRef>
-          <a:effectRef idx="2">
-            <a:schemeClr val="accent1"/>
-          </a:effectRef>
-          <a:fontRef idx="minor">
-            <a:schemeClr val="lt1"/>
-          </a:fontRef>
-        </p:style>
-        <p:txBody>
-          <a:bodyPr rtlCol="0" anchor="ctr"/>
-          <a:lstStyle/>
-          <a:p>
-            <a:pPr algn="ctr"/>
-            <a:r>
-              <a:rPr sz="1400" b="1">
-                <a:solidFill>
-                  <a:srgbClr val="FFFFFF"/>
-                </a:solidFill>
-                <a:latin typeface="Calibri"/>
-              </a:rPr>
-              <a:t>tcpip.sys</a:t>
-            </a:r>
-          </a:p>
-        </p:txBody>
-      </p:sp>
-      <p:sp>
-        <p:nvSpPr>
-          <p:cNvPr id="10" name="TextBox 9"/>
-          <p:cNvSpPr txBox="1"/>
-          <p:nvPr/>
-        </p:nvSpPr>
-        <p:spPr>
-          <a:xfrm>
-            <a:off x="5303520" y="1490472"/>
-            <a:ext cx="3474720" cy="402336"/>
-          </a:xfrm>
-          <a:prstGeom prst="rect">
-            <a:avLst/>
-          </a:prstGeom>
-          <a:noFill/>
-        </p:spPr>
-        <p:txBody>
-          <a:bodyPr wrap="square">
-            <a:spAutoFit/>
-          </a:bodyPr>
-          <a:lstStyle/>
-          <a:p>
-            <a:pPr algn="l"/>
-            <a:r>
-              <a:rPr sz="1300" b="0">
-                <a:solidFill>
-                  <a:srgbClr val="646464"/>
-                </a:solidFill>
-                <a:latin typeface="Calibri"/>
-              </a:rPr>
-              <a:t>只處理 IP 封包</a:t>
-            </a:r>
-          </a:p>
-        </p:txBody>
-      </p:sp>
-      <p:sp>
-        <p:nvSpPr>
-          <p:cNvPr id="11" name="Rectangle 10"/>
-          <p:cNvSpPr/>
-          <p:nvPr/>
-        </p:nvSpPr>
-        <p:spPr>
-          <a:xfrm>
-            <a:off x="365760" y="1883664"/>
-            <a:ext cx="4754880" cy="402336"/>
-          </a:xfrm>
-          <a:prstGeom prst="rect">
-            <a:avLst/>
-          </a:prstGeom>
-          <a:solidFill>
-            <a:srgbClr val="555555"/>
-          </a:solidFill>
-          <a:ln w="31750">
-            <a:solidFill>
-              <a:srgbClr val="909090"/>
-            </a:solidFill>
-          </a:ln>
-        </p:spPr>
-        <p:style>
-          <a:lnRef idx="1">
-            <a:schemeClr val="accent1"/>
-          </a:lnRef>
-          <a:fillRef idx="3">
-            <a:schemeClr val="accent1"/>
-          </a:fillRef>
-          <a:effectRef idx="2">
-            <a:schemeClr val="accent1"/>
-          </a:effectRef>
-          <a:fontRef idx="minor">
-            <a:schemeClr val="lt1"/>
-          </a:fontRef>
-        </p:style>
-        <p:txBody>
-          <a:bodyPr rtlCol="0" anchor="ctr"/>
-          <a:lstStyle/>
-          <a:p>
-            <a:pPr algn="ctr"/>
-            <a:r>
-              <a:rPr sz="1400" b="1">
-                <a:solidFill>
-                  <a:srgbClr val="FFFFFF"/>
-                </a:solidFill>
-                <a:latin typeface="Calibri"/>
-              </a:rPr>
-              <a:t>ndis.sys（NDIS）</a:t>
-            </a:r>
-          </a:p>
-        </p:txBody>
-      </p:sp>
-      <p:sp>
-        <p:nvSpPr>
-          <p:cNvPr id="12" name="TextBox 11"/>
-          <p:cNvSpPr txBox="1"/>
-          <p:nvPr/>
-        </p:nvSpPr>
-        <p:spPr>
-          <a:xfrm>
-            <a:off x="5303520" y="1929384"/>
-            <a:ext cx="3474720" cy="402336"/>
-          </a:xfrm>
-          <a:prstGeom prst="rect">
-            <a:avLst/>
-          </a:prstGeom>
-          <a:noFill/>
-        </p:spPr>
-        <p:txBody>
-          <a:bodyPr wrap="square">
-            <a:spAutoFit/>
-          </a:bodyPr>
-          <a:lstStyle/>
-          <a:p>
-            <a:pPr algn="l"/>
-            <a:r>
-              <a:rPr sz="1300" b="0">
-                <a:solidFill>
-                  <a:srgbClr val="787878"/>
-                </a:solidFill>
-                <a:latin typeface="Calibri"/>
-              </a:rPr>
-              <a:t>無 CSI OID 定義</a:t>
-            </a:r>
-          </a:p>
-        </p:txBody>
-      </p:sp>
-      <p:sp>
-        <p:nvSpPr>
-          <p:cNvPr id="13" name="Rectangle 12"/>
-          <p:cNvSpPr/>
-          <p:nvPr/>
-        </p:nvSpPr>
-        <p:spPr>
-          <a:xfrm>
-            <a:off x="365760" y="2322576"/>
-            <a:ext cx="4754880" cy="402336"/>
-          </a:xfrm>
-          <a:prstGeom prst="rect">
-            <a:avLst/>
-          </a:prstGeom>
-          <a:solidFill>
-            <a:srgbClr val="303030"/>
-          </a:solidFill>
-          <a:ln w="31750">
-            <a:solidFill>
-              <a:srgbClr val="B8B8B8"/>
-            </a:solidFill>
-          </a:ln>
-        </p:spPr>
-        <p:style>
-          <a:lnRef idx="1">
-            <a:schemeClr val="accent1"/>
-          </a:lnRef>
-          <a:fillRef idx="3">
-            <a:schemeClr val="accent1"/>
-          </a:fillRef>
-          <a:effectRef idx="2">
-            <a:schemeClr val="accent1"/>
-          </a:effectRef>
-          <a:fontRef idx="minor">
-            <a:schemeClr val="lt1"/>
-          </a:fontRef>
-        </p:style>
-        <p:txBody>
-          <a:bodyPr rtlCol="0" anchor="ctr"/>
-          <a:lstStyle/>
-          <a:p>
-            <a:pPr algn="ctr"/>
-            <a:r>
-              <a:rPr sz="1400" b="1">
-                <a:solidFill>
-                  <a:srgbClr val="FFFFFF"/>
-                </a:solidFill>
-                <a:latin typeface="Calibri"/>
-              </a:rPr>
-              <a:t>nwifi.sys</a:t>
-            </a:r>
-          </a:p>
-        </p:txBody>
-      </p:sp>
-      <p:sp>
-        <p:nvSpPr>
-          <p:cNvPr id="14" name="TextBox 13"/>
-          <p:cNvSpPr txBox="1"/>
-          <p:nvPr/>
-        </p:nvSpPr>
-        <p:spPr>
-          <a:xfrm>
-            <a:off x="5303520" y="2368296"/>
-            <a:ext cx="3474720" cy="402336"/>
-          </a:xfrm>
-          <a:prstGeom prst="rect">
-            <a:avLst/>
-          </a:prstGeom>
-          <a:noFill/>
-        </p:spPr>
-        <p:txBody>
-          <a:bodyPr wrap="square">
-            <a:spAutoFit/>
-          </a:bodyPr>
-          <a:lstStyle/>
-          <a:p>
-            <a:pPr algn="l"/>
-            <a:r>
-              <a:rPr sz="1300" b="0">
-                <a:solidFill>
-                  <a:srgbClr val="444444"/>
-                </a:solidFill>
-                <a:latin typeface="Calibri"/>
-              </a:rPr>
-              <a:t>丟棄所有 PHY metadata</a:t>
-            </a:r>
-          </a:p>
-        </p:txBody>
-      </p:sp>
-      <p:sp>
-        <p:nvSpPr>
-          <p:cNvPr id="15" name="Rectangle 14"/>
-          <p:cNvSpPr/>
-          <p:nvPr/>
-        </p:nvSpPr>
-        <p:spPr>
-          <a:xfrm>
-            <a:off x="365760" y="2761488"/>
-            <a:ext cx="4754880" cy="402336"/>
-          </a:xfrm>
-          <a:prstGeom prst="rect">
-            <a:avLst/>
-          </a:prstGeom>
-          <a:solidFill>
-            <a:srgbClr val="303030"/>
-          </a:solidFill>
-          <a:ln w="31750">
-            <a:solidFill>
-              <a:srgbClr val="B8B8B8"/>
-            </a:solidFill>
-          </a:ln>
-        </p:spPr>
-        <p:style>
-          <a:lnRef idx="1">
-            <a:schemeClr val="accent1"/>
-          </a:lnRef>
-          <a:fillRef idx="3">
-            <a:schemeClr val="accent1"/>
-          </a:fillRef>
-          <a:effectRef idx="2">
-            <a:schemeClr val="accent1"/>
-          </a:effectRef>
-          <a:fontRef idx="minor">
-            <a:schemeClr val="lt1"/>
-          </a:fontRef>
-        </p:style>
-        <p:txBody>
-          <a:bodyPr rtlCol="0" anchor="ctr"/>
-          <a:lstStyle/>
-          <a:p>
-            <a:pPr algn="ctr"/>
-            <a:r>
-              <a:rPr sz="1400" b="1">
-                <a:solidFill>
-                  <a:srgbClr val="FFFFFF"/>
-                </a:solidFill>
-                <a:latin typeface="Calibri"/>
-              </a:rPr>
-              <a:t>OEM.sys</a:t>
-            </a:r>
-          </a:p>
-        </p:txBody>
-      </p:sp>
-      <p:sp>
-        <p:nvSpPr>
-          <p:cNvPr id="16" name="TextBox 15"/>
-          <p:cNvSpPr txBox="1"/>
-          <p:nvPr/>
-        </p:nvSpPr>
-        <p:spPr>
-          <a:xfrm>
-            <a:off x="5303520" y="2807208"/>
-            <a:ext cx="3474720" cy="402336"/>
-          </a:xfrm>
-          <a:prstGeom prst="rect">
-            <a:avLst/>
-          </a:prstGeom>
-          <a:noFill/>
-        </p:spPr>
-        <p:txBody>
-          <a:bodyPr wrap="square">
-            <a:spAutoFit/>
-          </a:bodyPr>
-          <a:lstStyle/>
-          <a:p>
-            <a:pPr algn="l"/>
-            <a:r>
-              <a:rPr sz="1300" b="0">
-                <a:solidFill>
-                  <a:srgbClr val="444444"/>
-                </a:solidFill>
-                <a:latin typeface="Calibri"/>
-              </a:rPr>
-              <a:t>能讀取 CSI，但不上報</a:t>
-            </a:r>
-          </a:p>
-        </p:txBody>
-      </p:sp>
-      <p:sp>
-        <p:nvSpPr>
-          <p:cNvPr id="17" name="Rectangle 16"/>
-          <p:cNvSpPr/>
-          <p:nvPr/>
-        </p:nvSpPr>
-        <p:spPr>
-          <a:xfrm>
-            <a:off x="365760" y="3200400"/>
-            <a:ext cx="4754880" cy="402336"/>
-          </a:xfrm>
-          <a:prstGeom prst="rect">
-            <a:avLst/>
-          </a:prstGeom>
-          <a:solidFill>
-            <a:srgbClr val="727272"/>
-          </a:solidFill>
-          <a:ln w="12700">
-            <a:solidFill>
-              <a:srgbClr val="828282"/>
-            </a:solidFill>
-          </a:ln>
-        </p:spPr>
-        <p:style>
-          <a:lnRef idx="1">
-            <a:schemeClr val="accent1"/>
-          </a:lnRef>
-          <a:fillRef idx="3">
-            <a:schemeClr val="accent1"/>
-          </a:fillRef>
-          <a:effectRef idx="2">
-            <a:schemeClr val="accent1"/>
-          </a:effectRef>
-          <a:fontRef idx="minor">
-            <a:schemeClr val="lt1"/>
-          </a:fontRef>
-        </p:style>
-        <p:txBody>
-          <a:bodyPr rtlCol="0" anchor="ctr"/>
-          <a:lstStyle/>
-          <a:p>
-            <a:pPr algn="ctr"/>
-            <a:r>
-              <a:rPr sz="1400" b="1">
-                <a:solidFill>
-                  <a:srgbClr val="FFFFFF"/>
-                </a:solidFill>
-                <a:latin typeface="Calibri"/>
-              </a:rPr>
-              <a:t>NIC 韌體 + 硬體</a:t>
-            </a:r>
-          </a:p>
-        </p:txBody>
-      </p:sp>
-      <p:sp>
-        <p:nvSpPr>
-          <p:cNvPr id="18" name="TextBox 17"/>
-          <p:cNvSpPr txBox="1"/>
-          <p:nvPr/>
-        </p:nvSpPr>
-        <p:spPr>
-          <a:xfrm>
-            <a:off x="5303520" y="3246120"/>
-            <a:ext cx="3474720" cy="402336"/>
-          </a:xfrm>
-          <a:prstGeom prst="rect">
-            <a:avLst/>
-          </a:prstGeom>
-          <a:noFill/>
-        </p:spPr>
-        <p:txBody>
-          <a:bodyPr wrap="square">
-            <a:spAutoFit/>
-          </a:bodyPr>
-          <a:lstStyle/>
-          <a:p>
-            <a:pPr algn="l"/>
-            <a:r>
-              <a:rPr sz="1300" b="0">
-                <a:solidFill>
-                  <a:srgbClr val="888888"/>
-                </a:solidFill>
-                <a:latin typeface="Calibri"/>
-              </a:rPr>
-              <a:t>CSI 計算並儲存於此</a:t>
-            </a:r>
-          </a:p>
-        </p:txBody>
-      </p:sp>
-      <p:cxnSp>
-        <p:nvCxnSpPr>
-          <p:cNvPr id="19" name="Connector 18"/>
-          <p:cNvCxnSpPr/>
-          <p:nvPr/>
-        </p:nvCxnSpPr>
-        <p:spPr>
-          <a:xfrm>
-            <a:off x="365760" y="4393688"/>
-            <a:ext cx="8412480" cy="0"/>
-          </a:xfrm>
-          <a:prstGeom prst="line">
-            <a:avLst/>
-          </a:prstGeom>
-          <a:ln w="6350">
-            <a:solidFill>
-              <a:srgbClr val="D8D8D8"/>
             </a:solidFill>
           </a:ln>
         </p:spPr>
@@ -10239,14 +9885,76 @@
       </p:cxnSp>
       <p:sp>
         <p:nvSpPr>
-          <p:cNvPr id="20" name="TextBox 19"/>
+          <p:cNvPr id="10" name="Rectangle 9"/>
+          <p:cNvSpPr/>
+          <p:nvPr/>
+        </p:nvSpPr>
+        <p:spPr>
+          <a:xfrm>
+            <a:off x="640080" y="1387602"/>
+            <a:ext cx="6583680" cy="384048"/>
+          </a:xfrm>
+          <a:prstGeom prst="rect">
+            <a:avLst/>
+          </a:prstGeom>
+          <a:gradFill rotWithShape="1">
+            <a:gsLst>
+              <a:gs pos="0">
+                <a:srgbClr val="424242"/>
+              </a:gs>
+              <a:gs pos="100000">
+                <a:srgbClr val="4B4B4B"/>
+              </a:gs>
+            </a:gsLst>
+            <a:lin scaled="0" ang="0"/>
+          </a:gradFill>
+          <a:ln w="12700">
+            <a:solidFill>
+              <a:srgbClr val="9A9A9A"/>
+            </a:solidFill>
+          </a:ln>
+        </p:spPr>
+        <p:style>
+          <a:lnRef idx="1">
+            <a:schemeClr val="accent1"/>
+          </a:lnRef>
+          <a:fillRef idx="3">
+            <a:schemeClr val="accent1"/>
+          </a:fillRef>
+          <a:effectRef idx="2">
+            <a:schemeClr val="accent1"/>
+          </a:effectRef>
+          <a:fontRef idx="minor">
+            <a:schemeClr val="lt1"/>
+          </a:fontRef>
+        </p:style>
+        <p:txBody>
+          <a:bodyPr rtlCol="0" anchor="ctr"/>
+          <a:lstStyle/>
+          <a:p>
+            <a:pPr algn="ctr"/>
+            <a:r>
+              <a:rPr sz="1400" b="1">
+                <a:solidFill>
+                  <a:srgbClr val="FFFFFF"/>
+                </a:solidFill>
+                <a:latin typeface="Calibri"/>
+              </a:rPr>
+              <a:t>WinSock (ws2_32.dll)</a:t>
+            </a:r>
+          </a:p>
+        </p:txBody>
+      </p:sp>
+      <p:sp>
+        <p:nvSpPr>
+          <p:cNvPr id="11" name="TextBox 10"/>
           <p:cNvSpPr txBox="1"/>
           <p:nvPr/>
         </p:nvSpPr>
         <p:spPr>
           <a:xfrm>
-            <a:off x="457200" y="4393692"/>
-            <a:ext cx="8229600" cy="256032"/>
+            <a:off x="7315200" y="1387602"/>
+            <a:ext cx="1463040" cy="384048"/>
           </a:xfrm>
           <a:prstGeom prst="rect">
             <a:avLst/>
@@ -10261,20 +9969,882 @@
           <a:p>
             <a:pPr algn="l"/>
             <a:r>
+              <a:rPr sz="1000" b="0">
+                <a:solidFill>
+                  <a:srgbClr val="646464"/>
+                </a:solidFill>
+                <a:latin typeface="Calibri"/>
+              </a:rPr>
+              <a:t>User Mode</a:t>
+            </a:r>
+          </a:p>
+        </p:txBody>
+      </p:sp>
+      <p:cxnSp>
+        <p:nvCxnSpPr>
+          <p:cNvPr id="12" name="Connector 11"/>
+          <p:cNvCxnSpPr/>
+          <p:nvPr/>
+        </p:nvCxnSpPr>
+        <p:spPr>
+          <a:xfrm>
+            <a:off x="3931920" y="1771650"/>
+            <a:ext cx="0" cy="36576"/>
+          </a:xfrm>
+          <a:prstGeom prst="line">
+            <a:avLst/>
+          </a:prstGeom>
+          <a:ln w="12700">
+            <a:solidFill>
+              <a:srgbClr val="9A9A9A"/>
+            </a:solidFill>
+          </a:ln>
+        </p:spPr>
+        <p:style>
+          <a:lnRef idx="2">
+            <a:schemeClr val="accent1"/>
+          </a:lnRef>
+          <a:fillRef idx="0">
+            <a:schemeClr val="accent1"/>
+          </a:fillRef>
+          <a:effectRef idx="1">
+            <a:schemeClr val="accent1"/>
+          </a:effectRef>
+          <a:fontRef idx="minor">
+            <a:schemeClr val="tx1"/>
+          </a:fontRef>
+        </p:style>
+      </p:cxnSp>
+      <p:sp>
+        <p:nvSpPr>
+          <p:cNvPr id="13" name="Rectangle 12"/>
+          <p:cNvSpPr/>
+          <p:nvPr/>
+        </p:nvSpPr>
+        <p:spPr>
+          <a:xfrm>
+            <a:off x="640080" y="1808226"/>
+            <a:ext cx="6583680" cy="384048"/>
+          </a:xfrm>
+          <a:prstGeom prst="rect">
+            <a:avLst/>
+          </a:prstGeom>
+          <a:gradFill rotWithShape="1">
+            <a:gsLst>
+              <a:gs pos="0">
+                <a:srgbClr val="4E4E4E"/>
+              </a:gs>
+              <a:gs pos="100000">
+                <a:srgbClr val="595959"/>
+              </a:gs>
+            </a:gsLst>
+            <a:lin scaled="0" ang="0"/>
+          </a:gradFill>
+          <a:ln w="12700">
+            <a:solidFill>
+              <a:srgbClr val="9A9A9A"/>
+            </a:solidFill>
+          </a:ln>
+        </p:spPr>
+        <p:style>
+          <a:lnRef idx="1">
+            <a:schemeClr val="accent1"/>
+          </a:lnRef>
+          <a:fillRef idx="3">
+            <a:schemeClr val="accent1"/>
+          </a:fillRef>
+          <a:effectRef idx="2">
+            <a:schemeClr val="accent1"/>
+          </a:effectRef>
+          <a:fontRef idx="minor">
+            <a:schemeClr val="lt1"/>
+          </a:fontRef>
+        </p:style>
+        <p:txBody>
+          <a:bodyPr rtlCol="0" anchor="ctr"/>
+          <a:lstStyle/>
+          <a:p>
+            <a:pPr algn="ctr"/>
+            <a:r>
+              <a:rPr sz="1400" b="1">
+                <a:solidFill>
+                  <a:srgbClr val="FFFFFF"/>
+                </a:solidFill>
+                <a:latin typeface="Calibri"/>
+              </a:rPr>
+              <a:t>AFD.sys（Ancillary Function Driver）</a:t>
+            </a:r>
+          </a:p>
+        </p:txBody>
+      </p:sp>
+      <p:sp>
+        <p:nvSpPr>
+          <p:cNvPr id="14" name="TextBox 13"/>
+          <p:cNvSpPr txBox="1"/>
+          <p:nvPr/>
+        </p:nvSpPr>
+        <p:spPr>
+          <a:xfrm>
+            <a:off x="7315200" y="1808226"/>
+            <a:ext cx="1463040" cy="384048"/>
+          </a:xfrm>
+          <a:prstGeom prst="rect">
+            <a:avLst/>
+          </a:prstGeom>
+          <a:noFill/>
+        </p:spPr>
+        <p:txBody>
+          <a:bodyPr wrap="square">
+            <a:spAutoFit/>
+          </a:bodyPr>
+          <a:lstStyle/>
+          <a:p>
+            <a:pPr algn="l"/>
+            <a:r>
+              <a:rPr sz="1000" b="0">
+                <a:solidFill>
+                  <a:srgbClr val="646464"/>
+                </a:solidFill>
+                <a:latin typeface="Calibri"/>
+              </a:rPr>
+              <a:t>Kernel Mode</a:t>
+            </a:r>
+          </a:p>
+        </p:txBody>
+      </p:sp>
+      <p:cxnSp>
+        <p:nvCxnSpPr>
+          <p:cNvPr id="15" name="Connector 14"/>
+          <p:cNvCxnSpPr/>
+          <p:nvPr/>
+        </p:nvCxnSpPr>
+        <p:spPr>
+          <a:xfrm>
+            <a:off x="3931920" y="2192274"/>
+            <a:ext cx="0" cy="36576"/>
+          </a:xfrm>
+          <a:prstGeom prst="line">
+            <a:avLst/>
+          </a:prstGeom>
+          <a:ln w="12700">
+            <a:solidFill>
+              <a:srgbClr val="9A9A9A"/>
+            </a:solidFill>
+          </a:ln>
+        </p:spPr>
+        <p:style>
+          <a:lnRef idx="2">
+            <a:schemeClr val="accent1"/>
+          </a:lnRef>
+          <a:fillRef idx="0">
+            <a:schemeClr val="accent1"/>
+          </a:fillRef>
+          <a:effectRef idx="1">
+            <a:schemeClr val="accent1"/>
+          </a:effectRef>
+          <a:fontRef idx="minor">
+            <a:schemeClr val="tx1"/>
+          </a:fontRef>
+        </p:style>
+      </p:cxnSp>
+      <p:sp>
+        <p:nvSpPr>
+          <p:cNvPr id="16" name="Rectangle 15"/>
+          <p:cNvSpPr/>
+          <p:nvPr/>
+        </p:nvSpPr>
+        <p:spPr>
+          <a:xfrm>
+            <a:off x="640080" y="2228850"/>
+            <a:ext cx="6583680" cy="384048"/>
+          </a:xfrm>
+          <a:prstGeom prst="rect">
+            <a:avLst/>
+          </a:prstGeom>
+          <a:gradFill rotWithShape="1">
+            <a:gsLst>
+              <a:gs pos="0">
+                <a:srgbClr val="5A5A5A"/>
+              </a:gs>
+              <a:gs pos="100000">
+                <a:srgbClr val="676767"/>
+              </a:gs>
+            </a:gsLst>
+            <a:lin scaled="0" ang="0"/>
+          </a:gradFill>
+          <a:ln w="12700">
+            <a:solidFill>
+              <a:srgbClr val="9A9A9A"/>
+            </a:solidFill>
+          </a:ln>
+        </p:spPr>
+        <p:style>
+          <a:lnRef idx="1">
+            <a:schemeClr val="accent1"/>
+          </a:lnRef>
+          <a:fillRef idx="3">
+            <a:schemeClr val="accent1"/>
+          </a:fillRef>
+          <a:effectRef idx="2">
+            <a:schemeClr val="accent1"/>
+          </a:effectRef>
+          <a:fontRef idx="minor">
+            <a:schemeClr val="lt1"/>
+          </a:fontRef>
+        </p:style>
+        <p:txBody>
+          <a:bodyPr rtlCol="0" anchor="ctr"/>
+          <a:lstStyle/>
+          <a:p>
+            <a:pPr algn="ctr"/>
+            <a:r>
+              <a:rPr sz="1400" b="1">
+                <a:solidFill>
+                  <a:srgbClr val="FFFFFF"/>
+                </a:solidFill>
+                <a:latin typeface="Calibri"/>
+              </a:rPr>
+              <a:t>tcpip.sys（TCP/IP Stack）</a:t>
+            </a:r>
+          </a:p>
+        </p:txBody>
+      </p:sp>
+      <p:sp>
+        <p:nvSpPr>
+          <p:cNvPr id="17" name="TextBox 16"/>
+          <p:cNvSpPr txBox="1"/>
+          <p:nvPr/>
+        </p:nvSpPr>
+        <p:spPr>
+          <a:xfrm>
+            <a:off x="7315200" y="2228850"/>
+            <a:ext cx="1463040" cy="384048"/>
+          </a:xfrm>
+          <a:prstGeom prst="rect">
+            <a:avLst/>
+          </a:prstGeom>
+          <a:noFill/>
+        </p:spPr>
+        <p:txBody>
+          <a:bodyPr wrap="square">
+            <a:spAutoFit/>
+          </a:bodyPr>
+          <a:lstStyle/>
+          <a:p>
+            <a:pPr algn="l"/>
+            <a:r>
+              <a:rPr sz="1000" b="0">
+                <a:solidFill>
+                  <a:srgbClr val="646464"/>
+                </a:solidFill>
+                <a:latin typeface="Calibri"/>
+              </a:rPr>
+              <a:t>Kernel Mode</a:t>
+            </a:r>
+          </a:p>
+        </p:txBody>
+      </p:sp>
+      <p:cxnSp>
+        <p:nvCxnSpPr>
+          <p:cNvPr id="18" name="Connector 17"/>
+          <p:cNvCxnSpPr/>
+          <p:nvPr/>
+        </p:nvCxnSpPr>
+        <p:spPr>
+          <a:xfrm>
+            <a:off x="3931920" y="2612898"/>
+            <a:ext cx="0" cy="36576"/>
+          </a:xfrm>
+          <a:prstGeom prst="line">
+            <a:avLst/>
+          </a:prstGeom>
+          <a:ln w="12700">
+            <a:solidFill>
+              <a:srgbClr val="9A9A9A"/>
+            </a:solidFill>
+          </a:ln>
+        </p:spPr>
+        <p:style>
+          <a:lnRef idx="2">
+            <a:schemeClr val="accent1"/>
+          </a:lnRef>
+          <a:fillRef idx="0">
+            <a:schemeClr val="accent1"/>
+          </a:fillRef>
+          <a:effectRef idx="1">
+            <a:schemeClr val="accent1"/>
+          </a:effectRef>
+          <a:fontRef idx="minor">
+            <a:schemeClr val="tx1"/>
+          </a:fontRef>
+        </p:style>
+      </p:cxnSp>
+      <p:sp>
+        <p:nvSpPr>
+          <p:cNvPr id="19" name="Rectangle 18"/>
+          <p:cNvSpPr/>
+          <p:nvPr/>
+        </p:nvSpPr>
+        <p:spPr>
+          <a:xfrm>
+            <a:off x="640080" y="2649474"/>
+            <a:ext cx="6583680" cy="384048"/>
+          </a:xfrm>
+          <a:prstGeom prst="rect">
+            <a:avLst/>
+          </a:prstGeom>
+          <a:gradFill rotWithShape="1">
+            <a:gsLst>
+              <a:gs pos="0">
+                <a:srgbClr val="666666"/>
+              </a:gs>
+              <a:gs pos="100000">
+                <a:srgbClr val="757575"/>
+              </a:gs>
+            </a:gsLst>
+            <a:lin scaled="0" ang="0"/>
+          </a:gradFill>
+          <a:ln w="12700">
+            <a:solidFill>
+              <a:srgbClr val="9A9A9A"/>
+            </a:solidFill>
+          </a:ln>
+        </p:spPr>
+        <p:style>
+          <a:lnRef idx="1">
+            <a:schemeClr val="accent1"/>
+          </a:lnRef>
+          <a:fillRef idx="3">
+            <a:schemeClr val="accent1"/>
+          </a:fillRef>
+          <a:effectRef idx="2">
+            <a:schemeClr val="accent1"/>
+          </a:effectRef>
+          <a:fontRef idx="minor">
+            <a:schemeClr val="lt1"/>
+          </a:fontRef>
+        </p:style>
+        <p:txBody>
+          <a:bodyPr rtlCol="0" anchor="ctr"/>
+          <a:lstStyle/>
+          <a:p>
+            <a:pPr algn="ctr"/>
+            <a:r>
+              <a:rPr sz="1400" b="1">
+                <a:solidFill>
+                  <a:srgbClr val="FFFFFF"/>
+                </a:solidFill>
+                <a:latin typeface="Calibri"/>
+              </a:rPr>
+              <a:t>ndis.sys（NDIS）</a:t>
+            </a:r>
+          </a:p>
+        </p:txBody>
+      </p:sp>
+      <p:sp>
+        <p:nvSpPr>
+          <p:cNvPr id="20" name="TextBox 19"/>
+          <p:cNvSpPr txBox="1"/>
+          <p:nvPr/>
+        </p:nvSpPr>
+        <p:spPr>
+          <a:xfrm>
+            <a:off x="7315200" y="2649474"/>
+            <a:ext cx="1463040" cy="384048"/>
+          </a:xfrm>
+          <a:prstGeom prst="rect">
+            <a:avLst/>
+          </a:prstGeom>
+          <a:noFill/>
+        </p:spPr>
+        <p:txBody>
+          <a:bodyPr wrap="square">
+            <a:spAutoFit/>
+          </a:bodyPr>
+          <a:lstStyle/>
+          <a:p>
+            <a:pPr algn="l"/>
+            <a:r>
+              <a:rPr sz="1000" b="0">
+                <a:solidFill>
+                  <a:srgbClr val="646464"/>
+                </a:solidFill>
+                <a:latin typeface="Calibri"/>
+              </a:rPr>
+              <a:t>Kernel Mode</a:t>
+            </a:r>
+          </a:p>
+        </p:txBody>
+      </p:sp>
+      <p:cxnSp>
+        <p:nvCxnSpPr>
+          <p:cNvPr id="21" name="Connector 20"/>
+          <p:cNvCxnSpPr/>
+          <p:nvPr/>
+        </p:nvCxnSpPr>
+        <p:spPr>
+          <a:xfrm>
+            <a:off x="3931920" y="3033522"/>
+            <a:ext cx="0" cy="36576"/>
+          </a:xfrm>
+          <a:prstGeom prst="line">
+            <a:avLst/>
+          </a:prstGeom>
+          <a:ln w="12700">
+            <a:solidFill>
+              <a:srgbClr val="9A9A9A"/>
+            </a:solidFill>
+          </a:ln>
+        </p:spPr>
+        <p:style>
+          <a:lnRef idx="2">
+            <a:schemeClr val="accent1"/>
+          </a:lnRef>
+          <a:fillRef idx="0">
+            <a:schemeClr val="accent1"/>
+          </a:fillRef>
+          <a:effectRef idx="1">
+            <a:schemeClr val="accent1"/>
+          </a:effectRef>
+          <a:fontRef idx="minor">
+            <a:schemeClr val="tx1"/>
+          </a:fontRef>
+        </p:style>
+      </p:cxnSp>
+      <p:sp>
+        <p:nvSpPr>
+          <p:cNvPr id="22" name="Rectangle 21"/>
+          <p:cNvSpPr/>
+          <p:nvPr/>
+        </p:nvSpPr>
+        <p:spPr>
+          <a:xfrm>
+            <a:off x="640080" y="3070098"/>
+            <a:ext cx="6583680" cy="384048"/>
+          </a:xfrm>
+          <a:prstGeom prst="rect">
+            <a:avLst/>
+          </a:prstGeom>
+          <a:gradFill rotWithShape="1">
+            <a:gsLst>
+              <a:gs pos="0">
+                <a:srgbClr val="727272"/>
+              </a:gs>
+              <a:gs pos="100000">
+                <a:srgbClr val="838383"/>
+              </a:gs>
+            </a:gsLst>
+            <a:lin scaled="0" ang="0"/>
+          </a:gradFill>
+          <a:ln w="12700">
+            <a:solidFill>
+              <a:srgbClr val="9A9A9A"/>
+            </a:solidFill>
+          </a:ln>
+        </p:spPr>
+        <p:style>
+          <a:lnRef idx="1">
+            <a:schemeClr val="accent1"/>
+          </a:lnRef>
+          <a:fillRef idx="3">
+            <a:schemeClr val="accent1"/>
+          </a:fillRef>
+          <a:effectRef idx="2">
+            <a:schemeClr val="accent1"/>
+          </a:effectRef>
+          <a:fontRef idx="minor">
+            <a:schemeClr val="lt1"/>
+          </a:fontRef>
+        </p:style>
+        <p:txBody>
+          <a:bodyPr rtlCol="0" anchor="ctr"/>
+          <a:lstStyle/>
+          <a:p>
+            <a:pPr algn="ctr"/>
+            <a:r>
+              <a:rPr sz="1400" b="1">
+                <a:solidFill>
+                  <a:srgbClr val="FFFFFF"/>
+                </a:solidFill>
+                <a:latin typeface="Calibri"/>
+              </a:rPr>
+              <a:t>nwifi.sys（Native WiFi）</a:t>
+            </a:r>
+          </a:p>
+        </p:txBody>
+      </p:sp>
+      <p:sp>
+        <p:nvSpPr>
+          <p:cNvPr id="23" name="TextBox 22"/>
+          <p:cNvSpPr txBox="1"/>
+          <p:nvPr/>
+        </p:nvSpPr>
+        <p:spPr>
+          <a:xfrm>
+            <a:off x="7315200" y="3070098"/>
+            <a:ext cx="1463040" cy="384048"/>
+          </a:xfrm>
+          <a:prstGeom prst="rect">
+            <a:avLst/>
+          </a:prstGeom>
+          <a:noFill/>
+        </p:spPr>
+        <p:txBody>
+          <a:bodyPr wrap="square">
+            <a:spAutoFit/>
+          </a:bodyPr>
+          <a:lstStyle/>
+          <a:p>
+            <a:pPr algn="l"/>
+            <a:r>
+              <a:rPr sz="1000" b="0">
+                <a:solidFill>
+                  <a:srgbClr val="646464"/>
+                </a:solidFill>
+                <a:latin typeface="Calibri"/>
+              </a:rPr>
+              <a:t>Kernel Mode</a:t>
+            </a:r>
+          </a:p>
+        </p:txBody>
+      </p:sp>
+      <p:cxnSp>
+        <p:nvCxnSpPr>
+          <p:cNvPr id="24" name="Connector 23"/>
+          <p:cNvCxnSpPr/>
+          <p:nvPr/>
+        </p:nvCxnSpPr>
+        <p:spPr>
+          <a:xfrm>
+            <a:off x="3931920" y="3454146"/>
+            <a:ext cx="0" cy="36576"/>
+          </a:xfrm>
+          <a:prstGeom prst="line">
+            <a:avLst/>
+          </a:prstGeom>
+          <a:ln w="12700">
+            <a:solidFill>
+              <a:srgbClr val="9A9A9A"/>
+            </a:solidFill>
+          </a:ln>
+        </p:spPr>
+        <p:style>
+          <a:lnRef idx="2">
+            <a:schemeClr val="accent1"/>
+          </a:lnRef>
+          <a:fillRef idx="0">
+            <a:schemeClr val="accent1"/>
+          </a:fillRef>
+          <a:effectRef idx="1">
+            <a:schemeClr val="accent1"/>
+          </a:effectRef>
+          <a:fontRef idx="minor">
+            <a:schemeClr val="tx1"/>
+          </a:fontRef>
+        </p:style>
+      </p:cxnSp>
+      <p:sp>
+        <p:nvSpPr>
+          <p:cNvPr id="25" name="Rectangle 24"/>
+          <p:cNvSpPr/>
+          <p:nvPr/>
+        </p:nvSpPr>
+        <p:spPr>
+          <a:xfrm>
+            <a:off x="640080" y="3490722"/>
+            <a:ext cx="6583680" cy="384048"/>
+          </a:xfrm>
+          <a:prstGeom prst="rect">
+            <a:avLst/>
+          </a:prstGeom>
+          <a:gradFill rotWithShape="1">
+            <a:gsLst>
+              <a:gs pos="0">
+                <a:srgbClr val="7E7E7E"/>
+              </a:gs>
+              <a:gs pos="100000">
+                <a:srgbClr val="909090"/>
+              </a:gs>
+            </a:gsLst>
+            <a:lin scaled="0" ang="0"/>
+          </a:gradFill>
+          <a:ln w="12700">
+            <a:solidFill>
+              <a:srgbClr val="9A9A9A"/>
+            </a:solidFill>
+          </a:ln>
+        </p:spPr>
+        <p:style>
+          <a:lnRef idx="1">
+            <a:schemeClr val="accent1"/>
+          </a:lnRef>
+          <a:fillRef idx="3">
+            <a:schemeClr val="accent1"/>
+          </a:fillRef>
+          <a:effectRef idx="2">
+            <a:schemeClr val="accent1"/>
+          </a:effectRef>
+          <a:fontRef idx="minor">
+            <a:schemeClr val="lt1"/>
+          </a:fontRef>
+        </p:style>
+        <p:txBody>
+          <a:bodyPr rtlCol="0" anchor="ctr"/>
+          <a:lstStyle/>
+          <a:p>
+            <a:pPr algn="ctr"/>
+            <a:r>
+              <a:rPr sz="1400" b="1">
+                <a:solidFill>
+                  <a:srgbClr val="FFFFFF"/>
+                </a:solidFill>
+                <a:latin typeface="Calibri"/>
+              </a:rPr>
+              <a:t>OEM.sys（Miniport Driver）</a:t>
+            </a:r>
+          </a:p>
+        </p:txBody>
+      </p:sp>
+      <p:sp>
+        <p:nvSpPr>
+          <p:cNvPr id="26" name="TextBox 25"/>
+          <p:cNvSpPr txBox="1"/>
+          <p:nvPr/>
+        </p:nvSpPr>
+        <p:spPr>
+          <a:xfrm>
+            <a:off x="7315200" y="3490722"/>
+            <a:ext cx="1463040" cy="384048"/>
+          </a:xfrm>
+          <a:prstGeom prst="rect">
+            <a:avLst/>
+          </a:prstGeom>
+          <a:noFill/>
+        </p:spPr>
+        <p:txBody>
+          <a:bodyPr wrap="square">
+            <a:spAutoFit/>
+          </a:bodyPr>
+          <a:lstStyle/>
+          <a:p>
+            <a:pPr algn="l"/>
+            <a:r>
+              <a:rPr sz="1000" b="0">
+                <a:solidFill>
+                  <a:srgbClr val="646464"/>
+                </a:solidFill>
+                <a:latin typeface="Calibri"/>
+              </a:rPr>
+              <a:t>Kernel Mode</a:t>
+            </a:r>
+          </a:p>
+        </p:txBody>
+      </p:sp>
+      <p:cxnSp>
+        <p:nvCxnSpPr>
+          <p:cNvPr id="27" name="Connector 26"/>
+          <p:cNvCxnSpPr/>
+          <p:nvPr/>
+        </p:nvCxnSpPr>
+        <p:spPr>
+          <a:xfrm>
+            <a:off x="3931920" y="3874770"/>
+            <a:ext cx="0" cy="36576"/>
+          </a:xfrm>
+          <a:prstGeom prst="line">
+            <a:avLst/>
+          </a:prstGeom>
+          <a:ln w="12700">
+            <a:solidFill>
+              <a:srgbClr val="9A9A9A"/>
+            </a:solidFill>
+          </a:ln>
+        </p:spPr>
+        <p:style>
+          <a:lnRef idx="2">
+            <a:schemeClr val="accent1"/>
+          </a:lnRef>
+          <a:fillRef idx="0">
+            <a:schemeClr val="accent1"/>
+          </a:fillRef>
+          <a:effectRef idx="1">
+            <a:schemeClr val="accent1"/>
+          </a:effectRef>
+          <a:fontRef idx="minor">
+            <a:schemeClr val="tx1"/>
+          </a:fontRef>
+        </p:style>
+      </p:cxnSp>
+      <p:sp>
+        <p:nvSpPr>
+          <p:cNvPr id="28" name="Rectangle 27"/>
+          <p:cNvSpPr/>
+          <p:nvPr/>
+        </p:nvSpPr>
+        <p:spPr>
+          <a:xfrm>
+            <a:off x="640080" y="3911346"/>
+            <a:ext cx="6583680" cy="384048"/>
+          </a:xfrm>
+          <a:prstGeom prst="rect">
+            <a:avLst/>
+          </a:prstGeom>
+          <a:gradFill rotWithShape="1">
+            <a:gsLst>
+              <a:gs pos="0">
+                <a:srgbClr val="8A8A8A"/>
+              </a:gs>
+              <a:gs pos="100000">
+                <a:srgbClr val="9E9E9E"/>
+              </a:gs>
+            </a:gsLst>
+            <a:lin scaled="0" ang="0"/>
+          </a:gradFill>
+          <a:ln w="12700">
+            <a:solidFill>
+              <a:srgbClr val="9A9A9A"/>
+            </a:solidFill>
+          </a:ln>
+        </p:spPr>
+        <p:style>
+          <a:lnRef idx="1">
+            <a:schemeClr val="accent1"/>
+          </a:lnRef>
+          <a:fillRef idx="3">
+            <a:schemeClr val="accent1"/>
+          </a:fillRef>
+          <a:effectRef idx="2">
+            <a:schemeClr val="accent1"/>
+          </a:effectRef>
+          <a:fontRef idx="minor">
+            <a:schemeClr val="lt1"/>
+          </a:fontRef>
+        </p:style>
+        <p:txBody>
+          <a:bodyPr rtlCol="0" anchor="ctr"/>
+          <a:lstStyle/>
+          <a:p>
+            <a:pPr algn="ctr"/>
+            <a:r>
+              <a:rPr sz="1400" b="1">
+                <a:solidFill>
+                  <a:srgbClr val="FFFFFF"/>
+                </a:solidFill>
+                <a:latin typeface="Calibri"/>
+              </a:rPr>
+              <a:t>NIC 硬體 + 韌體</a:t>
+            </a:r>
+          </a:p>
+        </p:txBody>
+      </p:sp>
+      <p:sp>
+        <p:nvSpPr>
+          <p:cNvPr id="29" name="TextBox 28"/>
+          <p:cNvSpPr txBox="1"/>
+          <p:nvPr/>
+        </p:nvSpPr>
+        <p:spPr>
+          <a:xfrm>
+            <a:off x="7315200" y="3911346"/>
+            <a:ext cx="1463040" cy="384048"/>
+          </a:xfrm>
+          <a:prstGeom prst="rect">
+            <a:avLst/>
+          </a:prstGeom>
+          <a:noFill/>
+        </p:spPr>
+        <p:txBody>
+          <a:bodyPr wrap="square">
+            <a:spAutoFit/>
+          </a:bodyPr>
+          <a:lstStyle/>
+          <a:p>
+            <a:pPr algn="l"/>
+            <a:r>
+              <a:rPr sz="1000" b="0">
+                <a:solidFill>
+                  <a:srgbClr val="646464"/>
+                </a:solidFill>
+                <a:latin typeface="Calibri"/>
+              </a:rPr>
+              <a:t>Hardware</a:t>
+            </a:r>
+          </a:p>
+        </p:txBody>
+      </p:sp>
+      <p:cxnSp>
+        <p:nvCxnSpPr>
+          <p:cNvPr id="30" name="Connector 29"/>
+          <p:cNvCxnSpPr/>
+          <p:nvPr/>
+        </p:nvCxnSpPr>
+        <p:spPr>
+          <a:xfrm>
+            <a:off x="365760" y="4393688"/>
+            <a:ext cx="8412480" cy="0"/>
+          </a:xfrm>
+          <a:prstGeom prst="line">
+            <a:avLst/>
+          </a:prstGeom>
+          <a:ln w="6350">
+            <a:solidFill>
+              <a:srgbClr val="D8D8D8"/>
+            </a:solidFill>
+          </a:ln>
+        </p:spPr>
+        <p:style>
+          <a:lnRef idx="2">
+            <a:schemeClr val="accent1"/>
+          </a:lnRef>
+          <a:fillRef idx="0">
+            <a:schemeClr val="accent1"/>
+          </a:fillRef>
+          <a:effectRef idx="1">
+            <a:schemeClr val="accent1"/>
+          </a:effectRef>
+          <a:fontRef idx="minor">
+            <a:schemeClr val="tx1"/>
+          </a:fontRef>
+        </p:style>
+      </p:cxnSp>
+      <p:sp>
+        <p:nvSpPr>
+          <p:cNvPr id="31" name="TextBox 30"/>
+          <p:cNvSpPr txBox="1"/>
+          <p:nvPr/>
+        </p:nvSpPr>
+        <p:spPr>
+          <a:xfrm>
+            <a:off x="457200" y="4393692"/>
+            <a:ext cx="8229600" cy="256032"/>
+          </a:xfrm>
+          <a:prstGeom prst="rect">
+            <a:avLst/>
+          </a:prstGeom>
+          <a:noFill/>
+        </p:spPr>
+        <p:txBody>
+          <a:bodyPr wrap="square">
+            <a:spAutoFit/>
+          </a:bodyPr>
+          <a:lstStyle/>
+          <a:p>
+            <a:pPr algn="l"/>
+            <a:r>
               <a:rPr sz="1300" b="0">
                 <a:solidFill>
                   <a:srgbClr val="646464"/>
                 </a:solidFill>
                 <a:latin typeface="Calibri"/>
               </a:rPr>
-              <a:t>CSI 消失於 OEM.sys ↔ nwifi.sys 介面：OEM.sys 有能力讀取但選擇不轉發，nwifi.sys 也不要求</a:t>
-            </a:r>
-          </a:p>
-        </p:txBody>
-      </p:sp>
-      <p:sp>
-        <p:nvSpPr>
-          <p:cNvPr id="21" name="Rectangle 20"/>
+              <a:t>每層只能透過明確定義的介面與相鄰層溝通</a:t>
+            </a:r>
+          </a:p>
+        </p:txBody>
+      </p:sp>
+      <p:sp>
+        <p:nvSpPr>
+          <p:cNvPr id="32" name="Rectangle 31"/>
           <p:cNvSpPr/>
           <p:nvPr/>
         </p:nvSpPr>
@@ -10325,7 +10895,7 @@
       </p:sp>
       <p:sp>
         <p:nvSpPr>
-          <p:cNvPr id="22" name="TextBox 21"/>
+          <p:cNvPr id="33" name="TextBox 32"/>
           <p:cNvSpPr txBox="1"/>
           <p:nvPr/>
         </p:nvSpPr>
@@ -10360,7 +10930,7 @@
       </p:sp>
       <p:sp>
         <p:nvSpPr>
-          <p:cNvPr id="23" name="TextBox 22"/>
+          <p:cNvPr id="34" name="TextBox 33"/>
           <p:cNvSpPr txBox="1"/>
           <p:nvPr/>
         </p:nvSpPr>
@@ -10388,7 +10958,7 @@
                 </a:solidFill>
                 <a:latin typeface="Calibri"/>
               </a:rPr>
-              <a:t>15 / 24</a:t>
+              <a:t>15 / 25</a:t>
             </a:r>
           </a:p>
         </p:txBody>
@@ -10402,422 +10972,6 @@
 </file>
 
 <file path=ppt/slides/slide16.xml><?xml version="1.0" encoding="utf-8"?>
-<p:sld xmlns:a="http://schemas.openxmlformats.org/drawingml/2006/main" xmlns:p="http://schemas.openxmlformats.org/presentationml/2006/main" xmlns:r="http://schemas.openxmlformats.org/officeDocument/2006/relationships">
-  <p:cSld>
-    <p:spTree>
-      <p:nvGrpSpPr>
-        <p:cNvPr id="1" name=""/>
-        <p:cNvGrpSpPr/>
-        <p:nvPr/>
-      </p:nvGrpSpPr>
-      <p:grpSpPr/>
-      <p:sp>
-        <p:nvSpPr>
-          <p:cNvPr id="2" name="Rectangle 1"/>
-          <p:cNvSpPr/>
-          <p:nvPr/>
-        </p:nvSpPr>
-        <p:spPr>
-          <a:xfrm>
-            <a:off x="0" y="0"/>
-            <a:ext cx="9144000" cy="5143500"/>
-          </a:xfrm>
-          <a:prstGeom prst="rect">
-            <a:avLst/>
-          </a:prstGeom>
-          <a:gradFill rotWithShape="1">
-            <a:gsLst>
-              <a:gs pos="0">
-                <a:srgbClr val="121212"/>
-              </a:gs>
-              <a:gs pos="100000">
-                <a:srgbClr val="282828"/>
-              </a:gs>
-            </a:gsLst>
-            <a:lin scaled="0" ang="5400000"/>
-          </a:gradFill>
-          <a:ln>
-            <a:noFill/>
-          </a:ln>
-        </p:spPr>
-        <p:style>
-          <a:lnRef idx="1">
-            <a:schemeClr val="accent1"/>
-          </a:lnRef>
-          <a:fillRef idx="3">
-            <a:schemeClr val="accent1"/>
-          </a:fillRef>
-          <a:effectRef idx="2">
-            <a:schemeClr val="accent1"/>
-          </a:effectRef>
-          <a:fontRef idx="minor">
-            <a:schemeClr val="lt1"/>
-          </a:fontRef>
-        </p:style>
-        <p:txBody>
-          <a:bodyPr rtlCol="0" anchor="ctr"/>
-          <a:lstStyle/>
-          <a:p>
-            <a:pPr algn="ctr"/>
-          </a:p>
-        </p:txBody>
-      </p:sp>
-      <p:sp>
-        <p:nvSpPr>
-          <p:cNvPr id="3" name="Rectangle 2"/>
-          <p:cNvSpPr/>
-          <p:nvPr/>
-        </p:nvSpPr>
-        <p:spPr>
-          <a:xfrm>
-            <a:off x="0" y="0"/>
-            <a:ext cx="9144000" cy="109728"/>
-          </a:xfrm>
-          <a:prstGeom prst="rect">
-            <a:avLst/>
-          </a:prstGeom>
-          <a:gradFill rotWithShape="1">
-            <a:gsLst>
-              <a:gs pos="0">
-                <a:srgbClr val="9A9A9A"/>
-              </a:gs>
-              <a:gs pos="100000">
-                <a:srgbClr val="505050"/>
-              </a:gs>
-            </a:gsLst>
-            <a:lin scaled="0" ang="0"/>
-          </a:gradFill>
-          <a:ln>
-            <a:noFill/>
-          </a:ln>
-        </p:spPr>
-        <p:style>
-          <a:lnRef idx="1">
-            <a:schemeClr val="accent1"/>
-          </a:lnRef>
-          <a:fillRef idx="3">
-            <a:schemeClr val="accent1"/>
-          </a:fillRef>
-          <a:effectRef idx="2">
-            <a:schemeClr val="accent1"/>
-          </a:effectRef>
-          <a:fontRef idx="minor">
-            <a:schemeClr val="lt1"/>
-          </a:fontRef>
-        </p:style>
-        <p:txBody>
-          <a:bodyPr rtlCol="0" anchor="ctr"/>
-          <a:lstStyle/>
-          <a:p>
-            <a:pPr algn="ctr"/>
-          </a:p>
-        </p:txBody>
-      </p:sp>
-      <p:cxnSp>
-        <p:nvCxnSpPr>
-          <p:cNvPr id="4" name="Connector 3"/>
-          <p:cNvCxnSpPr/>
-          <p:nvPr/>
-        </p:nvCxnSpPr>
-        <p:spPr>
-          <a:xfrm>
-            <a:off x="0" y="109728"/>
-            <a:ext cx="9144000" cy="0"/>
-          </a:xfrm>
-          <a:prstGeom prst="line">
-            <a:avLst/>
-          </a:prstGeom>
-          <a:ln w="6350">
-            <a:solidFill>
-              <a:srgbClr val="606060"/>
-            </a:solidFill>
-          </a:ln>
-        </p:spPr>
-        <p:style>
-          <a:lnRef idx="2">
-            <a:schemeClr val="accent1"/>
-          </a:lnRef>
-          <a:fillRef idx="0">
-            <a:schemeClr val="accent1"/>
-          </a:fillRef>
-          <a:effectRef idx="1">
-            <a:schemeClr val="accent1"/>
-          </a:effectRef>
-          <a:fontRef idx="minor">
-            <a:schemeClr val="tx1"/>
-          </a:fontRef>
-        </p:style>
-      </p:cxnSp>
-      <p:sp>
-        <p:nvSpPr>
-          <p:cNvPr id="5" name="TextBox 4"/>
-          <p:cNvSpPr txBox="1"/>
-          <p:nvPr/>
-        </p:nvSpPr>
-        <p:spPr>
-          <a:xfrm>
-            <a:off x="5943600" y="731520"/>
-            <a:ext cx="2743200" cy="3200400"/>
-          </a:xfrm>
-          <a:prstGeom prst="rect">
-            <a:avLst/>
-          </a:prstGeom>
-          <a:noFill/>
-        </p:spPr>
-        <p:txBody>
-          <a:bodyPr wrap="square">
-            <a:spAutoFit/>
-          </a:bodyPr>
-          <a:lstStyle/>
-          <a:p>
-            <a:pPr algn="r"/>
-            <a:r>
-              <a:rPr sz="16000" b="1">
-                <a:solidFill>
-                  <a:srgbClr val="383838"/>
-                </a:solidFill>
-                <a:latin typeface="Calibri"/>
-              </a:rPr>
-              <a:t>3</a:t>
-            </a:r>
-          </a:p>
-        </p:txBody>
-      </p:sp>
-      <p:sp>
-        <p:nvSpPr>
-          <p:cNvPr id="6" name="TextBox 5"/>
-          <p:cNvSpPr txBox="1"/>
-          <p:nvPr/>
-        </p:nvSpPr>
-        <p:spPr>
-          <a:xfrm>
-            <a:off x="548640" y="1645920"/>
-            <a:ext cx="6400800" cy="1188720"/>
-          </a:xfrm>
-          <a:prstGeom prst="rect">
-            <a:avLst/>
-          </a:prstGeom>
-          <a:noFill/>
-        </p:spPr>
-        <p:txBody>
-          <a:bodyPr wrap="square">
-            <a:spAutoFit/>
-          </a:bodyPr>
-          <a:lstStyle/>
-          <a:p>
-            <a:pPr algn="l"/>
-            <a:r>
-              <a:rPr sz="4400" b="1">
-                <a:solidFill>
-                  <a:srgbClr val="FFFFFF"/>
-                </a:solidFill>
-                <a:latin typeface="Calibri"/>
-              </a:rPr>
-              <a:t>替代方案</a:t>
-            </a:r>
-          </a:p>
-        </p:txBody>
-      </p:sp>
-      <p:sp>
-        <p:nvSpPr>
-          <p:cNvPr id="7" name="TextBox 6"/>
-          <p:cNvSpPr txBox="1"/>
-          <p:nvPr/>
-        </p:nvSpPr>
-        <p:spPr>
-          <a:xfrm>
-            <a:off x="548640" y="2834640"/>
-            <a:ext cx="6858000" cy="822960"/>
-          </a:xfrm>
-          <a:prstGeom prst="rect">
-            <a:avLst/>
-          </a:prstGeom>
-          <a:noFill/>
-        </p:spPr>
-        <p:txBody>
-          <a:bodyPr wrap="square">
-            <a:spAutoFit/>
-          </a:bodyPr>
-          <a:lstStyle/>
-          <a:p>
-            <a:pPr algn="l"/>
-            <a:r>
-              <a:rPr sz="2200" b="0">
-                <a:solidFill>
-                  <a:srgbClr val="9A9A9A"/>
-                </a:solidFill>
-                <a:latin typeface="Calibri"/>
-              </a:rPr>
-              <a:t>Linux 生態 vs Windows 限制</a:t>
-            </a:r>
-          </a:p>
-        </p:txBody>
-      </p:sp>
-      <p:cxnSp>
-        <p:nvCxnSpPr>
-          <p:cNvPr id="8" name="Connector 7"/>
-          <p:cNvCxnSpPr/>
-          <p:nvPr/>
-        </p:nvCxnSpPr>
-        <p:spPr>
-          <a:xfrm>
-            <a:off x="365760" y="3840480"/>
-            <a:ext cx="8412480" cy="0"/>
-          </a:xfrm>
-          <a:prstGeom prst="line">
-            <a:avLst/>
-          </a:prstGeom>
-          <a:ln w="19050">
-            <a:solidFill>
-              <a:srgbClr val="9A9A9A"/>
-            </a:solidFill>
-          </a:ln>
-        </p:spPr>
-        <p:style>
-          <a:lnRef idx="2">
-            <a:schemeClr val="accent1"/>
-          </a:lnRef>
-          <a:fillRef idx="0">
-            <a:schemeClr val="accent1"/>
-          </a:fillRef>
-          <a:effectRef idx="1">
-            <a:schemeClr val="accent1"/>
-          </a:effectRef>
-          <a:fontRef idx="minor">
-            <a:schemeClr val="tx1"/>
-          </a:fontRef>
-        </p:style>
-      </p:cxnSp>
-      <p:sp>
-        <p:nvSpPr>
-          <p:cNvPr id="9" name="Rectangle 8"/>
-          <p:cNvSpPr/>
-          <p:nvPr/>
-        </p:nvSpPr>
-        <p:spPr>
-          <a:xfrm>
-            <a:off x="0" y="4686300"/>
-            <a:ext cx="9144000" cy="457200"/>
-          </a:xfrm>
-          <a:prstGeom prst="rect">
-            <a:avLst/>
-          </a:prstGeom>
-          <a:gradFill rotWithShape="1">
-            <a:gsLst>
-              <a:gs pos="0">
-                <a:srgbClr val="181818"/>
-              </a:gs>
-              <a:gs pos="100000">
-                <a:srgbClr val="383838"/>
-              </a:gs>
-            </a:gsLst>
-            <a:lin scaled="0" ang="0"/>
-          </a:gradFill>
-          <a:ln>
-            <a:noFill/>
-          </a:ln>
-        </p:spPr>
-        <p:style>
-          <a:lnRef idx="1">
-            <a:schemeClr val="accent1"/>
-          </a:lnRef>
-          <a:fillRef idx="3">
-            <a:schemeClr val="accent1"/>
-          </a:fillRef>
-          <a:effectRef idx="2">
-            <a:schemeClr val="accent1"/>
-          </a:effectRef>
-          <a:fontRef idx="minor">
-            <a:schemeClr val="lt1"/>
-          </a:fontRef>
-        </p:style>
-        <p:txBody>
-          <a:bodyPr rtlCol="0" anchor="ctr"/>
-          <a:lstStyle/>
-          <a:p>
-            <a:pPr algn="ctr"/>
-          </a:p>
-        </p:txBody>
-      </p:sp>
-      <p:sp>
-        <p:nvSpPr>
-          <p:cNvPr id="10" name="TextBox 9"/>
-          <p:cNvSpPr txBox="1"/>
-          <p:nvPr/>
-        </p:nvSpPr>
-        <p:spPr>
-          <a:xfrm>
-            <a:off x="274320" y="4722876"/>
-            <a:ext cx="4572000" cy="384048"/>
-          </a:xfrm>
-          <a:prstGeom prst="rect">
-            <a:avLst/>
-          </a:prstGeom>
-          <a:noFill/>
-        </p:spPr>
-        <p:txBody>
-          <a:bodyPr wrap="square">
-            <a:spAutoFit/>
-          </a:bodyPr>
-          <a:lstStyle/>
-          <a:p>
-            <a:pPr algn="l"/>
-            <a:r>
-              <a:rPr sz="1300" b="0">
-                <a:solidFill>
-                  <a:srgbClr val="C0C0C0"/>
-                </a:solidFill>
-                <a:latin typeface="Calibri"/>
-              </a:rPr>
-              <a:t>替代方案</a:t>
-            </a:r>
-          </a:p>
-        </p:txBody>
-      </p:sp>
-      <p:sp>
-        <p:nvSpPr>
-          <p:cNvPr id="11" name="TextBox 10"/>
-          <p:cNvSpPr txBox="1"/>
-          <p:nvPr/>
-        </p:nvSpPr>
-        <p:spPr>
-          <a:xfrm>
-            <a:off x="7863840" y="4722876"/>
-            <a:ext cx="914400" cy="384048"/>
-          </a:xfrm>
-          <a:prstGeom prst="rect">
-            <a:avLst/>
-          </a:prstGeom>
-          <a:noFill/>
-        </p:spPr>
-        <p:txBody>
-          <a:bodyPr wrap="square">
-            <a:spAutoFit/>
-          </a:bodyPr>
-          <a:lstStyle/>
-          <a:p>
-            <a:pPr algn="r"/>
-            <a:r>
-              <a:rPr sz="1300" b="0">
-                <a:solidFill>
-                  <a:srgbClr val="C0C0C0"/>
-                </a:solidFill>
-                <a:latin typeface="Calibri"/>
-              </a:rPr>
-              <a:t>16 / 24</a:t>
-            </a:r>
-          </a:p>
-        </p:txBody>
-      </p:sp>
-    </p:spTree>
-  </p:cSld>
-  <p:clrMapOvr>
-    <a:masterClrMapping/>
-  </p:clrMapOvr>
-</p:sld>
-</file>
-
-<file path=ppt/slides/slide17.xml><?xml version="1.0" encoding="utf-8"?>
 <p:sld xmlns:a="http://schemas.openxmlformats.org/drawingml/2006/main" xmlns:p="http://schemas.openxmlformats.org/presentationml/2006/main" xmlns:r="http://schemas.openxmlformats.org/officeDocument/2006/relationships">
   <p:cSld>
     <p:bg>
@@ -11018,7 +11172,7 @@
                 </a:solidFill>
                 <a:latin typeface="Calibri"/>
               </a:rPr>
-              <a:t>為什麼 Linux 可以取得 CSI？</a:t>
+              <a:t>CSI 消失點分析</a:t>
             </a:r>
           </a:p>
         </p:txBody>
@@ -11053,21 +11207,555 @@
                 </a:solidFill>
                 <a:latin typeface="Calibri"/>
               </a:rPr>
-              <a:t>Section 3/4</a:t>
+              <a:t>Section 2/4</a:t>
+            </a:r>
+          </a:p>
+        </p:txBody>
+      </p:sp>
+      <p:sp>
+        <p:nvSpPr>
+          <p:cNvPr id="7" name="Rectangle 6"/>
+          <p:cNvSpPr/>
+          <p:nvPr/>
+        </p:nvSpPr>
+        <p:spPr>
+          <a:xfrm>
+            <a:off x="365760" y="1005840"/>
+            <a:ext cx="4754880" cy="402336"/>
+          </a:xfrm>
+          <a:prstGeom prst="rect">
+            <a:avLst/>
+          </a:prstGeom>
+          <a:solidFill>
+            <a:srgbClr val="545454"/>
+          </a:solidFill>
+          <a:ln w="12700">
+            <a:solidFill>
+              <a:srgbClr val="9A9A9A"/>
+            </a:solidFill>
+          </a:ln>
+        </p:spPr>
+        <p:style>
+          <a:lnRef idx="1">
+            <a:schemeClr val="accent1"/>
+          </a:lnRef>
+          <a:fillRef idx="3">
+            <a:schemeClr val="accent1"/>
+          </a:fillRef>
+          <a:effectRef idx="2">
+            <a:schemeClr val="accent1"/>
+          </a:effectRef>
+          <a:fontRef idx="minor">
+            <a:schemeClr val="lt1"/>
+          </a:fontRef>
+        </p:style>
+        <p:txBody>
+          <a:bodyPr rtlCol="0" anchor="ctr"/>
+          <a:lstStyle/>
+          <a:p>
+            <a:pPr algn="ctr"/>
+            <a:r>
+              <a:rPr sz="1400" b="1">
+                <a:solidFill>
+                  <a:srgbClr val="FFFFFF"/>
+                </a:solidFill>
+                <a:latin typeface="Calibri"/>
+              </a:rPr>
+              <a:t>應用程式 / WinSock</a:t>
+            </a:r>
+          </a:p>
+        </p:txBody>
+      </p:sp>
+      <p:sp>
+        <p:nvSpPr>
+          <p:cNvPr id="8" name="TextBox 7"/>
+          <p:cNvSpPr txBox="1"/>
+          <p:nvPr/>
+        </p:nvSpPr>
+        <p:spPr>
+          <a:xfrm>
+            <a:off x="5303520" y="1051560"/>
+            <a:ext cx="3474720" cy="402336"/>
+          </a:xfrm>
+          <a:prstGeom prst="rect">
+            <a:avLst/>
+          </a:prstGeom>
+          <a:noFill/>
+        </p:spPr>
+        <p:txBody>
+          <a:bodyPr wrap="square">
+            <a:spAutoFit/>
+          </a:bodyPr>
+          <a:lstStyle/>
+          <a:p>
+            <a:pPr algn="l"/>
+            <a:r>
+              <a:rPr sz="1300" b="0">
+                <a:solidFill>
+                  <a:srgbClr val="646464"/>
+                </a:solidFill>
+                <a:latin typeface="Calibri"/>
+              </a:rPr>
+              <a:t>無法感知 CSI 存在</a:t>
+            </a:r>
+          </a:p>
+        </p:txBody>
+      </p:sp>
+      <p:sp>
+        <p:nvSpPr>
+          <p:cNvPr id="9" name="Rectangle 8"/>
+          <p:cNvSpPr/>
+          <p:nvPr/>
+        </p:nvSpPr>
+        <p:spPr>
+          <a:xfrm>
+            <a:off x="365760" y="1444752"/>
+            <a:ext cx="4754880" cy="402336"/>
+          </a:xfrm>
+          <a:prstGeom prst="rect">
+            <a:avLst/>
+          </a:prstGeom>
+          <a:solidFill>
+            <a:srgbClr val="545454"/>
+          </a:solidFill>
+          <a:ln w="12700">
+            <a:solidFill>
+              <a:srgbClr val="9A9A9A"/>
+            </a:solidFill>
+          </a:ln>
+        </p:spPr>
+        <p:style>
+          <a:lnRef idx="1">
+            <a:schemeClr val="accent1"/>
+          </a:lnRef>
+          <a:fillRef idx="3">
+            <a:schemeClr val="accent1"/>
+          </a:fillRef>
+          <a:effectRef idx="2">
+            <a:schemeClr val="accent1"/>
+          </a:effectRef>
+          <a:fontRef idx="minor">
+            <a:schemeClr val="lt1"/>
+          </a:fontRef>
+        </p:style>
+        <p:txBody>
+          <a:bodyPr rtlCol="0" anchor="ctr"/>
+          <a:lstStyle/>
+          <a:p>
+            <a:pPr algn="ctr"/>
+            <a:r>
+              <a:rPr sz="1400" b="1">
+                <a:solidFill>
+                  <a:srgbClr val="FFFFFF"/>
+                </a:solidFill>
+                <a:latin typeface="Calibri"/>
+              </a:rPr>
+              <a:t>tcpip.sys</a:t>
+            </a:r>
+          </a:p>
+        </p:txBody>
+      </p:sp>
+      <p:sp>
+        <p:nvSpPr>
+          <p:cNvPr id="10" name="TextBox 9"/>
+          <p:cNvSpPr txBox="1"/>
+          <p:nvPr/>
+        </p:nvSpPr>
+        <p:spPr>
+          <a:xfrm>
+            <a:off x="5303520" y="1490472"/>
+            <a:ext cx="3474720" cy="402336"/>
+          </a:xfrm>
+          <a:prstGeom prst="rect">
+            <a:avLst/>
+          </a:prstGeom>
+          <a:noFill/>
+        </p:spPr>
+        <p:txBody>
+          <a:bodyPr wrap="square">
+            <a:spAutoFit/>
+          </a:bodyPr>
+          <a:lstStyle/>
+          <a:p>
+            <a:pPr algn="l"/>
+            <a:r>
+              <a:rPr sz="1300" b="0">
+                <a:solidFill>
+                  <a:srgbClr val="646464"/>
+                </a:solidFill>
+                <a:latin typeface="Calibri"/>
+              </a:rPr>
+              <a:t>只處理 IP 封包</a:t>
+            </a:r>
+          </a:p>
+        </p:txBody>
+      </p:sp>
+      <p:sp>
+        <p:nvSpPr>
+          <p:cNvPr id="11" name="Rectangle 10"/>
+          <p:cNvSpPr/>
+          <p:nvPr/>
+        </p:nvSpPr>
+        <p:spPr>
+          <a:xfrm>
+            <a:off x="365760" y="1883664"/>
+            <a:ext cx="4754880" cy="402336"/>
+          </a:xfrm>
+          <a:prstGeom prst="rect">
+            <a:avLst/>
+          </a:prstGeom>
+          <a:solidFill>
+            <a:srgbClr val="555555"/>
+          </a:solidFill>
+          <a:ln w="31750">
+            <a:solidFill>
+              <a:srgbClr val="909090"/>
+            </a:solidFill>
+          </a:ln>
+        </p:spPr>
+        <p:style>
+          <a:lnRef idx="1">
+            <a:schemeClr val="accent1"/>
+          </a:lnRef>
+          <a:fillRef idx="3">
+            <a:schemeClr val="accent1"/>
+          </a:fillRef>
+          <a:effectRef idx="2">
+            <a:schemeClr val="accent1"/>
+          </a:effectRef>
+          <a:fontRef idx="minor">
+            <a:schemeClr val="lt1"/>
+          </a:fontRef>
+        </p:style>
+        <p:txBody>
+          <a:bodyPr rtlCol="0" anchor="ctr"/>
+          <a:lstStyle/>
+          <a:p>
+            <a:pPr algn="ctr"/>
+            <a:r>
+              <a:rPr sz="1400" b="1">
+                <a:solidFill>
+                  <a:srgbClr val="FFFFFF"/>
+                </a:solidFill>
+                <a:latin typeface="Calibri"/>
+              </a:rPr>
+              <a:t>ndis.sys（NDIS）</a:t>
+            </a:r>
+          </a:p>
+        </p:txBody>
+      </p:sp>
+      <p:sp>
+        <p:nvSpPr>
+          <p:cNvPr id="12" name="TextBox 11"/>
+          <p:cNvSpPr txBox="1"/>
+          <p:nvPr/>
+        </p:nvSpPr>
+        <p:spPr>
+          <a:xfrm>
+            <a:off x="5303520" y="1929384"/>
+            <a:ext cx="3474720" cy="402336"/>
+          </a:xfrm>
+          <a:prstGeom prst="rect">
+            <a:avLst/>
+          </a:prstGeom>
+          <a:noFill/>
+        </p:spPr>
+        <p:txBody>
+          <a:bodyPr wrap="square">
+            <a:spAutoFit/>
+          </a:bodyPr>
+          <a:lstStyle/>
+          <a:p>
+            <a:pPr algn="l"/>
+            <a:r>
+              <a:rPr sz="1300" b="0">
+                <a:solidFill>
+                  <a:srgbClr val="787878"/>
+                </a:solidFill>
+                <a:latin typeface="Calibri"/>
+              </a:rPr>
+              <a:t>無 CSI OID 定義</a:t>
+            </a:r>
+          </a:p>
+        </p:txBody>
+      </p:sp>
+      <p:sp>
+        <p:nvSpPr>
+          <p:cNvPr id="13" name="Rectangle 12"/>
+          <p:cNvSpPr/>
+          <p:nvPr/>
+        </p:nvSpPr>
+        <p:spPr>
+          <a:xfrm>
+            <a:off x="365760" y="2322576"/>
+            <a:ext cx="4754880" cy="402336"/>
+          </a:xfrm>
+          <a:prstGeom prst="rect">
+            <a:avLst/>
+          </a:prstGeom>
+          <a:solidFill>
+            <a:srgbClr val="303030"/>
+          </a:solidFill>
+          <a:ln w="31750">
+            <a:solidFill>
+              <a:srgbClr val="B8B8B8"/>
+            </a:solidFill>
+          </a:ln>
+        </p:spPr>
+        <p:style>
+          <a:lnRef idx="1">
+            <a:schemeClr val="accent1"/>
+          </a:lnRef>
+          <a:fillRef idx="3">
+            <a:schemeClr val="accent1"/>
+          </a:fillRef>
+          <a:effectRef idx="2">
+            <a:schemeClr val="accent1"/>
+          </a:effectRef>
+          <a:fontRef idx="minor">
+            <a:schemeClr val="lt1"/>
+          </a:fontRef>
+        </p:style>
+        <p:txBody>
+          <a:bodyPr rtlCol="0" anchor="ctr"/>
+          <a:lstStyle/>
+          <a:p>
+            <a:pPr algn="ctr"/>
+            <a:r>
+              <a:rPr sz="1400" b="1">
+                <a:solidFill>
+                  <a:srgbClr val="FFFFFF"/>
+                </a:solidFill>
+                <a:latin typeface="Calibri"/>
+              </a:rPr>
+              <a:t>nwifi.sys</a:t>
+            </a:r>
+          </a:p>
+        </p:txBody>
+      </p:sp>
+      <p:sp>
+        <p:nvSpPr>
+          <p:cNvPr id="14" name="TextBox 13"/>
+          <p:cNvSpPr txBox="1"/>
+          <p:nvPr/>
+        </p:nvSpPr>
+        <p:spPr>
+          <a:xfrm>
+            <a:off x="5303520" y="2368296"/>
+            <a:ext cx="3474720" cy="402336"/>
+          </a:xfrm>
+          <a:prstGeom prst="rect">
+            <a:avLst/>
+          </a:prstGeom>
+          <a:noFill/>
+        </p:spPr>
+        <p:txBody>
+          <a:bodyPr wrap="square">
+            <a:spAutoFit/>
+          </a:bodyPr>
+          <a:lstStyle/>
+          <a:p>
+            <a:pPr algn="l"/>
+            <a:r>
+              <a:rPr sz="1300" b="0">
+                <a:solidFill>
+                  <a:srgbClr val="444444"/>
+                </a:solidFill>
+                <a:latin typeface="Calibri"/>
+              </a:rPr>
+              <a:t>丟棄所有 PHY metadata</a:t>
+            </a:r>
+          </a:p>
+        </p:txBody>
+      </p:sp>
+      <p:sp>
+        <p:nvSpPr>
+          <p:cNvPr id="15" name="Rectangle 14"/>
+          <p:cNvSpPr/>
+          <p:nvPr/>
+        </p:nvSpPr>
+        <p:spPr>
+          <a:xfrm>
+            <a:off x="365760" y="2761488"/>
+            <a:ext cx="4754880" cy="402336"/>
+          </a:xfrm>
+          <a:prstGeom prst="rect">
+            <a:avLst/>
+          </a:prstGeom>
+          <a:solidFill>
+            <a:srgbClr val="303030"/>
+          </a:solidFill>
+          <a:ln w="31750">
+            <a:solidFill>
+              <a:srgbClr val="B8B8B8"/>
+            </a:solidFill>
+          </a:ln>
+        </p:spPr>
+        <p:style>
+          <a:lnRef idx="1">
+            <a:schemeClr val="accent1"/>
+          </a:lnRef>
+          <a:fillRef idx="3">
+            <a:schemeClr val="accent1"/>
+          </a:fillRef>
+          <a:effectRef idx="2">
+            <a:schemeClr val="accent1"/>
+          </a:effectRef>
+          <a:fontRef idx="minor">
+            <a:schemeClr val="lt1"/>
+          </a:fontRef>
+        </p:style>
+        <p:txBody>
+          <a:bodyPr rtlCol="0" anchor="ctr"/>
+          <a:lstStyle/>
+          <a:p>
+            <a:pPr algn="ctr"/>
+            <a:r>
+              <a:rPr sz="1400" b="1">
+                <a:solidFill>
+                  <a:srgbClr val="FFFFFF"/>
+                </a:solidFill>
+                <a:latin typeface="Calibri"/>
+              </a:rPr>
+              <a:t>OEM.sys</a:t>
+            </a:r>
+          </a:p>
+        </p:txBody>
+      </p:sp>
+      <p:sp>
+        <p:nvSpPr>
+          <p:cNvPr id="16" name="TextBox 15"/>
+          <p:cNvSpPr txBox="1"/>
+          <p:nvPr/>
+        </p:nvSpPr>
+        <p:spPr>
+          <a:xfrm>
+            <a:off x="5303520" y="2807208"/>
+            <a:ext cx="3474720" cy="402336"/>
+          </a:xfrm>
+          <a:prstGeom prst="rect">
+            <a:avLst/>
+          </a:prstGeom>
+          <a:noFill/>
+        </p:spPr>
+        <p:txBody>
+          <a:bodyPr wrap="square">
+            <a:spAutoFit/>
+          </a:bodyPr>
+          <a:lstStyle/>
+          <a:p>
+            <a:pPr algn="l"/>
+            <a:r>
+              <a:rPr sz="1300" b="0">
+                <a:solidFill>
+                  <a:srgbClr val="444444"/>
+                </a:solidFill>
+                <a:latin typeface="Calibri"/>
+              </a:rPr>
+              <a:t>能讀取 CSI，但不上報</a:t>
+            </a:r>
+          </a:p>
+        </p:txBody>
+      </p:sp>
+      <p:sp>
+        <p:nvSpPr>
+          <p:cNvPr id="17" name="Rectangle 16"/>
+          <p:cNvSpPr/>
+          <p:nvPr/>
+        </p:nvSpPr>
+        <p:spPr>
+          <a:xfrm>
+            <a:off x="365760" y="3200400"/>
+            <a:ext cx="4754880" cy="402336"/>
+          </a:xfrm>
+          <a:prstGeom prst="rect">
+            <a:avLst/>
+          </a:prstGeom>
+          <a:solidFill>
+            <a:srgbClr val="727272"/>
+          </a:solidFill>
+          <a:ln w="12700">
+            <a:solidFill>
+              <a:srgbClr val="828282"/>
+            </a:solidFill>
+          </a:ln>
+        </p:spPr>
+        <p:style>
+          <a:lnRef idx="1">
+            <a:schemeClr val="accent1"/>
+          </a:lnRef>
+          <a:fillRef idx="3">
+            <a:schemeClr val="accent1"/>
+          </a:fillRef>
+          <a:effectRef idx="2">
+            <a:schemeClr val="accent1"/>
+          </a:effectRef>
+          <a:fontRef idx="minor">
+            <a:schemeClr val="lt1"/>
+          </a:fontRef>
+        </p:style>
+        <p:txBody>
+          <a:bodyPr rtlCol="0" anchor="ctr"/>
+          <a:lstStyle/>
+          <a:p>
+            <a:pPr algn="ctr"/>
+            <a:r>
+              <a:rPr sz="1400" b="1">
+                <a:solidFill>
+                  <a:srgbClr val="FFFFFF"/>
+                </a:solidFill>
+                <a:latin typeface="Calibri"/>
+              </a:rPr>
+              <a:t>NIC 韌體 + 硬體</a:t>
+            </a:r>
+          </a:p>
+        </p:txBody>
+      </p:sp>
+      <p:sp>
+        <p:nvSpPr>
+          <p:cNvPr id="18" name="TextBox 17"/>
+          <p:cNvSpPr txBox="1"/>
+          <p:nvPr/>
+        </p:nvSpPr>
+        <p:spPr>
+          <a:xfrm>
+            <a:off x="5303520" y="3246120"/>
+            <a:ext cx="3474720" cy="402336"/>
+          </a:xfrm>
+          <a:prstGeom prst="rect">
+            <a:avLst/>
+          </a:prstGeom>
+          <a:noFill/>
+        </p:spPr>
+        <p:txBody>
+          <a:bodyPr wrap="square">
+            <a:spAutoFit/>
+          </a:bodyPr>
+          <a:lstStyle/>
+          <a:p>
+            <a:pPr algn="l"/>
+            <a:r>
+              <a:rPr sz="1300" b="0">
+                <a:solidFill>
+                  <a:srgbClr val="888888"/>
+                </a:solidFill>
+                <a:latin typeface="Calibri"/>
+              </a:rPr>
+              <a:t>CSI 計算並儲存於此</a:t>
             </a:r>
           </a:p>
         </p:txBody>
       </p:sp>
       <p:cxnSp>
         <p:nvCxnSpPr>
-          <p:cNvPr id="7" name="Connector 6"/>
+          <p:cNvPr id="19" name="Connector 18"/>
           <p:cNvCxnSpPr/>
           <p:nvPr/>
         </p:nvCxnSpPr>
         <p:spPr>
           <a:xfrm>
-            <a:off x="4572000" y="960120"/>
-            <a:ext cx="0" cy="3433572"/>
+            <a:off x="365760" y="4393688"/>
+            <a:ext cx="8412480" cy="0"/>
           </a:xfrm>
           <a:prstGeom prst="line">
             <a:avLst/>
@@ -11095,14 +11783,14 @@
       </p:cxnSp>
       <p:sp>
         <p:nvSpPr>
-          <p:cNvPr id="8" name="TextBox 7"/>
+          <p:cNvPr id="20" name="TextBox 19"/>
           <p:cNvSpPr txBox="1"/>
           <p:nvPr/>
         </p:nvSpPr>
         <p:spPr>
           <a:xfrm>
-            <a:off x="457200" y="1033272"/>
-            <a:ext cx="3863340" cy="384048"/>
+            <a:off x="457200" y="4393692"/>
+            <a:ext cx="8229600" cy="256032"/>
           </a:xfrm>
           <a:prstGeom prst="rect">
             <a:avLst/>
@@ -11117,444 +11805,20 @@
           <a:p>
             <a:pPr algn="l"/>
             <a:r>
-              <a:rPr sz="1800" b="1">
-                <a:solidFill>
-                  <a:srgbClr val="9A9A9A"/>
+              <a:rPr sz="1300" b="0">
+                <a:solidFill>
+                  <a:srgbClr val="646464"/>
                 </a:solidFill>
                 <a:latin typeface="Calibri"/>
               </a:rPr>
-              <a:t>Linux 驅動架構</a:t>
-            </a:r>
-          </a:p>
-        </p:txBody>
-      </p:sp>
-      <p:sp>
-        <p:nvSpPr>
-          <p:cNvPr id="9" name="TextBox 8"/>
-          <p:cNvSpPr txBox="1"/>
-          <p:nvPr/>
-        </p:nvSpPr>
-        <p:spPr>
-          <a:xfrm>
-            <a:off x="457200" y="1463040"/>
-            <a:ext cx="3863340" cy="2839212"/>
-          </a:xfrm>
-          <a:prstGeom prst="rect">
-            <a:avLst/>
-          </a:prstGeom>
-          <a:noFill/>
-        </p:spPr>
-        <p:txBody>
-          <a:bodyPr wrap="square">
-            <a:spAutoFit/>
-          </a:bodyPr>
-          <a:lstStyle/>
-          <a:p>
-            <a:pPr>
-              <a:spcBef>
-                <a:spcPts val="300"/>
-              </a:spcBef>
-            </a:pPr>
-            <a:r>
-              <a:rPr sz="1500">
-                <a:solidFill>
-                  <a:srgbClr val="1A1A1A"/>
-                </a:solidFill>
-              </a:rPr>
-              <a:t>cfg80211：802.11 設定框架</a:t>
-            </a:r>
-          </a:p>
-          <a:p>
-            <a:pPr>
-              <a:spcBef>
-                <a:spcPts val="300"/>
-              </a:spcBef>
-            </a:pPr>
-            <a:r>
-              <a:rPr sz="1500">
-                <a:solidFill>
-                  <a:srgbClr val="1A1A1A"/>
-                </a:solidFill>
-              </a:rPr>
-              <a:t>mac80211：軟體 MAC 實作</a:t>
-            </a:r>
-          </a:p>
-          <a:p>
-            <a:pPr>
-              <a:spcBef>
-                <a:spcPts val="300"/>
-              </a:spcBef>
-            </a:pPr>
-            <a:r>
-              <a:rPr sz="1500">
-                <a:solidFill>
-                  <a:srgbClr val="1A1A1A"/>
-                </a:solidFill>
-              </a:rPr>
-              <a:t>nl80211：Netlink 介面（用戶空間↔核心）</a:t>
-            </a:r>
-          </a:p>
-          <a:p>
-            <a:r>
-              <a:rPr sz="600"/>
-              <a:t/>
-            </a:r>
-          </a:p>
-          <a:p>
-            <a:pPr>
-              <a:spcBef>
-                <a:spcPts val="300"/>
-              </a:spcBef>
-            </a:pPr>
-            <a:r>
-              <a:rPr sz="1500">
-                <a:solidFill>
-                  <a:srgbClr val="1A1A1A"/>
-                </a:solidFill>
-              </a:rPr>
-              <a:t>關鍵差異：開源驅動</a:t>
-            </a:r>
-          </a:p>
-          <a:p>
-            <a:pPr>
-              <a:spcBef>
-                <a:spcPts val="100"/>
-              </a:spcBef>
-            </a:pPr>
-            <a:r>
-              <a:rPr sz="1300">
-                <a:solidFill>
-                  <a:srgbClr val="646464"/>
-                </a:solidFill>
-              </a:rPr>
-              <a:t>  · iwlwifi（Intel）可修改</a:t>
-            </a:r>
-          </a:p>
-          <a:p>
-            <a:pPr>
-              <a:spcBef>
-                <a:spcPts val="100"/>
-              </a:spcBef>
-            </a:pPr>
-            <a:r>
-              <a:rPr sz="1300">
-                <a:solidFill>
-                  <a:srgbClr val="646464"/>
-                </a:solidFill>
-              </a:rPr>
-              <a:t>  · ath9k（Atheros）可修改</a:t>
-            </a:r>
-          </a:p>
-          <a:p>
-            <a:pPr>
-              <a:spcBef>
-                <a:spcPts val="100"/>
-              </a:spcBef>
-            </a:pPr>
-            <a:r>
-              <a:rPr sz="1300">
-                <a:solidFill>
-                  <a:srgbClr val="646464"/>
-                </a:solidFill>
-              </a:rPr>
-              <a:t>  · brcmfmac（Broadcom）可 patch 韌體</a:t>
-            </a:r>
-          </a:p>
-          <a:p>
-            <a:r>
-              <a:rPr sz="600"/>
-              <a:t/>
-            </a:r>
-          </a:p>
-          <a:p>
-            <a:pPr>
-              <a:spcBef>
-                <a:spcPts val="300"/>
-              </a:spcBef>
-            </a:pPr>
-            <a:r>
-              <a:rPr sz="1500">
-                <a:solidFill>
-                  <a:srgbClr val="1A1A1A"/>
-                </a:solidFill>
-              </a:rPr>
-              <a:t>debugfs 介面：</a:t>
-            </a:r>
-          </a:p>
-          <a:p>
-            <a:pPr>
-              <a:spcBef>
-                <a:spcPts val="100"/>
-              </a:spcBef>
-            </a:pPr>
-            <a:r>
-              <a:rPr sz="1300">
-                <a:solidFill>
-                  <a:srgbClr val="646464"/>
-                </a:solidFill>
-              </a:rPr>
-              <a:t>  /sys/kernel/debug/ieee80211/</a:t>
-            </a:r>
-          </a:p>
-          <a:p>
-            <a:pPr>
-              <a:spcBef>
-                <a:spcPts val="100"/>
-              </a:spcBef>
-            </a:pPr>
-            <a:r>
-              <a:rPr sz="1300">
-                <a:solidFill>
-                  <a:srgbClr val="646464"/>
-                </a:solidFill>
-              </a:rPr>
-              <a:t>  部分驅動在此暴露 CSI 原始資料</a:t>
-            </a:r>
-          </a:p>
-        </p:txBody>
-      </p:sp>
-      <p:sp>
-        <p:nvSpPr>
-          <p:cNvPr id="10" name="TextBox 9"/>
-          <p:cNvSpPr txBox="1"/>
-          <p:nvPr/>
-        </p:nvSpPr>
-        <p:spPr>
-          <a:xfrm>
-            <a:off x="4823460" y="1033272"/>
-            <a:ext cx="3863340" cy="384048"/>
-          </a:xfrm>
-          <a:prstGeom prst="rect">
-            <a:avLst/>
-          </a:prstGeom>
-          <a:noFill/>
-        </p:spPr>
-        <p:txBody>
-          <a:bodyPr wrap="square">
-            <a:spAutoFit/>
-          </a:bodyPr>
-          <a:lstStyle/>
-          <a:p>
-            <a:pPr algn="l"/>
-            <a:r>
-              <a:rPr sz="1800" b="1">
-                <a:solidFill>
-                  <a:srgbClr val="9A9A9A"/>
-                </a:solidFill>
-                <a:latin typeface="Calibri"/>
-              </a:rPr>
-              <a:t>Windows 的根本差異</a:t>
-            </a:r>
-          </a:p>
-        </p:txBody>
-      </p:sp>
-      <p:sp>
-        <p:nvSpPr>
-          <p:cNvPr id="11" name="TextBox 10"/>
-          <p:cNvSpPr txBox="1"/>
-          <p:nvPr/>
-        </p:nvSpPr>
-        <p:spPr>
-          <a:xfrm>
-            <a:off x="4823460" y="1463040"/>
-            <a:ext cx="3863340" cy="2839212"/>
-          </a:xfrm>
-          <a:prstGeom prst="rect">
-            <a:avLst/>
-          </a:prstGeom>
-          <a:noFill/>
-        </p:spPr>
-        <p:txBody>
-          <a:bodyPr wrap="square">
-            <a:spAutoFit/>
-          </a:bodyPr>
-          <a:lstStyle/>
-          <a:p>
-            <a:pPr>
-              <a:spcBef>
-                <a:spcPts val="300"/>
-              </a:spcBef>
-            </a:pPr>
-            <a:r>
-              <a:rPr sz="1500" b="1">
-                <a:solidFill>
-                  <a:srgbClr val="1A1A1A"/>
-                </a:solidFill>
-              </a:rPr>
-              <a:t>✗ OEM.sys 為閉源二進位</a:t>
-            </a:r>
-          </a:p>
-          <a:p>
-            <a:pPr>
-              <a:spcBef>
-                <a:spcPts val="300"/>
-              </a:spcBef>
-            </a:pPr>
-            <a:r>
-              <a:rPr sz="1500" b="1">
-                <a:solidFill>
-                  <a:srgbClr val="1A1A1A"/>
-                </a:solidFill>
-              </a:rPr>
-              <a:t>✗ NDIS 介面固定，無擴充 CSI 的機制</a:t>
-            </a:r>
-          </a:p>
-          <a:p>
-            <a:pPr>
-              <a:spcBef>
-                <a:spcPts val="300"/>
-              </a:spcBef>
-            </a:pPr>
-            <a:r>
-              <a:rPr sz="1500" b="1">
-                <a:solidFill>
-                  <a:srgbClr val="1A1A1A"/>
-                </a:solidFill>
-              </a:rPr>
-              <a:t>✗ 無等同 debugfs 的 PHY 資料介面</a:t>
-            </a:r>
-          </a:p>
-          <a:p>
-            <a:pPr>
-              <a:spcBef>
-                <a:spcPts val="300"/>
-              </a:spcBef>
-            </a:pPr>
-            <a:r>
-              <a:rPr sz="1500" b="1">
-                <a:solidFill>
-                  <a:srgbClr val="1A1A1A"/>
-                </a:solidFill>
-              </a:rPr>
-              <a:t>✗ 韌體修改需要 WHQL 簽章</a:t>
-            </a:r>
-          </a:p>
-          <a:p>
-            <a:r>
-              <a:rPr sz="600"/>
-              <a:t/>
-            </a:r>
-          </a:p>
-          <a:p>
-            <a:pPr>
-              <a:spcBef>
-                <a:spcPts val="300"/>
-              </a:spcBef>
-            </a:pPr>
-            <a:r>
-              <a:rPr sz="1500">
-                <a:solidFill>
-                  <a:srgbClr val="1A1A1A"/>
-                </a:solidFill>
-              </a:rPr>
-              <a:t>→ Linux 的可行性來自</a:t>
-            </a:r>
-          </a:p>
-          <a:p>
-            <a:pPr>
-              <a:spcBef>
-                <a:spcPts val="100"/>
-              </a:spcBef>
-            </a:pPr>
-            <a:r>
-              <a:rPr sz="1300">
-                <a:solidFill>
-                  <a:srgbClr val="646464"/>
-                </a:solidFill>
-              </a:rPr>
-              <a:t>  開源 + 可修改驅動 + 彈性的核心介面</a:t>
-            </a:r>
-          </a:p>
-          <a:p>
-            <a:pPr>
-              <a:spcBef>
-                <a:spcPts val="100"/>
-              </a:spcBef>
-            </a:pPr>
-            <a:r>
-              <a:rPr sz="1300">
-                <a:solidFill>
-                  <a:srgbClr val="646464"/>
-                </a:solidFill>
-              </a:rPr>
-              <a:t>  不是 Windows 的「bug」，是設計哲學差異</a:t>
-            </a:r>
-          </a:p>
-        </p:txBody>
-      </p:sp>
-      <p:cxnSp>
-        <p:nvCxnSpPr>
-          <p:cNvPr id="12" name="Connector 11"/>
-          <p:cNvCxnSpPr/>
-          <p:nvPr/>
-        </p:nvCxnSpPr>
-        <p:spPr>
-          <a:xfrm>
-            <a:off x="365760" y="4393688"/>
-            <a:ext cx="8412480" cy="0"/>
-          </a:xfrm>
-          <a:prstGeom prst="line">
-            <a:avLst/>
-          </a:prstGeom>
-          <a:ln w="6350">
-            <a:solidFill>
-              <a:srgbClr val="D8D8D8"/>
-            </a:solidFill>
-          </a:ln>
-        </p:spPr>
-        <p:style>
-          <a:lnRef idx="2">
-            <a:schemeClr val="accent1"/>
-          </a:lnRef>
-          <a:fillRef idx="0">
-            <a:schemeClr val="accent1"/>
-          </a:fillRef>
-          <a:effectRef idx="1">
-            <a:schemeClr val="accent1"/>
-          </a:effectRef>
-          <a:fontRef idx="minor">
-            <a:schemeClr val="tx1"/>
-          </a:fontRef>
-        </p:style>
-      </p:cxnSp>
-      <p:sp>
-        <p:nvSpPr>
-          <p:cNvPr id="13" name="TextBox 12"/>
-          <p:cNvSpPr txBox="1"/>
-          <p:nvPr/>
-        </p:nvSpPr>
-        <p:spPr>
-          <a:xfrm>
-            <a:off x="457200" y="4393692"/>
-            <a:ext cx="8229600" cy="256032"/>
-          </a:xfrm>
-          <a:prstGeom prst="rect">
-            <a:avLst/>
-          </a:prstGeom>
-          <a:noFill/>
-        </p:spPr>
-        <p:txBody>
-          <a:bodyPr wrap="square">
-            <a:spAutoFit/>
-          </a:bodyPr>
-          <a:lstStyle/>
-          <a:p>
-            <a:pPr algn="l"/>
-            <a:r>
-              <a:rPr sz="1300" b="0">
-                <a:solidFill>
-                  <a:srgbClr val="646464"/>
-                </a:solidFill>
-                <a:latin typeface="Calibri"/>
-              </a:rPr>
-              <a:t>Linux 的可行性來自開源生態，不是 Windows 的設計缺陷</a:t>
-            </a:r>
-          </a:p>
-        </p:txBody>
-      </p:sp>
-      <p:sp>
-        <p:nvSpPr>
-          <p:cNvPr id="14" name="Rectangle 13"/>
+              <a:t>CSI 消失於 OEM.sys ↔ nwifi.sys 介面：OEM.sys 有能力讀取但選擇不轉發，nwifi.sys 也不要求</a:t>
+            </a:r>
+          </a:p>
+        </p:txBody>
+      </p:sp>
+      <p:sp>
+        <p:nvSpPr>
+          <p:cNvPr id="21" name="Rectangle 20"/>
           <p:cNvSpPr/>
           <p:nvPr/>
         </p:nvSpPr>
@@ -11605,7 +11869,7 @@
       </p:sp>
       <p:sp>
         <p:nvSpPr>
-          <p:cNvPr id="15" name="TextBox 14"/>
+          <p:cNvPr id="22" name="TextBox 21"/>
           <p:cNvSpPr txBox="1"/>
           <p:nvPr/>
         </p:nvSpPr>
@@ -11633,14 +11897,14 @@
                 </a:solidFill>
                 <a:latin typeface="Calibri"/>
               </a:rPr>
-              <a:t>替代方案</a:t>
-            </a:r>
-          </a:p>
-        </p:txBody>
-      </p:sp>
-      <p:sp>
-        <p:nvSpPr>
-          <p:cNvPr id="16" name="TextBox 15"/>
+              <a:t>Windows 驅動堆疊</a:t>
+            </a:r>
+          </a:p>
+        </p:txBody>
+      </p:sp>
+      <p:sp>
+        <p:nvSpPr>
+          <p:cNvPr id="23" name="TextBox 22"/>
           <p:cNvSpPr txBox="1"/>
           <p:nvPr/>
         </p:nvSpPr>
@@ -11668,7 +11932,1287 @@
                 </a:solidFill>
                 <a:latin typeface="Calibri"/>
               </a:rPr>
-              <a:t>17 / 24</a:t>
+              <a:t>16 / 25</a:t>
+            </a:r>
+          </a:p>
+        </p:txBody>
+      </p:sp>
+    </p:spTree>
+  </p:cSld>
+  <p:clrMapOvr>
+    <a:masterClrMapping/>
+  </p:clrMapOvr>
+</p:sld>
+</file>
+
+<file path=ppt/slides/slide17.xml><?xml version="1.0" encoding="utf-8"?>
+<p:sld xmlns:a="http://schemas.openxmlformats.org/drawingml/2006/main" xmlns:p="http://schemas.openxmlformats.org/presentationml/2006/main" xmlns:r="http://schemas.openxmlformats.org/officeDocument/2006/relationships">
+  <p:cSld>
+    <p:spTree>
+      <p:nvGrpSpPr>
+        <p:cNvPr id="1" name=""/>
+        <p:cNvGrpSpPr/>
+        <p:nvPr/>
+      </p:nvGrpSpPr>
+      <p:grpSpPr/>
+      <p:sp>
+        <p:nvSpPr>
+          <p:cNvPr id="2" name="Rectangle 1"/>
+          <p:cNvSpPr/>
+          <p:nvPr/>
+        </p:nvSpPr>
+        <p:spPr>
+          <a:xfrm>
+            <a:off x="0" y="0"/>
+            <a:ext cx="9144000" cy="5143500"/>
+          </a:xfrm>
+          <a:prstGeom prst="rect">
+            <a:avLst/>
+          </a:prstGeom>
+          <a:gradFill rotWithShape="1">
+            <a:gsLst>
+              <a:gs pos="0">
+                <a:srgbClr val="121212"/>
+              </a:gs>
+              <a:gs pos="100000">
+                <a:srgbClr val="282828"/>
+              </a:gs>
+            </a:gsLst>
+            <a:lin scaled="0" ang="5400000"/>
+          </a:gradFill>
+          <a:ln>
+            <a:noFill/>
+          </a:ln>
+        </p:spPr>
+        <p:style>
+          <a:lnRef idx="1">
+            <a:schemeClr val="accent1"/>
+          </a:lnRef>
+          <a:fillRef idx="3">
+            <a:schemeClr val="accent1"/>
+          </a:fillRef>
+          <a:effectRef idx="2">
+            <a:schemeClr val="accent1"/>
+          </a:effectRef>
+          <a:fontRef idx="minor">
+            <a:schemeClr val="lt1"/>
+          </a:fontRef>
+        </p:style>
+        <p:txBody>
+          <a:bodyPr rtlCol="0" anchor="ctr"/>
+          <a:lstStyle/>
+          <a:p>
+            <a:pPr algn="ctr"/>
+          </a:p>
+        </p:txBody>
+      </p:sp>
+      <p:sp>
+        <p:nvSpPr>
+          <p:cNvPr id="3" name="Rectangle 2"/>
+          <p:cNvSpPr/>
+          <p:nvPr/>
+        </p:nvSpPr>
+        <p:spPr>
+          <a:xfrm>
+            <a:off x="0" y="0"/>
+            <a:ext cx="9144000" cy="109728"/>
+          </a:xfrm>
+          <a:prstGeom prst="rect">
+            <a:avLst/>
+          </a:prstGeom>
+          <a:gradFill rotWithShape="1">
+            <a:gsLst>
+              <a:gs pos="0">
+                <a:srgbClr val="9A9A9A"/>
+              </a:gs>
+              <a:gs pos="100000">
+                <a:srgbClr val="505050"/>
+              </a:gs>
+            </a:gsLst>
+            <a:lin scaled="0" ang="0"/>
+          </a:gradFill>
+          <a:ln>
+            <a:noFill/>
+          </a:ln>
+        </p:spPr>
+        <p:style>
+          <a:lnRef idx="1">
+            <a:schemeClr val="accent1"/>
+          </a:lnRef>
+          <a:fillRef idx="3">
+            <a:schemeClr val="accent1"/>
+          </a:fillRef>
+          <a:effectRef idx="2">
+            <a:schemeClr val="accent1"/>
+          </a:effectRef>
+          <a:fontRef idx="minor">
+            <a:schemeClr val="lt1"/>
+          </a:fontRef>
+        </p:style>
+        <p:txBody>
+          <a:bodyPr rtlCol="0" anchor="ctr"/>
+          <a:lstStyle/>
+          <a:p>
+            <a:pPr algn="ctr"/>
+          </a:p>
+        </p:txBody>
+      </p:sp>
+      <p:cxnSp>
+        <p:nvCxnSpPr>
+          <p:cNvPr id="4" name="Connector 3"/>
+          <p:cNvCxnSpPr/>
+          <p:nvPr/>
+        </p:nvCxnSpPr>
+        <p:spPr>
+          <a:xfrm>
+            <a:off x="0" y="109728"/>
+            <a:ext cx="9144000" cy="0"/>
+          </a:xfrm>
+          <a:prstGeom prst="line">
+            <a:avLst/>
+          </a:prstGeom>
+          <a:ln w="6350">
+            <a:solidFill>
+              <a:srgbClr val="606060"/>
+            </a:solidFill>
+          </a:ln>
+        </p:spPr>
+        <p:style>
+          <a:lnRef idx="2">
+            <a:schemeClr val="accent1"/>
+          </a:lnRef>
+          <a:fillRef idx="0">
+            <a:schemeClr val="accent1"/>
+          </a:fillRef>
+          <a:effectRef idx="1">
+            <a:schemeClr val="accent1"/>
+          </a:effectRef>
+          <a:fontRef idx="minor">
+            <a:schemeClr val="tx1"/>
+          </a:fontRef>
+        </p:style>
+      </p:cxnSp>
+      <p:sp>
+        <p:nvSpPr>
+          <p:cNvPr id="5" name="TextBox 4"/>
+          <p:cNvSpPr txBox="1"/>
+          <p:nvPr/>
+        </p:nvSpPr>
+        <p:spPr>
+          <a:xfrm>
+            <a:off x="5943600" y="731520"/>
+            <a:ext cx="2743200" cy="3200400"/>
+          </a:xfrm>
+          <a:prstGeom prst="rect">
+            <a:avLst/>
+          </a:prstGeom>
+          <a:noFill/>
+        </p:spPr>
+        <p:txBody>
+          <a:bodyPr wrap="square">
+            <a:spAutoFit/>
+          </a:bodyPr>
+          <a:lstStyle/>
+          <a:p>
+            <a:pPr algn="r"/>
+            <a:r>
+              <a:rPr sz="16000" b="1">
+                <a:solidFill>
+                  <a:srgbClr val="383838"/>
+                </a:solidFill>
+                <a:latin typeface="Calibri"/>
+              </a:rPr>
+              <a:t>3</a:t>
+            </a:r>
+          </a:p>
+        </p:txBody>
+      </p:sp>
+      <p:sp>
+        <p:nvSpPr>
+          <p:cNvPr id="6" name="TextBox 5"/>
+          <p:cNvSpPr txBox="1"/>
+          <p:nvPr/>
+        </p:nvSpPr>
+        <p:spPr>
+          <a:xfrm>
+            <a:off x="548640" y="1645920"/>
+            <a:ext cx="6400800" cy="1188720"/>
+          </a:xfrm>
+          <a:prstGeom prst="rect">
+            <a:avLst/>
+          </a:prstGeom>
+          <a:noFill/>
+        </p:spPr>
+        <p:txBody>
+          <a:bodyPr wrap="square">
+            <a:spAutoFit/>
+          </a:bodyPr>
+          <a:lstStyle/>
+          <a:p>
+            <a:pPr algn="l"/>
+            <a:r>
+              <a:rPr sz="4400" b="1">
+                <a:solidFill>
+                  <a:srgbClr val="FFFFFF"/>
+                </a:solidFill>
+                <a:latin typeface="Calibri"/>
+              </a:rPr>
+              <a:t>替代方案</a:t>
+            </a:r>
+          </a:p>
+        </p:txBody>
+      </p:sp>
+      <p:sp>
+        <p:nvSpPr>
+          <p:cNvPr id="7" name="TextBox 6"/>
+          <p:cNvSpPr txBox="1"/>
+          <p:nvPr/>
+        </p:nvSpPr>
+        <p:spPr>
+          <a:xfrm>
+            <a:off x="548640" y="2834640"/>
+            <a:ext cx="6858000" cy="822960"/>
+          </a:xfrm>
+          <a:prstGeom prst="rect">
+            <a:avLst/>
+          </a:prstGeom>
+          <a:noFill/>
+        </p:spPr>
+        <p:txBody>
+          <a:bodyPr wrap="square">
+            <a:spAutoFit/>
+          </a:bodyPr>
+          <a:lstStyle/>
+          <a:p>
+            <a:pPr algn="l"/>
+            <a:r>
+              <a:rPr sz="2200" b="0">
+                <a:solidFill>
+                  <a:srgbClr val="9A9A9A"/>
+                </a:solidFill>
+                <a:latin typeface="Calibri"/>
+              </a:rPr>
+              <a:t>Linux 生態 vs Windows 限制</a:t>
+            </a:r>
+          </a:p>
+        </p:txBody>
+      </p:sp>
+      <p:cxnSp>
+        <p:nvCxnSpPr>
+          <p:cNvPr id="8" name="Connector 7"/>
+          <p:cNvCxnSpPr/>
+          <p:nvPr/>
+        </p:nvCxnSpPr>
+        <p:spPr>
+          <a:xfrm>
+            <a:off x="365760" y="3840480"/>
+            <a:ext cx="8412480" cy="0"/>
+          </a:xfrm>
+          <a:prstGeom prst="line">
+            <a:avLst/>
+          </a:prstGeom>
+          <a:ln w="19050">
+            <a:solidFill>
+              <a:srgbClr val="9A9A9A"/>
+            </a:solidFill>
+          </a:ln>
+        </p:spPr>
+        <p:style>
+          <a:lnRef idx="2">
+            <a:schemeClr val="accent1"/>
+          </a:lnRef>
+          <a:fillRef idx="0">
+            <a:schemeClr val="accent1"/>
+          </a:fillRef>
+          <a:effectRef idx="1">
+            <a:schemeClr val="accent1"/>
+          </a:effectRef>
+          <a:fontRef idx="minor">
+            <a:schemeClr val="tx1"/>
+          </a:fontRef>
+        </p:style>
+      </p:cxnSp>
+      <p:sp>
+        <p:nvSpPr>
+          <p:cNvPr id="9" name="Rectangle 8"/>
+          <p:cNvSpPr/>
+          <p:nvPr/>
+        </p:nvSpPr>
+        <p:spPr>
+          <a:xfrm>
+            <a:off x="0" y="4686300"/>
+            <a:ext cx="9144000" cy="457200"/>
+          </a:xfrm>
+          <a:prstGeom prst="rect">
+            <a:avLst/>
+          </a:prstGeom>
+          <a:gradFill rotWithShape="1">
+            <a:gsLst>
+              <a:gs pos="0">
+                <a:srgbClr val="181818"/>
+              </a:gs>
+              <a:gs pos="100000">
+                <a:srgbClr val="383838"/>
+              </a:gs>
+            </a:gsLst>
+            <a:lin scaled="0" ang="0"/>
+          </a:gradFill>
+          <a:ln>
+            <a:noFill/>
+          </a:ln>
+        </p:spPr>
+        <p:style>
+          <a:lnRef idx="1">
+            <a:schemeClr val="accent1"/>
+          </a:lnRef>
+          <a:fillRef idx="3">
+            <a:schemeClr val="accent1"/>
+          </a:fillRef>
+          <a:effectRef idx="2">
+            <a:schemeClr val="accent1"/>
+          </a:effectRef>
+          <a:fontRef idx="minor">
+            <a:schemeClr val="lt1"/>
+          </a:fontRef>
+        </p:style>
+        <p:txBody>
+          <a:bodyPr rtlCol="0" anchor="ctr"/>
+          <a:lstStyle/>
+          <a:p>
+            <a:pPr algn="ctr"/>
+          </a:p>
+        </p:txBody>
+      </p:sp>
+      <p:sp>
+        <p:nvSpPr>
+          <p:cNvPr id="10" name="TextBox 9"/>
+          <p:cNvSpPr txBox="1"/>
+          <p:nvPr/>
+        </p:nvSpPr>
+        <p:spPr>
+          <a:xfrm>
+            <a:off x="274320" y="4722876"/>
+            <a:ext cx="4572000" cy="384048"/>
+          </a:xfrm>
+          <a:prstGeom prst="rect">
+            <a:avLst/>
+          </a:prstGeom>
+          <a:noFill/>
+        </p:spPr>
+        <p:txBody>
+          <a:bodyPr wrap="square">
+            <a:spAutoFit/>
+          </a:bodyPr>
+          <a:lstStyle/>
+          <a:p>
+            <a:pPr algn="l"/>
+            <a:r>
+              <a:rPr sz="1300" b="0">
+                <a:solidFill>
+                  <a:srgbClr val="C0C0C0"/>
+                </a:solidFill>
+                <a:latin typeface="Calibri"/>
+              </a:rPr>
+              <a:t>替代方案</a:t>
+            </a:r>
+          </a:p>
+        </p:txBody>
+      </p:sp>
+      <p:sp>
+        <p:nvSpPr>
+          <p:cNvPr id="11" name="TextBox 10"/>
+          <p:cNvSpPr txBox="1"/>
+          <p:nvPr/>
+        </p:nvSpPr>
+        <p:spPr>
+          <a:xfrm>
+            <a:off x="7863840" y="4722876"/>
+            <a:ext cx="914400" cy="384048"/>
+          </a:xfrm>
+          <a:prstGeom prst="rect">
+            <a:avLst/>
+          </a:prstGeom>
+          <a:noFill/>
+        </p:spPr>
+        <p:txBody>
+          <a:bodyPr wrap="square">
+            <a:spAutoFit/>
+          </a:bodyPr>
+          <a:lstStyle/>
+          <a:p>
+            <a:pPr algn="r"/>
+            <a:r>
+              <a:rPr sz="1300" b="0">
+                <a:solidFill>
+                  <a:srgbClr val="C0C0C0"/>
+                </a:solidFill>
+                <a:latin typeface="Calibri"/>
+              </a:rPr>
+              <a:t>17 / 25</a:t>
+            </a:r>
+          </a:p>
+        </p:txBody>
+      </p:sp>
+    </p:spTree>
+  </p:cSld>
+  <p:clrMapOvr>
+    <a:masterClrMapping/>
+  </p:clrMapOvr>
+</p:sld>
+</file>
+
+<file path=ppt/slides/slide18.xml><?xml version="1.0" encoding="utf-8"?>
+<p:sld xmlns:a="http://schemas.openxmlformats.org/drawingml/2006/main" xmlns:p="http://schemas.openxmlformats.org/presentationml/2006/main" xmlns:r="http://schemas.openxmlformats.org/officeDocument/2006/relationships">
+  <p:cSld>
+    <p:bg>
+      <p:bgPr>
+        <a:solidFill>
+          <a:srgbClr val="FFFFFF"/>
+        </a:solidFill>
+        <a:effectLst/>
+      </p:bgPr>
+    </p:bg>
+    <p:spTree>
+      <p:nvGrpSpPr>
+        <p:cNvPr id="1" name=""/>
+        <p:cNvGrpSpPr/>
+        <p:nvPr/>
+      </p:nvGrpSpPr>
+      <p:grpSpPr/>
+      <p:sp>
+        <p:nvSpPr>
+          <p:cNvPr id="2" name="Rectangle 1"/>
+          <p:cNvSpPr/>
+          <p:nvPr/>
+        </p:nvSpPr>
+        <p:spPr>
+          <a:xfrm>
+            <a:off x="0" y="0"/>
+            <a:ext cx="9144000" cy="822960"/>
+          </a:xfrm>
+          <a:prstGeom prst="rect">
+            <a:avLst/>
+          </a:prstGeom>
+          <a:gradFill rotWithShape="1">
+            <a:gsLst>
+              <a:gs pos="0">
+                <a:srgbClr val="181818"/>
+              </a:gs>
+              <a:gs pos="100000">
+                <a:srgbClr val="424242"/>
+              </a:gs>
+            </a:gsLst>
+            <a:lin scaled="0" ang="0"/>
+          </a:gradFill>
+          <a:ln>
+            <a:noFill/>
+          </a:ln>
+        </p:spPr>
+        <p:style>
+          <a:lnRef idx="1">
+            <a:schemeClr val="accent1"/>
+          </a:lnRef>
+          <a:fillRef idx="3">
+            <a:schemeClr val="accent1"/>
+          </a:fillRef>
+          <a:effectRef idx="2">
+            <a:schemeClr val="accent1"/>
+          </a:effectRef>
+          <a:fontRef idx="minor">
+            <a:schemeClr val="lt1"/>
+          </a:fontRef>
+        </p:style>
+        <p:txBody>
+          <a:bodyPr rtlCol="0" anchor="ctr"/>
+          <a:lstStyle/>
+          <a:p>
+            <a:pPr algn="ctr"/>
+          </a:p>
+        </p:txBody>
+      </p:sp>
+      <p:sp>
+        <p:nvSpPr>
+          <p:cNvPr id="3" name="Rectangle 2"/>
+          <p:cNvSpPr/>
+          <p:nvPr/>
+        </p:nvSpPr>
+        <p:spPr>
+          <a:xfrm>
+            <a:off x="0" y="0"/>
+            <a:ext cx="9144000" cy="10972"/>
+          </a:xfrm>
+          <a:prstGeom prst="rect">
+            <a:avLst/>
+          </a:prstGeom>
+          <a:gradFill rotWithShape="1">
+            <a:gsLst>
+              <a:gs pos="0">
+                <a:srgbClr val="707070"/>
+              </a:gs>
+              <a:gs pos="100000">
+                <a:srgbClr val="303030"/>
+              </a:gs>
+            </a:gsLst>
+            <a:lin scaled="0" ang="0"/>
+          </a:gradFill>
+          <a:ln>
+            <a:noFill/>
+          </a:ln>
+        </p:spPr>
+        <p:style>
+          <a:lnRef idx="1">
+            <a:schemeClr val="accent1"/>
+          </a:lnRef>
+          <a:fillRef idx="3">
+            <a:schemeClr val="accent1"/>
+          </a:fillRef>
+          <a:effectRef idx="2">
+            <a:schemeClr val="accent1"/>
+          </a:effectRef>
+          <a:fontRef idx="minor">
+            <a:schemeClr val="lt1"/>
+          </a:fontRef>
+        </p:style>
+        <p:txBody>
+          <a:bodyPr rtlCol="0" anchor="ctr"/>
+          <a:lstStyle/>
+          <a:p>
+            <a:pPr algn="ctr"/>
+          </a:p>
+        </p:txBody>
+      </p:sp>
+      <p:sp>
+        <p:nvSpPr>
+          <p:cNvPr id="4" name="Rectangle 3"/>
+          <p:cNvSpPr/>
+          <p:nvPr/>
+        </p:nvSpPr>
+        <p:spPr>
+          <a:xfrm>
+            <a:off x="0" y="0"/>
+            <a:ext cx="50292" cy="822960"/>
+          </a:xfrm>
+          <a:prstGeom prst="rect">
+            <a:avLst/>
+          </a:prstGeom>
+          <a:gradFill rotWithShape="1">
+            <a:gsLst>
+              <a:gs pos="0">
+                <a:srgbClr val="9A9A9A"/>
+              </a:gs>
+              <a:gs pos="100000">
+                <a:srgbClr val="424242"/>
+              </a:gs>
+            </a:gsLst>
+            <a:lin scaled="0" ang="5400000"/>
+          </a:gradFill>
+          <a:ln>
+            <a:noFill/>
+          </a:ln>
+        </p:spPr>
+        <p:style>
+          <a:lnRef idx="1">
+            <a:schemeClr val="accent1"/>
+          </a:lnRef>
+          <a:fillRef idx="3">
+            <a:schemeClr val="accent1"/>
+          </a:fillRef>
+          <a:effectRef idx="2">
+            <a:schemeClr val="accent1"/>
+          </a:effectRef>
+          <a:fontRef idx="minor">
+            <a:schemeClr val="lt1"/>
+          </a:fontRef>
+        </p:style>
+        <p:txBody>
+          <a:bodyPr rtlCol="0" anchor="ctr"/>
+          <a:lstStyle/>
+          <a:p>
+            <a:pPr algn="ctr"/>
+          </a:p>
+        </p:txBody>
+      </p:sp>
+      <p:sp>
+        <p:nvSpPr>
+          <p:cNvPr id="5" name="TextBox 4"/>
+          <p:cNvSpPr txBox="1"/>
+          <p:nvPr/>
+        </p:nvSpPr>
+        <p:spPr>
+          <a:xfrm>
+            <a:off x="365760" y="109728"/>
+            <a:ext cx="7040880" cy="731520"/>
+          </a:xfrm>
+          <a:prstGeom prst="rect">
+            <a:avLst/>
+          </a:prstGeom>
+          <a:noFill/>
+        </p:spPr>
+        <p:txBody>
+          <a:bodyPr wrap="square">
+            <a:spAutoFit/>
+          </a:bodyPr>
+          <a:lstStyle/>
+          <a:p>
+            <a:pPr algn="l"/>
+            <a:r>
+              <a:rPr sz="2800" b="1">
+                <a:solidFill>
+                  <a:srgbClr val="FFFFFF"/>
+                </a:solidFill>
+                <a:latin typeface="Calibri"/>
+              </a:rPr>
+              <a:t>為什麼 Linux 可以取得 CSI？</a:t>
+            </a:r>
+          </a:p>
+        </p:txBody>
+      </p:sp>
+      <p:sp>
+        <p:nvSpPr>
+          <p:cNvPr id="6" name="TextBox 5"/>
+          <p:cNvSpPr txBox="1"/>
+          <p:nvPr/>
+        </p:nvSpPr>
+        <p:spPr>
+          <a:xfrm>
+            <a:off x="7498080" y="109728"/>
+            <a:ext cx="1280160" cy="731520"/>
+          </a:xfrm>
+          <a:prstGeom prst="rect">
+            <a:avLst/>
+          </a:prstGeom>
+          <a:noFill/>
+        </p:spPr>
+        <p:txBody>
+          <a:bodyPr wrap="square">
+            <a:spAutoFit/>
+          </a:bodyPr>
+          <a:lstStyle/>
+          <a:p>
+            <a:pPr algn="r"/>
+            <a:r>
+              <a:rPr sz="1300" b="0">
+                <a:solidFill>
+                  <a:srgbClr val="C0C0C0"/>
+                </a:solidFill>
+                <a:latin typeface="Calibri"/>
+              </a:rPr>
+              <a:t>Section 3/4</a:t>
+            </a:r>
+          </a:p>
+        </p:txBody>
+      </p:sp>
+      <p:cxnSp>
+        <p:nvCxnSpPr>
+          <p:cNvPr id="7" name="Connector 6"/>
+          <p:cNvCxnSpPr/>
+          <p:nvPr/>
+        </p:nvCxnSpPr>
+        <p:spPr>
+          <a:xfrm>
+            <a:off x="4572000" y="960120"/>
+            <a:ext cx="0" cy="3433572"/>
+          </a:xfrm>
+          <a:prstGeom prst="line">
+            <a:avLst/>
+          </a:prstGeom>
+          <a:ln w="6350">
+            <a:solidFill>
+              <a:srgbClr val="D8D8D8"/>
+            </a:solidFill>
+          </a:ln>
+        </p:spPr>
+        <p:style>
+          <a:lnRef idx="2">
+            <a:schemeClr val="accent1"/>
+          </a:lnRef>
+          <a:fillRef idx="0">
+            <a:schemeClr val="accent1"/>
+          </a:fillRef>
+          <a:effectRef idx="1">
+            <a:schemeClr val="accent1"/>
+          </a:effectRef>
+          <a:fontRef idx="minor">
+            <a:schemeClr val="tx1"/>
+          </a:fontRef>
+        </p:style>
+      </p:cxnSp>
+      <p:sp>
+        <p:nvSpPr>
+          <p:cNvPr id="8" name="TextBox 7"/>
+          <p:cNvSpPr txBox="1"/>
+          <p:nvPr/>
+        </p:nvSpPr>
+        <p:spPr>
+          <a:xfrm>
+            <a:off x="457200" y="1033272"/>
+            <a:ext cx="3863340" cy="384048"/>
+          </a:xfrm>
+          <a:prstGeom prst="rect">
+            <a:avLst/>
+          </a:prstGeom>
+          <a:noFill/>
+        </p:spPr>
+        <p:txBody>
+          <a:bodyPr wrap="square">
+            <a:spAutoFit/>
+          </a:bodyPr>
+          <a:lstStyle/>
+          <a:p>
+            <a:pPr algn="l"/>
+            <a:r>
+              <a:rPr sz="1800" b="1">
+                <a:solidFill>
+                  <a:srgbClr val="9A9A9A"/>
+                </a:solidFill>
+                <a:latin typeface="Calibri"/>
+              </a:rPr>
+              <a:t>Linux 驅動架構</a:t>
+            </a:r>
+          </a:p>
+        </p:txBody>
+      </p:sp>
+      <p:sp>
+        <p:nvSpPr>
+          <p:cNvPr id="9" name="TextBox 8"/>
+          <p:cNvSpPr txBox="1"/>
+          <p:nvPr/>
+        </p:nvSpPr>
+        <p:spPr>
+          <a:xfrm>
+            <a:off x="457200" y="1463040"/>
+            <a:ext cx="3863340" cy="2839212"/>
+          </a:xfrm>
+          <a:prstGeom prst="rect">
+            <a:avLst/>
+          </a:prstGeom>
+          <a:noFill/>
+        </p:spPr>
+        <p:txBody>
+          <a:bodyPr wrap="square">
+            <a:spAutoFit/>
+          </a:bodyPr>
+          <a:lstStyle/>
+          <a:p>
+            <a:pPr>
+              <a:spcBef>
+                <a:spcPts val="300"/>
+              </a:spcBef>
+            </a:pPr>
+            <a:r>
+              <a:rPr sz="1500">
+                <a:solidFill>
+                  <a:srgbClr val="1A1A1A"/>
+                </a:solidFill>
+              </a:rPr>
+              <a:t>cfg80211：802.11 設定框架</a:t>
+            </a:r>
+          </a:p>
+          <a:p>
+            <a:pPr>
+              <a:spcBef>
+                <a:spcPts val="300"/>
+              </a:spcBef>
+            </a:pPr>
+            <a:r>
+              <a:rPr sz="1500">
+                <a:solidFill>
+                  <a:srgbClr val="1A1A1A"/>
+                </a:solidFill>
+              </a:rPr>
+              <a:t>mac80211：軟體 MAC 實作</a:t>
+            </a:r>
+          </a:p>
+          <a:p>
+            <a:pPr>
+              <a:spcBef>
+                <a:spcPts val="300"/>
+              </a:spcBef>
+            </a:pPr>
+            <a:r>
+              <a:rPr sz="1500">
+                <a:solidFill>
+                  <a:srgbClr val="1A1A1A"/>
+                </a:solidFill>
+              </a:rPr>
+              <a:t>nl80211：Netlink 介面（用戶空間↔核心）</a:t>
+            </a:r>
+          </a:p>
+          <a:p>
+            <a:r>
+              <a:rPr sz="600"/>
+              <a:t/>
+            </a:r>
+          </a:p>
+          <a:p>
+            <a:pPr>
+              <a:spcBef>
+                <a:spcPts val="300"/>
+              </a:spcBef>
+            </a:pPr>
+            <a:r>
+              <a:rPr sz="1500">
+                <a:solidFill>
+                  <a:srgbClr val="1A1A1A"/>
+                </a:solidFill>
+              </a:rPr>
+              <a:t>關鍵差異：開源驅動</a:t>
+            </a:r>
+          </a:p>
+          <a:p>
+            <a:pPr>
+              <a:spcBef>
+                <a:spcPts val="100"/>
+              </a:spcBef>
+            </a:pPr>
+            <a:r>
+              <a:rPr sz="1300">
+                <a:solidFill>
+                  <a:srgbClr val="646464"/>
+                </a:solidFill>
+              </a:rPr>
+              <a:t>  · iwlwifi（Intel）可修改</a:t>
+            </a:r>
+          </a:p>
+          <a:p>
+            <a:pPr>
+              <a:spcBef>
+                <a:spcPts val="100"/>
+              </a:spcBef>
+            </a:pPr>
+            <a:r>
+              <a:rPr sz="1300">
+                <a:solidFill>
+                  <a:srgbClr val="646464"/>
+                </a:solidFill>
+              </a:rPr>
+              <a:t>  · ath9k（Atheros）可修改</a:t>
+            </a:r>
+          </a:p>
+          <a:p>
+            <a:pPr>
+              <a:spcBef>
+                <a:spcPts val="100"/>
+              </a:spcBef>
+            </a:pPr>
+            <a:r>
+              <a:rPr sz="1300">
+                <a:solidFill>
+                  <a:srgbClr val="646464"/>
+                </a:solidFill>
+              </a:rPr>
+              <a:t>  · brcmfmac（Broadcom）可 patch 韌體</a:t>
+            </a:r>
+          </a:p>
+          <a:p>
+            <a:r>
+              <a:rPr sz="600"/>
+              <a:t/>
+            </a:r>
+          </a:p>
+          <a:p>
+            <a:pPr>
+              <a:spcBef>
+                <a:spcPts val="300"/>
+              </a:spcBef>
+            </a:pPr>
+            <a:r>
+              <a:rPr sz="1500">
+                <a:solidFill>
+                  <a:srgbClr val="1A1A1A"/>
+                </a:solidFill>
+              </a:rPr>
+              <a:t>debugfs 介面：</a:t>
+            </a:r>
+          </a:p>
+          <a:p>
+            <a:pPr>
+              <a:spcBef>
+                <a:spcPts val="100"/>
+              </a:spcBef>
+            </a:pPr>
+            <a:r>
+              <a:rPr sz="1300">
+                <a:solidFill>
+                  <a:srgbClr val="646464"/>
+                </a:solidFill>
+              </a:rPr>
+              <a:t>  /sys/kernel/debug/ieee80211/</a:t>
+            </a:r>
+          </a:p>
+          <a:p>
+            <a:pPr>
+              <a:spcBef>
+                <a:spcPts val="100"/>
+              </a:spcBef>
+            </a:pPr>
+            <a:r>
+              <a:rPr sz="1300">
+                <a:solidFill>
+                  <a:srgbClr val="646464"/>
+                </a:solidFill>
+              </a:rPr>
+              <a:t>  部分驅動在此暴露 CSI 原始資料</a:t>
+            </a:r>
+          </a:p>
+        </p:txBody>
+      </p:sp>
+      <p:sp>
+        <p:nvSpPr>
+          <p:cNvPr id="10" name="TextBox 9"/>
+          <p:cNvSpPr txBox="1"/>
+          <p:nvPr/>
+        </p:nvSpPr>
+        <p:spPr>
+          <a:xfrm>
+            <a:off x="4823460" y="1033272"/>
+            <a:ext cx="3863340" cy="384048"/>
+          </a:xfrm>
+          <a:prstGeom prst="rect">
+            <a:avLst/>
+          </a:prstGeom>
+          <a:noFill/>
+        </p:spPr>
+        <p:txBody>
+          <a:bodyPr wrap="square">
+            <a:spAutoFit/>
+          </a:bodyPr>
+          <a:lstStyle/>
+          <a:p>
+            <a:pPr algn="l"/>
+            <a:r>
+              <a:rPr sz="1800" b="1">
+                <a:solidFill>
+                  <a:srgbClr val="9A9A9A"/>
+                </a:solidFill>
+                <a:latin typeface="Calibri"/>
+              </a:rPr>
+              <a:t>Windows 的根本差異</a:t>
+            </a:r>
+          </a:p>
+        </p:txBody>
+      </p:sp>
+      <p:sp>
+        <p:nvSpPr>
+          <p:cNvPr id="11" name="TextBox 10"/>
+          <p:cNvSpPr txBox="1"/>
+          <p:nvPr/>
+        </p:nvSpPr>
+        <p:spPr>
+          <a:xfrm>
+            <a:off x="4823460" y="1463040"/>
+            <a:ext cx="3863340" cy="2839212"/>
+          </a:xfrm>
+          <a:prstGeom prst="rect">
+            <a:avLst/>
+          </a:prstGeom>
+          <a:noFill/>
+        </p:spPr>
+        <p:txBody>
+          <a:bodyPr wrap="square">
+            <a:spAutoFit/>
+          </a:bodyPr>
+          <a:lstStyle/>
+          <a:p>
+            <a:pPr>
+              <a:spcBef>
+                <a:spcPts val="300"/>
+              </a:spcBef>
+            </a:pPr>
+            <a:r>
+              <a:rPr sz="1500" b="1">
+                <a:solidFill>
+                  <a:srgbClr val="1A1A1A"/>
+                </a:solidFill>
+              </a:rPr>
+              <a:t>✗ OEM.sys 為閉源二進位</a:t>
+            </a:r>
+          </a:p>
+          <a:p>
+            <a:pPr>
+              <a:spcBef>
+                <a:spcPts val="300"/>
+              </a:spcBef>
+            </a:pPr>
+            <a:r>
+              <a:rPr sz="1500" b="1">
+                <a:solidFill>
+                  <a:srgbClr val="1A1A1A"/>
+                </a:solidFill>
+              </a:rPr>
+              <a:t>✗ NDIS 介面固定，無擴充 CSI 的機制</a:t>
+            </a:r>
+          </a:p>
+          <a:p>
+            <a:pPr>
+              <a:spcBef>
+                <a:spcPts val="300"/>
+              </a:spcBef>
+            </a:pPr>
+            <a:r>
+              <a:rPr sz="1500" b="1">
+                <a:solidFill>
+                  <a:srgbClr val="1A1A1A"/>
+                </a:solidFill>
+              </a:rPr>
+              <a:t>✗ 無等同 debugfs 的 PHY 資料介面</a:t>
+            </a:r>
+          </a:p>
+          <a:p>
+            <a:pPr>
+              <a:spcBef>
+                <a:spcPts val="300"/>
+              </a:spcBef>
+            </a:pPr>
+            <a:r>
+              <a:rPr sz="1500" b="1">
+                <a:solidFill>
+                  <a:srgbClr val="1A1A1A"/>
+                </a:solidFill>
+              </a:rPr>
+              <a:t>✗ 韌體修改需要 WHQL 簽章</a:t>
+            </a:r>
+          </a:p>
+          <a:p>
+            <a:r>
+              <a:rPr sz="600"/>
+              <a:t/>
+            </a:r>
+          </a:p>
+          <a:p>
+            <a:pPr>
+              <a:spcBef>
+                <a:spcPts val="300"/>
+              </a:spcBef>
+            </a:pPr>
+            <a:r>
+              <a:rPr sz="1500">
+                <a:solidFill>
+                  <a:srgbClr val="1A1A1A"/>
+                </a:solidFill>
+              </a:rPr>
+              <a:t>→ Linux 的可行性來自</a:t>
+            </a:r>
+          </a:p>
+          <a:p>
+            <a:pPr>
+              <a:spcBef>
+                <a:spcPts val="100"/>
+              </a:spcBef>
+            </a:pPr>
+            <a:r>
+              <a:rPr sz="1300">
+                <a:solidFill>
+                  <a:srgbClr val="646464"/>
+                </a:solidFill>
+              </a:rPr>
+              <a:t>  開源 + 可修改驅動 + 彈性的核心介面</a:t>
+            </a:r>
+          </a:p>
+          <a:p>
+            <a:pPr>
+              <a:spcBef>
+                <a:spcPts val="100"/>
+              </a:spcBef>
+            </a:pPr>
+            <a:r>
+              <a:rPr sz="1300">
+                <a:solidFill>
+                  <a:srgbClr val="646464"/>
+                </a:solidFill>
+              </a:rPr>
+              <a:t>  不是 Windows 的「bug」，是設計哲學差異</a:t>
+            </a:r>
+          </a:p>
+        </p:txBody>
+      </p:sp>
+      <p:cxnSp>
+        <p:nvCxnSpPr>
+          <p:cNvPr id="12" name="Connector 11"/>
+          <p:cNvCxnSpPr/>
+          <p:nvPr/>
+        </p:nvCxnSpPr>
+        <p:spPr>
+          <a:xfrm>
+            <a:off x="365760" y="4393688"/>
+            <a:ext cx="8412480" cy="0"/>
+          </a:xfrm>
+          <a:prstGeom prst="line">
+            <a:avLst/>
+          </a:prstGeom>
+          <a:ln w="6350">
+            <a:solidFill>
+              <a:srgbClr val="D8D8D8"/>
+            </a:solidFill>
+          </a:ln>
+        </p:spPr>
+        <p:style>
+          <a:lnRef idx="2">
+            <a:schemeClr val="accent1"/>
+          </a:lnRef>
+          <a:fillRef idx="0">
+            <a:schemeClr val="accent1"/>
+          </a:fillRef>
+          <a:effectRef idx="1">
+            <a:schemeClr val="accent1"/>
+          </a:effectRef>
+          <a:fontRef idx="minor">
+            <a:schemeClr val="tx1"/>
+          </a:fontRef>
+        </p:style>
+      </p:cxnSp>
+      <p:sp>
+        <p:nvSpPr>
+          <p:cNvPr id="13" name="TextBox 12"/>
+          <p:cNvSpPr txBox="1"/>
+          <p:nvPr/>
+        </p:nvSpPr>
+        <p:spPr>
+          <a:xfrm>
+            <a:off x="457200" y="4393692"/>
+            <a:ext cx="8229600" cy="256032"/>
+          </a:xfrm>
+          <a:prstGeom prst="rect">
+            <a:avLst/>
+          </a:prstGeom>
+          <a:noFill/>
+        </p:spPr>
+        <p:txBody>
+          <a:bodyPr wrap="square">
+            <a:spAutoFit/>
+          </a:bodyPr>
+          <a:lstStyle/>
+          <a:p>
+            <a:pPr algn="l"/>
+            <a:r>
+              <a:rPr sz="1300" b="0">
+                <a:solidFill>
+                  <a:srgbClr val="646464"/>
+                </a:solidFill>
+                <a:latin typeface="Calibri"/>
+              </a:rPr>
+              <a:t>Linux 的可行性來自開源生態，不是 Windows 的設計缺陷</a:t>
+            </a:r>
+          </a:p>
+        </p:txBody>
+      </p:sp>
+      <p:sp>
+        <p:nvSpPr>
+          <p:cNvPr id="14" name="Rectangle 13"/>
+          <p:cNvSpPr/>
+          <p:nvPr/>
+        </p:nvSpPr>
+        <p:spPr>
+          <a:xfrm>
+            <a:off x="0" y="4686300"/>
+            <a:ext cx="9144000" cy="457200"/>
+          </a:xfrm>
+          <a:prstGeom prst="rect">
+            <a:avLst/>
+          </a:prstGeom>
+          <a:gradFill rotWithShape="1">
+            <a:gsLst>
+              <a:gs pos="0">
+                <a:srgbClr val="181818"/>
+              </a:gs>
+              <a:gs pos="100000">
+                <a:srgbClr val="383838"/>
+              </a:gs>
+            </a:gsLst>
+            <a:lin scaled="0" ang="0"/>
+          </a:gradFill>
+          <a:ln>
+            <a:noFill/>
+          </a:ln>
+        </p:spPr>
+        <p:style>
+          <a:lnRef idx="1">
+            <a:schemeClr val="accent1"/>
+          </a:lnRef>
+          <a:fillRef idx="3">
+            <a:schemeClr val="accent1"/>
+          </a:fillRef>
+          <a:effectRef idx="2">
+            <a:schemeClr val="accent1"/>
+          </a:effectRef>
+          <a:fontRef idx="minor">
+            <a:schemeClr val="lt1"/>
+          </a:fontRef>
+        </p:style>
+        <p:txBody>
+          <a:bodyPr rtlCol="0" anchor="ctr"/>
+          <a:lstStyle/>
+          <a:p>
+            <a:pPr algn="ctr"/>
+          </a:p>
+        </p:txBody>
+      </p:sp>
+      <p:sp>
+        <p:nvSpPr>
+          <p:cNvPr id="15" name="TextBox 14"/>
+          <p:cNvSpPr txBox="1"/>
+          <p:nvPr/>
+        </p:nvSpPr>
+        <p:spPr>
+          <a:xfrm>
+            <a:off x="274320" y="4722876"/>
+            <a:ext cx="4572000" cy="384048"/>
+          </a:xfrm>
+          <a:prstGeom prst="rect">
+            <a:avLst/>
+          </a:prstGeom>
+          <a:noFill/>
+        </p:spPr>
+        <p:txBody>
+          <a:bodyPr wrap="square">
+            <a:spAutoFit/>
+          </a:bodyPr>
+          <a:lstStyle/>
+          <a:p>
+            <a:pPr algn="l"/>
+            <a:r>
+              <a:rPr sz="1300" b="0">
+                <a:solidFill>
+                  <a:srgbClr val="C0C0C0"/>
+                </a:solidFill>
+                <a:latin typeface="Calibri"/>
+              </a:rPr>
+              <a:t>替代方案</a:t>
+            </a:r>
+          </a:p>
+        </p:txBody>
+      </p:sp>
+      <p:sp>
+        <p:nvSpPr>
+          <p:cNvPr id="16" name="TextBox 15"/>
+          <p:cNvSpPr txBox="1"/>
+          <p:nvPr/>
+        </p:nvSpPr>
+        <p:spPr>
+          <a:xfrm>
+            <a:off x="7863840" y="4722876"/>
+            <a:ext cx="914400" cy="384048"/>
+          </a:xfrm>
+          <a:prstGeom prst="rect">
+            <a:avLst/>
+          </a:prstGeom>
+          <a:noFill/>
+        </p:spPr>
+        <p:txBody>
+          <a:bodyPr wrap="square">
+            <a:spAutoFit/>
+          </a:bodyPr>
+          <a:lstStyle/>
+          <a:p>
+            <a:pPr algn="r"/>
+            <a:r>
+              <a:rPr sz="1300" b="0">
+                <a:solidFill>
+                  <a:srgbClr val="C0C0C0"/>
+                </a:solidFill>
+                <a:latin typeface="Calibri"/>
+              </a:rPr>
+              <a:t>18 / 25</a:t>
             </a:r>
           </a:p>
         </p:txBody>
@@ -11705,7 +13249,7 @@
 </p:sld>
 </file>
 
-<file path=ppt/slides/slide18.xml><?xml version="1.0" encoding="utf-8"?>
+<file path=ppt/slides/slide19.xml><?xml version="1.0" encoding="utf-8"?>
 <p:sld xmlns:a="http://schemas.openxmlformats.org/drawingml/2006/main" xmlns:p="http://schemas.openxmlformats.org/presentationml/2006/main" xmlns:r="http://schemas.openxmlformats.org/officeDocument/2006/relationships">
   <p:cSld>
     <p:bg>
@@ -12950,7 +14494,7 @@
                 </a:solidFill>
                 <a:latin typeface="Calibri"/>
               </a:rPr>
-              <a:t>18 / 24</a:t>
+              <a:t>19 / 25</a:t>
             </a:r>
           </a:p>
         </p:txBody>
@@ -12963,7 +14507,553 @@
 </p:sld>
 </file>
 
-<file path=ppt/slides/slide19.xml><?xml version="1.0" encoding="utf-8"?>
+<file path=ppt/slides/slide2.xml><?xml version="1.0" encoding="utf-8"?>
+<p:sld xmlns:a="http://schemas.openxmlformats.org/drawingml/2006/main" xmlns:p="http://schemas.openxmlformats.org/presentationml/2006/main" xmlns:r="http://schemas.openxmlformats.org/officeDocument/2006/relationships">
+  <p:cSld>
+    <p:bg>
+      <p:bgPr>
+        <a:solidFill>
+          <a:srgbClr val="FFFFFF"/>
+        </a:solidFill>
+        <a:effectLst/>
+      </p:bgPr>
+    </p:bg>
+    <p:spTree>
+      <p:nvGrpSpPr>
+        <p:cNvPr id="1" name=""/>
+        <p:cNvGrpSpPr/>
+        <p:nvPr/>
+      </p:nvGrpSpPr>
+      <p:grpSpPr/>
+      <p:sp>
+        <p:nvSpPr>
+          <p:cNvPr id="2" name="Rectangle 1"/>
+          <p:cNvSpPr/>
+          <p:nvPr/>
+        </p:nvSpPr>
+        <p:spPr>
+          <a:xfrm>
+            <a:off x="0" y="0"/>
+            <a:ext cx="9144000" cy="822960"/>
+          </a:xfrm>
+          <a:prstGeom prst="rect">
+            <a:avLst/>
+          </a:prstGeom>
+          <a:gradFill rotWithShape="1">
+            <a:gsLst>
+              <a:gs pos="0">
+                <a:srgbClr val="181818"/>
+              </a:gs>
+              <a:gs pos="100000">
+                <a:srgbClr val="424242"/>
+              </a:gs>
+            </a:gsLst>
+            <a:lin scaled="0" ang="0"/>
+          </a:gradFill>
+          <a:ln>
+            <a:noFill/>
+          </a:ln>
+        </p:spPr>
+        <p:style>
+          <a:lnRef idx="1">
+            <a:schemeClr val="accent1"/>
+          </a:lnRef>
+          <a:fillRef idx="3">
+            <a:schemeClr val="accent1"/>
+          </a:fillRef>
+          <a:effectRef idx="2">
+            <a:schemeClr val="accent1"/>
+          </a:effectRef>
+          <a:fontRef idx="minor">
+            <a:schemeClr val="lt1"/>
+          </a:fontRef>
+        </p:style>
+        <p:txBody>
+          <a:bodyPr rtlCol="0" anchor="ctr"/>
+          <a:lstStyle/>
+          <a:p>
+            <a:pPr algn="ctr"/>
+          </a:p>
+        </p:txBody>
+      </p:sp>
+      <p:sp>
+        <p:nvSpPr>
+          <p:cNvPr id="3" name="Rectangle 2"/>
+          <p:cNvSpPr/>
+          <p:nvPr/>
+        </p:nvSpPr>
+        <p:spPr>
+          <a:xfrm>
+            <a:off x="0" y="0"/>
+            <a:ext cx="9144000" cy="10972"/>
+          </a:xfrm>
+          <a:prstGeom prst="rect">
+            <a:avLst/>
+          </a:prstGeom>
+          <a:gradFill rotWithShape="1">
+            <a:gsLst>
+              <a:gs pos="0">
+                <a:srgbClr val="707070"/>
+              </a:gs>
+              <a:gs pos="100000">
+                <a:srgbClr val="303030"/>
+              </a:gs>
+            </a:gsLst>
+            <a:lin scaled="0" ang="0"/>
+          </a:gradFill>
+          <a:ln>
+            <a:noFill/>
+          </a:ln>
+        </p:spPr>
+        <p:style>
+          <a:lnRef idx="1">
+            <a:schemeClr val="accent1"/>
+          </a:lnRef>
+          <a:fillRef idx="3">
+            <a:schemeClr val="accent1"/>
+          </a:fillRef>
+          <a:effectRef idx="2">
+            <a:schemeClr val="accent1"/>
+          </a:effectRef>
+          <a:fontRef idx="minor">
+            <a:schemeClr val="lt1"/>
+          </a:fontRef>
+        </p:style>
+        <p:txBody>
+          <a:bodyPr rtlCol="0" anchor="ctr"/>
+          <a:lstStyle/>
+          <a:p>
+            <a:pPr algn="ctr"/>
+          </a:p>
+        </p:txBody>
+      </p:sp>
+      <p:sp>
+        <p:nvSpPr>
+          <p:cNvPr id="4" name="Rectangle 3"/>
+          <p:cNvSpPr/>
+          <p:nvPr/>
+        </p:nvSpPr>
+        <p:spPr>
+          <a:xfrm>
+            <a:off x="0" y="0"/>
+            <a:ext cx="50292" cy="822960"/>
+          </a:xfrm>
+          <a:prstGeom prst="rect">
+            <a:avLst/>
+          </a:prstGeom>
+          <a:gradFill rotWithShape="1">
+            <a:gsLst>
+              <a:gs pos="0">
+                <a:srgbClr val="9A9A9A"/>
+              </a:gs>
+              <a:gs pos="100000">
+                <a:srgbClr val="424242"/>
+              </a:gs>
+            </a:gsLst>
+            <a:lin scaled="0" ang="5400000"/>
+          </a:gradFill>
+          <a:ln>
+            <a:noFill/>
+          </a:ln>
+        </p:spPr>
+        <p:style>
+          <a:lnRef idx="1">
+            <a:schemeClr val="accent1"/>
+          </a:lnRef>
+          <a:fillRef idx="3">
+            <a:schemeClr val="accent1"/>
+          </a:fillRef>
+          <a:effectRef idx="2">
+            <a:schemeClr val="accent1"/>
+          </a:effectRef>
+          <a:fontRef idx="minor">
+            <a:schemeClr val="lt1"/>
+          </a:fontRef>
+        </p:style>
+        <p:txBody>
+          <a:bodyPr rtlCol="0" anchor="ctr"/>
+          <a:lstStyle/>
+          <a:p>
+            <a:pPr algn="ctr"/>
+          </a:p>
+        </p:txBody>
+      </p:sp>
+      <p:sp>
+        <p:nvSpPr>
+          <p:cNvPr id="5" name="TextBox 4"/>
+          <p:cNvSpPr txBox="1"/>
+          <p:nvPr/>
+        </p:nvSpPr>
+        <p:spPr>
+          <a:xfrm>
+            <a:off x="365760" y="109728"/>
+            <a:ext cx="7040880" cy="731520"/>
+          </a:xfrm>
+          <a:prstGeom prst="rect">
+            <a:avLst/>
+          </a:prstGeom>
+          <a:noFill/>
+        </p:spPr>
+        <p:txBody>
+          <a:bodyPr wrap="square">
+            <a:spAutoFit/>
+          </a:bodyPr>
+          <a:lstStyle/>
+          <a:p>
+            <a:pPr algn="l"/>
+            <a:r>
+              <a:rPr sz="2800" b="1">
+                <a:solidFill>
+                  <a:srgbClr val="FFFFFF"/>
+                </a:solidFill>
+                <a:latin typeface="Calibri"/>
+              </a:rPr>
+              <a:t>大綱</a:t>
+            </a:r>
+          </a:p>
+        </p:txBody>
+      </p:sp>
+      <p:sp>
+        <p:nvSpPr>
+          <p:cNvPr id="6" name="Rectangle 5"/>
+          <p:cNvSpPr/>
+          <p:nvPr/>
+        </p:nvSpPr>
+        <p:spPr>
+          <a:xfrm>
+            <a:off x="365760" y="960120"/>
+            <a:ext cx="36576" cy="3433572"/>
+          </a:xfrm>
+          <a:prstGeom prst="rect">
+            <a:avLst/>
+          </a:prstGeom>
+          <a:solidFill>
+            <a:srgbClr val="9A9A9A"/>
+          </a:solidFill>
+          <a:ln>
+            <a:noFill/>
+          </a:ln>
+        </p:spPr>
+        <p:style>
+          <a:lnRef idx="1">
+            <a:schemeClr val="accent1"/>
+          </a:lnRef>
+          <a:fillRef idx="3">
+            <a:schemeClr val="accent1"/>
+          </a:fillRef>
+          <a:effectRef idx="2">
+            <a:schemeClr val="accent1"/>
+          </a:effectRef>
+          <a:fontRef idx="minor">
+            <a:schemeClr val="lt1"/>
+          </a:fontRef>
+        </p:style>
+        <p:txBody>
+          <a:bodyPr rtlCol="0" anchor="ctr"/>
+          <a:lstStyle/>
+          <a:p>
+            <a:pPr algn="ctr"/>
+          </a:p>
+        </p:txBody>
+      </p:sp>
+      <p:sp>
+        <p:nvSpPr>
+          <p:cNvPr id="7" name="TextBox 6"/>
+          <p:cNvSpPr txBox="1"/>
+          <p:nvPr/>
+        </p:nvSpPr>
+        <p:spPr>
+          <a:xfrm>
+            <a:off x="530352" y="1051560"/>
+            <a:ext cx="8138160" cy="3250692"/>
+          </a:xfrm>
+          <a:prstGeom prst="rect">
+            <a:avLst/>
+          </a:prstGeom>
+          <a:noFill/>
+        </p:spPr>
+        <p:txBody>
+          <a:bodyPr wrap="square">
+            <a:spAutoFit/>
+          </a:bodyPr>
+          <a:lstStyle/>
+          <a:p>
+            <a:pPr>
+              <a:spcBef>
+                <a:spcPts val="400"/>
+              </a:spcBef>
+            </a:pPr>
+            <a:r>
+              <a:rPr sz="1700">
+                <a:solidFill>
+                  <a:srgbClr val="1A1A1A"/>
+                </a:solidFill>
+              </a:rPr>
+              <a:t>● 前言：為什麼需要 CSI？（Slide 3）</a:t>
+            </a:r>
+          </a:p>
+          <a:p>
+            <a:pPr>
+              <a:spcBef>
+                <a:spcPts val="400"/>
+              </a:spcBef>
+            </a:pPr>
+            <a:r>
+              <a:rPr sz="1700">
+                <a:solidFill>
+                  <a:srgbClr val="1A1A1A"/>
+                </a:solidFill>
+              </a:rPr>
+              <a:t>● 第一段：基礎架構（Slides 5–7）</a:t>
+            </a:r>
+          </a:p>
+          <a:p>
+            <a:pPr lvl="1">
+              <a:spcBef>
+                <a:spcPts val="100"/>
+              </a:spcBef>
+            </a:pPr>
+            <a:r>
+              <a:rPr sz="1500">
+                <a:solidFill>
+                  <a:srgbClr val="646464"/>
+                </a:solidFill>
+              </a:rPr>
+              <a:t>  · · 802.11 RF 信號路徑</a:t>
+            </a:r>
+          </a:p>
+          <a:p>
+            <a:pPr lvl="1">
+              <a:spcBef>
+                <a:spcPts val="100"/>
+              </a:spcBef>
+            </a:pPr>
+            <a:r>
+              <a:rPr sz="1500">
+                <a:solidFill>
+                  <a:srgbClr val="646464"/>
+                </a:solidFill>
+              </a:rPr>
+              <a:t>  · · PHY / MAC 與 CSI</a:t>
+            </a:r>
+          </a:p>
+          <a:p>
+            <a:pPr lvl="1">
+              <a:spcBef>
+                <a:spcPts val="100"/>
+              </a:spcBef>
+            </a:pPr>
+            <a:r>
+              <a:rPr sz="1500">
+                <a:solidFill>
+                  <a:srgbClr val="646464"/>
+                </a:solidFill>
+              </a:rPr>
+              <a:t>  · · OSI 7 層 vs Windows 元件對應</a:t>
+            </a:r>
+          </a:p>
+          <a:p>
+            <a:pPr>
+              <a:spcBef>
+                <a:spcPts val="400"/>
+              </a:spcBef>
+            </a:pPr>
+            <a:r>
+              <a:rPr sz="1700">
+                <a:solidFill>
+                  <a:srgbClr val="1A1A1A"/>
+                </a:solidFill>
+              </a:rPr>
+              <a:t>● 第二段：Windows 驅動堆疊（Slides 10–16）</a:t>
+            </a:r>
+          </a:p>
+          <a:p>
+            <a:pPr lvl="1">
+              <a:spcBef>
+                <a:spcPts val="100"/>
+              </a:spcBef>
+            </a:pPr>
+            <a:r>
+              <a:rPr sz="1500">
+                <a:solidFill>
+                  <a:srgbClr val="646464"/>
+                </a:solidFill>
+              </a:rPr>
+              <a:t>  · · OEM.sys / nwifi.sys / NDIS / WDI（逐層解析）</a:t>
+            </a:r>
+          </a:p>
+          <a:p>
+            <a:pPr lvl="1">
+              <a:spcBef>
+                <a:spcPts val="100"/>
+              </a:spcBef>
+            </a:pPr>
+            <a:r>
+              <a:rPr sz="1500">
+                <a:solidFill>
+                  <a:srgbClr val="646464"/>
+                </a:solidFill>
+              </a:rPr>
+              <a:t>  · · 架構總覽與 CSI 消失點分析</a:t>
+            </a:r>
+          </a:p>
+          <a:p>
+            <a:pPr>
+              <a:spcBef>
+                <a:spcPts val="400"/>
+              </a:spcBef>
+            </a:pPr>
+            <a:r>
+              <a:rPr sz="1700">
+                <a:solidFill>
+                  <a:srgbClr val="1A1A1A"/>
+                </a:solidFill>
+              </a:rPr>
+              <a:t>● 第三段：替代方案（Slides 18–21）</a:t>
+            </a:r>
+          </a:p>
+          <a:p>
+            <a:pPr lvl="1">
+              <a:spcBef>
+                <a:spcPts val="100"/>
+              </a:spcBef>
+            </a:pPr>
+            <a:r>
+              <a:rPr sz="1500">
+                <a:solidFill>
+                  <a:srgbClr val="646464"/>
+                </a:solidFill>
+              </a:rPr>
+              <a:t>  · · Linux 生態 vs Windows 限制</a:t>
+            </a:r>
+          </a:p>
+          <a:p>
+            <a:pPr lvl="1">
+              <a:spcBef>
+                <a:spcPts val="100"/>
+              </a:spcBef>
+            </a:pPr>
+            <a:r>
+              <a:rPr sz="1500">
+                <a:solidFill>
+                  <a:srgbClr val="646464"/>
+                </a:solidFill>
+              </a:rPr>
+              <a:t>  · · 硬體選型建議</a:t>
+            </a:r>
+          </a:p>
+          <a:p>
+            <a:pPr>
+              <a:spcBef>
+                <a:spcPts val="400"/>
+              </a:spcBef>
+            </a:pPr>
+            <a:r>
+              <a:rPr sz="1700">
+                <a:solidFill>
+                  <a:srgbClr val="1A1A1A"/>
+                </a:solidFill>
+              </a:rPr>
+              <a:t>● 第四段：結語與建議（Slides 23–25）</a:t>
+            </a:r>
+          </a:p>
+        </p:txBody>
+      </p:sp>
+      <p:sp>
+        <p:nvSpPr>
+          <p:cNvPr id="8" name="Rectangle 7"/>
+          <p:cNvSpPr/>
+          <p:nvPr/>
+        </p:nvSpPr>
+        <p:spPr>
+          <a:xfrm>
+            <a:off x="0" y="4686300"/>
+            <a:ext cx="9144000" cy="457200"/>
+          </a:xfrm>
+          <a:prstGeom prst="rect">
+            <a:avLst/>
+          </a:prstGeom>
+          <a:gradFill rotWithShape="1">
+            <a:gsLst>
+              <a:gs pos="0">
+                <a:srgbClr val="181818"/>
+              </a:gs>
+              <a:gs pos="100000">
+                <a:srgbClr val="383838"/>
+              </a:gs>
+            </a:gsLst>
+            <a:lin scaled="0" ang="0"/>
+          </a:gradFill>
+          <a:ln>
+            <a:noFill/>
+          </a:ln>
+        </p:spPr>
+        <p:style>
+          <a:lnRef idx="1">
+            <a:schemeClr val="accent1"/>
+          </a:lnRef>
+          <a:fillRef idx="3">
+            <a:schemeClr val="accent1"/>
+          </a:fillRef>
+          <a:effectRef idx="2">
+            <a:schemeClr val="accent1"/>
+          </a:effectRef>
+          <a:fontRef idx="minor">
+            <a:schemeClr val="lt1"/>
+          </a:fontRef>
+        </p:style>
+        <p:txBody>
+          <a:bodyPr rtlCol="0" anchor="ctr"/>
+          <a:lstStyle/>
+          <a:p>
+            <a:pPr algn="ctr"/>
+          </a:p>
+        </p:txBody>
+      </p:sp>
+      <p:sp>
+        <p:nvSpPr>
+          <p:cNvPr id="9" name="TextBox 8"/>
+          <p:cNvSpPr txBox="1"/>
+          <p:nvPr/>
+        </p:nvSpPr>
+        <p:spPr>
+          <a:xfrm>
+            <a:off x="7863840" y="4722876"/>
+            <a:ext cx="914400" cy="384048"/>
+          </a:xfrm>
+          <a:prstGeom prst="rect">
+            <a:avLst/>
+          </a:prstGeom>
+          <a:noFill/>
+        </p:spPr>
+        <p:txBody>
+          <a:bodyPr wrap="square">
+            <a:spAutoFit/>
+          </a:bodyPr>
+          <a:lstStyle/>
+          <a:p>
+            <a:pPr algn="r"/>
+            <a:r>
+              <a:rPr sz="1300" b="0">
+                <a:solidFill>
+                  <a:srgbClr val="C0C0C0"/>
+                </a:solidFill>
+                <a:latin typeface="Calibri"/>
+              </a:rPr>
+              <a:t>02 / 25</a:t>
+            </a:r>
+          </a:p>
+        </p:txBody>
+      </p:sp>
+    </p:spTree>
+  </p:cSld>
+  <p:clrMapOvr>
+    <a:masterClrMapping/>
+  </p:clrMapOvr>
+</p:sld>
+</file>
+
+<file path=ppt/slides/slide20.xml><?xml version="1.0" encoding="utf-8"?>
 <p:sld xmlns:a="http://schemas.openxmlformats.org/drawingml/2006/main" xmlns:p="http://schemas.openxmlformats.org/presentationml/2006/main" xmlns:r="http://schemas.openxmlformats.org/officeDocument/2006/relationships">
   <p:cSld>
     <p:bg>
@@ -13999,7 +16089,7 @@
                 </a:solidFill>
                 <a:latin typeface="Calibri"/>
               </a:rPr>
-              <a:t>19 / 24</a:t>
+              <a:t>20 / 25</a:t>
             </a:r>
           </a:p>
         </p:txBody>
@@ -14012,553 +16102,7 @@
 </p:sld>
 </file>
 
-<file path=ppt/slides/slide2.xml><?xml version="1.0" encoding="utf-8"?>
-<p:sld xmlns:a="http://schemas.openxmlformats.org/drawingml/2006/main" xmlns:p="http://schemas.openxmlformats.org/presentationml/2006/main" xmlns:r="http://schemas.openxmlformats.org/officeDocument/2006/relationships">
-  <p:cSld>
-    <p:bg>
-      <p:bgPr>
-        <a:solidFill>
-          <a:srgbClr val="FFFFFF"/>
-        </a:solidFill>
-        <a:effectLst/>
-      </p:bgPr>
-    </p:bg>
-    <p:spTree>
-      <p:nvGrpSpPr>
-        <p:cNvPr id="1" name=""/>
-        <p:cNvGrpSpPr/>
-        <p:nvPr/>
-      </p:nvGrpSpPr>
-      <p:grpSpPr/>
-      <p:sp>
-        <p:nvSpPr>
-          <p:cNvPr id="2" name="Rectangle 1"/>
-          <p:cNvSpPr/>
-          <p:nvPr/>
-        </p:nvSpPr>
-        <p:spPr>
-          <a:xfrm>
-            <a:off x="0" y="0"/>
-            <a:ext cx="9144000" cy="822960"/>
-          </a:xfrm>
-          <a:prstGeom prst="rect">
-            <a:avLst/>
-          </a:prstGeom>
-          <a:gradFill rotWithShape="1">
-            <a:gsLst>
-              <a:gs pos="0">
-                <a:srgbClr val="181818"/>
-              </a:gs>
-              <a:gs pos="100000">
-                <a:srgbClr val="424242"/>
-              </a:gs>
-            </a:gsLst>
-            <a:lin scaled="0" ang="0"/>
-          </a:gradFill>
-          <a:ln>
-            <a:noFill/>
-          </a:ln>
-        </p:spPr>
-        <p:style>
-          <a:lnRef idx="1">
-            <a:schemeClr val="accent1"/>
-          </a:lnRef>
-          <a:fillRef idx="3">
-            <a:schemeClr val="accent1"/>
-          </a:fillRef>
-          <a:effectRef idx="2">
-            <a:schemeClr val="accent1"/>
-          </a:effectRef>
-          <a:fontRef idx="minor">
-            <a:schemeClr val="lt1"/>
-          </a:fontRef>
-        </p:style>
-        <p:txBody>
-          <a:bodyPr rtlCol="0" anchor="ctr"/>
-          <a:lstStyle/>
-          <a:p>
-            <a:pPr algn="ctr"/>
-          </a:p>
-        </p:txBody>
-      </p:sp>
-      <p:sp>
-        <p:nvSpPr>
-          <p:cNvPr id="3" name="Rectangle 2"/>
-          <p:cNvSpPr/>
-          <p:nvPr/>
-        </p:nvSpPr>
-        <p:spPr>
-          <a:xfrm>
-            <a:off x="0" y="0"/>
-            <a:ext cx="9144000" cy="10972"/>
-          </a:xfrm>
-          <a:prstGeom prst="rect">
-            <a:avLst/>
-          </a:prstGeom>
-          <a:gradFill rotWithShape="1">
-            <a:gsLst>
-              <a:gs pos="0">
-                <a:srgbClr val="707070"/>
-              </a:gs>
-              <a:gs pos="100000">
-                <a:srgbClr val="303030"/>
-              </a:gs>
-            </a:gsLst>
-            <a:lin scaled="0" ang="0"/>
-          </a:gradFill>
-          <a:ln>
-            <a:noFill/>
-          </a:ln>
-        </p:spPr>
-        <p:style>
-          <a:lnRef idx="1">
-            <a:schemeClr val="accent1"/>
-          </a:lnRef>
-          <a:fillRef idx="3">
-            <a:schemeClr val="accent1"/>
-          </a:fillRef>
-          <a:effectRef idx="2">
-            <a:schemeClr val="accent1"/>
-          </a:effectRef>
-          <a:fontRef idx="minor">
-            <a:schemeClr val="lt1"/>
-          </a:fontRef>
-        </p:style>
-        <p:txBody>
-          <a:bodyPr rtlCol="0" anchor="ctr"/>
-          <a:lstStyle/>
-          <a:p>
-            <a:pPr algn="ctr"/>
-          </a:p>
-        </p:txBody>
-      </p:sp>
-      <p:sp>
-        <p:nvSpPr>
-          <p:cNvPr id="4" name="Rectangle 3"/>
-          <p:cNvSpPr/>
-          <p:nvPr/>
-        </p:nvSpPr>
-        <p:spPr>
-          <a:xfrm>
-            <a:off x="0" y="0"/>
-            <a:ext cx="50292" cy="822960"/>
-          </a:xfrm>
-          <a:prstGeom prst="rect">
-            <a:avLst/>
-          </a:prstGeom>
-          <a:gradFill rotWithShape="1">
-            <a:gsLst>
-              <a:gs pos="0">
-                <a:srgbClr val="9A9A9A"/>
-              </a:gs>
-              <a:gs pos="100000">
-                <a:srgbClr val="424242"/>
-              </a:gs>
-            </a:gsLst>
-            <a:lin scaled="0" ang="5400000"/>
-          </a:gradFill>
-          <a:ln>
-            <a:noFill/>
-          </a:ln>
-        </p:spPr>
-        <p:style>
-          <a:lnRef idx="1">
-            <a:schemeClr val="accent1"/>
-          </a:lnRef>
-          <a:fillRef idx="3">
-            <a:schemeClr val="accent1"/>
-          </a:fillRef>
-          <a:effectRef idx="2">
-            <a:schemeClr val="accent1"/>
-          </a:effectRef>
-          <a:fontRef idx="minor">
-            <a:schemeClr val="lt1"/>
-          </a:fontRef>
-        </p:style>
-        <p:txBody>
-          <a:bodyPr rtlCol="0" anchor="ctr"/>
-          <a:lstStyle/>
-          <a:p>
-            <a:pPr algn="ctr"/>
-          </a:p>
-        </p:txBody>
-      </p:sp>
-      <p:sp>
-        <p:nvSpPr>
-          <p:cNvPr id="5" name="TextBox 4"/>
-          <p:cNvSpPr txBox="1"/>
-          <p:nvPr/>
-        </p:nvSpPr>
-        <p:spPr>
-          <a:xfrm>
-            <a:off x="365760" y="109728"/>
-            <a:ext cx="7040880" cy="731520"/>
-          </a:xfrm>
-          <a:prstGeom prst="rect">
-            <a:avLst/>
-          </a:prstGeom>
-          <a:noFill/>
-        </p:spPr>
-        <p:txBody>
-          <a:bodyPr wrap="square">
-            <a:spAutoFit/>
-          </a:bodyPr>
-          <a:lstStyle/>
-          <a:p>
-            <a:pPr algn="l"/>
-            <a:r>
-              <a:rPr sz="2800" b="1">
-                <a:solidFill>
-                  <a:srgbClr val="FFFFFF"/>
-                </a:solidFill>
-                <a:latin typeface="Calibri"/>
-              </a:rPr>
-              <a:t>大綱</a:t>
-            </a:r>
-          </a:p>
-        </p:txBody>
-      </p:sp>
-      <p:sp>
-        <p:nvSpPr>
-          <p:cNvPr id="6" name="Rectangle 5"/>
-          <p:cNvSpPr/>
-          <p:nvPr/>
-        </p:nvSpPr>
-        <p:spPr>
-          <a:xfrm>
-            <a:off x="365760" y="960120"/>
-            <a:ext cx="36576" cy="3433572"/>
-          </a:xfrm>
-          <a:prstGeom prst="rect">
-            <a:avLst/>
-          </a:prstGeom>
-          <a:solidFill>
-            <a:srgbClr val="9A9A9A"/>
-          </a:solidFill>
-          <a:ln>
-            <a:noFill/>
-          </a:ln>
-        </p:spPr>
-        <p:style>
-          <a:lnRef idx="1">
-            <a:schemeClr val="accent1"/>
-          </a:lnRef>
-          <a:fillRef idx="3">
-            <a:schemeClr val="accent1"/>
-          </a:fillRef>
-          <a:effectRef idx="2">
-            <a:schemeClr val="accent1"/>
-          </a:effectRef>
-          <a:fontRef idx="minor">
-            <a:schemeClr val="lt1"/>
-          </a:fontRef>
-        </p:style>
-        <p:txBody>
-          <a:bodyPr rtlCol="0" anchor="ctr"/>
-          <a:lstStyle/>
-          <a:p>
-            <a:pPr algn="ctr"/>
-          </a:p>
-        </p:txBody>
-      </p:sp>
-      <p:sp>
-        <p:nvSpPr>
-          <p:cNvPr id="7" name="TextBox 6"/>
-          <p:cNvSpPr txBox="1"/>
-          <p:nvPr/>
-        </p:nvSpPr>
-        <p:spPr>
-          <a:xfrm>
-            <a:off x="530352" y="1051560"/>
-            <a:ext cx="8138160" cy="3250692"/>
-          </a:xfrm>
-          <a:prstGeom prst="rect">
-            <a:avLst/>
-          </a:prstGeom>
-          <a:noFill/>
-        </p:spPr>
-        <p:txBody>
-          <a:bodyPr wrap="square">
-            <a:spAutoFit/>
-          </a:bodyPr>
-          <a:lstStyle/>
-          <a:p>
-            <a:pPr>
-              <a:spcBef>
-                <a:spcPts val="400"/>
-              </a:spcBef>
-            </a:pPr>
-            <a:r>
-              <a:rPr sz="1700">
-                <a:solidFill>
-                  <a:srgbClr val="1A1A1A"/>
-                </a:solidFill>
-              </a:rPr>
-              <a:t>● 前言：為什麼需要 CSI？（Slide 3）</a:t>
-            </a:r>
-          </a:p>
-          <a:p>
-            <a:pPr>
-              <a:spcBef>
-                <a:spcPts val="400"/>
-              </a:spcBef>
-            </a:pPr>
-            <a:r>
-              <a:rPr sz="1700">
-                <a:solidFill>
-                  <a:srgbClr val="1A1A1A"/>
-                </a:solidFill>
-              </a:rPr>
-              <a:t>● 第一段：基礎架構（Slides 5–7）</a:t>
-            </a:r>
-          </a:p>
-          <a:p>
-            <a:pPr lvl="1">
-              <a:spcBef>
-                <a:spcPts val="100"/>
-              </a:spcBef>
-            </a:pPr>
-            <a:r>
-              <a:rPr sz="1500">
-                <a:solidFill>
-                  <a:srgbClr val="646464"/>
-                </a:solidFill>
-              </a:rPr>
-              <a:t>  · · 802.11 RF 信號路徑</a:t>
-            </a:r>
-          </a:p>
-          <a:p>
-            <a:pPr lvl="1">
-              <a:spcBef>
-                <a:spcPts val="100"/>
-              </a:spcBef>
-            </a:pPr>
-            <a:r>
-              <a:rPr sz="1500">
-                <a:solidFill>
-                  <a:srgbClr val="646464"/>
-                </a:solidFill>
-              </a:rPr>
-              <a:t>  · · PHY / MAC 與 CSI</a:t>
-            </a:r>
-          </a:p>
-          <a:p>
-            <a:pPr lvl="1">
-              <a:spcBef>
-                <a:spcPts val="100"/>
-              </a:spcBef>
-            </a:pPr>
-            <a:r>
-              <a:rPr sz="1500">
-                <a:solidFill>
-                  <a:srgbClr val="646464"/>
-                </a:solidFill>
-              </a:rPr>
-              <a:t>  · · OSI 7 層 vs Windows 元件對應</a:t>
-            </a:r>
-          </a:p>
-          <a:p>
-            <a:pPr>
-              <a:spcBef>
-                <a:spcPts val="400"/>
-              </a:spcBef>
-            </a:pPr>
-            <a:r>
-              <a:rPr sz="1700">
-                <a:solidFill>
-                  <a:srgbClr val="1A1A1A"/>
-                </a:solidFill>
-              </a:rPr>
-              <a:t>● 第二段：Windows 驅動堆疊（Slides 9–15）</a:t>
-            </a:r>
-          </a:p>
-          <a:p>
-            <a:pPr lvl="1">
-              <a:spcBef>
-                <a:spcPts val="100"/>
-              </a:spcBef>
-            </a:pPr>
-            <a:r>
-              <a:rPr sz="1500">
-                <a:solidFill>
-                  <a:srgbClr val="646464"/>
-                </a:solidFill>
-              </a:rPr>
-              <a:t>  · · OEM.sys / nwifi.sys / NDIS / WDI</a:t>
-            </a:r>
-          </a:p>
-          <a:p>
-            <a:pPr lvl="1">
-              <a:spcBef>
-                <a:spcPts val="100"/>
-              </a:spcBef>
-            </a:pPr>
-            <a:r>
-              <a:rPr sz="1500">
-                <a:solidFill>
-                  <a:srgbClr val="646464"/>
-                </a:solidFill>
-              </a:rPr>
-              <a:t>  · · CSI 消失點分析</a:t>
-            </a:r>
-          </a:p>
-          <a:p>
-            <a:pPr>
-              <a:spcBef>
-                <a:spcPts val="400"/>
-              </a:spcBef>
-            </a:pPr>
-            <a:r>
-              <a:rPr sz="1700">
-                <a:solidFill>
-                  <a:srgbClr val="1A1A1A"/>
-                </a:solidFill>
-              </a:rPr>
-              <a:t>● 第三段：替代方案（Slides 17–20）</a:t>
-            </a:r>
-          </a:p>
-          <a:p>
-            <a:pPr lvl="1">
-              <a:spcBef>
-                <a:spcPts val="100"/>
-              </a:spcBef>
-            </a:pPr>
-            <a:r>
-              <a:rPr sz="1500">
-                <a:solidFill>
-                  <a:srgbClr val="646464"/>
-                </a:solidFill>
-              </a:rPr>
-              <a:t>  · · Linux 生態 vs Windows 限制</a:t>
-            </a:r>
-          </a:p>
-          <a:p>
-            <a:pPr lvl="1">
-              <a:spcBef>
-                <a:spcPts val="100"/>
-              </a:spcBef>
-            </a:pPr>
-            <a:r>
-              <a:rPr sz="1500">
-                <a:solidFill>
-                  <a:srgbClr val="646464"/>
-                </a:solidFill>
-              </a:rPr>
-              <a:t>  · · 硬體選型建議</a:t>
-            </a:r>
-          </a:p>
-          <a:p>
-            <a:pPr>
-              <a:spcBef>
-                <a:spcPts val="400"/>
-              </a:spcBef>
-            </a:pPr>
-            <a:r>
-              <a:rPr sz="1700">
-                <a:solidFill>
-                  <a:srgbClr val="1A1A1A"/>
-                </a:solidFill>
-              </a:rPr>
-              <a:t>● 第四段：結語與建議（Slides 22–24）</a:t>
-            </a:r>
-          </a:p>
-        </p:txBody>
-      </p:sp>
-      <p:sp>
-        <p:nvSpPr>
-          <p:cNvPr id="8" name="Rectangle 7"/>
-          <p:cNvSpPr/>
-          <p:nvPr/>
-        </p:nvSpPr>
-        <p:spPr>
-          <a:xfrm>
-            <a:off x="0" y="4686300"/>
-            <a:ext cx="9144000" cy="457200"/>
-          </a:xfrm>
-          <a:prstGeom prst="rect">
-            <a:avLst/>
-          </a:prstGeom>
-          <a:gradFill rotWithShape="1">
-            <a:gsLst>
-              <a:gs pos="0">
-                <a:srgbClr val="181818"/>
-              </a:gs>
-              <a:gs pos="100000">
-                <a:srgbClr val="383838"/>
-              </a:gs>
-            </a:gsLst>
-            <a:lin scaled="0" ang="0"/>
-          </a:gradFill>
-          <a:ln>
-            <a:noFill/>
-          </a:ln>
-        </p:spPr>
-        <p:style>
-          <a:lnRef idx="1">
-            <a:schemeClr val="accent1"/>
-          </a:lnRef>
-          <a:fillRef idx="3">
-            <a:schemeClr val="accent1"/>
-          </a:fillRef>
-          <a:effectRef idx="2">
-            <a:schemeClr val="accent1"/>
-          </a:effectRef>
-          <a:fontRef idx="minor">
-            <a:schemeClr val="lt1"/>
-          </a:fontRef>
-        </p:style>
-        <p:txBody>
-          <a:bodyPr rtlCol="0" anchor="ctr"/>
-          <a:lstStyle/>
-          <a:p>
-            <a:pPr algn="ctr"/>
-          </a:p>
-        </p:txBody>
-      </p:sp>
-      <p:sp>
-        <p:nvSpPr>
-          <p:cNvPr id="9" name="TextBox 8"/>
-          <p:cNvSpPr txBox="1"/>
-          <p:nvPr/>
-        </p:nvSpPr>
-        <p:spPr>
-          <a:xfrm>
-            <a:off x="7863840" y="4722876"/>
-            <a:ext cx="914400" cy="384048"/>
-          </a:xfrm>
-          <a:prstGeom prst="rect">
-            <a:avLst/>
-          </a:prstGeom>
-          <a:noFill/>
-        </p:spPr>
-        <p:txBody>
-          <a:bodyPr wrap="square">
-            <a:spAutoFit/>
-          </a:bodyPr>
-          <a:lstStyle/>
-          <a:p>
-            <a:pPr algn="r"/>
-            <a:r>
-              <a:rPr sz="1300" b="0">
-                <a:solidFill>
-                  <a:srgbClr val="C0C0C0"/>
-                </a:solidFill>
-                <a:latin typeface="Calibri"/>
-              </a:rPr>
-              <a:t>02 / 24</a:t>
-            </a:r>
-          </a:p>
-        </p:txBody>
-      </p:sp>
-    </p:spTree>
-  </p:cSld>
-  <p:clrMapOvr>
-    <a:masterClrMapping/>
-  </p:clrMapOvr>
-</p:sld>
-</file>
-
-<file path=ppt/slides/slide20.xml><?xml version="1.0" encoding="utf-8"?>
+<file path=ppt/slides/slide21.xml><?xml version="1.0" encoding="utf-8"?>
 <p:sld xmlns:a="http://schemas.openxmlformats.org/drawingml/2006/main" xmlns:p="http://schemas.openxmlformats.org/presentationml/2006/main" xmlns:r="http://schemas.openxmlformats.org/officeDocument/2006/relationships">
   <p:cSld>
     <p:bg>
@@ -15803,7 +17347,7 @@
                 </a:solidFill>
                 <a:latin typeface="Calibri"/>
               </a:rPr>
-              <a:t>20 / 24</a:t>
+              <a:t>21 / 25</a:t>
             </a:r>
           </a:p>
         </p:txBody>
@@ -15816,7 +17360,7 @@
 </p:sld>
 </file>
 
-<file path=ppt/slides/slide21.xml><?xml version="1.0" encoding="utf-8"?>
+<file path=ppt/slides/slide22.xml><?xml version="1.0" encoding="utf-8"?>
 <p:sld xmlns:a="http://schemas.openxmlformats.org/drawingml/2006/main" xmlns:p="http://schemas.openxmlformats.org/presentationml/2006/main" xmlns:r="http://schemas.openxmlformats.org/officeDocument/2006/relationships">
   <p:cSld>
     <p:spTree>
@@ -16219,981 +17763,7 @@
                 </a:solidFill>
                 <a:latin typeface="Calibri"/>
               </a:rPr>
-              <a:t>21 / 24</a:t>
-            </a:r>
-          </a:p>
-        </p:txBody>
-      </p:sp>
-    </p:spTree>
-  </p:cSld>
-  <p:clrMapOvr>
-    <a:masterClrMapping/>
-  </p:clrMapOvr>
-</p:sld>
-</file>
-
-<file path=ppt/slides/slide22.xml><?xml version="1.0" encoding="utf-8"?>
-<p:sld xmlns:a="http://schemas.openxmlformats.org/drawingml/2006/main" xmlns:p="http://schemas.openxmlformats.org/presentationml/2006/main" xmlns:r="http://schemas.openxmlformats.org/officeDocument/2006/relationships">
-  <p:cSld>
-    <p:bg>
-      <p:bgPr>
-        <a:solidFill>
-          <a:srgbClr val="FFFFFF"/>
-        </a:solidFill>
-        <a:effectLst/>
-      </p:bgPr>
-    </p:bg>
-    <p:spTree>
-      <p:nvGrpSpPr>
-        <p:cNvPr id="1" name=""/>
-        <p:cNvGrpSpPr/>
-        <p:nvPr/>
-      </p:nvGrpSpPr>
-      <p:grpSpPr/>
-      <p:sp>
-        <p:nvSpPr>
-          <p:cNvPr id="2" name="Rectangle 1"/>
-          <p:cNvSpPr/>
-          <p:nvPr/>
-        </p:nvSpPr>
-        <p:spPr>
-          <a:xfrm>
-            <a:off x="0" y="0"/>
-            <a:ext cx="9144000" cy="822960"/>
-          </a:xfrm>
-          <a:prstGeom prst="rect">
-            <a:avLst/>
-          </a:prstGeom>
-          <a:gradFill rotWithShape="1">
-            <a:gsLst>
-              <a:gs pos="0">
-                <a:srgbClr val="181818"/>
-              </a:gs>
-              <a:gs pos="100000">
-                <a:srgbClr val="424242"/>
-              </a:gs>
-            </a:gsLst>
-            <a:lin scaled="0" ang="0"/>
-          </a:gradFill>
-          <a:ln>
-            <a:noFill/>
-          </a:ln>
-        </p:spPr>
-        <p:style>
-          <a:lnRef idx="1">
-            <a:schemeClr val="accent1"/>
-          </a:lnRef>
-          <a:fillRef idx="3">
-            <a:schemeClr val="accent1"/>
-          </a:fillRef>
-          <a:effectRef idx="2">
-            <a:schemeClr val="accent1"/>
-          </a:effectRef>
-          <a:fontRef idx="minor">
-            <a:schemeClr val="lt1"/>
-          </a:fontRef>
-        </p:style>
-        <p:txBody>
-          <a:bodyPr rtlCol="0" anchor="ctr"/>
-          <a:lstStyle/>
-          <a:p>
-            <a:pPr algn="ctr"/>
-          </a:p>
-        </p:txBody>
-      </p:sp>
-      <p:sp>
-        <p:nvSpPr>
-          <p:cNvPr id="3" name="Rectangle 2"/>
-          <p:cNvSpPr/>
-          <p:nvPr/>
-        </p:nvSpPr>
-        <p:spPr>
-          <a:xfrm>
-            <a:off x="0" y="0"/>
-            <a:ext cx="9144000" cy="10972"/>
-          </a:xfrm>
-          <a:prstGeom prst="rect">
-            <a:avLst/>
-          </a:prstGeom>
-          <a:gradFill rotWithShape="1">
-            <a:gsLst>
-              <a:gs pos="0">
-                <a:srgbClr val="707070"/>
-              </a:gs>
-              <a:gs pos="100000">
-                <a:srgbClr val="303030"/>
-              </a:gs>
-            </a:gsLst>
-            <a:lin scaled="0" ang="0"/>
-          </a:gradFill>
-          <a:ln>
-            <a:noFill/>
-          </a:ln>
-        </p:spPr>
-        <p:style>
-          <a:lnRef idx="1">
-            <a:schemeClr val="accent1"/>
-          </a:lnRef>
-          <a:fillRef idx="3">
-            <a:schemeClr val="accent1"/>
-          </a:fillRef>
-          <a:effectRef idx="2">
-            <a:schemeClr val="accent1"/>
-          </a:effectRef>
-          <a:fontRef idx="minor">
-            <a:schemeClr val="lt1"/>
-          </a:fontRef>
-        </p:style>
-        <p:txBody>
-          <a:bodyPr rtlCol="0" anchor="ctr"/>
-          <a:lstStyle/>
-          <a:p>
-            <a:pPr algn="ctr"/>
-          </a:p>
-        </p:txBody>
-      </p:sp>
-      <p:sp>
-        <p:nvSpPr>
-          <p:cNvPr id="4" name="Rectangle 3"/>
-          <p:cNvSpPr/>
-          <p:nvPr/>
-        </p:nvSpPr>
-        <p:spPr>
-          <a:xfrm>
-            <a:off x="0" y="0"/>
-            <a:ext cx="50292" cy="822960"/>
-          </a:xfrm>
-          <a:prstGeom prst="rect">
-            <a:avLst/>
-          </a:prstGeom>
-          <a:gradFill rotWithShape="1">
-            <a:gsLst>
-              <a:gs pos="0">
-                <a:srgbClr val="9A9A9A"/>
-              </a:gs>
-              <a:gs pos="100000">
-                <a:srgbClr val="424242"/>
-              </a:gs>
-            </a:gsLst>
-            <a:lin scaled="0" ang="5400000"/>
-          </a:gradFill>
-          <a:ln>
-            <a:noFill/>
-          </a:ln>
-        </p:spPr>
-        <p:style>
-          <a:lnRef idx="1">
-            <a:schemeClr val="accent1"/>
-          </a:lnRef>
-          <a:fillRef idx="3">
-            <a:schemeClr val="accent1"/>
-          </a:fillRef>
-          <a:effectRef idx="2">
-            <a:schemeClr val="accent1"/>
-          </a:effectRef>
-          <a:fontRef idx="minor">
-            <a:schemeClr val="lt1"/>
-          </a:fontRef>
-        </p:style>
-        <p:txBody>
-          <a:bodyPr rtlCol="0" anchor="ctr"/>
-          <a:lstStyle/>
-          <a:p>
-            <a:pPr algn="ctr"/>
-          </a:p>
-        </p:txBody>
-      </p:sp>
-      <p:sp>
-        <p:nvSpPr>
-          <p:cNvPr id="5" name="TextBox 4"/>
-          <p:cNvSpPr txBox="1"/>
-          <p:nvPr/>
-        </p:nvSpPr>
-        <p:spPr>
-          <a:xfrm>
-            <a:off x="365760" y="109728"/>
-            <a:ext cx="7040880" cy="731520"/>
-          </a:xfrm>
-          <a:prstGeom prst="rect">
-            <a:avLst/>
-          </a:prstGeom>
-          <a:noFill/>
-        </p:spPr>
-        <p:txBody>
-          <a:bodyPr wrap="square">
-            <a:spAutoFit/>
-          </a:bodyPr>
-          <a:lstStyle/>
-          <a:p>
-            <a:pPr algn="l"/>
-            <a:r>
-              <a:rPr sz="2800" b="1">
-                <a:solidFill>
-                  <a:srgbClr val="FFFFFF"/>
-                </a:solidFill>
-                <a:latin typeface="Calibri"/>
-              </a:rPr>
-              <a:t>完整架構總覽：CSI 的旅程</a:t>
-            </a:r>
-          </a:p>
-        </p:txBody>
-      </p:sp>
-      <p:sp>
-        <p:nvSpPr>
-          <p:cNvPr id="6" name="TextBox 5"/>
-          <p:cNvSpPr txBox="1"/>
-          <p:nvPr/>
-        </p:nvSpPr>
-        <p:spPr>
-          <a:xfrm>
-            <a:off x="7498080" y="109728"/>
-            <a:ext cx="1280160" cy="731520"/>
-          </a:xfrm>
-          <a:prstGeom prst="rect">
-            <a:avLst/>
-          </a:prstGeom>
-          <a:noFill/>
-        </p:spPr>
-        <p:txBody>
-          <a:bodyPr wrap="square">
-            <a:spAutoFit/>
-          </a:bodyPr>
-          <a:lstStyle/>
-          <a:p>
-            <a:pPr algn="r"/>
-            <a:r>
-              <a:rPr sz="1300" b="0">
-                <a:solidFill>
-                  <a:srgbClr val="C0C0C0"/>
-                </a:solidFill>
-                <a:latin typeface="Calibri"/>
-              </a:rPr>
-              <a:t>Section 4/4</a:t>
-            </a:r>
-          </a:p>
-        </p:txBody>
-      </p:sp>
-      <p:sp>
-        <p:nvSpPr>
-          <p:cNvPr id="7" name="Rectangle 6"/>
-          <p:cNvSpPr/>
-          <p:nvPr/>
-        </p:nvSpPr>
-        <p:spPr>
-          <a:xfrm>
-            <a:off x="365760" y="1005840"/>
-            <a:ext cx="4754880" cy="402336"/>
-          </a:xfrm>
-          <a:prstGeom prst="rect">
-            <a:avLst/>
-          </a:prstGeom>
-          <a:solidFill>
-            <a:srgbClr val="545454"/>
-          </a:solidFill>
-          <a:ln w="12700">
-            <a:solidFill>
-              <a:srgbClr val="9A9A9A"/>
-            </a:solidFill>
-          </a:ln>
-        </p:spPr>
-        <p:style>
-          <a:lnRef idx="1">
-            <a:schemeClr val="accent1"/>
-          </a:lnRef>
-          <a:fillRef idx="3">
-            <a:schemeClr val="accent1"/>
-          </a:fillRef>
-          <a:effectRef idx="2">
-            <a:schemeClr val="accent1"/>
-          </a:effectRef>
-          <a:fontRef idx="minor">
-            <a:schemeClr val="lt1"/>
-          </a:fontRef>
-        </p:style>
-        <p:txBody>
-          <a:bodyPr rtlCol="0" anchor="ctr"/>
-          <a:lstStyle/>
-          <a:p>
-            <a:pPr algn="ctr"/>
-            <a:r>
-              <a:rPr sz="1400" b="1">
-                <a:solidFill>
-                  <a:srgbClr val="FFFFFF"/>
-                </a:solidFill>
-                <a:latin typeface="Calibri"/>
-              </a:rPr>
-              <a:t>應用程式</a:t>
-            </a:r>
-          </a:p>
-        </p:txBody>
-      </p:sp>
-      <p:sp>
-        <p:nvSpPr>
-          <p:cNvPr id="8" name="TextBox 7"/>
-          <p:cNvSpPr txBox="1"/>
-          <p:nvPr/>
-        </p:nvSpPr>
-        <p:spPr>
-          <a:xfrm>
-            <a:off x="5303520" y="1051560"/>
-            <a:ext cx="3474720" cy="402336"/>
-          </a:xfrm>
-          <a:prstGeom prst="rect">
-            <a:avLst/>
-          </a:prstGeom>
-          <a:noFill/>
-        </p:spPr>
-        <p:txBody>
-          <a:bodyPr wrap="square">
-            <a:spAutoFit/>
-          </a:bodyPr>
-          <a:lstStyle/>
-          <a:p>
-            <a:pPr algn="l"/>
-            <a:r>
-              <a:rPr sz="1300" b="0">
-                <a:solidFill>
-                  <a:srgbClr val="646464"/>
-                </a:solidFill>
-                <a:latin typeface="Calibri"/>
-              </a:rPr>
-              <a:t>只能用 WinSock，看不到 PHY</a:t>
-            </a:r>
-          </a:p>
-        </p:txBody>
-      </p:sp>
-      <p:sp>
-        <p:nvSpPr>
-          <p:cNvPr id="9" name="Rectangle 8"/>
-          <p:cNvSpPr/>
-          <p:nvPr/>
-        </p:nvSpPr>
-        <p:spPr>
-          <a:xfrm>
-            <a:off x="365760" y="1444752"/>
-            <a:ext cx="4754880" cy="402336"/>
-          </a:xfrm>
-          <a:prstGeom prst="rect">
-            <a:avLst/>
-          </a:prstGeom>
-          <a:solidFill>
-            <a:srgbClr val="555555"/>
-          </a:solidFill>
-          <a:ln w="31750">
-            <a:solidFill>
-              <a:srgbClr val="909090"/>
-            </a:solidFill>
-          </a:ln>
-        </p:spPr>
-        <p:style>
-          <a:lnRef idx="1">
-            <a:schemeClr val="accent1"/>
-          </a:lnRef>
-          <a:fillRef idx="3">
-            <a:schemeClr val="accent1"/>
-          </a:fillRef>
-          <a:effectRef idx="2">
-            <a:schemeClr val="accent1"/>
-          </a:effectRef>
-          <a:fontRef idx="minor">
-            <a:schemeClr val="lt1"/>
-          </a:fontRef>
-        </p:style>
-        <p:txBody>
-          <a:bodyPr rtlCol="0" anchor="ctr"/>
-          <a:lstStyle/>
-          <a:p>
-            <a:pPr algn="ctr"/>
-            <a:r>
-              <a:rPr sz="1400" b="1">
-                <a:solidFill>
-                  <a:srgbClr val="FFFFFF"/>
-                </a:solidFill>
-                <a:latin typeface="Calibri"/>
-              </a:rPr>
-              <a:t>NDIS / tcpip.sys</a:t>
-            </a:r>
-          </a:p>
-        </p:txBody>
-      </p:sp>
-      <p:sp>
-        <p:nvSpPr>
-          <p:cNvPr id="10" name="TextBox 9"/>
-          <p:cNvSpPr txBox="1"/>
-          <p:nvPr/>
-        </p:nvSpPr>
-        <p:spPr>
-          <a:xfrm>
-            <a:off x="5303520" y="1490472"/>
-            <a:ext cx="3474720" cy="402336"/>
-          </a:xfrm>
-          <a:prstGeom prst="rect">
-            <a:avLst/>
-          </a:prstGeom>
-          <a:noFill/>
-        </p:spPr>
-        <p:txBody>
-          <a:bodyPr wrap="square">
-            <a:spAutoFit/>
-          </a:bodyPr>
-          <a:lstStyle/>
-          <a:p>
-            <a:pPr algn="l"/>
-            <a:r>
-              <a:rPr sz="1300" b="0">
-                <a:solidFill>
-                  <a:srgbClr val="787878"/>
-                </a:solidFill>
-                <a:latin typeface="Calibri"/>
-              </a:rPr>
-              <a:t>無 CSI OID，協定通用化</a:t>
-            </a:r>
-          </a:p>
-        </p:txBody>
-      </p:sp>
-      <p:sp>
-        <p:nvSpPr>
-          <p:cNvPr id="11" name="Rectangle 10"/>
-          <p:cNvSpPr/>
-          <p:nvPr/>
-        </p:nvSpPr>
-        <p:spPr>
-          <a:xfrm>
-            <a:off x="365760" y="1883664"/>
-            <a:ext cx="4754880" cy="402336"/>
-          </a:xfrm>
-          <a:prstGeom prst="rect">
-            <a:avLst/>
-          </a:prstGeom>
-          <a:solidFill>
-            <a:srgbClr val="303030"/>
-          </a:solidFill>
-          <a:ln w="31750">
-            <a:solidFill>
-              <a:srgbClr val="B8B8B8"/>
-            </a:solidFill>
-          </a:ln>
-        </p:spPr>
-        <p:style>
-          <a:lnRef idx="1">
-            <a:schemeClr val="accent1"/>
-          </a:lnRef>
-          <a:fillRef idx="3">
-            <a:schemeClr val="accent1"/>
-          </a:fillRef>
-          <a:effectRef idx="2">
-            <a:schemeClr val="accent1"/>
-          </a:effectRef>
-          <a:fontRef idx="minor">
-            <a:schemeClr val="lt1"/>
-          </a:fontRef>
-        </p:style>
-        <p:txBody>
-          <a:bodyPr rtlCol="0" anchor="ctr"/>
-          <a:lstStyle/>
-          <a:p>
-            <a:pPr algn="ctr"/>
-            <a:r>
-              <a:rPr sz="1400" b="1">
-                <a:solidFill>
-                  <a:srgbClr val="FFFFFF"/>
-                </a:solidFill>
-                <a:latin typeface="Calibri"/>
-              </a:rPr>
-              <a:t>nwifi.sys</a:t>
-            </a:r>
-          </a:p>
-        </p:txBody>
-      </p:sp>
-      <p:sp>
-        <p:nvSpPr>
-          <p:cNvPr id="12" name="TextBox 11"/>
-          <p:cNvSpPr txBox="1"/>
-          <p:nvPr/>
-        </p:nvSpPr>
-        <p:spPr>
-          <a:xfrm>
-            <a:off x="5303520" y="1929384"/>
-            <a:ext cx="3474720" cy="402336"/>
-          </a:xfrm>
-          <a:prstGeom prst="rect">
-            <a:avLst/>
-          </a:prstGeom>
-          <a:noFill/>
-        </p:spPr>
-        <p:txBody>
-          <a:bodyPr wrap="square">
-            <a:spAutoFit/>
-          </a:bodyPr>
-          <a:lstStyle/>
-          <a:p>
-            <a:pPr algn="l"/>
-            <a:r>
-              <a:rPr sz="1300" b="0">
-                <a:solidFill>
-                  <a:srgbClr val="444444"/>
-                </a:solidFill>
-                <a:latin typeface="Calibri"/>
-              </a:rPr>
-              <a:t>802.11 管理，丟棄 PHY metadata</a:t>
-            </a:r>
-          </a:p>
-        </p:txBody>
-      </p:sp>
-      <p:sp>
-        <p:nvSpPr>
-          <p:cNvPr id="13" name="Rectangle 12"/>
-          <p:cNvSpPr/>
-          <p:nvPr/>
-        </p:nvSpPr>
-        <p:spPr>
-          <a:xfrm>
-            <a:off x="365760" y="2322576"/>
-            <a:ext cx="4754880" cy="402336"/>
-          </a:xfrm>
-          <a:prstGeom prst="rect">
-            <a:avLst/>
-          </a:prstGeom>
-          <a:solidFill>
-            <a:srgbClr val="303030"/>
-          </a:solidFill>
-          <a:ln w="31750">
-            <a:solidFill>
-              <a:srgbClr val="B8B8B8"/>
-            </a:solidFill>
-          </a:ln>
-        </p:spPr>
-        <p:style>
-          <a:lnRef idx="1">
-            <a:schemeClr val="accent1"/>
-          </a:lnRef>
-          <a:fillRef idx="3">
-            <a:schemeClr val="accent1"/>
-          </a:fillRef>
-          <a:effectRef idx="2">
-            <a:schemeClr val="accent1"/>
-          </a:effectRef>
-          <a:fontRef idx="minor">
-            <a:schemeClr val="lt1"/>
-          </a:fontRef>
-        </p:style>
-        <p:txBody>
-          <a:bodyPr rtlCol="0" anchor="ctr"/>
-          <a:lstStyle/>
-          <a:p>
-            <a:pPr algn="ctr"/>
-            <a:r>
-              <a:rPr sz="1400" b="1">
-                <a:solidFill>
-                  <a:srgbClr val="FFFFFF"/>
-                </a:solidFill>
-                <a:latin typeface="Calibri"/>
-              </a:rPr>
-              <a:t>OEM.sys（唯一機會）</a:t>
-            </a:r>
-          </a:p>
-        </p:txBody>
-      </p:sp>
-      <p:sp>
-        <p:nvSpPr>
-          <p:cNvPr id="14" name="TextBox 13"/>
-          <p:cNvSpPr txBox="1"/>
-          <p:nvPr/>
-        </p:nvSpPr>
-        <p:spPr>
-          <a:xfrm>
-            <a:off x="5303520" y="2368296"/>
-            <a:ext cx="3474720" cy="402336"/>
-          </a:xfrm>
-          <a:prstGeom prst="rect">
-            <a:avLst/>
-          </a:prstGeom>
-          <a:noFill/>
-        </p:spPr>
-        <p:txBody>
-          <a:bodyPr wrap="square">
-            <a:spAutoFit/>
-          </a:bodyPr>
-          <a:lstStyle/>
-          <a:p>
-            <a:pPr algn="l"/>
-            <a:r>
-              <a:rPr sz="1300" b="0">
-                <a:solidFill>
-                  <a:srgbClr val="444444"/>
-                </a:solidFill>
-                <a:latin typeface="Calibri"/>
-              </a:rPr>
-              <a:t>能讀 CSI，但介面不暴露</a:t>
-            </a:r>
-          </a:p>
-        </p:txBody>
-      </p:sp>
-      <p:sp>
-        <p:nvSpPr>
-          <p:cNvPr id="15" name="Rectangle 14"/>
-          <p:cNvSpPr/>
-          <p:nvPr/>
-        </p:nvSpPr>
-        <p:spPr>
-          <a:xfrm>
-            <a:off x="365760" y="2761488"/>
-            <a:ext cx="4754880" cy="402336"/>
-          </a:xfrm>
-          <a:prstGeom prst="rect">
-            <a:avLst/>
-          </a:prstGeom>
-          <a:solidFill>
-            <a:srgbClr val="727272"/>
-          </a:solidFill>
-          <a:ln w="12700">
-            <a:solidFill>
-              <a:srgbClr val="828282"/>
-            </a:solidFill>
-          </a:ln>
-        </p:spPr>
-        <p:style>
-          <a:lnRef idx="1">
-            <a:schemeClr val="accent1"/>
-          </a:lnRef>
-          <a:fillRef idx="3">
-            <a:schemeClr val="accent1"/>
-          </a:fillRef>
-          <a:effectRef idx="2">
-            <a:schemeClr val="accent1"/>
-          </a:effectRef>
-          <a:fontRef idx="minor">
-            <a:schemeClr val="lt1"/>
-          </a:fontRef>
-        </p:style>
-        <p:txBody>
-          <a:bodyPr rtlCol="0" anchor="ctr"/>
-          <a:lstStyle/>
-          <a:p>
-            <a:pPr algn="ctr"/>
-            <a:r>
-              <a:rPr sz="1400" b="1">
-                <a:solidFill>
-                  <a:srgbClr val="FFFFFF"/>
-                </a:solidFill>
-                <a:latin typeface="Calibri"/>
-              </a:rPr>
-              <a:t>NIC 韌體</a:t>
-            </a:r>
-          </a:p>
-        </p:txBody>
-      </p:sp>
-      <p:sp>
-        <p:nvSpPr>
-          <p:cNvPr id="16" name="TextBox 15"/>
-          <p:cNvSpPr txBox="1"/>
-          <p:nvPr/>
-        </p:nvSpPr>
-        <p:spPr>
-          <a:xfrm>
-            <a:off x="5303520" y="2807208"/>
-            <a:ext cx="3474720" cy="402336"/>
-          </a:xfrm>
-          <a:prstGeom prst="rect">
-            <a:avLst/>
-          </a:prstGeom>
-          <a:noFill/>
-        </p:spPr>
-        <p:txBody>
-          <a:bodyPr wrap="square">
-            <a:spAutoFit/>
-          </a:bodyPr>
-          <a:lstStyle/>
-          <a:p>
-            <a:pPr algn="l"/>
-            <a:r>
-              <a:rPr sz="1300" b="0">
-                <a:solidFill>
-                  <a:srgbClr val="888888"/>
-                </a:solidFill>
-                <a:latin typeface="Calibri"/>
-              </a:rPr>
-              <a:t>CSI 在此計算完成</a:t>
-            </a:r>
-          </a:p>
-        </p:txBody>
-      </p:sp>
-      <p:sp>
-        <p:nvSpPr>
-          <p:cNvPr id="17" name="Rectangle 16"/>
-          <p:cNvSpPr/>
-          <p:nvPr/>
-        </p:nvSpPr>
-        <p:spPr>
-          <a:xfrm>
-            <a:off x="365760" y="3200400"/>
-            <a:ext cx="4754880" cy="402336"/>
-          </a:xfrm>
-          <a:prstGeom prst="rect">
-            <a:avLst/>
-          </a:prstGeom>
-          <a:solidFill>
-            <a:srgbClr val="727272"/>
-          </a:solidFill>
-          <a:ln w="12700">
-            <a:solidFill>
-              <a:srgbClr val="828282"/>
-            </a:solidFill>
-          </a:ln>
-        </p:spPr>
-        <p:style>
-          <a:lnRef idx="1">
-            <a:schemeClr val="accent1"/>
-          </a:lnRef>
-          <a:fillRef idx="3">
-            <a:schemeClr val="accent1"/>
-          </a:fillRef>
-          <a:effectRef idx="2">
-            <a:schemeClr val="accent1"/>
-          </a:effectRef>
-          <a:fontRef idx="minor">
-            <a:schemeClr val="lt1"/>
-          </a:fontRef>
-        </p:style>
-        <p:txBody>
-          <a:bodyPr rtlCol="0" anchor="ctr"/>
-          <a:lstStyle/>
-          <a:p>
-            <a:pPr algn="ctr"/>
-            <a:r>
-              <a:rPr sz="1400" b="1">
-                <a:solidFill>
-                  <a:srgbClr val="FFFFFF"/>
-                </a:solidFill>
-                <a:latin typeface="Calibri"/>
-              </a:rPr>
-              <a:t>PHY 硬體 + RF 電路</a:t>
-            </a:r>
-          </a:p>
-        </p:txBody>
-      </p:sp>
-      <p:sp>
-        <p:nvSpPr>
-          <p:cNvPr id="18" name="TextBox 17"/>
-          <p:cNvSpPr txBox="1"/>
-          <p:nvPr/>
-        </p:nvSpPr>
-        <p:spPr>
-          <a:xfrm>
-            <a:off x="5303520" y="3246120"/>
-            <a:ext cx="3474720" cy="402336"/>
-          </a:xfrm>
-          <a:prstGeom prst="rect">
-            <a:avLst/>
-          </a:prstGeom>
-          <a:noFill/>
-        </p:spPr>
-        <p:txBody>
-          <a:bodyPr wrap="square">
-            <a:spAutoFit/>
-          </a:bodyPr>
-          <a:lstStyle/>
-          <a:p>
-            <a:pPr algn="l"/>
-            <a:r>
-              <a:rPr sz="1300" b="0">
-                <a:solidFill>
-                  <a:srgbClr val="888888"/>
-                </a:solidFill>
-                <a:latin typeface="Calibri"/>
-              </a:rPr>
-              <a:t>OFDM 解調，子載波分析</a:t>
-            </a:r>
-          </a:p>
-        </p:txBody>
-      </p:sp>
-      <p:cxnSp>
-        <p:nvCxnSpPr>
-          <p:cNvPr id="19" name="Connector 18"/>
-          <p:cNvCxnSpPr/>
-          <p:nvPr/>
-        </p:nvCxnSpPr>
-        <p:spPr>
-          <a:xfrm>
-            <a:off x="365760" y="4393688"/>
-            <a:ext cx="8412480" cy="0"/>
-          </a:xfrm>
-          <a:prstGeom prst="line">
-            <a:avLst/>
-          </a:prstGeom>
-          <a:ln w="6350">
-            <a:solidFill>
-              <a:srgbClr val="D8D8D8"/>
-            </a:solidFill>
-          </a:ln>
-        </p:spPr>
-        <p:style>
-          <a:lnRef idx="2">
-            <a:schemeClr val="accent1"/>
-          </a:lnRef>
-          <a:fillRef idx="0">
-            <a:schemeClr val="accent1"/>
-          </a:fillRef>
-          <a:effectRef idx="1">
-            <a:schemeClr val="accent1"/>
-          </a:effectRef>
-          <a:fontRef idx="minor">
-            <a:schemeClr val="tx1"/>
-          </a:fontRef>
-        </p:style>
-      </p:cxnSp>
-      <p:sp>
-        <p:nvSpPr>
-          <p:cNvPr id="20" name="TextBox 19"/>
-          <p:cNvSpPr txBox="1"/>
-          <p:nvPr/>
-        </p:nvSpPr>
-        <p:spPr>
-          <a:xfrm>
-            <a:off x="457200" y="4393692"/>
-            <a:ext cx="8229600" cy="256032"/>
-          </a:xfrm>
-          <a:prstGeom prst="rect">
-            <a:avLst/>
-          </a:prstGeom>
-          <a:noFill/>
-        </p:spPr>
-        <p:txBody>
-          <a:bodyPr wrap="square">
-            <a:spAutoFit/>
-          </a:bodyPr>
-          <a:lstStyle/>
-          <a:p>
-            <a:pPr algn="l"/>
-            <a:r>
-              <a:rPr sz="1300" b="0">
-                <a:solidFill>
-                  <a:srgbClr val="646464"/>
-                </a:solidFill>
-                <a:latin typeface="Calibri"/>
-              </a:rPr>
-              <a:t>Windows 架構的每一層都有合理的設計動機，但合力造成了 CSI 無法取得的結果</a:t>
-            </a:r>
-          </a:p>
-        </p:txBody>
-      </p:sp>
-      <p:sp>
-        <p:nvSpPr>
-          <p:cNvPr id="21" name="Rectangle 20"/>
-          <p:cNvSpPr/>
-          <p:nvPr/>
-        </p:nvSpPr>
-        <p:spPr>
-          <a:xfrm>
-            <a:off x="0" y="4686300"/>
-            <a:ext cx="9144000" cy="457200"/>
-          </a:xfrm>
-          <a:prstGeom prst="rect">
-            <a:avLst/>
-          </a:prstGeom>
-          <a:gradFill rotWithShape="1">
-            <a:gsLst>
-              <a:gs pos="0">
-                <a:srgbClr val="181818"/>
-              </a:gs>
-              <a:gs pos="100000">
-                <a:srgbClr val="383838"/>
-              </a:gs>
-            </a:gsLst>
-            <a:lin scaled="0" ang="0"/>
-          </a:gradFill>
-          <a:ln>
-            <a:noFill/>
-          </a:ln>
-        </p:spPr>
-        <p:style>
-          <a:lnRef idx="1">
-            <a:schemeClr val="accent1"/>
-          </a:lnRef>
-          <a:fillRef idx="3">
-            <a:schemeClr val="accent1"/>
-          </a:fillRef>
-          <a:effectRef idx="2">
-            <a:schemeClr val="accent1"/>
-          </a:effectRef>
-          <a:fontRef idx="minor">
-            <a:schemeClr val="lt1"/>
-          </a:fontRef>
-        </p:style>
-        <p:txBody>
-          <a:bodyPr rtlCol="0" anchor="ctr"/>
-          <a:lstStyle/>
-          <a:p>
-            <a:pPr algn="ctr"/>
-          </a:p>
-        </p:txBody>
-      </p:sp>
-      <p:sp>
-        <p:nvSpPr>
-          <p:cNvPr id="22" name="TextBox 21"/>
-          <p:cNvSpPr txBox="1"/>
-          <p:nvPr/>
-        </p:nvSpPr>
-        <p:spPr>
-          <a:xfrm>
-            <a:off x="274320" y="4722876"/>
-            <a:ext cx="4572000" cy="384048"/>
-          </a:xfrm>
-          <a:prstGeom prst="rect">
-            <a:avLst/>
-          </a:prstGeom>
-          <a:noFill/>
-        </p:spPr>
-        <p:txBody>
-          <a:bodyPr wrap="square">
-            <a:spAutoFit/>
-          </a:bodyPr>
-          <a:lstStyle/>
-          <a:p>
-            <a:pPr algn="l"/>
-            <a:r>
-              <a:rPr sz="1300" b="0">
-                <a:solidFill>
-                  <a:srgbClr val="C0C0C0"/>
-                </a:solidFill>
-                <a:latin typeface="Calibri"/>
-              </a:rPr>
-              <a:t>結語</a:t>
-            </a:r>
-          </a:p>
-        </p:txBody>
-      </p:sp>
-      <p:sp>
-        <p:nvSpPr>
-          <p:cNvPr id="23" name="TextBox 22"/>
-          <p:cNvSpPr txBox="1"/>
-          <p:nvPr/>
-        </p:nvSpPr>
-        <p:spPr>
-          <a:xfrm>
-            <a:off x="7863840" y="4722876"/>
-            <a:ext cx="914400" cy="384048"/>
-          </a:xfrm>
-          <a:prstGeom prst="rect">
-            <a:avLst/>
-          </a:prstGeom>
-          <a:noFill/>
-        </p:spPr>
-        <p:txBody>
-          <a:bodyPr wrap="square">
-            <a:spAutoFit/>
-          </a:bodyPr>
-          <a:lstStyle/>
-          <a:p>
-            <a:pPr algn="r"/>
-            <a:r>
-              <a:rPr sz="1300" b="0">
-                <a:solidFill>
-                  <a:srgbClr val="C0C0C0"/>
-                </a:solidFill>
-                <a:latin typeface="Calibri"/>
-              </a:rPr>
-              <a:t>22 / 24</a:t>
+              <a:t>22 / 25</a:t>
             </a:r>
           </a:p>
         </p:txBody>
@@ -17407,7 +17977,7 @@
                 </a:solidFill>
                 <a:latin typeface="Calibri"/>
               </a:rPr>
-              <a:t>給 RF 工程師的建議</a:t>
+              <a:t>完整架構總覽：CSI 的旅程</a:t>
             </a:r>
           </a:p>
         </p:txBody>
@@ -17455,17 +18025,19 @@
         </p:nvSpPr>
         <p:spPr>
           <a:xfrm>
-            <a:off x="365760" y="960120"/>
-            <a:ext cx="36576" cy="3433572"/>
+            <a:off x="365760" y="1005840"/>
+            <a:ext cx="4754880" cy="402336"/>
           </a:xfrm>
           <a:prstGeom prst="rect">
             <a:avLst/>
           </a:prstGeom>
           <a:solidFill>
-            <a:srgbClr val="9A9A9A"/>
+            <a:srgbClr val="545454"/>
           </a:solidFill>
-          <a:ln>
-            <a:noFill/>
+          <a:ln w="12700">
+            <a:solidFill>
+              <a:srgbClr val="9A9A9A"/>
+            </a:solidFill>
           </a:ln>
         </p:spPr>
         <p:style>
@@ -17487,6 +18059,15 @@
           <a:lstStyle/>
           <a:p>
             <a:pPr algn="ctr"/>
+            <a:r>
+              <a:rPr sz="1400" b="1">
+                <a:solidFill>
+                  <a:srgbClr val="FFFFFF"/>
+                </a:solidFill>
+                <a:latin typeface="Calibri"/>
+              </a:rPr>
+              <a:t>應用程式</a:t>
+            </a:r>
           </a:p>
         </p:txBody>
       </p:sp>
@@ -17498,8 +18079,8 @@
         </p:nvSpPr>
         <p:spPr>
           <a:xfrm>
-            <a:off x="530352" y="1051560"/>
-            <a:ext cx="8138160" cy="3250692"/>
+            <a:off x="5303520" y="1051560"/>
+            <a:ext cx="3474720" cy="402336"/>
           </a:xfrm>
           <a:prstGeom prst="rect">
             <a:avLst/>
@@ -17512,157 +18093,537 @@
           </a:bodyPr>
           <a:lstStyle/>
           <a:p>
-            <a:pPr>
-              <a:spcBef>
-                <a:spcPts val="400"/>
-              </a:spcBef>
-            </a:pPr>
-            <a:r>
-              <a:rPr b="1" sz="1700">
-                <a:solidFill>
-                  <a:srgbClr val="9A9A9A"/>
-                </a:solidFill>
-              </a:rPr>
-              <a:t>1. 選硬體先確認 CSI 工具支援</a:t>
-            </a:r>
-          </a:p>
-          <a:p>
-            <a:pPr lvl="1">
-              <a:spcBef>
-                <a:spcPts val="100"/>
-              </a:spcBef>
-            </a:pPr>
-            <a:r>
-              <a:rPr sz="1500">
+            <a:pPr algn="l"/>
+            <a:r>
+              <a:rPr sz="1300" b="0">
                 <a:solidFill>
                   <a:srgbClr val="646464"/>
                 </a:solidFill>
-              </a:rPr>
-              <a:t>  · → Intel AX200/AX210 = 目前最佳選擇</a:t>
-            </a:r>
-          </a:p>
-          <a:p>
-            <a:r>
-              <a:rPr sz="600"/>
-              <a:t/>
-            </a:r>
-          </a:p>
-          <a:p>
-            <a:pPr>
-              <a:spcBef>
-                <a:spcPts val="400"/>
-              </a:spcBef>
-            </a:pPr>
-            <a:r>
-              <a:rPr b="1" sz="1700">
-                <a:solidFill>
-                  <a:srgbClr val="9A9A9A"/>
-                </a:solidFill>
-              </a:rPr>
-              <a:t>2. 優先 Linux 環境採集 CSI</a:t>
-            </a:r>
-          </a:p>
-          <a:p>
-            <a:pPr lvl="1">
-              <a:spcBef>
-                <a:spcPts val="100"/>
-              </a:spcBef>
-            </a:pPr>
-            <a:r>
-              <a:rPr sz="1500">
+                <a:latin typeface="Calibri"/>
+              </a:rPr>
+              <a:t>只能用 WinSock，看不到 PHY</a:t>
+            </a:r>
+          </a:p>
+        </p:txBody>
+      </p:sp>
+      <p:sp>
+        <p:nvSpPr>
+          <p:cNvPr id="9" name="Rectangle 8"/>
+          <p:cNvSpPr/>
+          <p:nvPr/>
+        </p:nvSpPr>
+        <p:spPr>
+          <a:xfrm>
+            <a:off x="365760" y="1444752"/>
+            <a:ext cx="4754880" cy="402336"/>
+          </a:xfrm>
+          <a:prstGeom prst="rect">
+            <a:avLst/>
+          </a:prstGeom>
+          <a:solidFill>
+            <a:srgbClr val="555555"/>
+          </a:solidFill>
+          <a:ln w="31750">
+            <a:solidFill>
+              <a:srgbClr val="909090"/>
+            </a:solidFill>
+          </a:ln>
+        </p:spPr>
+        <p:style>
+          <a:lnRef idx="1">
+            <a:schemeClr val="accent1"/>
+          </a:lnRef>
+          <a:fillRef idx="3">
+            <a:schemeClr val="accent1"/>
+          </a:fillRef>
+          <a:effectRef idx="2">
+            <a:schemeClr val="accent1"/>
+          </a:effectRef>
+          <a:fontRef idx="minor">
+            <a:schemeClr val="lt1"/>
+          </a:fontRef>
+        </p:style>
+        <p:txBody>
+          <a:bodyPr rtlCol="0" anchor="ctr"/>
+          <a:lstStyle/>
+          <a:p>
+            <a:pPr algn="ctr"/>
+            <a:r>
+              <a:rPr sz="1400" b="1">
+                <a:solidFill>
+                  <a:srgbClr val="FFFFFF"/>
+                </a:solidFill>
+                <a:latin typeface="Calibri"/>
+              </a:rPr>
+              <a:t>NDIS / tcpip.sys</a:t>
+            </a:r>
+          </a:p>
+        </p:txBody>
+      </p:sp>
+      <p:sp>
+        <p:nvSpPr>
+          <p:cNvPr id="10" name="TextBox 9"/>
+          <p:cNvSpPr txBox="1"/>
+          <p:nvPr/>
+        </p:nvSpPr>
+        <p:spPr>
+          <a:xfrm>
+            <a:off x="5303520" y="1490472"/>
+            <a:ext cx="3474720" cy="402336"/>
+          </a:xfrm>
+          <a:prstGeom prst="rect">
+            <a:avLst/>
+          </a:prstGeom>
+          <a:noFill/>
+        </p:spPr>
+        <p:txBody>
+          <a:bodyPr wrap="square">
+            <a:spAutoFit/>
+          </a:bodyPr>
+          <a:lstStyle/>
+          <a:p>
+            <a:pPr algn="l"/>
+            <a:r>
+              <a:rPr sz="1300" b="0">
+                <a:solidFill>
+                  <a:srgbClr val="787878"/>
+                </a:solidFill>
+                <a:latin typeface="Calibri"/>
+              </a:rPr>
+              <a:t>無 CSI OID，協定通用化</a:t>
+            </a:r>
+          </a:p>
+        </p:txBody>
+      </p:sp>
+      <p:sp>
+        <p:nvSpPr>
+          <p:cNvPr id="11" name="Rectangle 10"/>
+          <p:cNvSpPr/>
+          <p:nvPr/>
+        </p:nvSpPr>
+        <p:spPr>
+          <a:xfrm>
+            <a:off x="365760" y="1883664"/>
+            <a:ext cx="4754880" cy="402336"/>
+          </a:xfrm>
+          <a:prstGeom prst="rect">
+            <a:avLst/>
+          </a:prstGeom>
+          <a:solidFill>
+            <a:srgbClr val="303030"/>
+          </a:solidFill>
+          <a:ln w="31750">
+            <a:solidFill>
+              <a:srgbClr val="B8B8B8"/>
+            </a:solidFill>
+          </a:ln>
+        </p:spPr>
+        <p:style>
+          <a:lnRef idx="1">
+            <a:schemeClr val="accent1"/>
+          </a:lnRef>
+          <a:fillRef idx="3">
+            <a:schemeClr val="accent1"/>
+          </a:fillRef>
+          <a:effectRef idx="2">
+            <a:schemeClr val="accent1"/>
+          </a:effectRef>
+          <a:fontRef idx="minor">
+            <a:schemeClr val="lt1"/>
+          </a:fontRef>
+        </p:style>
+        <p:txBody>
+          <a:bodyPr rtlCol="0" anchor="ctr"/>
+          <a:lstStyle/>
+          <a:p>
+            <a:pPr algn="ctr"/>
+            <a:r>
+              <a:rPr sz="1400" b="1">
+                <a:solidFill>
+                  <a:srgbClr val="FFFFFF"/>
+                </a:solidFill>
+                <a:latin typeface="Calibri"/>
+              </a:rPr>
+              <a:t>nwifi.sys</a:t>
+            </a:r>
+          </a:p>
+        </p:txBody>
+      </p:sp>
+      <p:sp>
+        <p:nvSpPr>
+          <p:cNvPr id="12" name="TextBox 11"/>
+          <p:cNvSpPr txBox="1"/>
+          <p:nvPr/>
+        </p:nvSpPr>
+        <p:spPr>
+          <a:xfrm>
+            <a:off x="5303520" y="1929384"/>
+            <a:ext cx="3474720" cy="402336"/>
+          </a:xfrm>
+          <a:prstGeom prst="rect">
+            <a:avLst/>
+          </a:prstGeom>
+          <a:noFill/>
+        </p:spPr>
+        <p:txBody>
+          <a:bodyPr wrap="square">
+            <a:spAutoFit/>
+          </a:bodyPr>
+          <a:lstStyle/>
+          <a:p>
+            <a:pPr algn="l"/>
+            <a:r>
+              <a:rPr sz="1300" b="0">
+                <a:solidFill>
+                  <a:srgbClr val="444444"/>
+                </a:solidFill>
+                <a:latin typeface="Calibri"/>
+              </a:rPr>
+              <a:t>802.11 管理，丟棄 PHY metadata</a:t>
+            </a:r>
+          </a:p>
+        </p:txBody>
+      </p:sp>
+      <p:sp>
+        <p:nvSpPr>
+          <p:cNvPr id="13" name="Rectangle 12"/>
+          <p:cNvSpPr/>
+          <p:nvPr/>
+        </p:nvSpPr>
+        <p:spPr>
+          <a:xfrm>
+            <a:off x="365760" y="2322576"/>
+            <a:ext cx="4754880" cy="402336"/>
+          </a:xfrm>
+          <a:prstGeom prst="rect">
+            <a:avLst/>
+          </a:prstGeom>
+          <a:solidFill>
+            <a:srgbClr val="303030"/>
+          </a:solidFill>
+          <a:ln w="31750">
+            <a:solidFill>
+              <a:srgbClr val="B8B8B8"/>
+            </a:solidFill>
+          </a:ln>
+        </p:spPr>
+        <p:style>
+          <a:lnRef idx="1">
+            <a:schemeClr val="accent1"/>
+          </a:lnRef>
+          <a:fillRef idx="3">
+            <a:schemeClr val="accent1"/>
+          </a:fillRef>
+          <a:effectRef idx="2">
+            <a:schemeClr val="accent1"/>
+          </a:effectRef>
+          <a:fontRef idx="minor">
+            <a:schemeClr val="lt1"/>
+          </a:fontRef>
+        </p:style>
+        <p:txBody>
+          <a:bodyPr rtlCol="0" anchor="ctr"/>
+          <a:lstStyle/>
+          <a:p>
+            <a:pPr algn="ctr"/>
+            <a:r>
+              <a:rPr sz="1400" b="1">
+                <a:solidFill>
+                  <a:srgbClr val="FFFFFF"/>
+                </a:solidFill>
+                <a:latin typeface="Calibri"/>
+              </a:rPr>
+              <a:t>OEM.sys（唯一機會）</a:t>
+            </a:r>
+          </a:p>
+        </p:txBody>
+      </p:sp>
+      <p:sp>
+        <p:nvSpPr>
+          <p:cNvPr id="14" name="TextBox 13"/>
+          <p:cNvSpPr txBox="1"/>
+          <p:nvPr/>
+        </p:nvSpPr>
+        <p:spPr>
+          <a:xfrm>
+            <a:off x="5303520" y="2368296"/>
+            <a:ext cx="3474720" cy="402336"/>
+          </a:xfrm>
+          <a:prstGeom prst="rect">
+            <a:avLst/>
+          </a:prstGeom>
+          <a:noFill/>
+        </p:spPr>
+        <p:txBody>
+          <a:bodyPr wrap="square">
+            <a:spAutoFit/>
+          </a:bodyPr>
+          <a:lstStyle/>
+          <a:p>
+            <a:pPr algn="l"/>
+            <a:r>
+              <a:rPr sz="1300" b="0">
+                <a:solidFill>
+                  <a:srgbClr val="444444"/>
+                </a:solidFill>
+                <a:latin typeface="Calibri"/>
+              </a:rPr>
+              <a:t>能讀 CSI，但介面不暴露</a:t>
+            </a:r>
+          </a:p>
+        </p:txBody>
+      </p:sp>
+      <p:sp>
+        <p:nvSpPr>
+          <p:cNvPr id="15" name="Rectangle 14"/>
+          <p:cNvSpPr/>
+          <p:nvPr/>
+        </p:nvSpPr>
+        <p:spPr>
+          <a:xfrm>
+            <a:off x="365760" y="2761488"/>
+            <a:ext cx="4754880" cy="402336"/>
+          </a:xfrm>
+          <a:prstGeom prst="rect">
+            <a:avLst/>
+          </a:prstGeom>
+          <a:solidFill>
+            <a:srgbClr val="727272"/>
+          </a:solidFill>
+          <a:ln w="12700">
+            <a:solidFill>
+              <a:srgbClr val="828282"/>
+            </a:solidFill>
+          </a:ln>
+        </p:spPr>
+        <p:style>
+          <a:lnRef idx="1">
+            <a:schemeClr val="accent1"/>
+          </a:lnRef>
+          <a:fillRef idx="3">
+            <a:schemeClr val="accent1"/>
+          </a:fillRef>
+          <a:effectRef idx="2">
+            <a:schemeClr val="accent1"/>
+          </a:effectRef>
+          <a:fontRef idx="minor">
+            <a:schemeClr val="lt1"/>
+          </a:fontRef>
+        </p:style>
+        <p:txBody>
+          <a:bodyPr rtlCol="0" anchor="ctr"/>
+          <a:lstStyle/>
+          <a:p>
+            <a:pPr algn="ctr"/>
+            <a:r>
+              <a:rPr sz="1400" b="1">
+                <a:solidFill>
+                  <a:srgbClr val="FFFFFF"/>
+                </a:solidFill>
+                <a:latin typeface="Calibri"/>
+              </a:rPr>
+              <a:t>NIC 韌體</a:t>
+            </a:r>
+          </a:p>
+        </p:txBody>
+      </p:sp>
+      <p:sp>
+        <p:nvSpPr>
+          <p:cNvPr id="16" name="TextBox 15"/>
+          <p:cNvSpPr txBox="1"/>
+          <p:nvPr/>
+        </p:nvSpPr>
+        <p:spPr>
+          <a:xfrm>
+            <a:off x="5303520" y="2807208"/>
+            <a:ext cx="3474720" cy="402336"/>
+          </a:xfrm>
+          <a:prstGeom prst="rect">
+            <a:avLst/>
+          </a:prstGeom>
+          <a:noFill/>
+        </p:spPr>
+        <p:txBody>
+          <a:bodyPr wrap="square">
+            <a:spAutoFit/>
+          </a:bodyPr>
+          <a:lstStyle/>
+          <a:p>
+            <a:pPr algn="l"/>
+            <a:r>
+              <a:rPr sz="1300" b="0">
+                <a:solidFill>
+                  <a:srgbClr val="888888"/>
+                </a:solidFill>
+                <a:latin typeface="Calibri"/>
+              </a:rPr>
+              <a:t>CSI 在此計算完成</a:t>
+            </a:r>
+          </a:p>
+        </p:txBody>
+      </p:sp>
+      <p:sp>
+        <p:nvSpPr>
+          <p:cNvPr id="17" name="Rectangle 16"/>
+          <p:cNvSpPr/>
+          <p:nvPr/>
+        </p:nvSpPr>
+        <p:spPr>
+          <a:xfrm>
+            <a:off x="365760" y="3200400"/>
+            <a:ext cx="4754880" cy="402336"/>
+          </a:xfrm>
+          <a:prstGeom prst="rect">
+            <a:avLst/>
+          </a:prstGeom>
+          <a:solidFill>
+            <a:srgbClr val="727272"/>
+          </a:solidFill>
+          <a:ln w="12700">
+            <a:solidFill>
+              <a:srgbClr val="828282"/>
+            </a:solidFill>
+          </a:ln>
+        </p:spPr>
+        <p:style>
+          <a:lnRef idx="1">
+            <a:schemeClr val="accent1"/>
+          </a:lnRef>
+          <a:fillRef idx="3">
+            <a:schemeClr val="accent1"/>
+          </a:fillRef>
+          <a:effectRef idx="2">
+            <a:schemeClr val="accent1"/>
+          </a:effectRef>
+          <a:fontRef idx="minor">
+            <a:schemeClr val="lt1"/>
+          </a:fontRef>
+        </p:style>
+        <p:txBody>
+          <a:bodyPr rtlCol="0" anchor="ctr"/>
+          <a:lstStyle/>
+          <a:p>
+            <a:pPr algn="ctr"/>
+            <a:r>
+              <a:rPr sz="1400" b="1">
+                <a:solidFill>
+                  <a:srgbClr val="FFFFFF"/>
+                </a:solidFill>
+                <a:latin typeface="Calibri"/>
+              </a:rPr>
+              <a:t>PHY 硬體 + RF 電路</a:t>
+            </a:r>
+          </a:p>
+        </p:txBody>
+      </p:sp>
+      <p:sp>
+        <p:nvSpPr>
+          <p:cNvPr id="18" name="TextBox 17"/>
+          <p:cNvSpPr txBox="1"/>
+          <p:nvPr/>
+        </p:nvSpPr>
+        <p:spPr>
+          <a:xfrm>
+            <a:off x="5303520" y="3246120"/>
+            <a:ext cx="3474720" cy="402336"/>
+          </a:xfrm>
+          <a:prstGeom prst="rect">
+            <a:avLst/>
+          </a:prstGeom>
+          <a:noFill/>
+        </p:spPr>
+        <p:txBody>
+          <a:bodyPr wrap="square">
+            <a:spAutoFit/>
+          </a:bodyPr>
+          <a:lstStyle/>
+          <a:p>
+            <a:pPr algn="l"/>
+            <a:r>
+              <a:rPr sz="1300" b="0">
+                <a:solidFill>
+                  <a:srgbClr val="888888"/>
+                </a:solidFill>
+                <a:latin typeface="Calibri"/>
+              </a:rPr>
+              <a:t>OFDM 解調，子載波分析</a:t>
+            </a:r>
+          </a:p>
+        </p:txBody>
+      </p:sp>
+      <p:cxnSp>
+        <p:nvCxnSpPr>
+          <p:cNvPr id="19" name="Connector 18"/>
+          <p:cNvCxnSpPr/>
+          <p:nvPr/>
+        </p:nvCxnSpPr>
+        <p:spPr>
+          <a:xfrm>
+            <a:off x="365760" y="4393688"/>
+            <a:ext cx="8412480" cy="0"/>
+          </a:xfrm>
+          <a:prstGeom prst="line">
+            <a:avLst/>
+          </a:prstGeom>
+          <a:ln w="6350">
+            <a:solidFill>
+              <a:srgbClr val="D8D8D8"/>
+            </a:solidFill>
+          </a:ln>
+        </p:spPr>
+        <p:style>
+          <a:lnRef idx="2">
+            <a:schemeClr val="accent1"/>
+          </a:lnRef>
+          <a:fillRef idx="0">
+            <a:schemeClr val="accent1"/>
+          </a:fillRef>
+          <a:effectRef idx="1">
+            <a:schemeClr val="accent1"/>
+          </a:effectRef>
+          <a:fontRef idx="minor">
+            <a:schemeClr val="tx1"/>
+          </a:fontRef>
+        </p:style>
+      </p:cxnSp>
+      <p:sp>
+        <p:nvSpPr>
+          <p:cNvPr id="20" name="TextBox 19"/>
+          <p:cNvSpPr txBox="1"/>
+          <p:nvPr/>
+        </p:nvSpPr>
+        <p:spPr>
+          <a:xfrm>
+            <a:off x="457200" y="4393692"/>
+            <a:ext cx="8229600" cy="256032"/>
+          </a:xfrm>
+          <a:prstGeom prst="rect">
+            <a:avLst/>
+          </a:prstGeom>
+          <a:noFill/>
+        </p:spPr>
+        <p:txBody>
+          <a:bodyPr wrap="square">
+            <a:spAutoFit/>
+          </a:bodyPr>
+          <a:lstStyle/>
+          <a:p>
+            <a:pPr algn="l"/>
+            <a:r>
+              <a:rPr sz="1300" b="0">
                 <a:solidFill>
                   <a:srgbClr val="646464"/>
                 </a:solidFill>
-              </a:rPr>
-              <a:t>  · → PicoScenes（商業支援）或 FeitCSI（開源）</a:t>
-            </a:r>
-          </a:p>
-          <a:p>
-            <a:pPr lvl="1">
-              <a:spcBef>
-                <a:spcPts val="100"/>
-              </a:spcBef>
-            </a:pPr>
-            <a:r>
-              <a:rPr sz="1500">
-                <a:solidFill>
-                  <a:srgbClr val="646464"/>
-                </a:solidFill>
-              </a:rPr>
-              <a:t>  · → 雙系統：Linux 採集，Windows 後處理</a:t>
-            </a:r>
-          </a:p>
-          <a:p>
-            <a:r>
-              <a:rPr sz="600"/>
-              <a:t/>
-            </a:r>
-          </a:p>
-          <a:p>
-            <a:pPr>
-              <a:spcBef>
-                <a:spcPts val="400"/>
-              </a:spcBef>
-            </a:pPr>
-            <a:r>
-              <a:rPr b="1" sz="1700">
-                <a:solidFill>
-                  <a:srgbClr val="9A9A9A"/>
-                </a:solidFill>
-              </a:rPr>
-              <a:t>3. 避免的坑</a:t>
-            </a:r>
-          </a:p>
-          <a:p>
-            <a:pPr lvl="1">
-              <a:spcBef>
-                <a:spcPts val="100"/>
-              </a:spcBef>
-            </a:pPr>
-            <a:r>
-              <a:rPr sz="1500">
-                <a:solidFill>
-                  <a:srgbClr val="646464"/>
-                </a:solidFill>
-              </a:rPr>
-              <a:t>  · ❌ OEM 私有 IOCTL（每次驅動更新後失效）</a:t>
-            </a:r>
-          </a:p>
-          <a:p>
-            <a:pPr lvl="1">
-              <a:spcBef>
-                <a:spcPts val="100"/>
-              </a:spcBef>
-            </a:pPr>
-            <a:r>
-              <a:rPr sz="1500">
-                <a:solidFill>
-                  <a:srgbClr val="646464"/>
-                </a:solidFill>
-              </a:rPr>
-              <a:t>  · ❌ VM 取 CSI（時序精度受 Hypervisor 影響）</a:t>
-            </a:r>
-          </a:p>
-          <a:p>
-            <a:pPr lvl="1">
-              <a:spcBef>
-                <a:spcPts val="100"/>
-              </a:spcBef>
-            </a:pPr>
-            <a:r>
-              <a:rPr sz="1500">
-                <a:solidFill>
-                  <a:srgbClr val="646464"/>
-                </a:solidFill>
-              </a:rPr>
-              <a:t>  · ❌ 未在支援清單上的網卡</a:t>
-            </a:r>
-          </a:p>
-        </p:txBody>
-      </p:sp>
-      <p:sp>
-        <p:nvSpPr>
-          <p:cNvPr id="9" name="Rectangle 8"/>
+                <a:latin typeface="Calibri"/>
+              </a:rPr>
+              <a:t>Windows 架構的每一層都有合理的設計動機，但合力造成了 CSI 無法取得的結果</a:t>
+            </a:r>
+          </a:p>
+        </p:txBody>
+      </p:sp>
+      <p:sp>
+        <p:nvSpPr>
+          <p:cNvPr id="21" name="Rectangle 20"/>
           <p:cNvSpPr/>
           <p:nvPr/>
         </p:nvSpPr>
@@ -17713,7 +18674,7 @@
       </p:sp>
       <p:sp>
         <p:nvSpPr>
-          <p:cNvPr id="10" name="TextBox 9"/>
+          <p:cNvPr id="22" name="TextBox 21"/>
           <p:cNvSpPr txBox="1"/>
           <p:nvPr/>
         </p:nvSpPr>
@@ -17748,7 +18709,7 @@
       </p:sp>
       <p:sp>
         <p:nvSpPr>
-          <p:cNvPr id="11" name="TextBox 10"/>
+          <p:cNvPr id="23" name="TextBox 22"/>
           <p:cNvSpPr txBox="1"/>
           <p:nvPr/>
         </p:nvSpPr>
@@ -17776,7 +18737,7 @@
                 </a:solidFill>
                 <a:latin typeface="Calibri"/>
               </a:rPr>
-              <a:t>23 / 24</a:t>
+              <a:t>23 / 25</a:t>
             </a:r>
           </a:p>
         </p:txBody>
@@ -17990,7 +18951,7 @@
                 </a:solidFill>
                 <a:latin typeface="Calibri"/>
               </a:rPr>
-              <a:t>Q&amp;A / 參考資料</a:t>
+              <a:t>給 RF 工程師的建議</a:t>
             </a:r>
           </a:p>
         </p:txBody>
@@ -18032,14 +18993,57 @@
       </p:sp>
       <p:sp>
         <p:nvSpPr>
-          <p:cNvPr id="7" name="TextBox 6"/>
+          <p:cNvPr id="7" name="Rectangle 6"/>
+          <p:cNvSpPr/>
+          <p:nvPr/>
+        </p:nvSpPr>
+        <p:spPr>
+          <a:xfrm>
+            <a:off x="365760" y="960120"/>
+            <a:ext cx="36576" cy="3433572"/>
+          </a:xfrm>
+          <a:prstGeom prst="rect">
+            <a:avLst/>
+          </a:prstGeom>
+          <a:solidFill>
+            <a:srgbClr val="9A9A9A"/>
+          </a:solidFill>
+          <a:ln>
+            <a:noFill/>
+          </a:ln>
+        </p:spPr>
+        <p:style>
+          <a:lnRef idx="1">
+            <a:schemeClr val="accent1"/>
+          </a:lnRef>
+          <a:fillRef idx="3">
+            <a:schemeClr val="accent1"/>
+          </a:fillRef>
+          <a:effectRef idx="2">
+            <a:schemeClr val="accent1"/>
+          </a:effectRef>
+          <a:fontRef idx="minor">
+            <a:schemeClr val="lt1"/>
+          </a:fontRef>
+        </p:style>
+        <p:txBody>
+          <a:bodyPr rtlCol="0" anchor="ctr"/>
+          <a:lstStyle/>
+          <a:p>
+            <a:pPr algn="ctr"/>
+          </a:p>
+        </p:txBody>
+      </p:sp>
+      <p:sp>
+        <p:nvSpPr>
+          <p:cNvPr id="8" name="TextBox 7"/>
           <p:cNvSpPr txBox="1"/>
           <p:nvPr/>
         </p:nvSpPr>
         <p:spPr>
           <a:xfrm>
-            <a:off x="502920" y="1097280"/>
-            <a:ext cx="8138160" cy="3415284"/>
+            <a:off x="530352" y="1051560"/>
+            <a:ext cx="8138160" cy="3250692"/>
           </a:xfrm>
           <a:prstGeom prst="rect">
             <a:avLst/>
@@ -18054,136 +19058,155 @@
           <a:p>
             <a:pPr>
               <a:spcBef>
-                <a:spcPts val="500"/>
+                <a:spcPts val="400"/>
               </a:spcBef>
             </a:pPr>
             <a:r>
-              <a:rPr sz="1400">
+              <a:rPr b="1" sz="1700">
                 <a:solidFill>
                   <a:srgbClr val="9A9A9A"/>
                 </a:solidFill>
-                <a:latin typeface="Calibri"/>
-              </a:rPr>
-              <a:t>[1] D. Halperin et al., Tool Release: Gathering 802.11n Traces with CSI, ACM SIGCOMM CCR, Vol. 41, No. 1, 2011. -&gt; linux-80211n-csitool</a:t>
+              </a:rPr>
+              <a:t>1. 選硬體先確認 CSI 工具支援</a:t>
+            </a:r>
+          </a:p>
+          <a:p>
+            <a:pPr lvl="1">
+              <a:spcBef>
+                <a:spcPts val="100"/>
+              </a:spcBef>
+            </a:pPr>
+            <a:r>
+              <a:rPr sz="1500">
+                <a:solidFill>
+                  <a:srgbClr val="646464"/>
+                </a:solidFill>
+              </a:rPr>
+              <a:t>  · → Intel AX200/AX210 = 目前最佳選擇</a:t>
+            </a:r>
+          </a:p>
+          <a:p>
+            <a:r>
+              <a:rPr sz="600"/>
+              <a:t/>
             </a:r>
           </a:p>
           <a:p>
             <a:pPr>
               <a:spcBef>
-                <a:spcPts val="500"/>
+                <a:spcPts val="400"/>
               </a:spcBef>
             </a:pPr>
             <a:r>
-              <a:rPr sz="1400">
+              <a:rPr b="1" sz="1700">
                 <a:solidFill>
                   <a:srgbClr val="9A9A9A"/>
                 </a:solidFill>
-                <a:latin typeface="Calibri"/>
-              </a:rPr>
-              <a:t>[2] M. Schulz et al., Nexmon: The C-based Firmware Patching Framework -- seemoo-lab/nexmon_csi</a:t>
+              </a:rPr>
+              <a:t>2. 優先 Linux 環境採集 CSI</a:t>
+            </a:r>
+          </a:p>
+          <a:p>
+            <a:pPr lvl="1">
+              <a:spcBef>
+                <a:spcPts val="100"/>
+              </a:spcBef>
+            </a:pPr>
+            <a:r>
+              <a:rPr sz="1500">
+                <a:solidFill>
+                  <a:srgbClr val="646464"/>
+                </a:solidFill>
+              </a:rPr>
+              <a:t>  · → PicoScenes（商業支援）或 FeitCSI（開源）</a:t>
+            </a:r>
+          </a:p>
+          <a:p>
+            <a:pPr lvl="1">
+              <a:spcBef>
+                <a:spcPts val="100"/>
+              </a:spcBef>
+            </a:pPr>
+            <a:r>
+              <a:rPr sz="1500">
+                <a:solidFill>
+                  <a:srgbClr val="646464"/>
+                </a:solidFill>
+              </a:rPr>
+              <a:t>  · → 雙系統：Linux 採集，Windows 後處理</a:t>
+            </a:r>
+          </a:p>
+          <a:p>
+            <a:r>
+              <a:rPr sz="600"/>
+              <a:t/>
             </a:r>
           </a:p>
           <a:p>
             <a:pPr>
               <a:spcBef>
-                <a:spcPts val="500"/>
+                <a:spcPts val="400"/>
               </a:spcBef>
             </a:pPr>
             <a:r>
-              <a:rPr sz="1400">
+              <a:rPr b="1" sz="1700">
                 <a:solidFill>
                   <a:srgbClr val="9A9A9A"/>
                 </a:solidFill>
-                <a:latin typeface="Calibri"/>
-              </a:rPr>
-              <a:t>[3] Z. Jiang, PicoScenes: Enabling Modern Wi-Fi ISAC Research -- ps.zpj.io</a:t>
-            </a:r>
-          </a:p>
-          <a:p>
-            <a:pPr>
+              </a:rPr>
+              <a:t>3. 避免的坑</a:t>
+            </a:r>
+          </a:p>
+          <a:p>
+            <a:pPr lvl="1">
               <a:spcBef>
-                <a:spcPts val="500"/>
+                <a:spcPts val="100"/>
               </a:spcBef>
             </a:pPr>
             <a:r>
-              <a:rPr sz="1400">
-                <a:solidFill>
-                  <a:srgbClr val="9A9A9A"/>
-                </a:solidFill>
-                <a:latin typeface="Calibri"/>
-              </a:rPr>
-              <a:t>[4] KuskoSoft, FeitCSI: 802.11 CSI Tool -- feitcsi.kuskosoft.com</a:t>
-            </a:r>
-          </a:p>
-          <a:p>
-            <a:pPr>
+              <a:rPr sz="1500">
+                <a:solidFill>
+                  <a:srgbClr val="646464"/>
+                </a:solidFill>
+              </a:rPr>
+              <a:t>  · ❌ OEM 私有 IOCTL（每次驅動更新後失效）</a:t>
+            </a:r>
+          </a:p>
+          <a:p>
+            <a:pPr lvl="1">
               <a:spcBef>
-                <a:spcPts val="500"/>
+                <a:spcPts val="100"/>
               </a:spcBef>
             </a:pPr>
             <a:r>
-              <a:rPr sz="1400">
-                <a:solidFill>
-                  <a:srgbClr val="9A9A9A"/>
-                </a:solidFill>
-                <a:latin typeface="Calibri"/>
-              </a:rPr>
-              <a:t>[5] Y. Xie et al., Atheros CSI Tool for 802.11n NICs -- xieyaxiongfly/Atheros-CSI-Tool</a:t>
-            </a:r>
-          </a:p>
-          <a:p>
-            <a:pPr>
+              <a:rPr sz="1500">
+                <a:solidFill>
+                  <a:srgbClr val="646464"/>
+                </a:solidFill>
+              </a:rPr>
+              <a:t>  · ❌ VM 取 CSI（時序精度受 Hypervisor 影響）</a:t>
+            </a:r>
+          </a:p>
+          <a:p>
+            <a:pPr lvl="1">
               <a:spcBef>
-                <a:spcPts val="500"/>
+                <a:spcPts val="100"/>
               </a:spcBef>
             </a:pPr>
             <a:r>
-              <a:rPr sz="1400">
-                <a:solidFill>
-                  <a:srgbClr val="9A9A9A"/>
-                </a:solidFill>
-                <a:latin typeface="Calibri"/>
-              </a:rPr>
-              <a:t>[6] Microsoft Docs, WDI Miniport Driver Design Guide -- learn.microsoft.com</a:t>
-            </a:r>
-          </a:p>
-          <a:p>
-            <a:pPr>
-              <a:spcBef>
-                <a:spcPts val="500"/>
-              </a:spcBef>
-            </a:pPr>
-            <a:r>
-              <a:rPr sz="1400">
-                <a:solidFill>
-                  <a:srgbClr val="9A9A9A"/>
-                </a:solidFill>
-                <a:latin typeface="Calibri"/>
-              </a:rPr>
-              <a:t>[7] Microsoft Docs, NDIS Network Interface Architecture -- learn.microsoft.com</a:t>
-            </a:r>
-          </a:p>
-          <a:p>
-            <a:pPr>
-              <a:spcBef>
-                <a:spcPts val="500"/>
-              </a:spcBef>
-            </a:pPr>
-            <a:r>
-              <a:rPr sz="1400">
-                <a:solidFill>
-                  <a:srgbClr val="9A9A9A"/>
-                </a:solidFill>
-                <a:latin typeface="Calibri"/>
-              </a:rPr>
-              <a:t>[8] Gi-z, CSIKit: Python CSI Processing Tools -- github.com/Gi-z/CSIKit</a:t>
-            </a:r>
-          </a:p>
-        </p:txBody>
-      </p:sp>
-      <p:sp>
-        <p:nvSpPr>
-          <p:cNvPr id="8" name="Rectangle 7"/>
+              <a:rPr sz="1500">
+                <a:solidFill>
+                  <a:srgbClr val="646464"/>
+                </a:solidFill>
+              </a:rPr>
+              <a:t>  · ❌ 未在支援清單上的網卡</a:t>
+            </a:r>
+          </a:p>
+        </p:txBody>
+      </p:sp>
+      <p:sp>
+        <p:nvSpPr>
+          <p:cNvPr id="9" name="Rectangle 8"/>
           <p:cNvSpPr/>
           <p:nvPr/>
         </p:nvSpPr>
@@ -18234,7 +19257,7 @@
       </p:sp>
       <p:sp>
         <p:nvSpPr>
-          <p:cNvPr id="9" name="TextBox 8"/>
+          <p:cNvPr id="10" name="TextBox 9"/>
           <p:cNvSpPr txBox="1"/>
           <p:nvPr/>
         </p:nvSpPr>
@@ -18269,7 +19292,7 @@
       </p:sp>
       <p:sp>
         <p:nvSpPr>
-          <p:cNvPr id="10" name="TextBox 9"/>
+          <p:cNvPr id="11" name="TextBox 10"/>
           <p:cNvSpPr txBox="1"/>
           <p:nvPr/>
         </p:nvSpPr>
@@ -18297,7 +19320,528 @@
                 </a:solidFill>
                 <a:latin typeface="Calibri"/>
               </a:rPr>
-              <a:t>24 / 24</a:t>
+              <a:t>24 / 25</a:t>
+            </a:r>
+          </a:p>
+        </p:txBody>
+      </p:sp>
+    </p:spTree>
+  </p:cSld>
+  <p:clrMapOvr>
+    <a:masterClrMapping/>
+  </p:clrMapOvr>
+</p:sld>
+</file>
+
+<file path=ppt/slides/slide25.xml><?xml version="1.0" encoding="utf-8"?>
+<p:sld xmlns:a="http://schemas.openxmlformats.org/drawingml/2006/main" xmlns:p="http://schemas.openxmlformats.org/presentationml/2006/main" xmlns:r="http://schemas.openxmlformats.org/officeDocument/2006/relationships">
+  <p:cSld>
+    <p:bg>
+      <p:bgPr>
+        <a:solidFill>
+          <a:srgbClr val="FFFFFF"/>
+        </a:solidFill>
+        <a:effectLst/>
+      </p:bgPr>
+    </p:bg>
+    <p:spTree>
+      <p:nvGrpSpPr>
+        <p:cNvPr id="1" name=""/>
+        <p:cNvGrpSpPr/>
+        <p:nvPr/>
+      </p:nvGrpSpPr>
+      <p:grpSpPr/>
+      <p:sp>
+        <p:nvSpPr>
+          <p:cNvPr id="2" name="Rectangle 1"/>
+          <p:cNvSpPr/>
+          <p:nvPr/>
+        </p:nvSpPr>
+        <p:spPr>
+          <a:xfrm>
+            <a:off x="0" y="0"/>
+            <a:ext cx="9144000" cy="822960"/>
+          </a:xfrm>
+          <a:prstGeom prst="rect">
+            <a:avLst/>
+          </a:prstGeom>
+          <a:gradFill rotWithShape="1">
+            <a:gsLst>
+              <a:gs pos="0">
+                <a:srgbClr val="181818"/>
+              </a:gs>
+              <a:gs pos="100000">
+                <a:srgbClr val="424242"/>
+              </a:gs>
+            </a:gsLst>
+            <a:lin scaled="0" ang="0"/>
+          </a:gradFill>
+          <a:ln>
+            <a:noFill/>
+          </a:ln>
+        </p:spPr>
+        <p:style>
+          <a:lnRef idx="1">
+            <a:schemeClr val="accent1"/>
+          </a:lnRef>
+          <a:fillRef idx="3">
+            <a:schemeClr val="accent1"/>
+          </a:fillRef>
+          <a:effectRef idx="2">
+            <a:schemeClr val="accent1"/>
+          </a:effectRef>
+          <a:fontRef idx="minor">
+            <a:schemeClr val="lt1"/>
+          </a:fontRef>
+        </p:style>
+        <p:txBody>
+          <a:bodyPr rtlCol="0" anchor="ctr"/>
+          <a:lstStyle/>
+          <a:p>
+            <a:pPr algn="ctr"/>
+          </a:p>
+        </p:txBody>
+      </p:sp>
+      <p:sp>
+        <p:nvSpPr>
+          <p:cNvPr id="3" name="Rectangle 2"/>
+          <p:cNvSpPr/>
+          <p:nvPr/>
+        </p:nvSpPr>
+        <p:spPr>
+          <a:xfrm>
+            <a:off x="0" y="0"/>
+            <a:ext cx="9144000" cy="10972"/>
+          </a:xfrm>
+          <a:prstGeom prst="rect">
+            <a:avLst/>
+          </a:prstGeom>
+          <a:gradFill rotWithShape="1">
+            <a:gsLst>
+              <a:gs pos="0">
+                <a:srgbClr val="707070"/>
+              </a:gs>
+              <a:gs pos="100000">
+                <a:srgbClr val="303030"/>
+              </a:gs>
+            </a:gsLst>
+            <a:lin scaled="0" ang="0"/>
+          </a:gradFill>
+          <a:ln>
+            <a:noFill/>
+          </a:ln>
+        </p:spPr>
+        <p:style>
+          <a:lnRef idx="1">
+            <a:schemeClr val="accent1"/>
+          </a:lnRef>
+          <a:fillRef idx="3">
+            <a:schemeClr val="accent1"/>
+          </a:fillRef>
+          <a:effectRef idx="2">
+            <a:schemeClr val="accent1"/>
+          </a:effectRef>
+          <a:fontRef idx="minor">
+            <a:schemeClr val="lt1"/>
+          </a:fontRef>
+        </p:style>
+        <p:txBody>
+          <a:bodyPr rtlCol="0" anchor="ctr"/>
+          <a:lstStyle/>
+          <a:p>
+            <a:pPr algn="ctr"/>
+          </a:p>
+        </p:txBody>
+      </p:sp>
+      <p:sp>
+        <p:nvSpPr>
+          <p:cNvPr id="4" name="Rectangle 3"/>
+          <p:cNvSpPr/>
+          <p:nvPr/>
+        </p:nvSpPr>
+        <p:spPr>
+          <a:xfrm>
+            <a:off x="0" y="0"/>
+            <a:ext cx="50292" cy="822960"/>
+          </a:xfrm>
+          <a:prstGeom prst="rect">
+            <a:avLst/>
+          </a:prstGeom>
+          <a:gradFill rotWithShape="1">
+            <a:gsLst>
+              <a:gs pos="0">
+                <a:srgbClr val="9A9A9A"/>
+              </a:gs>
+              <a:gs pos="100000">
+                <a:srgbClr val="424242"/>
+              </a:gs>
+            </a:gsLst>
+            <a:lin scaled="0" ang="5400000"/>
+          </a:gradFill>
+          <a:ln>
+            <a:noFill/>
+          </a:ln>
+        </p:spPr>
+        <p:style>
+          <a:lnRef idx="1">
+            <a:schemeClr val="accent1"/>
+          </a:lnRef>
+          <a:fillRef idx="3">
+            <a:schemeClr val="accent1"/>
+          </a:fillRef>
+          <a:effectRef idx="2">
+            <a:schemeClr val="accent1"/>
+          </a:effectRef>
+          <a:fontRef idx="minor">
+            <a:schemeClr val="lt1"/>
+          </a:fontRef>
+        </p:style>
+        <p:txBody>
+          <a:bodyPr rtlCol="0" anchor="ctr"/>
+          <a:lstStyle/>
+          <a:p>
+            <a:pPr algn="ctr"/>
+          </a:p>
+        </p:txBody>
+      </p:sp>
+      <p:sp>
+        <p:nvSpPr>
+          <p:cNvPr id="5" name="TextBox 4"/>
+          <p:cNvSpPr txBox="1"/>
+          <p:nvPr/>
+        </p:nvSpPr>
+        <p:spPr>
+          <a:xfrm>
+            <a:off x="365760" y="109728"/>
+            <a:ext cx="7040880" cy="731520"/>
+          </a:xfrm>
+          <a:prstGeom prst="rect">
+            <a:avLst/>
+          </a:prstGeom>
+          <a:noFill/>
+        </p:spPr>
+        <p:txBody>
+          <a:bodyPr wrap="square">
+            <a:spAutoFit/>
+          </a:bodyPr>
+          <a:lstStyle/>
+          <a:p>
+            <a:pPr algn="l"/>
+            <a:r>
+              <a:rPr sz="2800" b="1">
+                <a:solidFill>
+                  <a:srgbClr val="FFFFFF"/>
+                </a:solidFill>
+                <a:latin typeface="Calibri"/>
+              </a:rPr>
+              <a:t>Q&amp;A / 參考資料</a:t>
+            </a:r>
+          </a:p>
+        </p:txBody>
+      </p:sp>
+      <p:sp>
+        <p:nvSpPr>
+          <p:cNvPr id="6" name="TextBox 5"/>
+          <p:cNvSpPr txBox="1"/>
+          <p:nvPr/>
+        </p:nvSpPr>
+        <p:spPr>
+          <a:xfrm>
+            <a:off x="7498080" y="109728"/>
+            <a:ext cx="1280160" cy="731520"/>
+          </a:xfrm>
+          <a:prstGeom prst="rect">
+            <a:avLst/>
+          </a:prstGeom>
+          <a:noFill/>
+        </p:spPr>
+        <p:txBody>
+          <a:bodyPr wrap="square">
+            <a:spAutoFit/>
+          </a:bodyPr>
+          <a:lstStyle/>
+          <a:p>
+            <a:pPr algn="r"/>
+            <a:r>
+              <a:rPr sz="1300" b="0">
+                <a:solidFill>
+                  <a:srgbClr val="C0C0C0"/>
+                </a:solidFill>
+                <a:latin typeface="Calibri"/>
+              </a:rPr>
+              <a:t>Section 4/4</a:t>
+            </a:r>
+          </a:p>
+        </p:txBody>
+      </p:sp>
+      <p:sp>
+        <p:nvSpPr>
+          <p:cNvPr id="7" name="TextBox 6"/>
+          <p:cNvSpPr txBox="1"/>
+          <p:nvPr/>
+        </p:nvSpPr>
+        <p:spPr>
+          <a:xfrm>
+            <a:off x="502920" y="1097280"/>
+            <a:ext cx="8138160" cy="3415284"/>
+          </a:xfrm>
+          <a:prstGeom prst="rect">
+            <a:avLst/>
+          </a:prstGeom>
+          <a:noFill/>
+        </p:spPr>
+        <p:txBody>
+          <a:bodyPr wrap="square">
+            <a:spAutoFit/>
+          </a:bodyPr>
+          <a:lstStyle/>
+          <a:p>
+            <a:pPr>
+              <a:spcBef>
+                <a:spcPts val="500"/>
+              </a:spcBef>
+            </a:pPr>
+            <a:r>
+              <a:rPr sz="1400">
+                <a:solidFill>
+                  <a:srgbClr val="9A9A9A"/>
+                </a:solidFill>
+                <a:latin typeface="Calibri"/>
+              </a:rPr>
+              <a:t>[1] D. Halperin et al., Tool Release: Gathering 802.11n Traces with CSI, ACM SIGCOMM CCR, Vol. 41, No. 1, 2011. -&gt; linux-80211n-csitool</a:t>
+            </a:r>
+          </a:p>
+          <a:p>
+            <a:pPr>
+              <a:spcBef>
+                <a:spcPts val="500"/>
+              </a:spcBef>
+            </a:pPr>
+            <a:r>
+              <a:rPr sz="1400">
+                <a:solidFill>
+                  <a:srgbClr val="9A9A9A"/>
+                </a:solidFill>
+                <a:latin typeface="Calibri"/>
+              </a:rPr>
+              <a:t>[2] M. Schulz et al., Nexmon: The C-based Firmware Patching Framework -- seemoo-lab/nexmon_csi</a:t>
+            </a:r>
+          </a:p>
+          <a:p>
+            <a:pPr>
+              <a:spcBef>
+                <a:spcPts val="500"/>
+              </a:spcBef>
+            </a:pPr>
+            <a:r>
+              <a:rPr sz="1400">
+                <a:solidFill>
+                  <a:srgbClr val="9A9A9A"/>
+                </a:solidFill>
+                <a:latin typeface="Calibri"/>
+              </a:rPr>
+              <a:t>[3] Z. Jiang, PicoScenes: Enabling Modern Wi-Fi ISAC Research -- ps.zpj.io</a:t>
+            </a:r>
+          </a:p>
+          <a:p>
+            <a:pPr>
+              <a:spcBef>
+                <a:spcPts val="500"/>
+              </a:spcBef>
+            </a:pPr>
+            <a:r>
+              <a:rPr sz="1400">
+                <a:solidFill>
+                  <a:srgbClr val="9A9A9A"/>
+                </a:solidFill>
+                <a:latin typeface="Calibri"/>
+              </a:rPr>
+              <a:t>[4] KuskoSoft, FeitCSI: 802.11 CSI Tool -- feitcsi.kuskosoft.com</a:t>
+            </a:r>
+          </a:p>
+          <a:p>
+            <a:pPr>
+              <a:spcBef>
+                <a:spcPts val="500"/>
+              </a:spcBef>
+            </a:pPr>
+            <a:r>
+              <a:rPr sz="1400">
+                <a:solidFill>
+                  <a:srgbClr val="9A9A9A"/>
+                </a:solidFill>
+                <a:latin typeface="Calibri"/>
+              </a:rPr>
+              <a:t>[5] Y. Xie et al., Atheros CSI Tool for 802.11n NICs -- xieyaxiongfly/Atheros-CSI-Tool</a:t>
+            </a:r>
+          </a:p>
+          <a:p>
+            <a:pPr>
+              <a:spcBef>
+                <a:spcPts val="500"/>
+              </a:spcBef>
+            </a:pPr>
+            <a:r>
+              <a:rPr sz="1400">
+                <a:solidFill>
+                  <a:srgbClr val="9A9A9A"/>
+                </a:solidFill>
+                <a:latin typeface="Calibri"/>
+              </a:rPr>
+              <a:t>[6] Microsoft Docs, WDI Miniport Driver Design Guide -- learn.microsoft.com</a:t>
+            </a:r>
+          </a:p>
+          <a:p>
+            <a:pPr>
+              <a:spcBef>
+                <a:spcPts val="500"/>
+              </a:spcBef>
+            </a:pPr>
+            <a:r>
+              <a:rPr sz="1400">
+                <a:solidFill>
+                  <a:srgbClr val="9A9A9A"/>
+                </a:solidFill>
+                <a:latin typeface="Calibri"/>
+              </a:rPr>
+              <a:t>[7] Microsoft Docs, NDIS Network Interface Architecture -- learn.microsoft.com</a:t>
+            </a:r>
+          </a:p>
+          <a:p>
+            <a:pPr>
+              <a:spcBef>
+                <a:spcPts val="500"/>
+              </a:spcBef>
+            </a:pPr>
+            <a:r>
+              <a:rPr sz="1400">
+                <a:solidFill>
+                  <a:srgbClr val="9A9A9A"/>
+                </a:solidFill>
+                <a:latin typeface="Calibri"/>
+              </a:rPr>
+              <a:t>[8] Gi-z, CSIKit: Python CSI Processing Tools -- github.com/Gi-z/CSIKit</a:t>
+            </a:r>
+          </a:p>
+        </p:txBody>
+      </p:sp>
+      <p:sp>
+        <p:nvSpPr>
+          <p:cNvPr id="8" name="Rectangle 7"/>
+          <p:cNvSpPr/>
+          <p:nvPr/>
+        </p:nvSpPr>
+        <p:spPr>
+          <a:xfrm>
+            <a:off x="0" y="4686300"/>
+            <a:ext cx="9144000" cy="457200"/>
+          </a:xfrm>
+          <a:prstGeom prst="rect">
+            <a:avLst/>
+          </a:prstGeom>
+          <a:gradFill rotWithShape="1">
+            <a:gsLst>
+              <a:gs pos="0">
+                <a:srgbClr val="181818"/>
+              </a:gs>
+              <a:gs pos="100000">
+                <a:srgbClr val="383838"/>
+              </a:gs>
+            </a:gsLst>
+            <a:lin scaled="0" ang="0"/>
+          </a:gradFill>
+          <a:ln>
+            <a:noFill/>
+          </a:ln>
+        </p:spPr>
+        <p:style>
+          <a:lnRef idx="1">
+            <a:schemeClr val="accent1"/>
+          </a:lnRef>
+          <a:fillRef idx="3">
+            <a:schemeClr val="accent1"/>
+          </a:fillRef>
+          <a:effectRef idx="2">
+            <a:schemeClr val="accent1"/>
+          </a:effectRef>
+          <a:fontRef idx="minor">
+            <a:schemeClr val="lt1"/>
+          </a:fontRef>
+        </p:style>
+        <p:txBody>
+          <a:bodyPr rtlCol="0" anchor="ctr"/>
+          <a:lstStyle/>
+          <a:p>
+            <a:pPr algn="ctr"/>
+          </a:p>
+        </p:txBody>
+      </p:sp>
+      <p:sp>
+        <p:nvSpPr>
+          <p:cNvPr id="9" name="TextBox 8"/>
+          <p:cNvSpPr txBox="1"/>
+          <p:nvPr/>
+        </p:nvSpPr>
+        <p:spPr>
+          <a:xfrm>
+            <a:off x="274320" y="4722876"/>
+            <a:ext cx="4572000" cy="384048"/>
+          </a:xfrm>
+          <a:prstGeom prst="rect">
+            <a:avLst/>
+          </a:prstGeom>
+          <a:noFill/>
+        </p:spPr>
+        <p:txBody>
+          <a:bodyPr wrap="square">
+            <a:spAutoFit/>
+          </a:bodyPr>
+          <a:lstStyle/>
+          <a:p>
+            <a:pPr algn="l"/>
+            <a:r>
+              <a:rPr sz="1300" b="0">
+                <a:solidFill>
+                  <a:srgbClr val="C0C0C0"/>
+                </a:solidFill>
+                <a:latin typeface="Calibri"/>
+              </a:rPr>
+              <a:t>結語</a:t>
+            </a:r>
+          </a:p>
+        </p:txBody>
+      </p:sp>
+      <p:sp>
+        <p:nvSpPr>
+          <p:cNvPr id="10" name="TextBox 9"/>
+          <p:cNvSpPr txBox="1"/>
+          <p:nvPr/>
+        </p:nvSpPr>
+        <p:spPr>
+          <a:xfrm>
+            <a:off x="7863840" y="4722876"/>
+            <a:ext cx="914400" cy="384048"/>
+          </a:xfrm>
+          <a:prstGeom prst="rect">
+            <a:avLst/>
+          </a:prstGeom>
+          <a:noFill/>
+        </p:spPr>
+        <p:txBody>
+          <a:bodyPr wrap="square">
+            <a:spAutoFit/>
+          </a:bodyPr>
+          <a:lstStyle/>
+          <a:p>
+            <a:pPr algn="r"/>
+            <a:r>
+              <a:rPr sz="1300" b="0">
+                <a:solidFill>
+                  <a:srgbClr val="C0C0C0"/>
+                </a:solidFill>
+                <a:latin typeface="Calibri"/>
+              </a:rPr>
+              <a:t>25 / 25</a:t>
             </a:r>
           </a:p>
         </p:txBody>
@@ -18976,7 +20520,7 @@
                 </a:solidFill>
                 <a:latin typeface="Calibri"/>
               </a:rPr>
-              <a:t>03 / 24</a:t>
+              <a:t>03 / 25</a:t>
             </a:r>
           </a:p>
         </p:txBody>
@@ -19392,7 +20936,7 @@
                 </a:solidFill>
                 <a:latin typeface="Calibri"/>
               </a:rPr>
-              <a:t>04 / 24</a:t>
+              <a:t>04 / 25</a:t>
             </a:r>
           </a:p>
         </p:txBody>
@@ -20321,7 +21865,7 @@
                 </a:solidFill>
                 <a:latin typeface="Calibri"/>
               </a:rPr>
-              <a:t>05 / 24</a:t>
+              <a:t>05 / 25</a:t>
             </a:r>
           </a:p>
         </p:txBody>
@@ -21098,7 +22642,7 @@
                 </a:solidFill>
                 <a:latin typeface="Calibri"/>
               </a:rPr>
-              <a:t>06 / 24</a:t>
+              <a:t>06 / 25</a:t>
             </a:r>
           </a:p>
         </p:txBody>
@@ -22224,7 +23768,7 @@
                 </a:solidFill>
                 <a:latin typeface="Calibri"/>
               </a:rPr>
-              <a:t>07 / 24</a:t>
+              <a:t>07 / 25</a:t>
             </a:r>
           </a:p>
         </p:txBody>
@@ -22484,7 +24028,7 @@
                 </a:solidFill>
                 <a:latin typeface="Calibri"/>
               </a:rPr>
-              <a:t>OEM.sys → nwifi.sys → NDIS → WinSock</a:t>
+              <a:t>從 NIC 硬體向上：逐層解析 CSI 消失的原因</a:t>
             </a:r>
           </a:p>
         </p:txBody>
@@ -22640,7 +24184,7 @@
                 </a:solidFill>
                 <a:latin typeface="Calibri"/>
               </a:rPr>
-              <a:t>08 / 24</a:t>
+              <a:t>08 / 25</a:t>
             </a:r>
           </a:p>
         </p:txBody>
@@ -22854,7 +24398,7 @@
                 </a:solidFill>
                 <a:latin typeface="Calibri"/>
               </a:rPr>
-              <a:t>Windows 網路驅動架構總覽</a:t>
+              <a:t>CSI 要去哪？軟體層的問題</a:t>
             </a:r>
           </a:p>
         </p:txBody>
@@ -22896,30 +24440,24 @@
       </p:sp>
       <p:sp>
         <p:nvSpPr>
-          <p:cNvPr id="7" name="Rectangle 6"/>
+          <p:cNvPr id="7" name="Rounded Rectangle 6"/>
           <p:cNvSpPr/>
           <p:nvPr/>
         </p:nvSpPr>
         <p:spPr>
           <a:xfrm>
-            <a:off x="640080" y="966978"/>
-            <a:ext cx="6583680" cy="384048"/>
-          </a:xfrm>
-          <a:prstGeom prst="rect">
-            <a:avLst/>
-          </a:prstGeom>
-          <a:gradFill rotWithShape="1">
-            <a:gsLst>
-              <a:gs pos="0">
-                <a:srgbClr val="353535"/>
-              </a:gs>
-              <a:gs pos="100000">
-                <a:srgbClr val="3C3C3C"/>
-              </a:gs>
-            </a:gsLst>
-            <a:lin scaled="0" ang="0"/>
-          </a:gradFill>
-          <a:ln w="12700">
+            <a:off x="2194560" y="2105406"/>
+            <a:ext cx="1371600" cy="1005840"/>
+          </a:xfrm>
+          <a:prstGeom prst="roundRect">
+            <a:avLst>
+              <a:gd name="adj" fmla="val 20000"/>
+            </a:avLst>
+          </a:prstGeom>
+          <a:solidFill>
+            <a:srgbClr val="FFFFFF"/>
+          </a:solidFill>
+          <a:ln w="19050">
             <a:solidFill>
               <a:srgbClr val="9A9A9A"/>
             </a:solidFill>
@@ -22940,75 +24478,54 @@
           </a:fontRef>
         </p:style>
         <p:txBody>
-          <a:bodyPr rtlCol="0" anchor="ctr"/>
+          <a:bodyPr rtlCol="0" anchor="ctr" wrap="square" lIns="54864" rIns="54864" tIns="91440"/>
           <a:lstStyle/>
           <a:p>
             <a:pPr algn="ctr"/>
             <a:r>
-              <a:rPr sz="1400" b="1">
-                <a:solidFill>
-                  <a:srgbClr val="FFFFFF"/>
+              <a:rPr sz="1300" b="1">
+                <a:solidFill>
+                  <a:srgbClr val="1A1A1A"/>
                 </a:solidFill>
                 <a:latin typeface="Calibri"/>
               </a:rPr>
-              <a:t>應用程式</a:t>
-            </a:r>
-          </a:p>
-        </p:txBody>
-      </p:sp>
-      <p:sp>
-        <p:nvSpPr>
-          <p:cNvPr id="8" name="TextBox 7"/>
-          <p:cNvSpPr txBox="1"/>
-          <p:nvPr/>
-        </p:nvSpPr>
-        <p:spPr>
-          <a:xfrm>
-            <a:off x="7315200" y="966978"/>
-            <a:ext cx="1463040" cy="384048"/>
-          </a:xfrm>
-          <a:prstGeom prst="rect">
-            <a:avLst/>
-          </a:prstGeom>
-          <a:noFill/>
-        </p:spPr>
-        <p:txBody>
-          <a:bodyPr wrap="square">
-            <a:spAutoFit/>
-          </a:bodyPr>
-          <a:lstStyle/>
-          <a:p>
-            <a:pPr algn="l"/>
-            <a:r>
-              <a:rPr sz="1000" b="0">
-                <a:solidFill>
-                  <a:srgbClr val="646464"/>
+              <a:t>NIC 韌體</a:t>
+            </a:r>
+          </a:p>
+          <a:p>
+            <a:pPr algn="ctr"/>
+            <a:r>
+              <a:rPr sz="1100">
+                <a:solidFill>
+                  <a:srgbClr val="9A9A9A"/>
                 </a:solidFill>
                 <a:latin typeface="Calibri"/>
               </a:rPr>
-              <a:t>User Mode</a:t>
+              <a:t>CSI 計算於此
+存放於暫存器</a:t>
             </a:r>
           </a:p>
         </p:txBody>
       </p:sp>
       <p:cxnSp>
         <p:nvCxnSpPr>
-          <p:cNvPr id="9" name="Connector 8"/>
+          <p:cNvPr id="8" name="Connector 7"/>
           <p:cNvCxnSpPr/>
           <p:nvPr/>
         </p:nvCxnSpPr>
         <p:spPr>
           <a:xfrm>
-            <a:off x="3931920" y="1351026"/>
-            <a:ext cx="0" cy="36576"/>
+            <a:off x="3566160" y="2608326"/>
+            <a:ext cx="320040" cy="0"/>
           </a:xfrm>
           <a:prstGeom prst="line">
             <a:avLst/>
           </a:prstGeom>
-          <a:ln w="12700">
+          <a:ln w="25400">
             <a:solidFill>
               <a:srgbClr val="9A9A9A"/>
             </a:solidFill>
+            <a:tailEnd type="arrow" w="med" len="med"/>
           </a:ln>
         </p:spPr>
         <p:style>
@@ -23028,30 +24545,24 @@
       </p:cxnSp>
       <p:sp>
         <p:nvSpPr>
-          <p:cNvPr id="10" name="Rectangle 9"/>
+          <p:cNvPr id="9" name="Rounded Rectangle 8"/>
           <p:cNvSpPr/>
           <p:nvPr/>
         </p:nvSpPr>
         <p:spPr>
           <a:xfrm>
-            <a:off x="640080" y="1387602"/>
-            <a:ext cx="6583680" cy="384048"/>
-          </a:xfrm>
-          <a:prstGeom prst="rect">
-            <a:avLst/>
-          </a:prstGeom>
-          <a:gradFill rotWithShape="1">
-            <a:gsLst>
-              <a:gs pos="0">
-                <a:srgbClr val="424242"/>
-              </a:gs>
-              <a:gs pos="100000">
-                <a:srgbClr val="4B4B4B"/>
-              </a:gs>
-            </a:gsLst>
-            <a:lin scaled="0" ang="0"/>
-          </a:gradFill>
-          <a:ln w="12700">
+            <a:off x="3886200" y="2105406"/>
+            <a:ext cx="1371600" cy="1005840"/>
+          </a:xfrm>
+          <a:prstGeom prst="roundRect">
+            <a:avLst>
+              <a:gd name="adj" fmla="val 20000"/>
+            </a:avLst>
+          </a:prstGeom>
+          <a:solidFill>
+            <a:srgbClr val="FFFFFF"/>
+          </a:solidFill>
+          <a:ln w="19050">
             <a:solidFill>
               <a:srgbClr val="9A9A9A"/>
             </a:solidFill>
@@ -23072,75 +24583,55 @@
           </a:fontRef>
         </p:style>
         <p:txBody>
-          <a:bodyPr rtlCol="0" anchor="ctr"/>
+          <a:bodyPr rtlCol="0" anchor="ctr" wrap="square" lIns="54864" rIns="54864" tIns="91440"/>
           <a:lstStyle/>
           <a:p>
             <a:pPr algn="ctr"/>
             <a:r>
-              <a:rPr sz="1400" b="1">
-                <a:solidFill>
-                  <a:srgbClr val="FFFFFF"/>
+              <a:rPr sz="1300" b="1">
+                <a:solidFill>
+                  <a:srgbClr val="1A1A1A"/>
                 </a:solidFill>
                 <a:latin typeface="Calibri"/>
               </a:rPr>
-              <a:t>WinSock (ws2_32.dll)</a:t>
-            </a:r>
-          </a:p>
-        </p:txBody>
-      </p:sp>
-      <p:sp>
-        <p:nvSpPr>
-          <p:cNvPr id="11" name="TextBox 10"/>
-          <p:cNvSpPr txBox="1"/>
-          <p:nvPr/>
-        </p:nvSpPr>
-        <p:spPr>
-          <a:xfrm>
-            <a:off x="7315200" y="1387602"/>
-            <a:ext cx="1463040" cy="384048"/>
-          </a:xfrm>
-          <a:prstGeom prst="rect">
-            <a:avLst/>
-          </a:prstGeom>
-          <a:noFill/>
-        </p:spPr>
-        <p:txBody>
-          <a:bodyPr wrap="square">
-            <a:spAutoFit/>
-          </a:bodyPr>
-          <a:lstStyle/>
-          <a:p>
-            <a:pPr algn="l"/>
-            <a:r>
-              <a:rPr sz="1000" b="0">
-                <a:solidFill>
-                  <a:srgbClr val="646464"/>
+              <a:t>Windows
+驅動堆疊</a:t>
+            </a:r>
+          </a:p>
+          <a:p>
+            <a:pPr algn="ctr"/>
+            <a:r>
+              <a:rPr sz="1100">
+                <a:solidFill>
+                  <a:srgbClr val="9A9A9A"/>
                 </a:solidFill>
                 <a:latin typeface="Calibri"/>
               </a:rPr>
-              <a:t>User Mode</a:t>
+              <a:t>多層軟體元件
+（本段逐層解析）</a:t>
             </a:r>
           </a:p>
         </p:txBody>
       </p:sp>
       <p:cxnSp>
         <p:nvCxnSpPr>
-          <p:cNvPr id="12" name="Connector 11"/>
+          <p:cNvPr id="10" name="Connector 9"/>
           <p:cNvCxnSpPr/>
           <p:nvPr/>
         </p:nvCxnSpPr>
         <p:spPr>
           <a:xfrm>
-            <a:off x="3931920" y="1771650"/>
-            <a:ext cx="0" cy="36576"/>
+            <a:off x="5257800" y="2608326"/>
+            <a:ext cx="320040" cy="0"/>
           </a:xfrm>
           <a:prstGeom prst="line">
             <a:avLst/>
           </a:prstGeom>
-          <a:ln w="12700">
+          <a:ln w="25400">
             <a:solidFill>
               <a:srgbClr val="9A9A9A"/>
             </a:solidFill>
+            <a:tailEnd type="arrow" w="med" len="med"/>
           </a:ln>
         </p:spPr>
         <p:style>
@@ -23160,30 +24651,24 @@
       </p:cxnSp>
       <p:sp>
         <p:nvSpPr>
-          <p:cNvPr id="13" name="Rectangle 12"/>
+          <p:cNvPr id="11" name="Rounded Rectangle 10"/>
           <p:cNvSpPr/>
           <p:nvPr/>
         </p:nvSpPr>
         <p:spPr>
           <a:xfrm>
-            <a:off x="640080" y="1808226"/>
-            <a:ext cx="6583680" cy="384048"/>
-          </a:xfrm>
-          <a:prstGeom prst="rect">
-            <a:avLst/>
-          </a:prstGeom>
-          <a:gradFill rotWithShape="1">
-            <a:gsLst>
-              <a:gs pos="0">
-                <a:srgbClr val="4E4E4E"/>
-              </a:gs>
-              <a:gs pos="100000">
-                <a:srgbClr val="595959"/>
-              </a:gs>
-            </a:gsLst>
-            <a:lin scaled="0" ang="0"/>
-          </a:gradFill>
-          <a:ln w="12700">
+            <a:off x="5577840" y="2105406"/>
+            <a:ext cx="1371600" cy="1005840"/>
+          </a:xfrm>
+          <a:prstGeom prst="roundRect">
+            <a:avLst>
+              <a:gd name="adj" fmla="val 20000"/>
+            </a:avLst>
+          </a:prstGeom>
+          <a:solidFill>
+            <a:srgbClr val="FFFFFF"/>
+          </a:solidFill>
+          <a:ln w="19050">
             <a:solidFill>
               <a:srgbClr val="9A9A9A"/>
             </a:solidFill>
@@ -23204,74 +24689,52 @@
           </a:fontRef>
         </p:style>
         <p:txBody>
-          <a:bodyPr rtlCol="0" anchor="ctr"/>
+          <a:bodyPr rtlCol="0" anchor="ctr" wrap="square" lIns="54864" rIns="54864" tIns="91440"/>
           <a:lstStyle/>
           <a:p>
             <a:pPr algn="ctr"/>
             <a:r>
-              <a:rPr sz="1400" b="1">
-                <a:solidFill>
-                  <a:srgbClr val="FFFFFF"/>
+              <a:rPr sz="1300" b="1">
+                <a:solidFill>
+                  <a:srgbClr val="1A1A1A"/>
                 </a:solidFill>
                 <a:latin typeface="Calibri"/>
               </a:rPr>
-              <a:t>AFD.sys（Ancillary Function Driver）</a:t>
-            </a:r>
-          </a:p>
-        </p:txBody>
-      </p:sp>
-      <p:sp>
-        <p:nvSpPr>
-          <p:cNvPr id="14" name="TextBox 13"/>
-          <p:cNvSpPr txBox="1"/>
-          <p:nvPr/>
-        </p:nvSpPr>
-        <p:spPr>
-          <a:xfrm>
-            <a:off x="7315200" y="1808226"/>
-            <a:ext cx="1463040" cy="384048"/>
-          </a:xfrm>
-          <a:prstGeom prst="rect">
-            <a:avLst/>
-          </a:prstGeom>
-          <a:noFill/>
-        </p:spPr>
-        <p:txBody>
-          <a:bodyPr wrap="square">
-            <a:spAutoFit/>
-          </a:bodyPr>
-          <a:lstStyle/>
-          <a:p>
-            <a:pPr algn="l"/>
-            <a:r>
-              <a:rPr sz="1000" b="0">
-                <a:solidFill>
-                  <a:srgbClr val="646464"/>
+              <a:t>應用程式</a:t>
+            </a:r>
+          </a:p>
+          <a:p>
+            <a:pPr algn="ctr"/>
+            <a:r>
+              <a:rPr sz="1100">
+                <a:solidFill>
+                  <a:srgbClr val="9A9A9A"/>
                 </a:solidFill>
                 <a:latin typeface="Calibri"/>
               </a:rPr>
-              <a:t>Kernel Mode</a:t>
+              <a:t>研究目標
+想在此取得 CSI</a:t>
             </a:r>
           </a:p>
         </p:txBody>
       </p:sp>
       <p:cxnSp>
         <p:nvCxnSpPr>
-          <p:cNvPr id="15" name="Connector 14"/>
+          <p:cNvPr id="12" name="Connector 11"/>
           <p:cNvCxnSpPr/>
           <p:nvPr/>
         </p:nvCxnSpPr>
         <p:spPr>
           <a:xfrm>
-            <a:off x="3931920" y="2192274"/>
-            <a:ext cx="0" cy="36576"/>
+            <a:off x="365760" y="4393688"/>
+            <a:ext cx="8412480" cy="0"/>
           </a:xfrm>
           <a:prstGeom prst="line">
             <a:avLst/>
           </a:prstGeom>
-          <a:ln w="12700">
+          <a:ln w="6350">
             <a:solidFill>
-              <a:srgbClr val="9A9A9A"/>
+              <a:srgbClr val="D8D8D8"/>
             </a:solidFill>
           </a:ln>
         </p:spPr>
@@ -23292,76 +24755,14 @@
       </p:cxnSp>
       <p:sp>
         <p:nvSpPr>
-          <p:cNvPr id="16" name="Rectangle 15"/>
-          <p:cNvSpPr/>
-          <p:nvPr/>
-        </p:nvSpPr>
-        <p:spPr>
-          <a:xfrm>
-            <a:off x="640080" y="2228850"/>
-            <a:ext cx="6583680" cy="384048"/>
-          </a:xfrm>
-          <a:prstGeom prst="rect">
-            <a:avLst/>
-          </a:prstGeom>
-          <a:gradFill rotWithShape="1">
-            <a:gsLst>
-              <a:gs pos="0">
-                <a:srgbClr val="5A5A5A"/>
-              </a:gs>
-              <a:gs pos="100000">
-                <a:srgbClr val="676767"/>
-              </a:gs>
-            </a:gsLst>
-            <a:lin scaled="0" ang="0"/>
-          </a:gradFill>
-          <a:ln w="12700">
-            <a:solidFill>
-              <a:srgbClr val="9A9A9A"/>
-            </a:solidFill>
-          </a:ln>
-        </p:spPr>
-        <p:style>
-          <a:lnRef idx="1">
-            <a:schemeClr val="accent1"/>
-          </a:lnRef>
-          <a:fillRef idx="3">
-            <a:schemeClr val="accent1"/>
-          </a:fillRef>
-          <a:effectRef idx="2">
-            <a:schemeClr val="accent1"/>
-          </a:effectRef>
-          <a:fontRef idx="minor">
-            <a:schemeClr val="lt1"/>
-          </a:fontRef>
-        </p:style>
-        <p:txBody>
-          <a:bodyPr rtlCol="0" anchor="ctr"/>
-          <a:lstStyle/>
-          <a:p>
-            <a:pPr algn="ctr"/>
-            <a:r>
-              <a:rPr sz="1400" b="1">
-                <a:solidFill>
-                  <a:srgbClr val="FFFFFF"/>
-                </a:solidFill>
-                <a:latin typeface="Calibri"/>
-              </a:rPr>
-              <a:t>tcpip.sys（TCP/IP Stack）</a:t>
-            </a:r>
-          </a:p>
-        </p:txBody>
-      </p:sp>
-      <p:sp>
-        <p:nvSpPr>
-          <p:cNvPr id="17" name="TextBox 16"/>
+          <p:cNvPr id="13" name="TextBox 12"/>
           <p:cNvSpPr txBox="1"/>
           <p:nvPr/>
         </p:nvSpPr>
         <p:spPr>
           <a:xfrm>
-            <a:off x="7315200" y="2228850"/>
-            <a:ext cx="1463040" cy="384048"/>
+            <a:off x="457200" y="4393692"/>
+            <a:ext cx="8229600" cy="256032"/>
           </a:xfrm>
           <a:prstGeom prst="rect">
             <a:avLst/>
@@ -23376,618 +24777,20 @@
           <a:p>
             <a:pPr algn="l"/>
             <a:r>
-              <a:rPr sz="1000" b="0">
+              <a:rPr sz="1300" b="0">
                 <a:solidFill>
                   <a:srgbClr val="646464"/>
                 </a:solidFill>
                 <a:latin typeface="Calibri"/>
               </a:rPr>
-              <a:t>Kernel Mode</a:t>
-            </a:r>
-          </a:p>
-        </p:txBody>
-      </p:sp>
-      <p:cxnSp>
-        <p:nvCxnSpPr>
-          <p:cNvPr id="18" name="Connector 17"/>
-          <p:cNvCxnSpPr/>
-          <p:nvPr/>
-        </p:nvCxnSpPr>
-        <p:spPr>
-          <a:xfrm>
-            <a:off x="3931920" y="2612898"/>
-            <a:ext cx="0" cy="36576"/>
-          </a:xfrm>
-          <a:prstGeom prst="line">
-            <a:avLst/>
-          </a:prstGeom>
-          <a:ln w="12700">
-            <a:solidFill>
-              <a:srgbClr val="9A9A9A"/>
-            </a:solidFill>
-          </a:ln>
-        </p:spPr>
-        <p:style>
-          <a:lnRef idx="2">
-            <a:schemeClr val="accent1"/>
-          </a:lnRef>
-          <a:fillRef idx="0">
-            <a:schemeClr val="accent1"/>
-          </a:fillRef>
-          <a:effectRef idx="1">
-            <a:schemeClr val="accent1"/>
-          </a:effectRef>
-          <a:fontRef idx="minor">
-            <a:schemeClr val="tx1"/>
-          </a:fontRef>
-        </p:style>
-      </p:cxnSp>
-      <p:sp>
-        <p:nvSpPr>
-          <p:cNvPr id="19" name="Rectangle 18"/>
-          <p:cNvSpPr/>
-          <p:nvPr/>
-        </p:nvSpPr>
-        <p:spPr>
-          <a:xfrm>
-            <a:off x="640080" y="2649474"/>
-            <a:ext cx="6583680" cy="384048"/>
-          </a:xfrm>
-          <a:prstGeom prst="rect">
-            <a:avLst/>
-          </a:prstGeom>
-          <a:gradFill rotWithShape="1">
-            <a:gsLst>
-              <a:gs pos="0">
-                <a:srgbClr val="666666"/>
-              </a:gs>
-              <a:gs pos="100000">
-                <a:srgbClr val="757575"/>
-              </a:gs>
-            </a:gsLst>
-            <a:lin scaled="0" ang="0"/>
-          </a:gradFill>
-          <a:ln w="12700">
-            <a:solidFill>
-              <a:srgbClr val="9A9A9A"/>
-            </a:solidFill>
-          </a:ln>
-        </p:spPr>
-        <p:style>
-          <a:lnRef idx="1">
-            <a:schemeClr val="accent1"/>
-          </a:lnRef>
-          <a:fillRef idx="3">
-            <a:schemeClr val="accent1"/>
-          </a:fillRef>
-          <a:effectRef idx="2">
-            <a:schemeClr val="accent1"/>
-          </a:effectRef>
-          <a:fontRef idx="minor">
-            <a:schemeClr val="lt1"/>
-          </a:fontRef>
-        </p:style>
-        <p:txBody>
-          <a:bodyPr rtlCol="0" anchor="ctr"/>
-          <a:lstStyle/>
-          <a:p>
-            <a:pPr algn="ctr"/>
-            <a:r>
-              <a:rPr sz="1400" b="1">
-                <a:solidFill>
-                  <a:srgbClr val="FFFFFF"/>
-                </a:solidFill>
-                <a:latin typeface="Calibri"/>
-              </a:rPr>
-              <a:t>ndis.sys（NDIS）</a:t>
-            </a:r>
-          </a:p>
-        </p:txBody>
-      </p:sp>
-      <p:sp>
-        <p:nvSpPr>
-          <p:cNvPr id="20" name="TextBox 19"/>
-          <p:cNvSpPr txBox="1"/>
-          <p:nvPr/>
-        </p:nvSpPr>
-        <p:spPr>
-          <a:xfrm>
-            <a:off x="7315200" y="2649474"/>
-            <a:ext cx="1463040" cy="384048"/>
-          </a:xfrm>
-          <a:prstGeom prst="rect">
-            <a:avLst/>
-          </a:prstGeom>
-          <a:noFill/>
-        </p:spPr>
-        <p:txBody>
-          <a:bodyPr wrap="square">
-            <a:spAutoFit/>
-          </a:bodyPr>
-          <a:lstStyle/>
-          <a:p>
-            <a:pPr algn="l"/>
-            <a:r>
-              <a:rPr sz="1000" b="0">
-                <a:solidFill>
-                  <a:srgbClr val="646464"/>
-                </a:solidFill>
-                <a:latin typeface="Calibri"/>
-              </a:rPr>
-              <a:t>Kernel Mode</a:t>
-            </a:r>
-          </a:p>
-        </p:txBody>
-      </p:sp>
-      <p:cxnSp>
-        <p:nvCxnSpPr>
-          <p:cNvPr id="21" name="Connector 20"/>
-          <p:cNvCxnSpPr/>
-          <p:nvPr/>
-        </p:nvCxnSpPr>
-        <p:spPr>
-          <a:xfrm>
-            <a:off x="3931920" y="3033522"/>
-            <a:ext cx="0" cy="36576"/>
-          </a:xfrm>
-          <a:prstGeom prst="line">
-            <a:avLst/>
-          </a:prstGeom>
-          <a:ln w="12700">
-            <a:solidFill>
-              <a:srgbClr val="9A9A9A"/>
-            </a:solidFill>
-          </a:ln>
-        </p:spPr>
-        <p:style>
-          <a:lnRef idx="2">
-            <a:schemeClr val="accent1"/>
-          </a:lnRef>
-          <a:fillRef idx="0">
-            <a:schemeClr val="accent1"/>
-          </a:fillRef>
-          <a:effectRef idx="1">
-            <a:schemeClr val="accent1"/>
-          </a:effectRef>
-          <a:fontRef idx="minor">
-            <a:schemeClr val="tx1"/>
-          </a:fontRef>
-        </p:style>
-      </p:cxnSp>
-      <p:sp>
-        <p:nvSpPr>
-          <p:cNvPr id="22" name="Rectangle 21"/>
-          <p:cNvSpPr/>
-          <p:nvPr/>
-        </p:nvSpPr>
-        <p:spPr>
-          <a:xfrm>
-            <a:off x="640080" y="3070098"/>
-            <a:ext cx="6583680" cy="384048"/>
-          </a:xfrm>
-          <a:prstGeom prst="rect">
-            <a:avLst/>
-          </a:prstGeom>
-          <a:gradFill rotWithShape="1">
-            <a:gsLst>
-              <a:gs pos="0">
-                <a:srgbClr val="727272"/>
-              </a:gs>
-              <a:gs pos="100000">
-                <a:srgbClr val="838383"/>
-              </a:gs>
-            </a:gsLst>
-            <a:lin scaled="0" ang="0"/>
-          </a:gradFill>
-          <a:ln w="12700">
-            <a:solidFill>
-              <a:srgbClr val="9A9A9A"/>
-            </a:solidFill>
-          </a:ln>
-        </p:spPr>
-        <p:style>
-          <a:lnRef idx="1">
-            <a:schemeClr val="accent1"/>
-          </a:lnRef>
-          <a:fillRef idx="3">
-            <a:schemeClr val="accent1"/>
-          </a:fillRef>
-          <a:effectRef idx="2">
-            <a:schemeClr val="accent1"/>
-          </a:effectRef>
-          <a:fontRef idx="minor">
-            <a:schemeClr val="lt1"/>
-          </a:fontRef>
-        </p:style>
-        <p:txBody>
-          <a:bodyPr rtlCol="0" anchor="ctr"/>
-          <a:lstStyle/>
-          <a:p>
-            <a:pPr algn="ctr"/>
-            <a:r>
-              <a:rPr sz="1400" b="1">
-                <a:solidFill>
-                  <a:srgbClr val="FFFFFF"/>
-                </a:solidFill>
-                <a:latin typeface="Calibri"/>
-              </a:rPr>
-              <a:t>nwifi.sys（Native WiFi）</a:t>
-            </a:r>
-          </a:p>
-        </p:txBody>
-      </p:sp>
-      <p:sp>
-        <p:nvSpPr>
-          <p:cNvPr id="23" name="TextBox 22"/>
-          <p:cNvSpPr txBox="1"/>
-          <p:nvPr/>
-        </p:nvSpPr>
-        <p:spPr>
-          <a:xfrm>
-            <a:off x="7315200" y="3070098"/>
-            <a:ext cx="1463040" cy="384048"/>
-          </a:xfrm>
-          <a:prstGeom prst="rect">
-            <a:avLst/>
-          </a:prstGeom>
-          <a:noFill/>
-        </p:spPr>
-        <p:txBody>
-          <a:bodyPr wrap="square">
-            <a:spAutoFit/>
-          </a:bodyPr>
-          <a:lstStyle/>
-          <a:p>
-            <a:pPr algn="l"/>
-            <a:r>
-              <a:rPr sz="1000" b="0">
-                <a:solidFill>
-                  <a:srgbClr val="646464"/>
-                </a:solidFill>
-                <a:latin typeface="Calibri"/>
-              </a:rPr>
-              <a:t>Kernel Mode</a:t>
-            </a:r>
-          </a:p>
-        </p:txBody>
-      </p:sp>
-      <p:cxnSp>
-        <p:nvCxnSpPr>
-          <p:cNvPr id="24" name="Connector 23"/>
-          <p:cNvCxnSpPr/>
-          <p:nvPr/>
-        </p:nvCxnSpPr>
-        <p:spPr>
-          <a:xfrm>
-            <a:off x="3931920" y="3454146"/>
-            <a:ext cx="0" cy="36576"/>
-          </a:xfrm>
-          <a:prstGeom prst="line">
-            <a:avLst/>
-          </a:prstGeom>
-          <a:ln w="12700">
-            <a:solidFill>
-              <a:srgbClr val="9A9A9A"/>
-            </a:solidFill>
-          </a:ln>
-        </p:spPr>
-        <p:style>
-          <a:lnRef idx="2">
-            <a:schemeClr val="accent1"/>
-          </a:lnRef>
-          <a:fillRef idx="0">
-            <a:schemeClr val="accent1"/>
-          </a:fillRef>
-          <a:effectRef idx="1">
-            <a:schemeClr val="accent1"/>
-          </a:effectRef>
-          <a:fontRef idx="minor">
-            <a:schemeClr val="tx1"/>
-          </a:fontRef>
-        </p:style>
-      </p:cxnSp>
-      <p:sp>
-        <p:nvSpPr>
-          <p:cNvPr id="25" name="Rectangle 24"/>
-          <p:cNvSpPr/>
-          <p:nvPr/>
-        </p:nvSpPr>
-        <p:spPr>
-          <a:xfrm>
-            <a:off x="640080" y="3490722"/>
-            <a:ext cx="6583680" cy="384048"/>
-          </a:xfrm>
-          <a:prstGeom prst="rect">
-            <a:avLst/>
-          </a:prstGeom>
-          <a:gradFill rotWithShape="1">
-            <a:gsLst>
-              <a:gs pos="0">
-                <a:srgbClr val="7E7E7E"/>
-              </a:gs>
-              <a:gs pos="100000">
-                <a:srgbClr val="909090"/>
-              </a:gs>
-            </a:gsLst>
-            <a:lin scaled="0" ang="0"/>
-          </a:gradFill>
-          <a:ln w="12700">
-            <a:solidFill>
-              <a:srgbClr val="9A9A9A"/>
-            </a:solidFill>
-          </a:ln>
-        </p:spPr>
-        <p:style>
-          <a:lnRef idx="1">
-            <a:schemeClr val="accent1"/>
-          </a:lnRef>
-          <a:fillRef idx="3">
-            <a:schemeClr val="accent1"/>
-          </a:fillRef>
-          <a:effectRef idx="2">
-            <a:schemeClr val="accent1"/>
-          </a:effectRef>
-          <a:fontRef idx="minor">
-            <a:schemeClr val="lt1"/>
-          </a:fontRef>
-        </p:style>
-        <p:txBody>
-          <a:bodyPr rtlCol="0" anchor="ctr"/>
-          <a:lstStyle/>
-          <a:p>
-            <a:pPr algn="ctr"/>
-            <a:r>
-              <a:rPr sz="1400" b="1">
-                <a:solidFill>
-                  <a:srgbClr val="FFFFFF"/>
-                </a:solidFill>
-                <a:latin typeface="Calibri"/>
-              </a:rPr>
-              <a:t>OEM.sys（Miniport Driver）</a:t>
-            </a:r>
-          </a:p>
-        </p:txBody>
-      </p:sp>
-      <p:sp>
-        <p:nvSpPr>
-          <p:cNvPr id="26" name="TextBox 25"/>
-          <p:cNvSpPr txBox="1"/>
-          <p:nvPr/>
-        </p:nvSpPr>
-        <p:spPr>
-          <a:xfrm>
-            <a:off x="7315200" y="3490722"/>
-            <a:ext cx="1463040" cy="384048"/>
-          </a:xfrm>
-          <a:prstGeom prst="rect">
-            <a:avLst/>
-          </a:prstGeom>
-          <a:noFill/>
-        </p:spPr>
-        <p:txBody>
-          <a:bodyPr wrap="square">
-            <a:spAutoFit/>
-          </a:bodyPr>
-          <a:lstStyle/>
-          <a:p>
-            <a:pPr algn="l"/>
-            <a:r>
-              <a:rPr sz="1000" b="0">
-                <a:solidFill>
-                  <a:srgbClr val="646464"/>
-                </a:solidFill>
-                <a:latin typeface="Calibri"/>
-              </a:rPr>
-              <a:t>Kernel Mode</a:t>
-            </a:r>
-          </a:p>
-        </p:txBody>
-      </p:sp>
-      <p:cxnSp>
-        <p:nvCxnSpPr>
-          <p:cNvPr id="27" name="Connector 26"/>
-          <p:cNvCxnSpPr/>
-          <p:nvPr/>
-        </p:nvCxnSpPr>
-        <p:spPr>
-          <a:xfrm>
-            <a:off x="3931920" y="3874770"/>
-            <a:ext cx="0" cy="36576"/>
-          </a:xfrm>
-          <a:prstGeom prst="line">
-            <a:avLst/>
-          </a:prstGeom>
-          <a:ln w="12700">
-            <a:solidFill>
-              <a:srgbClr val="9A9A9A"/>
-            </a:solidFill>
-          </a:ln>
-        </p:spPr>
-        <p:style>
-          <a:lnRef idx="2">
-            <a:schemeClr val="accent1"/>
-          </a:lnRef>
-          <a:fillRef idx="0">
-            <a:schemeClr val="accent1"/>
-          </a:fillRef>
-          <a:effectRef idx="1">
-            <a:schemeClr val="accent1"/>
-          </a:effectRef>
-          <a:fontRef idx="minor">
-            <a:schemeClr val="tx1"/>
-          </a:fontRef>
-        </p:style>
-      </p:cxnSp>
-      <p:sp>
-        <p:nvSpPr>
-          <p:cNvPr id="28" name="Rectangle 27"/>
-          <p:cNvSpPr/>
-          <p:nvPr/>
-        </p:nvSpPr>
-        <p:spPr>
-          <a:xfrm>
-            <a:off x="640080" y="3911346"/>
-            <a:ext cx="6583680" cy="384048"/>
-          </a:xfrm>
-          <a:prstGeom prst="rect">
-            <a:avLst/>
-          </a:prstGeom>
-          <a:gradFill rotWithShape="1">
-            <a:gsLst>
-              <a:gs pos="0">
-                <a:srgbClr val="8A8A8A"/>
-              </a:gs>
-              <a:gs pos="100000">
-                <a:srgbClr val="9E9E9E"/>
-              </a:gs>
-            </a:gsLst>
-            <a:lin scaled="0" ang="0"/>
-          </a:gradFill>
-          <a:ln w="12700">
-            <a:solidFill>
-              <a:srgbClr val="9A9A9A"/>
-            </a:solidFill>
-          </a:ln>
-        </p:spPr>
-        <p:style>
-          <a:lnRef idx="1">
-            <a:schemeClr val="accent1"/>
-          </a:lnRef>
-          <a:fillRef idx="3">
-            <a:schemeClr val="accent1"/>
-          </a:fillRef>
-          <a:effectRef idx="2">
-            <a:schemeClr val="accent1"/>
-          </a:effectRef>
-          <a:fontRef idx="minor">
-            <a:schemeClr val="lt1"/>
-          </a:fontRef>
-        </p:style>
-        <p:txBody>
-          <a:bodyPr rtlCol="0" anchor="ctr"/>
-          <a:lstStyle/>
-          <a:p>
-            <a:pPr algn="ctr"/>
-            <a:r>
-              <a:rPr sz="1400" b="1">
-                <a:solidFill>
-                  <a:srgbClr val="FFFFFF"/>
-                </a:solidFill>
-                <a:latin typeface="Calibri"/>
-              </a:rPr>
-              <a:t>NIC 硬體 + 韌體</a:t>
-            </a:r>
-          </a:p>
-        </p:txBody>
-      </p:sp>
-      <p:sp>
-        <p:nvSpPr>
-          <p:cNvPr id="29" name="TextBox 28"/>
-          <p:cNvSpPr txBox="1"/>
-          <p:nvPr/>
-        </p:nvSpPr>
-        <p:spPr>
-          <a:xfrm>
-            <a:off x="7315200" y="3911346"/>
-            <a:ext cx="1463040" cy="384048"/>
-          </a:xfrm>
-          <a:prstGeom prst="rect">
-            <a:avLst/>
-          </a:prstGeom>
-          <a:noFill/>
-        </p:spPr>
-        <p:txBody>
-          <a:bodyPr wrap="square">
-            <a:spAutoFit/>
-          </a:bodyPr>
-          <a:lstStyle/>
-          <a:p>
-            <a:pPr algn="l"/>
-            <a:r>
-              <a:rPr sz="1000" b="0">
-                <a:solidFill>
-                  <a:srgbClr val="646464"/>
-                </a:solidFill>
-                <a:latin typeface="Calibri"/>
-              </a:rPr>
-              <a:t>Hardware</a:t>
-            </a:r>
-          </a:p>
-        </p:txBody>
-      </p:sp>
-      <p:cxnSp>
-        <p:nvCxnSpPr>
-          <p:cNvPr id="30" name="Connector 29"/>
-          <p:cNvCxnSpPr/>
-          <p:nvPr/>
-        </p:nvCxnSpPr>
-        <p:spPr>
-          <a:xfrm>
-            <a:off x="365760" y="4393688"/>
-            <a:ext cx="8412480" cy="0"/>
-          </a:xfrm>
-          <a:prstGeom prst="line">
-            <a:avLst/>
-          </a:prstGeom>
-          <a:ln w="6350">
-            <a:solidFill>
-              <a:srgbClr val="D8D8D8"/>
-            </a:solidFill>
-          </a:ln>
-        </p:spPr>
-        <p:style>
-          <a:lnRef idx="2">
-            <a:schemeClr val="accent1"/>
-          </a:lnRef>
-          <a:fillRef idx="0">
-            <a:schemeClr val="accent1"/>
-          </a:fillRef>
-          <a:effectRef idx="1">
-            <a:schemeClr val="accent1"/>
-          </a:effectRef>
-          <a:fontRef idx="minor">
-            <a:schemeClr val="tx1"/>
-          </a:fontRef>
-        </p:style>
-      </p:cxnSp>
-      <p:sp>
-        <p:nvSpPr>
-          <p:cNvPr id="31" name="TextBox 30"/>
-          <p:cNvSpPr txBox="1"/>
-          <p:nvPr/>
-        </p:nvSpPr>
-        <p:spPr>
-          <a:xfrm>
-            <a:off x="457200" y="4393692"/>
-            <a:ext cx="8229600" cy="256032"/>
-          </a:xfrm>
-          <a:prstGeom prst="rect">
-            <a:avLst/>
-          </a:prstGeom>
-          <a:noFill/>
-        </p:spPr>
-        <p:txBody>
-          <a:bodyPr wrap="square">
-            <a:spAutoFit/>
-          </a:bodyPr>
-          <a:lstStyle/>
-          <a:p>
-            <a:pPr algn="l"/>
-            <a:r>
-              <a:rPr sz="1300" b="0">
-                <a:solidFill>
-                  <a:srgbClr val="646464"/>
-                </a:solidFill>
-                <a:latin typeface="Calibri"/>
-              </a:rPr>
-              <a:t>每層只能透過明確定義的介面與相鄰層溝通</a:t>
-            </a:r>
-          </a:p>
-        </p:txBody>
-      </p:sp>
-      <p:sp>
-        <p:nvSpPr>
-          <p:cNvPr id="32" name="Rectangle 31"/>
+              <a:t>PHY 工程師熟悉左側；本段目標：找出中間黑盒子裡，CSI 在哪一層消失</a:t>
+            </a:r>
+          </a:p>
+        </p:txBody>
+      </p:sp>
+      <p:sp>
+        <p:nvSpPr>
+          <p:cNvPr id="14" name="Rectangle 13"/>
           <p:cNvSpPr/>
           <p:nvPr/>
         </p:nvSpPr>
@@ -24038,7 +24841,7 @@
       </p:sp>
       <p:sp>
         <p:nvSpPr>
-          <p:cNvPr id="33" name="TextBox 32"/>
+          <p:cNvPr id="15" name="TextBox 14"/>
           <p:cNvSpPr txBox="1"/>
           <p:nvPr/>
         </p:nvSpPr>
@@ -24073,7 +24876,7 @@
       </p:sp>
       <p:sp>
         <p:nvSpPr>
-          <p:cNvPr id="34" name="TextBox 33"/>
+          <p:cNvPr id="16" name="TextBox 15"/>
           <p:cNvSpPr txBox="1"/>
           <p:nvPr/>
         </p:nvSpPr>
@@ -24101,7 +24904,7 @@
                 </a:solidFill>
                 <a:latin typeface="Calibri"/>
               </a:rPr>
-              <a:t>09 / 24</a:t>
+              <a:t>09 / 25</a:t>
             </a:r>
           </a:p>
         </p:txBody>
